--- a/PC-FIT_2학기_발표자료.pptx
+++ b/PC-FIT_2학기_발표자료.pptx
@@ -1596,14 +1596,14 @@
         <p:spPr>
           <a:xfrm>
             <a:off x="457200" y="228600"/>
-            <a:ext cx="11274552" cy="27432"/>
+            <a:ext cx="11274552" cy="36576"/>
           </a:xfrm>
           <a:prstGeom prst="rect">
             <a:avLst/>
           </a:prstGeom>
           <a:solidFill>
             <a:srgbClr val="00F3FF">
-              <a:alpha val="30000"/>
+              <a:alpha val="40000"/>
             </a:srgbClr>
           </a:solidFill>
           <a:ln w="12700">
@@ -1625,7 +1625,7 @@
         <p:spPr>
           <a:xfrm>
             <a:off x="457200" y="384048"/>
-            <a:ext cx="3474720" cy="310896"/>
+            <a:ext cx="3840480" cy="329184"/>
           </a:xfrm>
           <a:prstGeom prst="roundRect">
             <a:avLst>
@@ -1654,7 +1654,7 @@
         <p:spPr>
           <a:xfrm>
             <a:off x="457200" y="384048"/>
-            <a:ext cx="3474720" cy="310896"/>
+            <a:ext cx="3840480" cy="329184"/>
           </a:xfrm>
           <a:prstGeom prst="rect">
             <a:avLst/>
@@ -1670,17 +1670,17 @@
               <a:buNone/>
             </a:pPr>
             <a:r>
-              <a:rPr lang="en-US" sz="1000" b="1" dirty="0">
+              <a:rPr lang="en-US" sz="1050" b="1" dirty="0">
                 <a:solidFill>
                   <a:srgbClr val="00F3FF"/>
                 </a:solidFill>
-                <a:latin typeface="Pretendard" pitchFamily="34" charset="0"/>
-                <a:ea typeface="Pretendard" pitchFamily="34" charset="-122"/>
-                <a:cs typeface="Pretendard" pitchFamily="34" charset="-120"/>
+                <a:latin typeface="맑은 고딕" pitchFamily="34" charset="0"/>
+                <a:ea typeface="맑은 고딕" pitchFamily="34" charset="-122"/>
+                <a:cs typeface="맑은 고딕" pitchFamily="34" charset="-120"/>
               </a:rPr>
               <a:t>2026 소프트웨어공학 2학기 프로젝트</a:t>
             </a:r>
-            <a:endParaRPr lang="en-US" sz="1000" dirty="0"/>
+            <a:endParaRPr lang="en-US" sz="1050" dirty="0"/>
           </a:p>
         </p:txBody>
       </p:sp>
@@ -1736,13 +1736,13 @@
             <a:r>
               <a:rPr lang="en-US" sz="950" dirty="0">
                 <a:solidFill>
-                  <a:srgbClr val="64748B"/>
-                </a:solidFill>
-                <a:latin typeface="Pretendard" pitchFamily="34" charset="0"/>
-                <a:ea typeface="Pretendard" pitchFamily="34" charset="-122"/>
-                <a:cs typeface="Pretendard" pitchFamily="34" charset="-120"/>
-              </a:rPr>
-              <a:t>PC-FIT 2.0 : AI 부품·가격 비교 &amp; 가성비 어드바이저</a:t>
+                  <a:srgbClr val="94A3B8"/>
+                </a:solidFill>
+                <a:latin typeface="맑은 고딕" pitchFamily="34" charset="0"/>
+                <a:ea typeface="맑은 고딕" pitchFamily="34" charset="-122"/>
+                <a:cs typeface="맑은 고딕" pitchFamily="34" charset="-120"/>
+              </a:rPr>
+              <a:t>PC-FIT 2.0 : AI 부품·가격 비교 및 가성비 어드바이저</a:t>
             </a:r>
             <a:endParaRPr lang="en-US" sz="950" dirty="0"/>
           </a:p>
@@ -1777,9 +1777,9 @@
                 <a:solidFill>
                   <a:srgbClr val="00F3FF"/>
                 </a:solidFill>
-                <a:latin typeface="Consolas" pitchFamily="34" charset="0"/>
-                <a:ea typeface="Consolas" pitchFamily="34" charset="-122"/>
-                <a:cs typeface="Consolas" pitchFamily="34" charset="-120"/>
+                <a:latin typeface="맑은 고딕" pitchFamily="34" charset="0"/>
+                <a:ea typeface="맑은 고딕" pitchFamily="34" charset="-122"/>
+                <a:cs typeface="맑은 고딕" pitchFamily="34" charset="-120"/>
               </a:rPr>
               <a:t>SLIDE 01 / 09</a:t>
             </a:r>
@@ -1816,9 +1816,9 @@
                 <a:solidFill>
                   <a:srgbClr val="00F3FF"/>
                 </a:solidFill>
-                <a:latin typeface="Consolas" pitchFamily="34" charset="0"/>
-                <a:ea typeface="Consolas" pitchFamily="34" charset="-122"/>
-                <a:cs typeface="Consolas" pitchFamily="34" charset="-120"/>
+                <a:latin typeface="맑은 고딕" pitchFamily="34" charset="0"/>
+                <a:ea typeface="맑은 고딕" pitchFamily="34" charset="-122"/>
+                <a:cs typeface="맑은 고딕" pitchFamily="34" charset="-120"/>
               </a:rPr>
               <a:t>PC-FIT 2.0 : AI DECISION ADVISOR</a:t>
             </a:r>
@@ -1854,13 +1854,13 @@
               <a:buNone/>
             </a:pPr>
             <a:r>
-              <a:rPr lang="en-US" sz="3400" b="1" dirty="0">
-                <a:solidFill>
-                  <a:srgbClr val="F8FAFC"/>
-                </a:solidFill>
-                <a:latin typeface="Pretendard" pitchFamily="34" charset="0"/>
-                <a:ea typeface="Pretendard" pitchFamily="34" charset="-122"/>
-                <a:cs typeface="Pretendard" pitchFamily="34" charset="-120"/>
+              <a:rPr lang="en-US" sz="3200" b="1" dirty="0">
+                <a:solidFill>
+                  <a:srgbClr val="F8FAFC"/>
+                </a:solidFill>
+                <a:latin typeface="맑은 고딕" pitchFamily="34" charset="0"/>
+                <a:ea typeface="맑은 고딕" pitchFamily="34" charset="-122"/>
+                <a:cs typeface="맑은 고딕" pitchFamily="34" charset="-120"/>
               </a:rPr>
               <a:t>최종 견적 후의 고민을 끝내는
 </a:t>
@@ -1872,13 +1872,13 @@
               <a:buNone/>
             </a:pPr>
             <a:r>
-              <a:rPr lang="en-US" sz="3400" b="1" dirty="0">
+              <a:rPr lang="en-US" sz="3200" b="1" dirty="0">
                 <a:solidFill>
                   <a:srgbClr val="00F3FF"/>
                 </a:solidFill>
-                <a:latin typeface="Pretendard" pitchFamily="34" charset="0"/>
-                <a:ea typeface="Pretendard" pitchFamily="34" charset="-122"/>
-                <a:cs typeface="Pretendard" pitchFamily="34" charset="-120"/>
+                <a:latin typeface="맑은 고딕" pitchFamily="34" charset="0"/>
+                <a:ea typeface="맑은 고딕" pitchFamily="34" charset="-122"/>
+                <a:cs typeface="맑은 고딕" pitchFamily="34" charset="-120"/>
               </a:rPr>
               <a:t>AI 부품·가격 비교
 </a:t>
@@ -1890,17 +1890,17 @@
               <a:buNone/>
             </a:pPr>
             <a:r>
-              <a:rPr lang="en-US" sz="3400" b="1" dirty="0">
+              <a:rPr lang="en-US" sz="3200" b="1" dirty="0">
                 <a:solidFill>
                   <a:srgbClr val="FF5CA8"/>
                 </a:solidFill>
-                <a:latin typeface="Pretendard" pitchFamily="34" charset="0"/>
-                <a:ea typeface="Pretendard" pitchFamily="34" charset="-122"/>
-                <a:cs typeface="Pretendard" pitchFamily="34" charset="-120"/>
+                <a:latin typeface="맑은 고딕" pitchFamily="34" charset="0"/>
+                <a:ea typeface="맑은 고딕" pitchFamily="34" charset="-122"/>
+                <a:cs typeface="맑은 고딕" pitchFamily="34" charset="-120"/>
               </a:rPr>
               <a:t>가성비 어드바이저</a:t>
             </a:r>
-            <a:endParaRPr lang="en-US" sz="3400" dirty="0"/>
+            <a:endParaRPr lang="en-US" sz="3200" dirty="0"/>
           </a:p>
         </p:txBody>
       </p:sp>
@@ -1932,17 +1932,17 @@
               <a:buNone/>
             </a:pPr>
             <a:r>
-              <a:rPr lang="en-US" sz="1350" dirty="0">
+              <a:rPr lang="en-US" sz="1300" dirty="0">
                 <a:solidFill>
                   <a:srgbClr val="CBD5E1"/>
                 </a:solidFill>
-                <a:latin typeface="Pretendard" pitchFamily="34" charset="0"/>
-                <a:ea typeface="Pretendard" pitchFamily="34" charset="-122"/>
-                <a:cs typeface="Pretendard" pitchFamily="34" charset="-120"/>
+                <a:latin typeface="맑은 고딕" pitchFamily="34" charset="0"/>
+                <a:ea typeface="맑은 고딕" pitchFamily="34" charset="-122"/>
+                <a:cs typeface="맑은 고딕" pitchFamily="34" charset="-120"/>
               </a:rPr>
               <a:t>"돈 더 주고 상위 부품을 살 가치가 있을까?"</a:t>
             </a:r>
-            <a:endParaRPr lang="en-US" sz="1350" dirty="0"/>
+            <a:endParaRPr lang="en-US" sz="1300" dirty="0"/>
           </a:p>
           <a:p>
             <a:pPr indent="0" marL="0">
@@ -1952,17 +1952,17 @@
               <a:buNone/>
             </a:pPr>
             <a:r>
-              <a:rPr lang="en-US" sz="1350" dirty="0">
+              <a:rPr lang="en-US" sz="1300" dirty="0">
                 <a:solidFill>
                   <a:srgbClr val="CBD5E1"/>
                 </a:solidFill>
-                <a:latin typeface="Pretendard" pitchFamily="34" charset="0"/>
-                <a:ea typeface="Pretendard" pitchFamily="34" charset="-122"/>
-                <a:cs typeface="Pretendard" pitchFamily="34" charset="-120"/>
-              </a:rPr>
-              <a:t>Supabase 부품 DB(945종) + 공인 벤치마크(3DMark·퀘이사존) 기반으로</a:t>
-            </a:r>
-            <a:endParaRPr lang="en-US" sz="1350" dirty="0"/>
+                <a:latin typeface="맑은 고딕" pitchFamily="34" charset="0"/>
+                <a:ea typeface="맑은 고딕" pitchFamily="34" charset="-122"/>
+                <a:cs typeface="맑은 고딕" pitchFamily="34" charset="-120"/>
+              </a:rPr>
+              <a:t>내 견적 부품 데이터와 벤치마크 기준표(3DMark·퀘이사존 FPS)를 바탕으로</a:t>
+            </a:r>
+            <a:endParaRPr lang="en-US" sz="1300" dirty="0"/>
           </a:p>
           <a:p>
             <a:pPr indent="0" marL="0">
@@ -1972,17 +1972,17 @@
               <a:buNone/>
             </a:pPr>
             <a:r>
-              <a:rPr lang="en-US" sz="1350" dirty="0">
+              <a:rPr lang="en-US" sz="1300" dirty="0">
                 <a:solidFill>
                   <a:srgbClr val="CBD5E1"/>
                 </a:solidFill>
-                <a:latin typeface="Pretendard" pitchFamily="34" charset="0"/>
-                <a:ea typeface="Pretendard" pitchFamily="34" charset="-122"/>
-                <a:cs typeface="Pretendard" pitchFamily="34" charset="-120"/>
-              </a:rPr>
-              <a:t>가격 차이 대비 실제 게임 프레임(FPS) 상승폭을 즉시 시각화합니다.</a:t>
-            </a:r>
-            <a:endParaRPr lang="en-US" sz="1350" dirty="0"/>
+                <a:latin typeface="맑은 고딕" pitchFamily="34" charset="0"/>
+                <a:ea typeface="맑은 고딕" pitchFamily="34" charset="-122"/>
+                <a:cs typeface="맑은 고딕" pitchFamily="34" charset="-120"/>
+              </a:rPr>
+              <a:t>가격 차이 대비 실제 게임 프레임 상승폭을 표와 그래프로 보여줍니다.</a:t>
+            </a:r>
+            <a:endParaRPr lang="en-US" sz="1300" dirty="0"/>
           </a:p>
         </p:txBody>
       </p:sp>
@@ -2044,9 +2044,9 @@
                 <a:solidFill>
                   <a:srgbClr val="00F3FF"/>
                 </a:solidFill>
-                <a:latin typeface="Pretendard" pitchFamily="34" charset="0"/>
-                <a:ea typeface="Pretendard" pitchFamily="34" charset="-122"/>
-                <a:cs typeface="Pretendard" pitchFamily="34" charset="-120"/>
+                <a:latin typeface="맑은 고딕" pitchFamily="34" charset="0"/>
+                <a:ea typeface="맑은 고딕" pitchFamily="34" charset="-122"/>
+                <a:cs typeface="맑은 고딕" pitchFamily="34" charset="-120"/>
               </a:rPr>
               <a:t>1. 해결하고자 하는 문제</a:t>
             </a:r>
@@ -2112,9 +2112,9 @@
                 <a:solidFill>
                   <a:srgbClr val="D97BFF"/>
                 </a:solidFill>
-                <a:latin typeface="Pretendard" pitchFamily="34" charset="0"/>
-                <a:ea typeface="Pretendard" pitchFamily="34" charset="-122"/>
-                <a:cs typeface="Pretendard" pitchFamily="34" charset="-120"/>
+                <a:latin typeface="맑은 고딕" pitchFamily="34" charset="0"/>
+                <a:ea typeface="맑은 고딕" pitchFamily="34" charset="-122"/>
+                <a:cs typeface="맑은 고딕" pitchFamily="34" charset="-120"/>
               </a:rPr>
               <a:t>2. AI 활용 해결 방안</a:t>
             </a:r>
@@ -2180,11 +2180,11 @@
                 <a:solidFill>
                   <a:srgbClr val="FF5CA8"/>
                 </a:solidFill>
-                <a:latin typeface="Pretendard" pitchFamily="34" charset="0"/>
-                <a:ea typeface="Pretendard" pitchFamily="34" charset="-122"/>
-                <a:cs typeface="Pretendard" pitchFamily="34" charset="-120"/>
-              </a:rPr>
-              <a:t>3. 기획서 &amp; 동작 코드</a:t>
+                <a:latin typeface="맑은 고딕" pitchFamily="34" charset="0"/>
+                <a:ea typeface="맑은 고딕" pitchFamily="34" charset="-122"/>
+                <a:cs typeface="맑은 고딕" pitchFamily="34" charset="-120"/>
+              </a:rPr>
+              <a:t>3. 기획서 및 동작 코드</a:t>
             </a:r>
             <a:endParaRPr lang="en-US" sz="1000" dirty="0"/>
           </a:p>
@@ -2225,7 +2225,7 @@
         </p:nvSpPr>
         <p:spPr>
           <a:xfrm>
-            <a:off x="6949440" y="1280160"/>
+            <a:off x="6949440" y="1261872"/>
             <a:ext cx="4480560" cy="320040"/>
           </a:xfrm>
           <a:prstGeom prst="rect">
@@ -2246,11 +2246,11 @@
                 <a:solidFill>
                   <a:srgbClr val="00F3FF"/>
                 </a:solidFill>
-                <a:latin typeface="Pretendard" pitchFamily="34" charset="0"/>
-                <a:ea typeface="Pretendard" pitchFamily="34" charset="-122"/>
-                <a:cs typeface="Pretendard" pitchFamily="34" charset="-120"/>
-              </a:rPr>
-              <a:t>⚡ AI 부품 비교 &amp; 가성비 어드바이저 미리보기</a:t>
+                <a:latin typeface="맑은 고딕" pitchFamily="34" charset="0"/>
+                <a:ea typeface="맑은 고딕" pitchFamily="34" charset="-122"/>
+                <a:cs typeface="맑은 고딕" pitchFamily="34" charset="-120"/>
+              </a:rPr>
+              <a:t>[AI 부품 비교 &amp; 가성비 어드바이저 미리보기]</a:t>
             </a:r>
             <a:endParaRPr lang="en-US" sz="1200" dirty="0"/>
           </a:p>
@@ -2264,7 +2264,7 @@
         </p:nvSpPr>
         <p:spPr>
           <a:xfrm>
-            <a:off x="6949440" y="1737360"/>
+            <a:off x="6949440" y="1719072"/>
             <a:ext cx="4480560" cy="1143000"/>
           </a:xfrm>
           <a:prstGeom prst="roundRect">
@@ -2291,8 +2291,8 @@
         </p:nvSpPr>
         <p:spPr>
           <a:xfrm>
-            <a:off x="7040880" y="1810512"/>
-            <a:ext cx="1828800" cy="1005840"/>
+            <a:off x="7022592" y="1783080"/>
+            <a:ext cx="1874520" cy="1005840"/>
           </a:xfrm>
           <a:prstGeom prst="rect">
             <a:avLst/>
@@ -2308,51 +2308,51 @@
               <a:buNone/>
             </a:pPr>
             <a:r>
-              <a:rPr lang="en-US" sz="1200" b="1" dirty="0">
+              <a:rPr lang="en-US" sz="1150" b="1" dirty="0">
                 <a:solidFill>
                   <a:srgbClr val="00F3FF"/>
                 </a:solidFill>
-                <a:latin typeface="Pretendard" pitchFamily="34" charset="0"/>
-                <a:ea typeface="Pretendard" pitchFamily="34" charset="-122"/>
-                <a:cs typeface="Pretendard" pitchFamily="34" charset="-120"/>
+                <a:latin typeface="맑은 고딕" pitchFamily="34" charset="0"/>
+                <a:ea typeface="맑은 고딕" pitchFamily="34" charset="-122"/>
+                <a:cs typeface="맑은 고딕" pitchFamily="34" charset="-120"/>
               </a:rPr>
               <a:t>현재 견적 부품</a:t>
             </a:r>
-            <a:endParaRPr lang="en-US" sz="1200" dirty="0"/>
+            <a:endParaRPr lang="en-US" sz="1150" dirty="0"/>
           </a:p>
           <a:p>
             <a:pPr algn="ctr" indent="0" marL="0">
               <a:buNone/>
             </a:pPr>
             <a:r>
-              <a:rPr lang="en-US" sz="1200" b="1" dirty="0">
+              <a:rPr lang="en-US" sz="1150" b="1" dirty="0">
                 <a:solidFill>
                   <a:srgbClr val="00F3FF"/>
                 </a:solidFill>
-                <a:latin typeface="Pretendard" pitchFamily="34" charset="0"/>
-                <a:ea typeface="Pretendard" pitchFamily="34" charset="-122"/>
-                <a:cs typeface="Pretendard" pitchFamily="34" charset="-120"/>
+                <a:latin typeface="맑은 고딕" pitchFamily="34" charset="0"/>
+                <a:ea typeface="맑은 고딕" pitchFamily="34" charset="-122"/>
+                <a:cs typeface="맑은 고딕" pitchFamily="34" charset="-120"/>
               </a:rPr>
               <a:t>RTX 5070</a:t>
             </a:r>
-            <a:endParaRPr lang="en-US" sz="1200" dirty="0"/>
+            <a:endParaRPr lang="en-US" sz="1150" dirty="0"/>
           </a:p>
           <a:p>
             <a:pPr algn="ctr" indent="0" marL="0">
               <a:buNone/>
             </a:pPr>
             <a:r>
-              <a:rPr lang="en-US" sz="1200" b="1" dirty="0">
+              <a:rPr lang="en-US" sz="1150" b="1" dirty="0">
                 <a:solidFill>
                   <a:srgbClr val="00F3FF"/>
                 </a:solidFill>
-                <a:latin typeface="Pretendard" pitchFamily="34" charset="0"/>
-                <a:ea typeface="Pretendard" pitchFamily="34" charset="-122"/>
-                <a:cs typeface="Pretendard" pitchFamily="34" charset="-120"/>
-              </a:rPr>
-              <a:t>TimeSpy 22,900점</a:t>
-            </a:r>
-            <a:endParaRPr lang="en-US" sz="1200" dirty="0"/>
+                <a:latin typeface="맑은 고딕" pitchFamily="34" charset="0"/>
+                <a:ea typeface="맑은 고딕" pitchFamily="34" charset="-122"/>
+                <a:cs typeface="맑은 고딕" pitchFamily="34" charset="-120"/>
+              </a:rPr>
+              <a:t>(TimeSpy 22,900점)</a:t>
+            </a:r>
+            <a:endParaRPr lang="en-US" sz="1150" dirty="0"/>
           </a:p>
         </p:txBody>
       </p:sp>
@@ -2364,7 +2364,7 @@
         </p:nvSpPr>
         <p:spPr>
           <a:xfrm>
-            <a:off x="8961120" y="2084832"/>
+            <a:off x="8961120" y="2066544"/>
             <a:ext cx="457200" cy="457200"/>
           </a:xfrm>
           <a:prstGeom prst="ellipse">
@@ -2391,7 +2391,7 @@
         </p:nvSpPr>
         <p:spPr>
           <a:xfrm>
-            <a:off x="8961120" y="2084832"/>
+            <a:off x="8961120" y="2066544"/>
             <a:ext cx="457200" cy="457200"/>
           </a:xfrm>
           <a:prstGeom prst="rect">
@@ -2412,9 +2412,9 @@
                 <a:solidFill>
                   <a:srgbClr val="FF5CA8"/>
                 </a:solidFill>
-                <a:latin typeface="Consolas" pitchFamily="34" charset="0"/>
-                <a:ea typeface="Consolas" pitchFamily="34" charset="-122"/>
-                <a:cs typeface="Consolas" pitchFamily="34" charset="-120"/>
+                <a:latin typeface="맑은 고딕" pitchFamily="34" charset="0"/>
+                <a:ea typeface="맑은 고딕" pitchFamily="34" charset="-122"/>
+                <a:cs typeface="맑은 고딕" pitchFamily="34" charset="-120"/>
               </a:rPr>
               <a:t>VS</a:t>
             </a:r>
@@ -2430,8 +2430,8 @@
         </p:nvSpPr>
         <p:spPr>
           <a:xfrm>
-            <a:off x="9509760" y="1810512"/>
-            <a:ext cx="1828800" cy="1005840"/>
+            <a:off x="9464040" y="1783080"/>
+            <a:ext cx="1874520" cy="1005840"/>
           </a:xfrm>
           <a:prstGeom prst="rect">
             <a:avLst/>
@@ -2447,51 +2447,51 @@
               <a:buNone/>
             </a:pPr>
             <a:r>
-              <a:rPr lang="en-US" sz="1200" b="1" dirty="0">
+              <a:rPr lang="en-US" sz="1150" b="1" dirty="0">
                 <a:solidFill>
                   <a:srgbClr val="FF5CA8"/>
                 </a:solidFill>
-                <a:latin typeface="Pretendard" pitchFamily="34" charset="0"/>
-                <a:ea typeface="Pretendard" pitchFamily="34" charset="-122"/>
-                <a:cs typeface="Pretendard" pitchFamily="34" charset="-120"/>
+                <a:latin typeface="맑은 고딕" pitchFamily="34" charset="0"/>
+                <a:ea typeface="맑은 고딕" pitchFamily="34" charset="-122"/>
+                <a:cs typeface="맑은 고딕" pitchFamily="34" charset="-120"/>
               </a:rPr>
               <a:t>고민 중인 상위 모델</a:t>
             </a:r>
-            <a:endParaRPr lang="en-US" sz="1200" dirty="0"/>
+            <a:endParaRPr lang="en-US" sz="1150" dirty="0"/>
           </a:p>
           <a:p>
             <a:pPr algn="ctr" indent="0" marL="0">
               <a:buNone/>
             </a:pPr>
             <a:r>
-              <a:rPr lang="en-US" sz="1200" b="1" dirty="0">
+              <a:rPr lang="en-US" sz="1150" b="1" dirty="0">
                 <a:solidFill>
                   <a:srgbClr val="FF5CA8"/>
                 </a:solidFill>
-                <a:latin typeface="Pretendard" pitchFamily="34" charset="0"/>
-                <a:ea typeface="Pretendard" pitchFamily="34" charset="-122"/>
-                <a:cs typeface="Pretendard" pitchFamily="34" charset="-120"/>
+                <a:latin typeface="맑은 고딕" pitchFamily="34" charset="0"/>
+                <a:ea typeface="맑은 고딕" pitchFamily="34" charset="-122"/>
+                <a:cs typeface="맑은 고딕" pitchFamily="34" charset="-120"/>
               </a:rPr>
               <a:t>RTX 5070 Ti</a:t>
             </a:r>
-            <a:endParaRPr lang="en-US" sz="1200" dirty="0"/>
+            <a:endParaRPr lang="en-US" sz="1150" dirty="0"/>
           </a:p>
           <a:p>
             <a:pPr algn="ctr" indent="0" marL="0">
               <a:buNone/>
             </a:pPr>
             <a:r>
-              <a:rPr lang="en-US" sz="1200" b="1" dirty="0">
+              <a:rPr lang="en-US" sz="1150" b="1" dirty="0">
                 <a:solidFill>
                   <a:srgbClr val="FF5CA8"/>
                 </a:solidFill>
-                <a:latin typeface="Pretendard" pitchFamily="34" charset="0"/>
-                <a:ea typeface="Pretendard" pitchFamily="34" charset="-122"/>
-                <a:cs typeface="Pretendard" pitchFamily="34" charset="-120"/>
-              </a:rPr>
-              <a:t>TimeSpy 27,800점</a:t>
-            </a:r>
-            <a:endParaRPr lang="en-US" sz="1200" dirty="0"/>
+                <a:latin typeface="맑은 고딕" pitchFamily="34" charset="0"/>
+                <a:ea typeface="맑은 고딕" pitchFamily="34" charset="-122"/>
+                <a:cs typeface="맑은 고딕" pitchFamily="34" charset="-120"/>
+              </a:rPr>
+              <a:t>(TimeSpy 27,800점)</a:t>
+            </a:r>
+            <a:endParaRPr lang="en-US" sz="1150" dirty="0"/>
           </a:p>
         </p:txBody>
       </p:sp>
@@ -2503,7 +2503,7 @@
         </p:nvSpPr>
         <p:spPr>
           <a:xfrm>
-            <a:off x="6949440" y="3108960"/>
+            <a:off x="6949440" y="3090672"/>
             <a:ext cx="1005840" cy="320040"/>
           </a:xfrm>
           <a:prstGeom prst="rect">
@@ -2524,11 +2524,11 @@
                 <a:solidFill>
                   <a:srgbClr val="CBD5E1"/>
                 </a:solidFill>
-                <a:latin typeface="Pretendard" pitchFamily="34" charset="0"/>
-                <a:ea typeface="Pretendard" pitchFamily="34" charset="-122"/>
-                <a:cs typeface="Pretendard" pitchFamily="34" charset="-120"/>
-              </a:rPr>
-              <a:t>가격 차액</a:t>
+                <a:latin typeface="맑은 고딕" pitchFamily="34" charset="0"/>
+                <a:ea typeface="맑은 고딕" pitchFamily="34" charset="-122"/>
+                <a:cs typeface="맑은 고딕" pitchFamily="34" charset="-120"/>
+              </a:rPr>
+              <a:t>가격 차이</a:t>
             </a:r>
             <a:endParaRPr lang="en-US" sz="1050" dirty="0"/>
           </a:p>
@@ -2542,7 +2542,7 @@
         </p:nvSpPr>
         <p:spPr>
           <a:xfrm>
-            <a:off x="8001000" y="3145536"/>
+            <a:off x="8001000" y="3127248"/>
             <a:ext cx="3383280" cy="256032"/>
           </a:xfrm>
           <a:prstGeom prst="roundRect">
@@ -2569,8 +2569,8 @@
         </p:nvSpPr>
         <p:spPr>
           <a:xfrm>
-            <a:off x="8001000" y="3145536"/>
-            <a:ext cx="3200400" cy="256032"/>
+            <a:off x="8001000" y="3127248"/>
+            <a:ext cx="3108960" cy="256032"/>
           </a:xfrm>
           <a:prstGeom prst="roundRect">
             <a:avLst>
@@ -2596,7 +2596,7 @@
         </p:nvSpPr>
         <p:spPr>
           <a:xfrm>
-            <a:off x="8092440" y="3145536"/>
+            <a:off x="8092440" y="3127248"/>
             <a:ext cx="3200400" cy="256032"/>
           </a:xfrm>
           <a:prstGeom prst="rect">
@@ -2617,11 +2617,11 @@
                 <a:solidFill>
                   <a:srgbClr val="F8FAFC"/>
                 </a:solidFill>
-                <a:latin typeface="Pretendard" pitchFamily="34" charset="0"/>
-                <a:ea typeface="Pretendard" pitchFamily="34" charset="-122"/>
-                <a:cs typeface="Pretendard" pitchFamily="34" charset="-120"/>
-              </a:rPr>
-              <a:t>+37~60만 원 추가 지출</a:t>
+                <a:latin typeface="맑은 고딕" pitchFamily="34" charset="0"/>
+                <a:ea typeface="맑은 고딕" pitchFamily="34" charset="-122"/>
+                <a:cs typeface="맑은 고딕" pitchFamily="34" charset="-120"/>
+              </a:rPr>
+              <a:t>약 40~60만 원 추가 지출</a:t>
             </a:r>
             <a:endParaRPr lang="en-US" sz="950" dirty="0"/>
           </a:p>
@@ -2635,7 +2635,7 @@
         </p:nvSpPr>
         <p:spPr>
           <a:xfrm>
-            <a:off x="6949440" y="3611880"/>
+            <a:off x="6949440" y="3593592"/>
             <a:ext cx="1005840" cy="320040"/>
           </a:xfrm>
           <a:prstGeom prst="rect">
@@ -2656,9 +2656,9 @@
                 <a:solidFill>
                   <a:srgbClr val="CBD5E1"/>
                 </a:solidFill>
-                <a:latin typeface="Pretendard" pitchFamily="34" charset="0"/>
-                <a:ea typeface="Pretendard" pitchFamily="34" charset="-122"/>
-                <a:cs typeface="Pretendard" pitchFamily="34" charset="-120"/>
+                <a:latin typeface="맑은 고딕" pitchFamily="34" charset="0"/>
+                <a:ea typeface="맑은 고딕" pitchFamily="34" charset="-122"/>
+                <a:cs typeface="맑은 고딕" pitchFamily="34" charset="-120"/>
               </a:rPr>
               <a:t>QHD 배그</a:t>
             </a:r>
@@ -2674,7 +2674,7 @@
         </p:nvSpPr>
         <p:spPr>
           <a:xfrm>
-            <a:off x="8001000" y="3648456"/>
+            <a:off x="8001000" y="3630168"/>
             <a:ext cx="3383280" cy="256032"/>
           </a:xfrm>
           <a:prstGeom prst="roundRect">
@@ -2701,8 +2701,8 @@
         </p:nvSpPr>
         <p:spPr>
           <a:xfrm>
-            <a:off x="8001000" y="3648456"/>
-            <a:ext cx="2194560" cy="256032"/>
+            <a:off x="8001000" y="3630168"/>
+            <a:ext cx="2103120" cy="256032"/>
           </a:xfrm>
           <a:prstGeom prst="roundRect">
             <a:avLst>
@@ -2728,7 +2728,7 @@
         </p:nvSpPr>
         <p:spPr>
           <a:xfrm>
-            <a:off x="8092440" y="3648456"/>
+            <a:off x="8092440" y="3630168"/>
             <a:ext cx="3200400" cy="256032"/>
           </a:xfrm>
           <a:prstGeom prst="rect">
@@ -2749,11 +2749,11 @@
                 <a:solidFill>
                   <a:srgbClr val="F8FAFC"/>
                 </a:solidFill>
-                <a:latin typeface="Pretendard" pitchFamily="34" charset="0"/>
-                <a:ea typeface="Pretendard" pitchFamily="34" charset="-122"/>
-                <a:cs typeface="Pretendard" pitchFamily="34" charset="-120"/>
-              </a:rPr>
-              <a:t>232 ➔ 272 FPS (+17% ↑)</a:t>
+                <a:latin typeface="맑은 고딕" pitchFamily="34" charset="0"/>
+                <a:ea typeface="맑은 고딕" pitchFamily="34" charset="-122"/>
+                <a:cs typeface="맑은 고딕" pitchFamily="34" charset="-120"/>
+              </a:rPr>
+              <a:t>232 -&gt; 272 FPS (+17% 상승)</a:t>
             </a:r>
             <a:endParaRPr lang="en-US" sz="950" dirty="0"/>
           </a:p>
@@ -2767,7 +2767,7 @@
         </p:nvSpPr>
         <p:spPr>
           <a:xfrm>
-            <a:off x="6949440" y="4114800"/>
+            <a:off x="6949440" y="4096512"/>
             <a:ext cx="1005840" cy="320040"/>
           </a:xfrm>
           <a:prstGeom prst="rect">
@@ -2788,9 +2788,9 @@
                 <a:solidFill>
                   <a:srgbClr val="CBD5E1"/>
                 </a:solidFill>
-                <a:latin typeface="Pretendard" pitchFamily="34" charset="0"/>
-                <a:ea typeface="Pretendard" pitchFamily="34" charset="-122"/>
-                <a:cs typeface="Pretendard" pitchFamily="34" charset="-120"/>
+                <a:latin typeface="맑은 고딕" pitchFamily="34" charset="0"/>
+                <a:ea typeface="맑은 고딕" pitchFamily="34" charset="-122"/>
+                <a:cs typeface="맑은 고딕" pitchFamily="34" charset="-120"/>
               </a:rPr>
               <a:t>사이버펑크</a:t>
             </a:r>
@@ -2806,7 +2806,7 @@
         </p:nvSpPr>
         <p:spPr>
           <a:xfrm>
-            <a:off x="8001000" y="4151376"/>
+            <a:off x="8001000" y="4133088"/>
             <a:ext cx="3383280" cy="256032"/>
           </a:xfrm>
           <a:prstGeom prst="roundRect">
@@ -2833,8 +2833,8 @@
         </p:nvSpPr>
         <p:spPr>
           <a:xfrm>
-            <a:off x="8001000" y="4151376"/>
-            <a:ext cx="2560320" cy="256032"/>
+            <a:off x="8001000" y="4133088"/>
+            <a:ext cx="2468880" cy="256032"/>
           </a:xfrm>
           <a:prstGeom prst="roundRect">
             <a:avLst>
@@ -2860,7 +2860,7 @@
         </p:nvSpPr>
         <p:spPr>
           <a:xfrm>
-            <a:off x="8092440" y="4151376"/>
+            <a:off x="8092440" y="4133088"/>
             <a:ext cx="3200400" cy="256032"/>
           </a:xfrm>
           <a:prstGeom prst="rect">
@@ -2881,11 +2881,11 @@
                 <a:solidFill>
                   <a:srgbClr val="F8FAFC"/>
                 </a:solidFill>
-                <a:latin typeface="Pretendard" pitchFamily="34" charset="0"/>
-                <a:ea typeface="Pretendard" pitchFamily="34" charset="-122"/>
-                <a:cs typeface="Pretendard" pitchFamily="34" charset="-120"/>
-              </a:rPr>
-              <a:t>94 ➔ 116 FPS (+23% ↑)</a:t>
+                <a:latin typeface="맑은 고딕" pitchFamily="34" charset="0"/>
+                <a:ea typeface="맑은 고딕" pitchFamily="34" charset="-122"/>
+                <a:cs typeface="맑은 고딕" pitchFamily="34" charset="-120"/>
+              </a:rPr>
+              <a:t>94 -&gt; 116 FPS (+23% 상승)</a:t>
             </a:r>
             <a:endParaRPr lang="en-US" sz="950" dirty="0"/>
           </a:p>
@@ -2928,51 +2928,68 @@
         </p:nvSpPr>
         <p:spPr>
           <a:xfrm>
-            <a:off x="7086600" y="4773168"/>
-            <a:ext cx="4206240" cy="731520"/>
-          </a:xfrm>
-          <a:prstGeom prst="rect">
-            <a:avLst/>
-          </a:prstGeom>
-          <a:noFill/>
-          <a:ln/>
-        </p:spPr>
-        <p:txBody>
-          <a:bodyPr wrap="square" rtlCol="0" anchor="ctr"/>
-          <a:lstStyle/>
-          <a:p>
-            <a:pPr indent="0" marL="0">
-              <a:buNone/>
-            </a:pPr>
-            <a:r>
-              <a:rPr lang="en-US" sz="1150" b="1" dirty="0">
-                <a:solidFill>
-                  <a:srgbClr val="F8FAFC"/>
-                </a:solidFill>
-                <a:latin typeface="Pretendard" pitchFamily="34" charset="0"/>
-                <a:ea typeface="Pretendard" pitchFamily="34" charset="-122"/>
-                <a:cs typeface="Pretendard" pitchFamily="34" charset="-120"/>
-              </a:rPr>
-              <a:t>💡 AI 판정: QHD 배그 기준 이미 232 FPS로 충분!</a:t>
-            </a:r>
-            <a:endParaRPr lang="en-US" sz="1150" dirty="0"/>
-          </a:p>
-          <a:p>
-            <a:pPr indent="0" marL="0">
-              <a:buNone/>
-            </a:pPr>
-            <a:r>
-              <a:rPr lang="en-US" sz="1150" b="1" dirty="0">
-                <a:solidFill>
-                  <a:srgbClr val="F8FAFC"/>
-                </a:solidFill>
-                <a:latin typeface="Pretendard" pitchFamily="34" charset="0"/>
-                <a:ea typeface="Pretendard" pitchFamily="34" charset="-122"/>
-                <a:cs typeface="Pretendard" pitchFamily="34" charset="-120"/>
-              </a:rPr>
-              <a:t>RTX 5070 유지로 최대 60만 원 절약 추천</a:t>
-            </a:r>
-            <a:endParaRPr lang="en-US" sz="1150" dirty="0"/>
+            <a:off x="7086600" y="4754880"/>
+            <a:ext cx="4206240" cy="777240"/>
+          </a:xfrm>
+          <a:prstGeom prst="rect">
+            <a:avLst/>
+          </a:prstGeom>
+          <a:noFill/>
+          <a:ln/>
+        </p:spPr>
+        <p:txBody>
+          <a:bodyPr wrap="square" rtlCol="0" anchor="ctr"/>
+          <a:lstStyle/>
+          <a:p>
+            <a:pPr indent="0" marL="0">
+              <a:buNone/>
+            </a:pPr>
+            <a:r>
+              <a:rPr lang="en-US" sz="1100" b="1" dirty="0">
+                <a:solidFill>
+                  <a:srgbClr val="F8FAFC"/>
+                </a:solidFill>
+                <a:latin typeface="맑은 고딕" pitchFamily="34" charset="0"/>
+                <a:ea typeface="맑은 고딕" pitchFamily="34" charset="-122"/>
+                <a:cs typeface="맑은 고딕" pitchFamily="34" charset="-120"/>
+              </a:rPr>
+              <a:t>[AI 판정 결론]</a:t>
+            </a:r>
+            <a:endParaRPr lang="en-US" sz="1100" dirty="0"/>
+          </a:p>
+          <a:p>
+            <a:pPr indent="0" marL="0">
+              <a:buNone/>
+            </a:pPr>
+            <a:r>
+              <a:rPr lang="en-US" sz="1100" b="1" dirty="0">
+                <a:solidFill>
+                  <a:srgbClr val="F8FAFC"/>
+                </a:solidFill>
+                <a:latin typeface="맑은 고딕" pitchFamily="34" charset="0"/>
+                <a:ea typeface="맑은 고딕" pitchFamily="34" charset="-122"/>
+                <a:cs typeface="맑은 고딕" pitchFamily="34" charset="-120"/>
+              </a:rPr>
+              <a:t>QHD 배그 기준 5070도 이미 232 FPS로 충분!</a:t>
+            </a:r>
+            <a:endParaRPr lang="en-US" sz="1100" dirty="0"/>
+          </a:p>
+          <a:p>
+            <a:pPr indent="0" marL="0">
+              <a:buNone/>
+            </a:pPr>
+            <a:r>
+              <a:rPr lang="en-US" sz="1100" b="1" dirty="0">
+                <a:solidFill>
+                  <a:srgbClr val="F8FAFC"/>
+                </a:solidFill>
+                <a:latin typeface="맑은 고딕" pitchFamily="34" charset="0"/>
+                <a:ea typeface="맑은 고딕" pitchFamily="34" charset="-122"/>
+                <a:cs typeface="맑은 고딕" pitchFamily="34" charset="-120"/>
+              </a:rPr>
+              <a:t>RTX 5070 유지로 추가 지출 절약 추천</a:t>
+            </a:r>
+            <a:endParaRPr lang="en-US" sz="1100" dirty="0"/>
           </a:p>
         </p:txBody>
       </p:sp>
@@ -3017,14 +3034,14 @@
         <p:spPr>
           <a:xfrm>
             <a:off x="457200" y="228600"/>
-            <a:ext cx="11274552" cy="27432"/>
+            <a:ext cx="11274552" cy="36576"/>
           </a:xfrm>
           <a:prstGeom prst="rect">
             <a:avLst/>
           </a:prstGeom>
           <a:solidFill>
             <a:srgbClr val="00F3FF">
-              <a:alpha val="30000"/>
+              <a:alpha val="40000"/>
             </a:srgbClr>
           </a:solidFill>
           <a:ln w="12700">
@@ -3046,7 +3063,7 @@
         <p:spPr>
           <a:xfrm>
             <a:off x="457200" y="384048"/>
-            <a:ext cx="3474720" cy="310896"/>
+            <a:ext cx="3840480" cy="329184"/>
           </a:xfrm>
           <a:prstGeom prst="roundRect">
             <a:avLst>
@@ -3075,7 +3092,7 @@
         <p:spPr>
           <a:xfrm>
             <a:off x="457200" y="384048"/>
-            <a:ext cx="3474720" cy="310896"/>
+            <a:ext cx="3840480" cy="329184"/>
           </a:xfrm>
           <a:prstGeom prst="rect">
             <a:avLst/>
@@ -3091,17 +3108,17 @@
               <a:buNone/>
             </a:pPr>
             <a:r>
-              <a:rPr lang="en-US" sz="1000" b="1" dirty="0">
+              <a:rPr lang="en-US" sz="1050" b="1" dirty="0">
                 <a:solidFill>
                   <a:srgbClr val="00F3FF"/>
                 </a:solidFill>
-                <a:latin typeface="Pretendard" pitchFamily="34" charset="0"/>
-                <a:ea typeface="Pretendard" pitchFamily="34" charset="-122"/>
-                <a:cs typeface="Pretendard" pitchFamily="34" charset="-120"/>
+                <a:latin typeface="맑은 고딕" pitchFamily="34" charset="0"/>
+                <a:ea typeface="맑은 고딕" pitchFamily="34" charset="-122"/>
+                <a:cs typeface="맑은 고딕" pitchFamily="34" charset="-120"/>
               </a:rPr>
               <a:t>PROJECT ROADMAP</a:t>
             </a:r>
-            <a:endParaRPr lang="en-US" sz="1000" dirty="0"/>
+            <a:endParaRPr lang="en-US" sz="1050" dirty="0"/>
           </a:p>
         </p:txBody>
       </p:sp>
@@ -3113,7 +3130,7 @@
         </p:nvSpPr>
         <p:spPr>
           <a:xfrm>
-            <a:off x="457200" y="777240"/>
+            <a:off x="457200" y="786384"/>
             <a:ext cx="11274552" cy="502920"/>
           </a:xfrm>
           <a:prstGeom prst="rect">
@@ -3130,17 +3147,17 @@
               <a:buNone/>
             </a:pPr>
             <a:r>
-              <a:rPr lang="en-US" sz="2400" b="1" dirty="0">
-                <a:solidFill>
-                  <a:srgbClr val="F8FAFC"/>
-                </a:solidFill>
-                <a:latin typeface="Pretendard" pitchFamily="34" charset="0"/>
-                <a:ea typeface="Pretendard" pitchFamily="34" charset="-122"/>
-                <a:cs typeface="Pretendard" pitchFamily="34" charset="-120"/>
+              <a:rPr lang="en-US" sz="2200" b="1" dirty="0">
+                <a:solidFill>
+                  <a:srgbClr val="F8FAFC"/>
+                </a:solidFill>
+                <a:latin typeface="맑은 고딕" pitchFamily="34" charset="0"/>
+                <a:ea typeface="맑은 고딕" pitchFamily="34" charset="-122"/>
+                <a:cs typeface="맑은 고딕" pitchFamily="34" charset="-120"/>
               </a:rPr>
               <a:t>1학기 완성 기반 위에서 2학기 무엇을 추가했는가?</a:t>
             </a:r>
-            <a:endParaRPr lang="en-US" sz="2400" dirty="0"/>
+            <a:endParaRPr lang="en-US" sz="2200" dirty="0"/>
           </a:p>
         </p:txBody>
       </p:sp>
@@ -3196,13 +3213,13 @@
             <a:r>
               <a:rPr lang="en-US" sz="950" dirty="0">
                 <a:solidFill>
-                  <a:srgbClr val="64748B"/>
-                </a:solidFill>
-                <a:latin typeface="Pretendard" pitchFamily="34" charset="0"/>
-                <a:ea typeface="Pretendard" pitchFamily="34" charset="-122"/>
-                <a:cs typeface="Pretendard" pitchFamily="34" charset="-120"/>
-              </a:rPr>
-              <a:t>PC-FIT 2.0 : AI 부품·가격 비교 &amp; 가성비 어드바이저</a:t>
+                  <a:srgbClr val="94A3B8"/>
+                </a:solidFill>
+                <a:latin typeface="맑은 고딕" pitchFamily="34" charset="0"/>
+                <a:ea typeface="맑은 고딕" pitchFamily="34" charset="-122"/>
+                <a:cs typeface="맑은 고딕" pitchFamily="34" charset="-120"/>
+              </a:rPr>
+              <a:t>PC-FIT 2.0 : AI 부품·가격 비교 및 가성비 어드바이저</a:t>
             </a:r>
             <a:endParaRPr lang="en-US" sz="950" dirty="0"/>
           </a:p>
@@ -3237,9 +3254,9 @@
                 <a:solidFill>
                   <a:srgbClr val="00F3FF"/>
                 </a:solidFill>
-                <a:latin typeface="Consolas" pitchFamily="34" charset="0"/>
-                <a:ea typeface="Consolas" pitchFamily="34" charset="-122"/>
-                <a:cs typeface="Consolas" pitchFamily="34" charset="-120"/>
+                <a:latin typeface="맑은 고딕" pitchFamily="34" charset="0"/>
+                <a:ea typeface="맑은 고딕" pitchFamily="34" charset="-122"/>
+                <a:cs typeface="맑은 고딕" pitchFamily="34" charset="-120"/>
               </a:rPr>
               <a:t>SLIDE 02 / 09</a:t>
             </a:r>
@@ -3256,7 +3273,7 @@
         <p:spPr>
           <a:xfrm>
             <a:off x="457200" y="1417320"/>
-            <a:ext cx="4937760" cy="4663440"/>
+            <a:ext cx="4892040" cy="4663440"/>
           </a:xfrm>
           <a:prstGeom prst="roundRect">
             <a:avLst>
@@ -3282,8 +3299,8 @@
         </p:nvSpPr>
         <p:spPr>
           <a:xfrm>
-            <a:off x="731520" y="1645920"/>
-            <a:ext cx="2743200" cy="274320"/>
+            <a:off x="731520" y="1627632"/>
+            <a:ext cx="3200400" cy="274320"/>
           </a:xfrm>
           <a:prstGeom prst="rect">
             <a:avLst/>
@@ -3303,11 +3320,11 @@
                 <a:solidFill>
                   <a:srgbClr val="CBD5E1"/>
                 </a:solidFill>
-                <a:latin typeface="Pretendard" pitchFamily="34" charset="0"/>
-                <a:ea typeface="Pretendard" pitchFamily="34" charset="-122"/>
-                <a:cs typeface="Pretendard" pitchFamily="34" charset="-120"/>
-              </a:rPr>
-              <a:t>1학기 완성 (Baseline)</a:t>
+                <a:latin typeface="맑은 고딕" pitchFamily="34" charset="0"/>
+                <a:ea typeface="맑은 고딕" pitchFamily="34" charset="-122"/>
+                <a:cs typeface="맑은 고딕" pitchFamily="34" charset="-120"/>
+              </a:rPr>
+              <a:t>1학기 완성 내역 (Baseline)</a:t>
             </a:r>
             <a:endParaRPr lang="en-US" sz="1100" dirty="0"/>
           </a:p>
@@ -3321,7 +3338,7 @@
         </p:nvSpPr>
         <p:spPr>
           <a:xfrm>
-            <a:off x="731520" y="1965960"/>
+            <a:off x="731520" y="1938528"/>
             <a:ext cx="4389120" cy="411480"/>
           </a:xfrm>
           <a:prstGeom prst="rect">
@@ -3338,17 +3355,17 @@
               <a:buNone/>
             </a:pPr>
             <a:r>
-              <a:rPr lang="en-US" sz="2000" b="1" dirty="0">
+              <a:rPr lang="en-US" sz="1900" b="1" dirty="0">
                 <a:solidFill>
                   <a:srgbClr val="00F3FF"/>
                 </a:solidFill>
-                <a:latin typeface="Pretendard" pitchFamily="34" charset="0"/>
-                <a:ea typeface="Pretendard" pitchFamily="34" charset="-122"/>
-                <a:cs typeface="Pretendard" pitchFamily="34" charset="-120"/>
+                <a:latin typeface="맑은 고딕" pitchFamily="34" charset="0"/>
+                <a:ea typeface="맑은 고딕" pitchFamily="34" charset="-122"/>
+                <a:cs typeface="맑은 고딕" pitchFamily="34" charset="-120"/>
               </a:rPr>
               <a:t>"예산·용도 맞춤 초기 견적 생성"</a:t>
             </a:r>
-            <a:endParaRPr lang="en-US" sz="2000" dirty="0"/>
+            <a:endParaRPr lang="en-US" sz="1900" dirty="0"/>
           </a:p>
         </p:txBody>
       </p:sp>
@@ -3360,12 +3377,12 @@
         </p:nvSpPr>
         <p:spPr>
           <a:xfrm>
-            <a:off x="731520" y="2606040"/>
-            <a:ext cx="1371600" cy="1508760"/>
+            <a:off x="731520" y="2560320"/>
+            <a:ext cx="1353312" cy="1508760"/>
           </a:xfrm>
           <a:prstGeom prst="roundRect">
             <a:avLst>
-              <a:gd name="adj" fmla="val 10000"/>
+              <a:gd name="adj" fmla="val 9459"/>
             </a:avLst>
           </a:prstGeom>
           <a:solidFill>
@@ -3373,7 +3390,7 @@
           </a:solidFill>
           <a:ln w="12700">
             <a:solidFill>
-              <a:srgbClr val="1E293B"/>
+              <a:srgbClr val="00F3FF"/>
             </a:solidFill>
             <a:prstDash val="solid"/>
           </a:ln>
@@ -3387,8 +3404,8 @@
         </p:nvSpPr>
         <p:spPr>
           <a:xfrm>
-            <a:off x="731520" y="2697480"/>
-            <a:ext cx="1371600" cy="1325880"/>
+            <a:off x="731520" y="2651760"/>
+            <a:ext cx="1353312" cy="1325880"/>
           </a:xfrm>
           <a:prstGeom prst="rect">
             <a:avLst/>
@@ -3408,11 +3425,11 @@
                 <a:solidFill>
                   <a:srgbClr val="F8FAFC"/>
                 </a:solidFill>
-                <a:latin typeface="Pretendard" pitchFamily="34" charset="0"/>
-                <a:ea typeface="Pretendard" pitchFamily="34" charset="-122"/>
-                <a:cs typeface="Pretendard" pitchFamily="34" charset="-120"/>
-              </a:rPr>
-              <a:t>📋</a:t>
+                <a:latin typeface="맑은 고딕" pitchFamily="34" charset="0"/>
+                <a:ea typeface="맑은 고딕" pitchFamily="34" charset="-122"/>
+                <a:cs typeface="맑은 고딕" pitchFamily="34" charset="-120"/>
+              </a:rPr>
+              <a:t>STEP 1</a:t>
             </a:r>
             <a:endParaRPr lang="en-US" sz="1100" dirty="0"/>
           </a:p>
@@ -3420,14 +3437,20 @@
             <a:pPr algn="ctr" indent="0" marL="0">
               <a:buNone/>
             </a:pPr>
+            <a:endParaRPr lang="en-US" sz="1100" dirty="0"/>
+          </a:p>
+          <a:p>
+            <a:pPr algn="ctr" indent="0" marL="0">
+              <a:buNone/>
+            </a:pPr>
             <a:r>
               <a:rPr lang="en-US" sz="1100" b="1" dirty="0">
                 <a:solidFill>
                   <a:srgbClr val="F8FAFC"/>
                 </a:solidFill>
-                <a:latin typeface="Pretendard" pitchFamily="34" charset="0"/>
-                <a:ea typeface="Pretendard" pitchFamily="34" charset="-122"/>
-                <a:cs typeface="Pretendard" pitchFamily="34" charset="-120"/>
+                <a:latin typeface="맑은 고딕" pitchFamily="34" charset="0"/>
+                <a:ea typeface="맑은 고딕" pitchFamily="34" charset="-122"/>
+                <a:cs typeface="맑은 고딕" pitchFamily="34" charset="-120"/>
               </a:rPr>
               <a:t>5단계 설문</a:t>
             </a:r>
@@ -3442,11 +3465,11 @@
                 <a:solidFill>
                   <a:srgbClr val="F8FAFC"/>
                 </a:solidFill>
-                <a:latin typeface="Pretendard" pitchFamily="34" charset="0"/>
-                <a:ea typeface="Pretendard" pitchFamily="34" charset="-122"/>
-                <a:cs typeface="Pretendard" pitchFamily="34" charset="-120"/>
-              </a:rPr>
-              <a:t>용도·예산 입력</a:t>
+                <a:latin typeface="맑은 고딕" pitchFamily="34" charset="0"/>
+                <a:ea typeface="맑은 고딕" pitchFamily="34" charset="-122"/>
+                <a:cs typeface="맑은 고딕" pitchFamily="34" charset="-120"/>
+              </a:rPr>
+              <a:t>(용도·예산 입력)</a:t>
             </a:r>
             <a:endParaRPr lang="en-US" sz="1100" dirty="0"/>
           </a:p>
@@ -3460,12 +3483,12 @@
         </p:nvSpPr>
         <p:spPr>
           <a:xfrm>
-            <a:off x="2194560" y="2606040"/>
-            <a:ext cx="1371600" cy="1508760"/>
+            <a:off x="2176272" y="2560320"/>
+            <a:ext cx="1353312" cy="1508760"/>
           </a:xfrm>
           <a:prstGeom prst="roundRect">
             <a:avLst>
-              <a:gd name="adj" fmla="val 10000"/>
+              <a:gd name="adj" fmla="val 9459"/>
             </a:avLst>
           </a:prstGeom>
           <a:solidFill>
@@ -3473,7 +3496,7 @@
           </a:solidFill>
           <a:ln w="12700">
             <a:solidFill>
-              <a:srgbClr val="1E293B"/>
+              <a:srgbClr val="00F3FF"/>
             </a:solidFill>
             <a:prstDash val="solid"/>
           </a:ln>
@@ -3487,8 +3510,8 @@
         </p:nvSpPr>
         <p:spPr>
           <a:xfrm>
-            <a:off x="2194560" y="2697480"/>
-            <a:ext cx="1371600" cy="1325880"/>
+            <a:off x="2176272" y="2651760"/>
+            <a:ext cx="1353312" cy="1325880"/>
           </a:xfrm>
           <a:prstGeom prst="rect">
             <a:avLst/>
@@ -3508,11 +3531,11 @@
                 <a:solidFill>
                   <a:srgbClr val="F8FAFC"/>
                 </a:solidFill>
-                <a:latin typeface="Pretendard" pitchFamily="34" charset="0"/>
-                <a:ea typeface="Pretendard" pitchFamily="34" charset="-122"/>
-                <a:cs typeface="Pretendard" pitchFamily="34" charset="-120"/>
-              </a:rPr>
-              <a:t>⚙️</a:t>
+                <a:latin typeface="맑은 고딕" pitchFamily="34" charset="0"/>
+                <a:ea typeface="맑은 고딕" pitchFamily="34" charset="-122"/>
+                <a:cs typeface="맑은 고딕" pitchFamily="34" charset="-120"/>
+              </a:rPr>
+              <a:t>STEP 2</a:t>
             </a:r>
             <a:endParaRPr lang="en-US" sz="1100" dirty="0"/>
           </a:p>
@@ -3520,14 +3543,20 @@
             <a:pPr algn="ctr" indent="0" marL="0">
               <a:buNone/>
             </a:pPr>
+            <a:endParaRPr lang="en-US" sz="1100" dirty="0"/>
+          </a:p>
+          <a:p>
+            <a:pPr algn="ctr" indent="0" marL="0">
+              <a:buNone/>
+            </a:pPr>
             <a:r>
               <a:rPr lang="en-US" sz="1100" b="1" dirty="0">
                 <a:solidFill>
                   <a:srgbClr val="F8FAFC"/>
                 </a:solidFill>
-                <a:latin typeface="Pretendard" pitchFamily="34" charset="0"/>
-                <a:ea typeface="Pretendard" pitchFamily="34" charset="-122"/>
-                <a:cs typeface="Pretendard" pitchFamily="34" charset="-120"/>
+                <a:latin typeface="맑은 고딕" pitchFamily="34" charset="0"/>
+                <a:ea typeface="맑은 고딕" pitchFamily="34" charset="-122"/>
+                <a:cs typeface="맑은 고딕" pitchFamily="34" charset="-120"/>
               </a:rPr>
               <a:t>호환성 검증</a:t>
             </a:r>
@@ -3542,11 +3571,11 @@
                 <a:solidFill>
                   <a:srgbClr val="F8FAFC"/>
                 </a:solidFill>
-                <a:latin typeface="Pretendard" pitchFamily="34" charset="0"/>
-                <a:ea typeface="Pretendard" pitchFamily="34" charset="-122"/>
-                <a:cs typeface="Pretendard" pitchFamily="34" charset="-120"/>
-              </a:rPr>
-              <a:t>소켓·파워 체크</a:t>
+                <a:latin typeface="맑은 고딕" pitchFamily="34" charset="0"/>
+                <a:ea typeface="맑은 고딕" pitchFamily="34" charset="-122"/>
+                <a:cs typeface="맑은 고딕" pitchFamily="34" charset="-120"/>
+              </a:rPr>
+              <a:t>(소켓·파워 체크)</a:t>
             </a:r>
             <a:endParaRPr lang="en-US" sz="1100" dirty="0"/>
           </a:p>
@@ -3560,12 +3589,12 @@
         </p:nvSpPr>
         <p:spPr>
           <a:xfrm>
-            <a:off x="3657600" y="2606040"/>
-            <a:ext cx="1371600" cy="1508760"/>
+            <a:off x="3621024" y="2560320"/>
+            <a:ext cx="1353312" cy="1508760"/>
           </a:xfrm>
           <a:prstGeom prst="roundRect">
             <a:avLst>
-              <a:gd name="adj" fmla="val 10000"/>
+              <a:gd name="adj" fmla="val 9459"/>
             </a:avLst>
           </a:prstGeom>
           <a:solidFill>
@@ -3573,7 +3602,7 @@
           </a:solidFill>
           <a:ln w="12700">
             <a:solidFill>
-              <a:srgbClr val="1E293B"/>
+              <a:srgbClr val="00F3FF"/>
             </a:solidFill>
             <a:prstDash val="solid"/>
           </a:ln>
@@ -3587,8 +3616,8 @@
         </p:nvSpPr>
         <p:spPr>
           <a:xfrm>
-            <a:off x="3657600" y="2697480"/>
-            <a:ext cx="1371600" cy="1325880"/>
+            <a:off x="3621024" y="2651760"/>
+            <a:ext cx="1353312" cy="1325880"/>
           </a:xfrm>
           <a:prstGeom prst="rect">
             <a:avLst/>
@@ -3608,11 +3637,11 @@
                 <a:solidFill>
                   <a:srgbClr val="F8FAFC"/>
                 </a:solidFill>
-                <a:latin typeface="Pretendard" pitchFamily="34" charset="0"/>
-                <a:ea typeface="Pretendard" pitchFamily="34" charset="-122"/>
-                <a:cs typeface="Pretendard" pitchFamily="34" charset="-120"/>
-              </a:rPr>
-              <a:t>🖥️</a:t>
+                <a:latin typeface="맑은 고딕" pitchFamily="34" charset="0"/>
+                <a:ea typeface="맑은 고딕" pitchFamily="34" charset="-122"/>
+                <a:cs typeface="맑은 고딕" pitchFamily="34" charset="-120"/>
+              </a:rPr>
+              <a:t>STEP 3</a:t>
             </a:r>
             <a:endParaRPr lang="en-US" sz="1100" dirty="0"/>
           </a:p>
@@ -3620,14 +3649,20 @@
             <a:pPr algn="ctr" indent="0" marL="0">
               <a:buNone/>
             </a:pPr>
+            <a:endParaRPr lang="en-US" sz="1100" dirty="0"/>
+          </a:p>
+          <a:p>
+            <a:pPr algn="ctr" indent="0" marL="0">
+              <a:buNone/>
+            </a:pPr>
             <a:r>
               <a:rPr lang="en-US" sz="1100" b="1" dirty="0">
                 <a:solidFill>
                   <a:srgbClr val="F8FAFC"/>
                 </a:solidFill>
-                <a:latin typeface="Pretendard" pitchFamily="34" charset="0"/>
-                <a:ea typeface="Pretendard" pitchFamily="34" charset="-122"/>
-                <a:cs typeface="Pretendard" pitchFamily="34" charset="-120"/>
+                <a:latin typeface="맑은 고딕" pitchFamily="34" charset="0"/>
+                <a:ea typeface="맑은 고딕" pitchFamily="34" charset="-122"/>
+                <a:cs typeface="맑은 고딕" pitchFamily="34" charset="-120"/>
               </a:rPr>
               <a:t>최종 견적서</a:t>
             </a:r>
@@ -3642,11 +3677,11 @@
                 <a:solidFill>
                   <a:srgbClr val="F8FAFC"/>
                 </a:solidFill>
-                <a:latin typeface="Pretendard" pitchFamily="34" charset="0"/>
-                <a:ea typeface="Pretendard" pitchFamily="34" charset="-122"/>
-                <a:cs typeface="Pretendard" pitchFamily="34" charset="-120"/>
-              </a:rPr>
-              <a:t>8종 부품 도출</a:t>
+                <a:latin typeface="맑은 고딕" pitchFamily="34" charset="0"/>
+                <a:ea typeface="맑은 고딕" pitchFamily="34" charset="-122"/>
+                <a:cs typeface="맑은 고딕" pitchFamily="34" charset="-120"/>
+              </a:rPr>
+              <a:t>(8종 부품 도출)</a:t>
             </a:r>
             <a:endParaRPr lang="en-US" sz="1100" dirty="0"/>
           </a:p>
@@ -3660,12 +3695,12 @@
         </p:nvSpPr>
         <p:spPr>
           <a:xfrm>
-            <a:off x="731520" y="4389120"/>
-            <a:ext cx="4389120" cy="1371600"/>
+            <a:off x="731520" y="4343400"/>
+            <a:ext cx="4343400" cy="1417320"/>
           </a:xfrm>
           <a:prstGeom prst="roundRect">
             <a:avLst>
-              <a:gd name="adj" fmla="val 10000"/>
+              <a:gd name="adj" fmla="val 9032"/>
             </a:avLst>
           </a:prstGeom>
           <a:solidFill>
@@ -3689,89 +3724,78 @@
         </p:nvSpPr>
         <p:spPr>
           <a:xfrm>
-            <a:off x="868680" y="4480560"/>
-            <a:ext cx="4114800" cy="1188720"/>
-          </a:xfrm>
-          <a:prstGeom prst="rect">
-            <a:avLst/>
-          </a:prstGeom>
-          <a:noFill/>
-          <a:ln/>
-        </p:spPr>
-        <p:txBody>
-          <a:bodyPr wrap="square" rtlCol="0" anchor="ctr"/>
-          <a:lstStyle/>
-          <a:p>
-            <a:pPr indent="0" marL="0">
-              <a:buNone/>
-            </a:pPr>
-            <a:r>
-              <a:rPr lang="en-US" sz="1200" b="1" dirty="0">
-                <a:solidFill>
-                  <a:srgbClr val="F8FAFC"/>
-                </a:solidFill>
-                <a:latin typeface="Pretendard" pitchFamily="34" charset="0"/>
-                <a:ea typeface="Pretendard" pitchFamily="34" charset="-122"/>
-                <a:cs typeface="Pretendard" pitchFamily="34" charset="-120"/>
-              </a:rPr>
-              <a:t>🚨 1학기 완료 후 발견된 실제 문제점</a:t>
-            </a:r>
-            <a:endParaRPr lang="en-US" sz="1200" dirty="0"/>
-          </a:p>
-          <a:p>
-            <a:pPr indent="0" marL="0">
-              <a:buNone/>
-            </a:pPr>
-            <a:r>
-              <a:rPr lang="en-US" sz="1200" b="1" dirty="0">
-                <a:solidFill>
-                  <a:srgbClr val="F8FAFC"/>
-                </a:solidFill>
-                <a:latin typeface="Pretendard" pitchFamily="34" charset="0"/>
-                <a:ea typeface="Pretendard" pitchFamily="34" charset="-122"/>
-                <a:cs typeface="Pretendard" pitchFamily="34" charset="-120"/>
-              </a:rPr>
-              <a:t>"견적은 나왔는데... 여기서 돈 더 주고 윗등급을 살지 말지 몰라서 다시 유튜브를 뒤져야 하네?"</a:t>
-            </a:r>
-            <a:endParaRPr lang="en-US" sz="1200" dirty="0"/>
-          </a:p>
-        </p:txBody>
-      </p:sp>
-      <p:sp>
-        <p:nvSpPr>
-          <p:cNvPr id="20" name="Text 18"/>
-          <p:cNvSpPr/>
-          <p:nvPr/>
-        </p:nvSpPr>
-        <p:spPr>
-          <a:xfrm>
-            <a:off x="5440680" y="3383280"/>
-            <a:ext cx="640080" cy="548640"/>
-          </a:xfrm>
-          <a:prstGeom prst="rect">
-            <a:avLst/>
-          </a:prstGeom>
-          <a:noFill/>
-          <a:ln/>
-        </p:spPr>
-        <p:txBody>
-          <a:bodyPr wrap="square" rtlCol="0" anchor="ctr"/>
-          <a:lstStyle/>
-          <a:p>
-            <a:pPr algn="ctr" indent="0" marL="0">
-              <a:buNone/>
-            </a:pPr>
-            <a:r>
-              <a:rPr lang="en-US" sz="2800" b="1" dirty="0">
-                <a:solidFill>
-                  <a:srgbClr val="00F3FF"/>
-                </a:solidFill>
-              </a:rPr>
-              <a:t>➔</a:t>
-            </a:r>
-            <a:endParaRPr lang="en-US" sz="2800" dirty="0"/>
-          </a:p>
-        </p:txBody>
+            <a:off x="868680" y="4434840"/>
+            <a:ext cx="4069080" cy="1234440"/>
+          </a:xfrm>
+          <a:prstGeom prst="rect">
+            <a:avLst/>
+          </a:prstGeom>
+          <a:noFill/>
+          <a:ln/>
+        </p:spPr>
+        <p:txBody>
+          <a:bodyPr wrap="square" rtlCol="0" anchor="ctr"/>
+          <a:lstStyle/>
+          <a:p>
+            <a:pPr indent="0" marL="0">
+              <a:buNone/>
+            </a:pPr>
+            <a:r>
+              <a:rPr lang="en-US" sz="1150" b="1" dirty="0">
+                <a:solidFill>
+                  <a:srgbClr val="F8FAFC"/>
+                </a:solidFill>
+                <a:latin typeface="맑은 고딕" pitchFamily="34" charset="0"/>
+                <a:ea typeface="맑은 고딕" pitchFamily="34" charset="-122"/>
+                <a:cs typeface="맑은 고딕" pitchFamily="34" charset="-120"/>
+              </a:rPr>
+              <a:t>[1학기 완료 후 발견된 한계점]</a:t>
+            </a:r>
+            <a:endParaRPr lang="en-US" sz="1150" dirty="0"/>
+          </a:p>
+          <a:p>
+            <a:pPr indent="0" marL="0">
+              <a:buNone/>
+            </a:pPr>
+            <a:r>
+              <a:rPr lang="en-US" sz="1150" b="1" dirty="0">
+                <a:solidFill>
+                  <a:srgbClr val="F8FAFC"/>
+                </a:solidFill>
+                <a:latin typeface="맑은 고딕" pitchFamily="34" charset="0"/>
+                <a:ea typeface="맑은 고딕" pitchFamily="34" charset="-122"/>
+                <a:cs typeface="맑은 고딕" pitchFamily="34" charset="-120"/>
+              </a:rPr>
+              <a:t>"견적서는 나왔는데, 여기서 돈을 더 주고 윗등급 부품을 살지 말지 몰라서 다시 유튜브·다나와를 뒤져야 하네?"</a:t>
+            </a:r>
+            <a:endParaRPr lang="en-US" sz="1150" dirty="0"/>
+          </a:p>
+        </p:txBody>
+      </p:sp>
+      <p:sp>
+        <p:nvSpPr>
+          <p:cNvPr id="20" name="Shape 18"/>
+          <p:cNvSpPr/>
+          <p:nvPr/>
+        </p:nvSpPr>
+        <p:spPr>
+          <a:xfrm>
+            <a:off x="5486400" y="3474720"/>
+            <a:ext cx="502920" cy="411480"/>
+          </a:xfrm>
+          <a:prstGeom prst="rightArrow">
+            <a:avLst/>
+          </a:prstGeom>
+          <a:solidFill>
+            <a:srgbClr val="00F3FF"/>
+          </a:solidFill>
+          <a:ln w="12700">
+            <a:solidFill>
+              <a:srgbClr val="00F3FF"/>
+            </a:solidFill>
+            <a:prstDash val="solid"/>
+          </a:ln>
+        </p:spPr>
       </p:sp>
       <p:sp>
         <p:nvSpPr>
@@ -3808,8 +3832,8 @@
         </p:nvSpPr>
         <p:spPr>
           <a:xfrm>
-            <a:off x="6400800" y="1645920"/>
-            <a:ext cx="3657600" cy="274320"/>
+            <a:off x="6400800" y="1627632"/>
+            <a:ext cx="4114800" cy="274320"/>
           </a:xfrm>
           <a:prstGeom prst="rect">
             <a:avLst/>
@@ -3829,11 +3853,11 @@
                 <a:solidFill>
                   <a:srgbClr val="FF5CA8"/>
                 </a:solidFill>
-                <a:latin typeface="Pretendard" pitchFamily="34" charset="0"/>
-                <a:ea typeface="Pretendard" pitchFamily="34" charset="-122"/>
-                <a:cs typeface="Pretendard" pitchFamily="34" charset="-120"/>
-              </a:rPr>
-              <a:t>2학기 신규 개발 (실제 구현 완료)</a:t>
+                <a:latin typeface="맑은 고딕" pitchFamily="34" charset="0"/>
+                <a:ea typeface="맑은 고딕" pitchFamily="34" charset="-122"/>
+                <a:cs typeface="맑은 고딕" pitchFamily="34" charset="-120"/>
+              </a:rPr>
+              <a:t>2학기 신규 개발 (실제 구현 기능)</a:t>
             </a:r>
             <a:endParaRPr lang="en-US" sz="1100" dirty="0"/>
           </a:p>
@@ -3847,7 +3871,7 @@
         </p:nvSpPr>
         <p:spPr>
           <a:xfrm>
-            <a:off x="6400800" y="1965960"/>
+            <a:off x="6400800" y="1938528"/>
             <a:ext cx="5029200" cy="411480"/>
           </a:xfrm>
           <a:prstGeom prst="rect">
@@ -3864,17 +3888,17 @@
               <a:buNone/>
             </a:pPr>
             <a:r>
-              <a:rPr lang="en-US" sz="1900" b="1" dirty="0">
-                <a:solidFill>
-                  <a:srgbClr val="F8FAFC"/>
-                </a:solidFill>
-                <a:latin typeface="Pretendard" pitchFamily="34" charset="0"/>
-                <a:ea typeface="Pretendard" pitchFamily="34" charset="-122"/>
-                <a:cs typeface="Pretendard" pitchFamily="34" charset="-120"/>
-              </a:rPr>
-              <a:t>"최종 견적 내 AI 가격·성능 비교 &amp; 차트 시각화"</a:t>
-            </a:r>
-            <a:endParaRPr lang="en-US" sz="1900" dirty="0"/>
+              <a:rPr lang="en-US" sz="1850" b="1" dirty="0">
+                <a:solidFill>
+                  <a:srgbClr val="F8FAFC"/>
+                </a:solidFill>
+                <a:latin typeface="맑은 고딕" pitchFamily="34" charset="0"/>
+                <a:ea typeface="맑은 고딕" pitchFamily="34" charset="-122"/>
+                <a:cs typeface="맑은 고딕" pitchFamily="34" charset="-120"/>
+              </a:rPr>
+              <a:t>"최종 견적 내 AI 가격·성능 비교 &amp; 직관적 시각화"</a:t>
+            </a:r>
+            <a:endParaRPr lang="en-US" sz="1850" dirty="0"/>
           </a:p>
         </p:txBody>
       </p:sp>
@@ -3930,34 +3954,34 @@
               <a:buNone/>
             </a:pPr>
             <a:r>
-              <a:rPr lang="en-US" sz="1150" b="1" dirty="0">
-                <a:solidFill>
-                  <a:srgbClr val="F8FAFC"/>
-                </a:solidFill>
-                <a:latin typeface="Pretendard" pitchFamily="34" charset="0"/>
-                <a:ea typeface="Pretendard" pitchFamily="34" charset="-122"/>
-                <a:cs typeface="Pretendard" pitchFamily="34" charset="-120"/>
-              </a:rPr>
-              <a:t>📊 AI 부품 비교 &amp; 가성비 어드바이저 (PartAdvisorCard)</a:t>
-            </a:r>
-            <a:endParaRPr lang="en-US" sz="1150" dirty="0"/>
-          </a:p>
-          <a:p>
-            <a:pPr indent="0" marL="0">
-              <a:buNone/>
-            </a:pPr>
-            <a:r>
-              <a:rPr lang="en-US" sz="1150" b="1" dirty="0">
-                <a:solidFill>
-                  <a:srgbClr val="F8FAFC"/>
-                </a:solidFill>
-                <a:latin typeface="Pretendard" pitchFamily="34" charset="0"/>
-                <a:ea typeface="Pretendard" pitchFamily="34" charset="-122"/>
-                <a:cs typeface="Pretendard" pitchFamily="34" charset="-120"/>
-              </a:rPr>
-              <a:t>클릭 한 번으로 두 부품의 게임 프레임(FPS) 막대차트와 스펙·가격 비교표 즉시 생성</a:t>
-            </a:r>
-            <a:endParaRPr lang="en-US" sz="1150" dirty="0"/>
+              <a:rPr lang="en-US" sz="1100" b="1" dirty="0">
+                <a:solidFill>
+                  <a:srgbClr val="F8FAFC"/>
+                </a:solidFill>
+                <a:latin typeface="맑은 고딕" pitchFamily="34" charset="0"/>
+                <a:ea typeface="맑은 고딕" pitchFamily="34" charset="-122"/>
+                <a:cs typeface="맑은 고딕" pitchFamily="34" charset="-120"/>
+              </a:rPr>
+              <a:t>1. AI 부품 비교 &amp; 가성비 어드바이저 (PartAdvisorCard.vue)</a:t>
+            </a:r>
+            <a:endParaRPr lang="en-US" sz="1100" dirty="0"/>
+          </a:p>
+          <a:p>
+            <a:pPr indent="0" marL="0">
+              <a:buNone/>
+            </a:pPr>
+            <a:r>
+              <a:rPr lang="en-US" sz="1100" b="1" dirty="0">
+                <a:solidFill>
+                  <a:srgbClr val="F8FAFC"/>
+                </a:solidFill>
+                <a:latin typeface="맑은 고딕" pitchFamily="34" charset="0"/>
+                <a:ea typeface="맑은 고딕" pitchFamily="34" charset="-122"/>
+                <a:cs typeface="맑은 고딕" pitchFamily="34" charset="-120"/>
+              </a:rPr>
+              <a:t>빠른 질문 버튼 클릭으로 두 부품의 게임 프레임(FPS) 막대차트와 스펙·가격 비교표 생성</a:t>
+            </a:r>
+            <a:endParaRPr lang="en-US" sz="1100" dirty="0"/>
           </a:p>
         </p:txBody>
       </p:sp>
@@ -4013,34 +4037,34 @@
               <a:buNone/>
             </a:pPr>
             <a:r>
-              <a:rPr lang="en-US" sz="1150" b="1" dirty="0">
-                <a:solidFill>
-                  <a:srgbClr val="F8FAFC"/>
-                </a:solidFill>
-                <a:latin typeface="Pretendard" pitchFamily="34" charset="0"/>
-                <a:ea typeface="Pretendard" pitchFamily="34" charset="-122"/>
-                <a:cs typeface="Pretendard" pitchFamily="34" charset="-120"/>
-              </a:rPr>
-              <a:t>🛡️ Supabase DB(945종) + 공인 벤치마크 교차 검증</a:t>
-            </a:r>
-            <a:endParaRPr lang="en-US" sz="1150" dirty="0"/>
-          </a:p>
-          <a:p>
-            <a:pPr indent="0" marL="0">
-              <a:buNone/>
-            </a:pPr>
-            <a:r>
-              <a:rPr lang="en-US" sz="1150" b="1" dirty="0">
-                <a:solidFill>
-                  <a:srgbClr val="F8FAFC"/>
-                </a:solidFill>
-                <a:latin typeface="Pretendard" pitchFamily="34" charset="0"/>
-                <a:ea typeface="Pretendard" pitchFamily="34" charset="-122"/>
-                <a:cs typeface="Pretendard" pitchFamily="34" charset="-120"/>
-              </a:rPr>
-              <a:t>3DMark Time Spy · 퀘이사존 FPS · Cinebench R23 실측 데이터를 주입해 거짓말 차단</a:t>
-            </a:r>
-            <a:endParaRPr lang="en-US" sz="1150" dirty="0"/>
+              <a:rPr lang="en-US" sz="1100" b="1" dirty="0">
+                <a:solidFill>
+                  <a:srgbClr val="F8FAFC"/>
+                </a:solidFill>
+                <a:latin typeface="맑은 고딕" pitchFamily="34" charset="0"/>
+                <a:ea typeface="맑은 고딕" pitchFamily="34" charset="-122"/>
+                <a:cs typeface="맑은 고딕" pitchFamily="34" charset="-120"/>
+              </a:rPr>
+              <a:t>2. 하드웨어 벤치마크 기준표 + 부품 DB 연동 (advisorController.js)</a:t>
+            </a:r>
+            <a:endParaRPr lang="en-US" sz="1100" dirty="0"/>
+          </a:p>
+          <a:p>
+            <a:pPr indent="0" marL="0">
+              <a:buNone/>
+            </a:pPr>
+            <a:r>
+              <a:rPr lang="en-US" sz="1100" b="1" dirty="0">
+                <a:solidFill>
+                  <a:srgbClr val="F8FAFC"/>
+                </a:solidFill>
+                <a:latin typeface="맑은 고딕" pitchFamily="34" charset="0"/>
+                <a:ea typeface="맑은 고딕" pitchFamily="34" charset="-122"/>
+                <a:cs typeface="맑은 고딕" pitchFamily="34" charset="-120"/>
+              </a:rPr>
+              <a:t>3DMark 점수, 퀘이사존 QHD 평균 FPS, DB 부품 스펙을 AI에게 전달해 정확한 비교 수행</a:t>
+            </a:r>
+            <a:endParaRPr lang="en-US" sz="1100" dirty="0"/>
           </a:p>
         </p:txBody>
       </p:sp>
@@ -4096,34 +4120,34 @@
               <a:buNone/>
             </a:pPr>
             <a:r>
-              <a:rPr lang="en-US" sz="1150" b="1" dirty="0">
-                <a:solidFill>
-                  <a:srgbClr val="F8FAFC"/>
-                </a:solidFill>
-                <a:latin typeface="Pretendard" pitchFamily="34" charset="0"/>
-                <a:ea typeface="Pretendard" pitchFamily="34" charset="-122"/>
-                <a:cs typeface="Pretendard" pitchFamily="34" charset="-120"/>
-              </a:rPr>
-              <a:t>🛒 네이버 쇼핑 최저가 연동 &amp; 커뮤니티 이륙 심사소</a:t>
-            </a:r>
-            <a:endParaRPr lang="en-US" sz="1150" dirty="0"/>
-          </a:p>
-          <a:p>
-            <a:pPr indent="0" marL="0">
-              <a:buNone/>
-            </a:pPr>
-            <a:r>
-              <a:rPr lang="en-US" sz="1150" b="1" dirty="0">
-                <a:solidFill>
-                  <a:srgbClr val="F8FAFC"/>
-                </a:solidFill>
-                <a:latin typeface="Pretendard" pitchFamily="34" charset="0"/>
-                <a:ea typeface="Pretendard" pitchFamily="34" charset="-122"/>
-                <a:cs typeface="Pretendard" pitchFamily="34" charset="-120"/>
-              </a:rPr>
-              <a:t>부품 카드별 네이버 가격비교 즉시 연결 및 유저 찬반 투표·댓글 피드백 완성</a:t>
-            </a:r>
-            <a:endParaRPr lang="en-US" sz="1150" dirty="0"/>
+              <a:rPr lang="en-US" sz="1100" b="1" dirty="0">
+                <a:solidFill>
+                  <a:srgbClr val="F8FAFC"/>
+                </a:solidFill>
+                <a:latin typeface="맑은 고딕" pitchFamily="34" charset="0"/>
+                <a:ea typeface="맑은 고딕" pitchFamily="34" charset="-122"/>
+                <a:cs typeface="맑은 고딕" pitchFamily="34" charset="-120"/>
+              </a:rPr>
+              <a:t>3. 네이버 쇼핑 가격비교 구매 연동 (PartCard.vue)</a:t>
+            </a:r>
+            <a:endParaRPr lang="en-US" sz="1100" dirty="0"/>
+          </a:p>
+          <a:p>
+            <a:pPr indent="0" marL="0">
+              <a:buNone/>
+            </a:pPr>
+            <a:r>
+              <a:rPr lang="en-US" sz="1100" b="1" dirty="0">
+                <a:solidFill>
+                  <a:srgbClr val="F8FAFC"/>
+                </a:solidFill>
+                <a:latin typeface="맑은 고딕" pitchFamily="34" charset="0"/>
+                <a:ea typeface="맑은 고딕" pitchFamily="34" charset="-122"/>
+                <a:cs typeface="맑은 고딕" pitchFamily="34" charset="-120"/>
+              </a:rPr>
+              <a:t>최종 견적의 각 부품 카드에서 [네이버 쇼핑 구매] 버튼으로 실시간 최저가 검색 연결</a:t>
+            </a:r>
+            <a:endParaRPr lang="en-US" sz="1100" dirty="0"/>
           </a:p>
         </p:txBody>
       </p:sp>
@@ -4168,14 +4192,14 @@
         <p:spPr>
           <a:xfrm>
             <a:off x="457200" y="228600"/>
-            <a:ext cx="11274552" cy="27432"/>
+            <a:ext cx="11274552" cy="36576"/>
           </a:xfrm>
           <a:prstGeom prst="rect">
             <a:avLst/>
           </a:prstGeom>
           <a:solidFill>
             <a:srgbClr val="00F3FF">
-              <a:alpha val="30000"/>
+              <a:alpha val="40000"/>
             </a:srgbClr>
           </a:solidFill>
           <a:ln w="12700">
@@ -4197,7 +4221,7 @@
         <p:spPr>
           <a:xfrm>
             <a:off x="457200" y="384048"/>
-            <a:ext cx="3474720" cy="310896"/>
+            <a:ext cx="3840480" cy="329184"/>
           </a:xfrm>
           <a:prstGeom prst="roundRect">
             <a:avLst>
@@ -4226,7 +4250,7 @@
         <p:spPr>
           <a:xfrm>
             <a:off x="457200" y="384048"/>
-            <a:ext cx="3474720" cy="310896"/>
+            <a:ext cx="3840480" cy="329184"/>
           </a:xfrm>
           <a:prstGeom prst="rect">
             <a:avLst/>
@@ -4242,17 +4266,17 @@
               <a:buNone/>
             </a:pPr>
             <a:r>
-              <a:rPr lang="en-US" sz="1000" b="1" dirty="0">
+              <a:rPr lang="en-US" sz="1050" b="1" dirty="0">
                 <a:solidFill>
                   <a:srgbClr val="FF5CA8"/>
                 </a:solidFill>
-                <a:latin typeface="Pretendard" pitchFamily="34" charset="0"/>
-                <a:ea typeface="Pretendard" pitchFamily="34" charset="-122"/>
-                <a:cs typeface="Pretendard" pitchFamily="34" charset="-120"/>
+                <a:latin typeface="맑은 고딕" pitchFamily="34" charset="0"/>
+                <a:ea typeface="맑은 고딕" pitchFamily="34" charset="-122"/>
+                <a:cs typeface="맑은 고딕" pitchFamily="34" charset="-120"/>
               </a:rPr>
               <a:t>1. 해결하고자 하는 문제 — 왜 만들었는가?</a:t>
             </a:r>
-            <a:endParaRPr lang="en-US" sz="1000" dirty="0"/>
+            <a:endParaRPr lang="en-US" sz="1050" dirty="0"/>
           </a:p>
         </p:txBody>
       </p:sp>
@@ -4264,7 +4288,7 @@
         </p:nvSpPr>
         <p:spPr>
           <a:xfrm>
-            <a:off x="457200" y="777240"/>
+            <a:off x="457200" y="786384"/>
             <a:ext cx="11274552" cy="502920"/>
           </a:xfrm>
           <a:prstGeom prst="rect">
@@ -4281,17 +4305,17 @@
               <a:buNone/>
             </a:pPr>
             <a:r>
-              <a:rPr lang="en-US" sz="2400" b="1" dirty="0">
-                <a:solidFill>
-                  <a:srgbClr val="F8FAFC"/>
-                </a:solidFill>
-                <a:latin typeface="Pretendard" pitchFamily="34" charset="0"/>
-                <a:ea typeface="Pretendard" pitchFamily="34" charset="-122"/>
-                <a:cs typeface="Pretendard" pitchFamily="34" charset="-120"/>
+              <a:rPr lang="en-US" sz="2200" b="1" dirty="0">
+                <a:solidFill>
+                  <a:srgbClr val="F8FAFC"/>
+                </a:solidFill>
+                <a:latin typeface="맑은 고딕" pitchFamily="34" charset="0"/>
+                <a:ea typeface="맑은 고딕" pitchFamily="34" charset="-122"/>
+                <a:cs typeface="맑은 고딕" pitchFamily="34" charset="-120"/>
               </a:rPr>
               <a:t>최종 견적을 맞춘 뒤 친구들이 겪은 3가지 실제 고민 사례</a:t>
             </a:r>
-            <a:endParaRPr lang="en-US" sz="2400" dirty="0"/>
+            <a:endParaRPr lang="en-US" sz="2200" dirty="0"/>
           </a:p>
         </p:txBody>
       </p:sp>
@@ -4347,13 +4371,13 @@
             <a:r>
               <a:rPr lang="en-US" sz="950" dirty="0">
                 <a:solidFill>
-                  <a:srgbClr val="64748B"/>
-                </a:solidFill>
-                <a:latin typeface="Pretendard" pitchFamily="34" charset="0"/>
-                <a:ea typeface="Pretendard" pitchFamily="34" charset="-122"/>
-                <a:cs typeface="Pretendard" pitchFamily="34" charset="-120"/>
-              </a:rPr>
-              <a:t>PC-FIT 2.0 : AI 부품·가격 비교 &amp; 가성비 어드바이저</a:t>
+                  <a:srgbClr val="94A3B8"/>
+                </a:solidFill>
+                <a:latin typeface="맑은 고딕" pitchFamily="34" charset="0"/>
+                <a:ea typeface="맑은 고딕" pitchFamily="34" charset="-122"/>
+                <a:cs typeface="맑은 고딕" pitchFamily="34" charset="-120"/>
+              </a:rPr>
+              <a:t>PC-FIT 2.0 : AI 부품·가격 비교 및 가성비 어드바이저</a:t>
             </a:r>
             <a:endParaRPr lang="en-US" sz="950" dirty="0"/>
           </a:p>
@@ -4388,9 +4412,9 @@
                 <a:solidFill>
                   <a:srgbClr val="00F3FF"/>
                 </a:solidFill>
-                <a:latin typeface="Consolas" pitchFamily="34" charset="0"/>
-                <a:ea typeface="Consolas" pitchFamily="34" charset="-122"/>
-                <a:cs typeface="Consolas" pitchFamily="34" charset="-120"/>
+                <a:latin typeface="맑은 고딕" pitchFamily="34" charset="0"/>
+                <a:ea typeface="맑은 고딕" pitchFamily="34" charset="-122"/>
+                <a:cs typeface="맑은 고딕" pitchFamily="34" charset="-120"/>
               </a:rPr>
               <a:t>SLIDE 03 / 09</a:t>
             </a:r>
@@ -4454,11 +4478,11 @@
                 <a:solidFill>
                   <a:srgbClr val="FF5CA8"/>
                 </a:solidFill>
-                <a:latin typeface="Pretendard" pitchFamily="34" charset="0"/>
-                <a:ea typeface="Pretendard" pitchFamily="34" charset="-122"/>
-                <a:cs typeface="Pretendard" pitchFamily="34" charset="-120"/>
-              </a:rPr>
-              <a:t>사례 01 · 내 친구의 실제 고민 🎮</a:t>
+                <a:latin typeface="맑은 고딕" pitchFamily="34" charset="0"/>
+                <a:ea typeface="맑은 고딕" pitchFamily="34" charset="-122"/>
+                <a:cs typeface="맑은 고딕" pitchFamily="34" charset="-120"/>
+              </a:rPr>
+              <a:t>[사례 01] 내 친구의 그래픽카드 고민</a:t>
             </a:r>
             <a:endParaRPr lang="en-US" sz="1050" dirty="0"/>
           </a:p>
@@ -4489,34 +4513,34 @@
               <a:buNone/>
             </a:pPr>
             <a:r>
-              <a:rPr lang="en-US" sz="1600" b="1" dirty="0">
-                <a:solidFill>
-                  <a:srgbClr val="F8FAFC"/>
-                </a:solidFill>
-                <a:latin typeface="Pretendard" pitchFamily="34" charset="0"/>
-                <a:ea typeface="Pretendard" pitchFamily="34" charset="-122"/>
-                <a:cs typeface="Pretendard" pitchFamily="34" charset="-120"/>
+              <a:rPr lang="en-US" sz="1550" b="1" dirty="0">
+                <a:solidFill>
+                  <a:srgbClr val="F8FAFC"/>
+                </a:solidFill>
+                <a:latin typeface="맑은 고딕" pitchFamily="34" charset="0"/>
+                <a:ea typeface="맑은 고딕" pitchFamily="34" charset="-122"/>
+                <a:cs typeface="맑은 고딕" pitchFamily="34" charset="-120"/>
               </a:rPr>
               <a:t>"견적 다 짰는데</a:t>
             </a:r>
-            <a:endParaRPr lang="en-US" sz="1600" dirty="0"/>
-          </a:p>
-          <a:p>
-            <a:pPr indent="0" marL="0">
-              <a:buNone/>
-            </a:pPr>
-            <a:r>
-              <a:rPr lang="en-US" sz="1600" b="1" dirty="0">
-                <a:solidFill>
-                  <a:srgbClr val="F8FAFC"/>
-                </a:solidFill>
-                <a:latin typeface="Pretendard" pitchFamily="34" charset="0"/>
-                <a:ea typeface="Pretendard" pitchFamily="34" charset="-122"/>
-                <a:cs typeface="Pretendard" pitchFamily="34" charset="-120"/>
+            <a:endParaRPr lang="en-US" sz="1550" dirty="0"/>
+          </a:p>
+          <a:p>
+            <a:pPr indent="0" marL="0">
+              <a:buNone/>
+            </a:pPr>
+            <a:r>
+              <a:rPr lang="en-US" sz="1550" b="1" dirty="0">
+                <a:solidFill>
+                  <a:srgbClr val="F8FAFC"/>
+                </a:solidFill>
+                <a:latin typeface="맑은 고딕" pitchFamily="34" charset="0"/>
+                <a:ea typeface="맑은 고딕" pitchFamily="34" charset="-122"/>
+                <a:cs typeface="맑은 고딕" pitchFamily="34" charset="-120"/>
               </a:rPr>
               <a:t>5070 살까, 5070 Ti 살까?"</a:t>
             </a:r>
-            <a:endParaRPr lang="en-US" sz="1600" dirty="0"/>
+            <a:endParaRPr lang="en-US" sz="1550" dirty="0"/>
           </a:p>
         </p:txBody>
       </p:sp>
@@ -4572,51 +4596,51 @@
               <a:buNone/>
             </a:pPr>
             <a:r>
-              <a:rPr lang="en-US" sz="1150" b="1" dirty="0">
-                <a:solidFill>
-                  <a:srgbClr val="F8FAFC"/>
-                </a:solidFill>
-                <a:latin typeface="Pretendard" pitchFamily="34" charset="0"/>
-                <a:ea typeface="Pretendard" pitchFamily="34" charset="-122"/>
-                <a:cs typeface="Pretendard" pitchFamily="34" charset="-120"/>
+              <a:rPr lang="en-US" sz="1100" b="1" dirty="0">
+                <a:solidFill>
+                  <a:srgbClr val="F8FAFC"/>
+                </a:solidFill>
+                <a:latin typeface="맑은 고딕" pitchFamily="34" charset="0"/>
+                <a:ea typeface="맑은 고딕" pitchFamily="34" charset="-122"/>
+                <a:cs typeface="맑은 고딕" pitchFamily="34" charset="-120"/>
               </a:rPr>
               <a:t>RTX 5070</a:t>
             </a:r>
-            <a:endParaRPr lang="en-US" sz="1150" dirty="0"/>
+            <a:endParaRPr lang="en-US" sz="1100" dirty="0"/>
           </a:p>
           <a:p>
             <a:pPr algn="ctr" indent="0" marL="0">
               <a:buNone/>
             </a:pPr>
             <a:r>
-              <a:rPr lang="en-US" sz="1150" b="1" dirty="0">
-                <a:solidFill>
-                  <a:srgbClr val="F8FAFC"/>
-                </a:solidFill>
-                <a:latin typeface="Pretendard" pitchFamily="34" charset="0"/>
-                <a:ea typeface="Pretendard" pitchFamily="34" charset="-122"/>
-                <a:cs typeface="Pretendard" pitchFamily="34" charset="-120"/>
+              <a:rPr lang="en-US" sz="1100" b="1" dirty="0">
+                <a:solidFill>
+                  <a:srgbClr val="F8FAFC"/>
+                </a:solidFill>
+                <a:latin typeface="맑은 고딕" pitchFamily="34" charset="0"/>
+                <a:ea typeface="맑은 고딕" pitchFamily="34" charset="-122"/>
+                <a:cs typeface="맑은 고딕" pitchFamily="34" charset="-120"/>
               </a:rPr>
               <a:t>(VRAM 12GB)   VS   RTX 5070 Ti</a:t>
             </a:r>
-            <a:endParaRPr lang="en-US" sz="1150" dirty="0"/>
+            <a:endParaRPr lang="en-US" sz="1100" dirty="0"/>
           </a:p>
           <a:p>
             <a:pPr algn="ctr" indent="0" marL="0">
               <a:buNone/>
             </a:pPr>
             <a:r>
-              <a:rPr lang="en-US" sz="1150" b="1" dirty="0">
-                <a:solidFill>
-                  <a:srgbClr val="F8FAFC"/>
-                </a:solidFill>
-                <a:latin typeface="Pretendard" pitchFamily="34" charset="0"/>
-                <a:ea typeface="Pretendard" pitchFamily="34" charset="-122"/>
-                <a:cs typeface="Pretendard" pitchFamily="34" charset="-120"/>
+              <a:rPr lang="en-US" sz="1100" b="1" dirty="0">
+                <a:solidFill>
+                  <a:srgbClr val="F8FAFC"/>
+                </a:solidFill>
+                <a:latin typeface="맑은 고딕" pitchFamily="34" charset="0"/>
+                <a:ea typeface="맑은 고딕" pitchFamily="34" charset="-122"/>
+                <a:cs typeface="맑은 고딕" pitchFamily="34" charset="-120"/>
               </a:rPr>
               <a:t>(VRAM 16GB)</a:t>
             </a:r>
-            <a:endParaRPr lang="en-US" sz="1150" dirty="0"/>
+            <a:endParaRPr lang="en-US" sz="1100" dirty="0"/>
           </a:p>
         </p:txBody>
       </p:sp>
@@ -4678,11 +4702,11 @@
                 <a:solidFill>
                   <a:srgbClr val="FF5CA8"/>
                 </a:solidFill>
-                <a:latin typeface="Pretendard" pitchFamily="34" charset="0"/>
-                <a:ea typeface="Pretendard" pitchFamily="34" charset="-122"/>
-                <a:cs typeface="Pretendard" pitchFamily="34" charset="-120"/>
-              </a:rPr>
-              <a:t>💸 가격 차이 최대 +60만 원!</a:t>
+                <a:latin typeface="맑은 고딕" pitchFamily="34" charset="0"/>
+                <a:ea typeface="맑은 고딕" pitchFamily="34" charset="-122"/>
+                <a:cs typeface="맑은 고딕" pitchFamily="34" charset="-120"/>
+              </a:rPr>
+              <a:t>가격 차이 약 40~60만 원!</a:t>
             </a:r>
             <a:endParaRPr lang="en-US" sz="1100" dirty="0"/>
           </a:p>
@@ -4740,17 +4764,17 @@
               <a:buNone/>
             </a:pPr>
             <a:r>
-              <a:rPr lang="en-US" sz="1150" dirty="0">
+              <a:rPr lang="en-US" sz="1100" dirty="0">
                 <a:solidFill>
                   <a:srgbClr val="CBD5E1"/>
                 </a:solidFill>
-                <a:latin typeface="Pretendard" pitchFamily="34" charset="0"/>
-                <a:ea typeface="Pretendard" pitchFamily="34" charset="-122"/>
-                <a:cs typeface="Pretendard" pitchFamily="34" charset="-120"/>
-              </a:rPr>
-              <a:t>"성능 차이 나는 건 알겠는데, 지금 내가 할 게임과 앞으로 할 게임에 60만 원이나 더 주고 사야 하나?"</a:t>
-            </a:r>
-            <a:endParaRPr lang="en-US" sz="1150" dirty="0"/>
+                <a:latin typeface="맑은 고딕" pitchFamily="34" charset="0"/>
+                <a:ea typeface="맑은 고딕" pitchFamily="34" charset="-122"/>
+                <a:cs typeface="맑은 고딕" pitchFamily="34" charset="-120"/>
+              </a:rPr>
+              <a:t>"성능 차이 나는 건 알겠는데, 지금 내가 할 게임과 앞으로 할 게임에 이 돈을 더 주고 사야 하나?"</a:t>
+            </a:r>
+            <a:endParaRPr lang="en-US" sz="1100" dirty="0"/>
           </a:p>
         </p:txBody>
       </p:sp>
@@ -4810,11 +4834,11 @@
                 <a:solidFill>
                   <a:srgbClr val="00F3FF"/>
                 </a:solidFill>
-                <a:latin typeface="Pretendard" pitchFamily="34" charset="0"/>
-                <a:ea typeface="Pretendard" pitchFamily="34" charset="-122"/>
-                <a:cs typeface="Pretendard" pitchFamily="34" charset="-120"/>
-              </a:rPr>
-              <a:t>사례 02 · CPU 게이밍 체감 고민 🧠</a:t>
+                <a:latin typeface="맑은 고딕" pitchFamily="34" charset="0"/>
+                <a:ea typeface="맑은 고딕" pitchFamily="34" charset="-122"/>
+                <a:cs typeface="맑은 고딕" pitchFamily="34" charset="-120"/>
+              </a:rPr>
+              <a:t>[사례 02] CPU 게이밍 체감 고민</a:t>
             </a:r>
             <a:endParaRPr lang="en-US" sz="1050" dirty="0"/>
           </a:p>
@@ -4845,34 +4869,34 @@
               <a:buNone/>
             </a:pPr>
             <a:r>
-              <a:rPr lang="en-US" sz="1600" b="1" dirty="0">
-                <a:solidFill>
-                  <a:srgbClr val="F8FAFC"/>
-                </a:solidFill>
-                <a:latin typeface="Pretendard" pitchFamily="34" charset="0"/>
-                <a:ea typeface="Pretendard" pitchFamily="34" charset="-122"/>
-                <a:cs typeface="Pretendard" pitchFamily="34" charset="-120"/>
+              <a:rPr lang="en-US" sz="1550" b="1" dirty="0">
+                <a:solidFill>
+                  <a:srgbClr val="F8FAFC"/>
+                </a:solidFill>
+                <a:latin typeface="맑은 고딕" pitchFamily="34" charset="0"/>
+                <a:ea typeface="맑은 고딕" pitchFamily="34" charset="-122"/>
+                <a:cs typeface="맑은 고딕" pitchFamily="34" charset="-120"/>
               </a:rPr>
               <a:t>"유튜브에선 무조건 가라는데</a:t>
             </a:r>
-            <a:endParaRPr lang="en-US" sz="1600" dirty="0"/>
-          </a:p>
-          <a:p>
-            <a:pPr indent="0" marL="0">
-              <a:buNone/>
-            </a:pPr>
-            <a:r>
-              <a:rPr lang="en-US" sz="1600" b="1" dirty="0">
-                <a:solidFill>
-                  <a:srgbClr val="F8FAFC"/>
-                </a:solidFill>
-                <a:latin typeface="Pretendard" pitchFamily="34" charset="0"/>
-                <a:ea typeface="Pretendard" pitchFamily="34" charset="-122"/>
-                <a:cs typeface="Pretendard" pitchFamily="34" charset="-120"/>
+            <a:endParaRPr lang="en-US" sz="1550" dirty="0"/>
+          </a:p>
+          <a:p>
+            <a:pPr indent="0" marL="0">
+              <a:buNone/>
+            </a:pPr>
+            <a:r>
+              <a:rPr lang="en-US" sz="1550" b="1" dirty="0">
+                <a:solidFill>
+                  <a:srgbClr val="F8FAFC"/>
+                </a:solidFill>
+                <a:latin typeface="맑은 고딕" pitchFamily="34" charset="0"/>
+                <a:ea typeface="맑은 고딕" pitchFamily="34" charset="-122"/>
+                <a:cs typeface="맑은 고딕" pitchFamily="34" charset="-120"/>
               </a:rPr>
               <a:t>35만 원 값어치를 할까?"</a:t>
             </a:r>
-            <a:endParaRPr lang="en-US" sz="1600" dirty="0"/>
+            <a:endParaRPr lang="en-US" sz="1550" dirty="0"/>
           </a:p>
         </p:txBody>
       </p:sp>
@@ -4928,51 +4952,51 @@
               <a:buNone/>
             </a:pPr>
             <a:r>
-              <a:rPr lang="en-US" sz="1150" b="1" dirty="0">
-                <a:solidFill>
-                  <a:srgbClr val="F8FAFC"/>
-                </a:solidFill>
-                <a:latin typeface="Pretendard" pitchFamily="34" charset="0"/>
-                <a:ea typeface="Pretendard" pitchFamily="34" charset="-122"/>
-                <a:cs typeface="Pretendard" pitchFamily="34" charset="-120"/>
+              <a:rPr lang="en-US" sz="1100" b="1" dirty="0">
+                <a:solidFill>
+                  <a:srgbClr val="F8FAFC"/>
+                </a:solidFill>
+                <a:latin typeface="맑은 고딕" pitchFamily="34" charset="0"/>
+                <a:ea typeface="맑은 고딕" pitchFamily="34" charset="-122"/>
+                <a:cs typeface="맑은 고딕" pitchFamily="34" charset="-120"/>
               </a:rPr>
               <a:t>라이젠 7500F</a:t>
             </a:r>
-            <a:endParaRPr lang="en-US" sz="1150" dirty="0"/>
+            <a:endParaRPr lang="en-US" sz="1100" dirty="0"/>
           </a:p>
           <a:p>
             <a:pPr algn="ctr" indent="0" marL="0">
               <a:buNone/>
             </a:pPr>
             <a:r>
-              <a:rPr lang="en-US" sz="1150" b="1" dirty="0">
-                <a:solidFill>
-                  <a:srgbClr val="F8FAFC"/>
-                </a:solidFill>
-                <a:latin typeface="Pretendard" pitchFamily="34" charset="0"/>
-                <a:ea typeface="Pretendard" pitchFamily="34" charset="-122"/>
-                <a:cs typeface="Pretendard" pitchFamily="34" charset="-120"/>
+              <a:rPr lang="en-US" sz="1100" b="1" dirty="0">
+                <a:solidFill>
+                  <a:srgbClr val="F8FAFC"/>
+                </a:solidFill>
+                <a:latin typeface="맑은 고딕" pitchFamily="34" charset="0"/>
+                <a:ea typeface="맑은 고딕" pitchFamily="34" charset="-122"/>
+                <a:cs typeface="맑은 고딕" pitchFamily="34" charset="-120"/>
               </a:rPr>
               <a:t>(약 21만 원)   VS   7800X3D</a:t>
             </a:r>
-            <a:endParaRPr lang="en-US" sz="1150" dirty="0"/>
+            <a:endParaRPr lang="en-US" sz="1100" dirty="0"/>
           </a:p>
           <a:p>
             <a:pPr algn="ctr" indent="0" marL="0">
               <a:buNone/>
             </a:pPr>
             <a:r>
-              <a:rPr lang="en-US" sz="1150" b="1" dirty="0">
-                <a:solidFill>
-                  <a:srgbClr val="F8FAFC"/>
-                </a:solidFill>
-                <a:latin typeface="Pretendard" pitchFamily="34" charset="0"/>
-                <a:ea typeface="Pretendard" pitchFamily="34" charset="-122"/>
-                <a:cs typeface="Pretendard" pitchFamily="34" charset="-120"/>
+              <a:rPr lang="en-US" sz="1100" b="1" dirty="0">
+                <a:solidFill>
+                  <a:srgbClr val="F8FAFC"/>
+                </a:solidFill>
+                <a:latin typeface="맑은 고딕" pitchFamily="34" charset="0"/>
+                <a:ea typeface="맑은 고딕" pitchFamily="34" charset="-122"/>
+                <a:cs typeface="맑은 고딕" pitchFamily="34" charset="-120"/>
               </a:rPr>
               <a:t>(약 56만 원)</a:t>
             </a:r>
-            <a:endParaRPr lang="en-US" sz="1150" dirty="0"/>
+            <a:endParaRPr lang="en-US" sz="1100" dirty="0"/>
           </a:p>
         </p:txBody>
       </p:sp>
@@ -5034,11 +5058,11 @@
                 <a:solidFill>
                   <a:srgbClr val="00F3FF"/>
                 </a:solidFill>
-                <a:latin typeface="Pretendard" pitchFamily="34" charset="0"/>
-                <a:ea typeface="Pretendard" pitchFamily="34" charset="-122"/>
-                <a:cs typeface="Pretendard" pitchFamily="34" charset="-120"/>
-              </a:rPr>
-              <a:t>💸 가격 2.6배 (+35만 원 차이)</a:t>
+                <a:latin typeface="맑은 고딕" pitchFamily="34" charset="0"/>
+                <a:ea typeface="맑은 고딕" pitchFamily="34" charset="-122"/>
+                <a:cs typeface="맑은 고딕" pitchFamily="34" charset="-120"/>
+              </a:rPr>
+              <a:t>가격 2.6배 (+35만 원 차이)</a:t>
             </a:r>
             <a:endParaRPr lang="en-US" sz="1100" dirty="0"/>
           </a:p>
@@ -5096,17 +5120,17 @@
               <a:buNone/>
             </a:pPr>
             <a:r>
-              <a:rPr lang="en-US" sz="1150" dirty="0">
+              <a:rPr lang="en-US" sz="1100" dirty="0">
                 <a:solidFill>
                   <a:srgbClr val="CBD5E1"/>
                 </a:solidFill>
-                <a:latin typeface="Pretendard" pitchFamily="34" charset="0"/>
-                <a:ea typeface="Pretendard" pitchFamily="34" charset="-122"/>
-                <a:cs typeface="Pretendard" pitchFamily="34" charset="-120"/>
+                <a:latin typeface="맑은 고딕" pitchFamily="34" charset="0"/>
+                <a:ea typeface="맑은 고딕" pitchFamily="34" charset="-122"/>
+                <a:cs typeface="맑은 고딕" pitchFamily="34" charset="-120"/>
               </a:rPr>
               <a:t>"35만 원 더 쓰면 내 모니터(QHD)에서 실제 프레임(FPS)이 몇이나 오르길래? 글카에 보태는 게 낫지 않나?"</a:t>
             </a:r>
-            <a:endParaRPr lang="en-US" sz="1150" dirty="0"/>
+            <a:endParaRPr lang="en-US" sz="1100" dirty="0"/>
           </a:p>
         </p:txBody>
       </p:sp>
@@ -5166,11 +5190,11 @@
                 <a:solidFill>
                   <a:srgbClr val="D97BFF"/>
                 </a:solidFill>
-                <a:latin typeface="Pretendard" pitchFamily="34" charset="0"/>
-                <a:ea typeface="Pretendard" pitchFamily="34" charset="-122"/>
-                <a:cs typeface="Pretendard" pitchFamily="34" charset="-120"/>
-              </a:rPr>
-              <a:t>사례 03 · 예산 초과 다이어트 고민 ⚖️</a:t>
+                <a:latin typeface="맑은 고딕" pitchFamily="34" charset="0"/>
+                <a:ea typeface="맑은 고딕" pitchFamily="34" charset="-122"/>
+                <a:cs typeface="맑은 고딕" pitchFamily="34" charset="-120"/>
+              </a:rPr>
+              <a:t>[사례 03] 예산 초과 다이어트 고민</a:t>
             </a:r>
             <a:endParaRPr lang="en-US" sz="1050" dirty="0"/>
           </a:p>
@@ -5201,34 +5225,34 @@
               <a:buNone/>
             </a:pPr>
             <a:r>
-              <a:rPr lang="en-US" sz="1600" b="1" dirty="0">
-                <a:solidFill>
-                  <a:srgbClr val="F8FAFC"/>
-                </a:solidFill>
-                <a:latin typeface="Pretendard" pitchFamily="34" charset="0"/>
-                <a:ea typeface="Pretendard" pitchFamily="34" charset="-122"/>
-                <a:cs typeface="Pretendard" pitchFamily="34" charset="-120"/>
+              <a:rPr lang="en-US" sz="1550" b="1" dirty="0">
+                <a:solidFill>
+                  <a:srgbClr val="F8FAFC"/>
+                </a:solidFill>
+                <a:latin typeface="맑은 고딕" pitchFamily="34" charset="0"/>
+                <a:ea typeface="맑은 고딕" pitchFamily="34" charset="-122"/>
+                <a:cs typeface="맑은 고딕" pitchFamily="34" charset="-120"/>
               </a:rPr>
               <a:t>"예산보다 20만 원 넘었는데</a:t>
             </a:r>
-            <a:endParaRPr lang="en-US" sz="1600" dirty="0"/>
-          </a:p>
-          <a:p>
-            <a:pPr indent="0" marL="0">
-              <a:buNone/>
-            </a:pPr>
-            <a:r>
-              <a:rPr lang="en-US" sz="1600" b="1" dirty="0">
-                <a:solidFill>
-                  <a:srgbClr val="F8FAFC"/>
-                </a:solidFill>
-                <a:latin typeface="Pretendard" pitchFamily="34" charset="0"/>
-                <a:ea typeface="Pretendard" pitchFamily="34" charset="-122"/>
-                <a:cs typeface="Pretendard" pitchFamily="34" charset="-120"/>
+            <a:endParaRPr lang="en-US" sz="1550" dirty="0"/>
+          </a:p>
+          <a:p>
+            <a:pPr indent="0" marL="0">
+              <a:buNone/>
+            </a:pPr>
+            <a:r>
+              <a:rPr lang="en-US" sz="1550" b="1" dirty="0">
+                <a:solidFill>
+                  <a:srgbClr val="F8FAFC"/>
+                </a:solidFill>
+                <a:latin typeface="맑은 고딕" pitchFamily="34" charset="0"/>
+                <a:ea typeface="맑은 고딕" pitchFamily="34" charset="-122"/>
+                <a:cs typeface="맑은 고딕" pitchFamily="34" charset="-120"/>
               </a:rPr>
               <a:t>어디를 낮춰야 손해가 적을까?"</a:t>
             </a:r>
-            <a:endParaRPr lang="en-US" sz="1600" dirty="0"/>
+            <a:endParaRPr lang="en-US" sz="1550" dirty="0"/>
           </a:p>
         </p:txBody>
       </p:sp>
@@ -5284,51 +5308,51 @@
               <a:buNone/>
             </a:pPr>
             <a:r>
-              <a:rPr lang="en-US" sz="1150" b="1" dirty="0">
-                <a:solidFill>
-                  <a:srgbClr val="F8FAFC"/>
-                </a:solidFill>
-                <a:latin typeface="Pretendard" pitchFamily="34" charset="0"/>
-                <a:ea typeface="Pretendard" pitchFamily="34" charset="-122"/>
-                <a:cs typeface="Pretendard" pitchFamily="34" charset="-120"/>
-              </a:rPr>
-              <a:t>GPU 한 단계</a:t>
-            </a:r>
-            <a:endParaRPr lang="en-US" sz="1150" dirty="0"/>
+              <a:rPr lang="en-US" sz="1100" b="1" dirty="0">
+                <a:solidFill>
+                  <a:srgbClr val="F8FAFC"/>
+                </a:solidFill>
+                <a:latin typeface="맑은 고딕" pitchFamily="34" charset="0"/>
+                <a:ea typeface="맑은 고딕" pitchFamily="34" charset="-122"/>
+                <a:cs typeface="맑은 고딕" pitchFamily="34" charset="-120"/>
+              </a:rPr>
+              <a:t>그래픽카드</a:t>
+            </a:r>
+            <a:endParaRPr lang="en-US" sz="1100" dirty="0"/>
           </a:p>
           <a:p>
             <a:pPr algn="ctr" indent="0" marL="0">
               <a:buNone/>
             </a:pPr>
             <a:r>
-              <a:rPr lang="en-US" sz="1150" b="1" dirty="0">
-                <a:solidFill>
-                  <a:srgbClr val="F8FAFC"/>
-                </a:solidFill>
-                <a:latin typeface="Pretendard" pitchFamily="34" charset="0"/>
-                <a:ea typeface="Pretendard" pitchFamily="34" charset="-122"/>
-                <a:cs typeface="Pretendard" pitchFamily="34" charset="-120"/>
-              </a:rPr>
-              <a:t>낮추기   VS   CPU·메인보드</a:t>
-            </a:r>
-            <a:endParaRPr lang="en-US" sz="1150" dirty="0"/>
+              <a:rPr lang="en-US" sz="1100" b="1" dirty="0">
+                <a:solidFill>
+                  <a:srgbClr val="F8FAFC"/>
+                </a:solidFill>
+                <a:latin typeface="맑은 고딕" pitchFamily="34" charset="0"/>
+                <a:ea typeface="맑은 고딕" pitchFamily="34" charset="-122"/>
+                <a:cs typeface="맑은 고딕" pitchFamily="34" charset="-120"/>
+              </a:rPr>
+              <a:t>한 단계 낮추기   VS   CPU·메인보드</a:t>
+            </a:r>
+            <a:endParaRPr lang="en-US" sz="1100" dirty="0"/>
           </a:p>
           <a:p>
             <a:pPr algn="ctr" indent="0" marL="0">
               <a:buNone/>
             </a:pPr>
             <a:r>
-              <a:rPr lang="en-US" sz="1150" b="1" dirty="0">
-                <a:solidFill>
-                  <a:srgbClr val="F8FAFC"/>
-                </a:solidFill>
-                <a:latin typeface="Pretendard" pitchFamily="34" charset="0"/>
-                <a:ea typeface="Pretendard" pitchFamily="34" charset="-122"/>
-                <a:cs typeface="Pretendard" pitchFamily="34" charset="-120"/>
+              <a:rPr lang="en-US" sz="1100" b="1" dirty="0">
+                <a:solidFill>
+                  <a:srgbClr val="F8FAFC"/>
+                </a:solidFill>
+                <a:latin typeface="맑은 고딕" pitchFamily="34" charset="0"/>
+                <a:ea typeface="맑은 고딕" pitchFamily="34" charset="-122"/>
+                <a:cs typeface="맑은 고딕" pitchFamily="34" charset="-120"/>
               </a:rPr>
               <a:t>낮추기</a:t>
             </a:r>
-            <a:endParaRPr lang="en-US" sz="1150" dirty="0"/>
+            <a:endParaRPr lang="en-US" sz="1100" dirty="0"/>
           </a:p>
         </p:txBody>
       </p:sp>
@@ -5390,11 +5414,11 @@
                 <a:solidFill>
                   <a:srgbClr val="D97BFF"/>
                 </a:solidFill>
-                <a:latin typeface="Pretendard" pitchFamily="34" charset="0"/>
-                <a:ea typeface="Pretendard" pitchFamily="34" charset="-122"/>
-                <a:cs typeface="Pretendard" pitchFamily="34" charset="-120"/>
-              </a:rPr>
-              <a:t>❓ 프레임 손실 최소 조합은?</a:t>
+                <a:latin typeface="맑은 고딕" pitchFamily="34" charset="0"/>
+                <a:ea typeface="맑은 고딕" pitchFamily="34" charset="-122"/>
+                <a:cs typeface="맑은 고딕" pitchFamily="34" charset="-120"/>
+              </a:rPr>
+              <a:t>프레임 손실 최소 조합은?</a:t>
             </a:r>
             <a:endParaRPr lang="en-US" sz="1100" dirty="0"/>
           </a:p>
@@ -5452,17 +5476,17 @@
               <a:buNone/>
             </a:pPr>
             <a:r>
-              <a:rPr lang="en-US" sz="1150" dirty="0">
+              <a:rPr lang="en-US" sz="1100" dirty="0">
                 <a:solidFill>
                   <a:srgbClr val="CBD5E1"/>
                 </a:solidFill>
-                <a:latin typeface="Pretendard" pitchFamily="34" charset="0"/>
-                <a:ea typeface="Pretendard" pitchFamily="34" charset="-122"/>
-                <a:cs typeface="Pretendard" pitchFamily="34" charset="-120"/>
-              </a:rPr>
-              <a:t>"20만 원을 아끼고 싶은데, CPU를 낮추는 게 나을지 그래픽카드를 낮추는 게 유리할지 누가 수치로 알려주면 좋겠다!"</a:t>
-            </a:r>
-            <a:endParaRPr lang="en-US" sz="1150" dirty="0"/>
+                <a:latin typeface="맑은 고딕" pitchFamily="34" charset="0"/>
+                <a:ea typeface="맑은 고딕" pitchFamily="34" charset="-122"/>
+                <a:cs typeface="맑은 고딕" pitchFamily="34" charset="-120"/>
+              </a:rPr>
+              <a:t>"20만 원을 아끼고 싶은데, CPU를 낮추는 게 나을지 그래픽카드를 낮추는 게 유리할지 수치로 보고 싶다!"</a:t>
+            </a:r>
+            <a:endParaRPr lang="en-US" sz="1100" dirty="0"/>
           </a:p>
         </p:txBody>
       </p:sp>
@@ -5507,14 +5531,14 @@
         <p:spPr>
           <a:xfrm>
             <a:off x="457200" y="228600"/>
-            <a:ext cx="11274552" cy="27432"/>
+            <a:ext cx="11274552" cy="36576"/>
           </a:xfrm>
           <a:prstGeom prst="rect">
             <a:avLst/>
           </a:prstGeom>
           <a:solidFill>
             <a:srgbClr val="00F3FF">
-              <a:alpha val="30000"/>
+              <a:alpha val="40000"/>
             </a:srgbClr>
           </a:solidFill>
           <a:ln w="12700">
@@ -5536,7 +5560,7 @@
         <p:spPr>
           <a:xfrm>
             <a:off x="457200" y="384048"/>
-            <a:ext cx="3474720" cy="310896"/>
+            <a:ext cx="3840480" cy="329184"/>
           </a:xfrm>
           <a:prstGeom prst="roundRect">
             <a:avLst>
@@ -5565,7 +5589,7 @@
         <p:spPr>
           <a:xfrm>
             <a:off x="457200" y="384048"/>
-            <a:ext cx="3474720" cy="310896"/>
+            <a:ext cx="3840480" cy="329184"/>
           </a:xfrm>
           <a:prstGeom prst="rect">
             <a:avLst/>
@@ -5581,17 +5605,17 @@
               <a:buNone/>
             </a:pPr>
             <a:r>
-              <a:rPr lang="en-US" sz="1000" b="1" dirty="0">
+              <a:rPr lang="en-US" sz="1050" b="1" dirty="0">
                 <a:solidFill>
                   <a:srgbClr val="FF5CA8"/>
                 </a:solidFill>
-                <a:latin typeface="Pretendard" pitchFamily="34" charset="0"/>
-                <a:ea typeface="Pretendard" pitchFamily="34" charset="-122"/>
-                <a:cs typeface="Pretendard" pitchFamily="34" charset="-120"/>
-              </a:rPr>
-              <a:t>1. 해결하고자 하는 문제 — UX 병목 해결</a:t>
-            </a:r>
-            <a:endParaRPr lang="en-US" sz="1000" dirty="0"/>
+                <a:latin typeface="맑은 고딕" pitchFamily="34" charset="0"/>
+                <a:ea typeface="맑은 고딕" pitchFamily="34" charset="-122"/>
+                <a:cs typeface="맑은 고딕" pitchFamily="34" charset="-120"/>
+              </a:rPr>
+              <a:t>1. 해결하고자 하는 문제 — 검색 피로도 해결</a:t>
+            </a:r>
+            <a:endParaRPr lang="en-US" sz="1050" dirty="0"/>
           </a:p>
         </p:txBody>
       </p:sp>
@@ -5603,7 +5627,7 @@
         </p:nvSpPr>
         <p:spPr>
           <a:xfrm>
-            <a:off x="457200" y="777240"/>
+            <a:off x="457200" y="786384"/>
             <a:ext cx="11274552" cy="502920"/>
           </a:xfrm>
           <a:prstGeom prst="rect">
@@ -5620,17 +5644,17 @@
               <a:buNone/>
             </a:pPr>
             <a:r>
-              <a:rPr lang="en-US" sz="2400" b="1" dirty="0">
-                <a:solidFill>
-                  <a:srgbClr val="F8FAFC"/>
-                </a:solidFill>
-                <a:latin typeface="Pretendard" pitchFamily="34" charset="0"/>
-                <a:ea typeface="Pretendard" pitchFamily="34" charset="-122"/>
-                <a:cs typeface="Pretendard" pitchFamily="34" charset="-120"/>
-              </a:rPr>
-              <a:t>부품 하나 비교하려고 4군데 사이트를 헤매던 3시간을 단 3초로!</a:t>
-            </a:r>
-            <a:endParaRPr lang="en-US" sz="2400" dirty="0"/>
+              <a:rPr lang="en-US" sz="2200" b="1" dirty="0">
+                <a:solidFill>
+                  <a:srgbClr val="F8FAFC"/>
+                </a:solidFill>
+                <a:latin typeface="맑은 고딕" pitchFamily="34" charset="0"/>
+                <a:ea typeface="맑은 고딕" pitchFamily="34" charset="-122"/>
+                <a:cs typeface="맑은 고딕" pitchFamily="34" charset="-120"/>
+              </a:rPr>
+              <a:t>부품 하나 비교하려고 여러 사이트를 헤매던 과정을 한 화면으로 통합!</a:t>
+            </a:r>
+            <a:endParaRPr lang="en-US" sz="2200" dirty="0"/>
           </a:p>
         </p:txBody>
       </p:sp>
@@ -5686,13 +5710,13 @@
             <a:r>
               <a:rPr lang="en-US" sz="950" dirty="0">
                 <a:solidFill>
-                  <a:srgbClr val="64748B"/>
-                </a:solidFill>
-                <a:latin typeface="Pretendard" pitchFamily="34" charset="0"/>
-                <a:ea typeface="Pretendard" pitchFamily="34" charset="-122"/>
-                <a:cs typeface="Pretendard" pitchFamily="34" charset="-120"/>
-              </a:rPr>
-              <a:t>PC-FIT 2.0 : AI 부품·가격 비교 &amp; 가성비 어드바이저</a:t>
+                  <a:srgbClr val="94A3B8"/>
+                </a:solidFill>
+                <a:latin typeface="맑은 고딕" pitchFamily="34" charset="0"/>
+                <a:ea typeface="맑은 고딕" pitchFamily="34" charset="-122"/>
+                <a:cs typeface="맑은 고딕" pitchFamily="34" charset="-120"/>
+              </a:rPr>
+              <a:t>PC-FIT 2.0 : AI 부품·가격 비교 및 가성비 어드바이저</a:t>
             </a:r>
             <a:endParaRPr lang="en-US" sz="950" dirty="0"/>
           </a:p>
@@ -5727,9 +5751,9 @@
                 <a:solidFill>
                   <a:srgbClr val="00F3FF"/>
                 </a:solidFill>
-                <a:latin typeface="Consolas" pitchFamily="34" charset="0"/>
-                <a:ea typeface="Consolas" pitchFamily="34" charset="-122"/>
-                <a:cs typeface="Consolas" pitchFamily="34" charset="-120"/>
+                <a:latin typeface="맑은 고딕" pitchFamily="34" charset="0"/>
+                <a:ea typeface="맑은 고딕" pitchFamily="34" charset="-122"/>
+                <a:cs typeface="맑은 고딕" pitchFamily="34" charset="-120"/>
               </a:rPr>
               <a:t>SLIDE 04 / 09</a:t>
             </a:r>
@@ -5793,11 +5817,11 @@
                 <a:solidFill>
                   <a:srgbClr val="FF5CA8"/>
                 </a:solidFill>
-                <a:latin typeface="Pretendard" pitchFamily="34" charset="0"/>
-                <a:ea typeface="Pretendard" pitchFamily="34" charset="-122"/>
-                <a:cs typeface="Pretendard" pitchFamily="34" charset="-120"/>
-              </a:rPr>
-              <a:t>BEFORE : 기존 구매자의 4단계 검색 지옥 (평균 3시간+ 소요 😫)</a:t>
+                <a:latin typeface="맑은 고딕" pitchFamily="34" charset="0"/>
+                <a:ea typeface="맑은 고딕" pitchFamily="34" charset="-122"/>
+                <a:cs typeface="맑은 고딕" pitchFamily="34" charset="-120"/>
+              </a:rPr>
+              <a:t>BEFORE : 기존 구매자의 4단계 비교 과정 (수 시간 소요)</a:t>
             </a:r>
             <a:endParaRPr lang="en-US" sz="1250" dirty="0"/>
           </a:p>
@@ -5859,11 +5883,11 @@
                 <a:solidFill>
                   <a:srgbClr val="F8FAFC"/>
                 </a:solidFill>
-                <a:latin typeface="Pretendard" pitchFamily="34" charset="0"/>
-                <a:ea typeface="Pretendard" pitchFamily="34" charset="-122"/>
-                <a:cs typeface="Pretendard" pitchFamily="34" charset="-120"/>
-              </a:rPr>
-              <a:t>📺 1. 유튜브 벤치 검색</a:t>
+                <a:latin typeface="맑은 고딕" pitchFamily="34" charset="0"/>
+                <a:ea typeface="맑은 고딕" pitchFamily="34" charset="-122"/>
+                <a:cs typeface="맑은 고딕" pitchFamily="34" charset="-120"/>
+              </a:rPr>
+              <a:t>[1단계] 유튜브 벤치마크 검색</a:t>
             </a:r>
             <a:endParaRPr lang="en-US" sz="1100" dirty="0"/>
           </a:p>
@@ -5876,11 +5900,11 @@
                 <a:solidFill>
                   <a:srgbClr val="F8FAFC"/>
                 </a:solidFill>
-                <a:latin typeface="Pretendard" pitchFamily="34" charset="0"/>
-                <a:ea typeface="Pretendard" pitchFamily="34" charset="-122"/>
-                <a:cs typeface="Pretendard" pitchFamily="34" charset="-120"/>
-              </a:rPr>
-              <a:t>"5070 vs 5070 Ti FPS"</a:t>
+                <a:latin typeface="맑은 고딕" pitchFamily="34" charset="0"/>
+                <a:ea typeface="맑은 고딕" pitchFamily="34" charset="-122"/>
+                <a:cs typeface="맑은 고딕" pitchFamily="34" charset="-120"/>
+              </a:rPr>
+              <a:t>"5070 vs 5070 Ti 프레임"</a:t>
             </a:r>
             <a:endParaRPr lang="en-US" sz="1100" dirty="0"/>
           </a:p>
@@ -5893,11 +5917,11 @@
                 <a:solidFill>
                   <a:srgbClr val="F8FAFC"/>
                 </a:solidFill>
-                <a:latin typeface="Pretendard" pitchFamily="34" charset="0"/>
-                <a:ea typeface="Pretendard" pitchFamily="34" charset="-122"/>
-                <a:cs typeface="Pretendard" pitchFamily="34" charset="-120"/>
-              </a:rPr>
-              <a:t>20분짜리 해외 영상 일일이 시청</a:t>
+                <a:latin typeface="맑은 고딕" pitchFamily="34" charset="0"/>
+                <a:ea typeface="맑은 고딕" pitchFamily="34" charset="-122"/>
+                <a:cs typeface="맑은 고딕" pitchFamily="34" charset="-120"/>
+              </a:rPr>
+              <a:t>해외 비교 영상을 일일이 찾아 시청</a:t>
             </a:r>
             <a:endParaRPr lang="en-US" sz="1100" dirty="0"/>
           </a:p>
@@ -5959,11 +5983,11 @@
                 <a:solidFill>
                   <a:srgbClr val="F8FAFC"/>
                 </a:solidFill>
-                <a:latin typeface="Pretendard" pitchFamily="34" charset="0"/>
-                <a:ea typeface="Pretendard" pitchFamily="34" charset="-122"/>
-                <a:cs typeface="Pretendard" pitchFamily="34" charset="-120"/>
-              </a:rPr>
-              <a:t>💰 2. 쇼핑몰 가격 검색</a:t>
+                <a:latin typeface="맑은 고딕" pitchFamily="34" charset="0"/>
+                <a:ea typeface="맑은 고딕" pitchFamily="34" charset="-122"/>
+                <a:cs typeface="맑은 고딕" pitchFamily="34" charset="-120"/>
+              </a:rPr>
+              <a:t>[2단계] 쇼핑몰 가격 비교</a:t>
             </a:r>
             <a:endParaRPr lang="en-US" sz="1100" dirty="0"/>
           </a:p>
@@ -5976,11 +6000,11 @@
                 <a:solidFill>
                   <a:srgbClr val="F8FAFC"/>
                 </a:solidFill>
-                <a:latin typeface="Pretendard" pitchFamily="34" charset="0"/>
-                <a:ea typeface="Pretendard" pitchFamily="34" charset="-122"/>
-                <a:cs typeface="Pretendard" pitchFamily="34" charset="-120"/>
-              </a:rPr>
-              <a:t>실구매가 차액 계산기</a:t>
+                <a:latin typeface="맑은 고딕" pitchFamily="34" charset="0"/>
+                <a:ea typeface="맑은 고딕" pitchFamily="34" charset="-122"/>
+                <a:cs typeface="맑은 고딕" pitchFamily="34" charset="-120"/>
+              </a:rPr>
+              <a:t>다나와·네이버에서 두 부품의</a:t>
             </a:r>
             <a:endParaRPr lang="en-US" sz="1100" dirty="0"/>
           </a:p>
@@ -5993,11 +6017,11 @@
                 <a:solidFill>
                   <a:srgbClr val="F8FAFC"/>
                 </a:solidFill>
-                <a:latin typeface="Pretendard" pitchFamily="34" charset="0"/>
-                <a:ea typeface="Pretendard" pitchFamily="34" charset="-122"/>
-                <a:cs typeface="Pretendard" pitchFamily="34" charset="-120"/>
-              </a:rPr>
-              <a:t>모델별 가격 편차 직접 대조</a:t>
+                <a:latin typeface="맑은 고딕" pitchFamily="34" charset="0"/>
+                <a:ea typeface="맑은 고딕" pitchFamily="34" charset="-122"/>
+                <a:cs typeface="맑은 고딕" pitchFamily="34" charset="-120"/>
+              </a:rPr>
+              <a:t>실구매가 차액을 직접 계산</a:t>
             </a:r>
             <a:endParaRPr lang="en-US" sz="1100" dirty="0"/>
           </a:p>
@@ -6059,11 +6083,11 @@
                 <a:solidFill>
                   <a:srgbClr val="F8FAFC"/>
                 </a:solidFill>
-                <a:latin typeface="Pretendard" pitchFamily="34" charset="0"/>
-                <a:ea typeface="Pretendard" pitchFamily="34" charset="-122"/>
-                <a:cs typeface="Pretendard" pitchFamily="34" charset="-120"/>
-              </a:rPr>
-              <a:t>🔌 3. 권장 파워 재확인</a:t>
+                <a:latin typeface="맑은 고딕" pitchFamily="34" charset="0"/>
+                <a:ea typeface="맑은 고딕" pitchFamily="34" charset="-122"/>
+                <a:cs typeface="맑은 고딕" pitchFamily="34" charset="-120"/>
+              </a:rPr>
+              <a:t>[3단계] 권장 파워·스펙 확인</a:t>
             </a:r>
             <a:endParaRPr lang="en-US" sz="1100" dirty="0"/>
           </a:p>
@@ -6076,11 +6100,11 @@
                 <a:solidFill>
                   <a:srgbClr val="F8FAFC"/>
                 </a:solidFill>
-                <a:latin typeface="Pretendard" pitchFamily="34" charset="0"/>
-                <a:ea typeface="Pretendard" pitchFamily="34" charset="-122"/>
-                <a:cs typeface="Pretendard" pitchFamily="34" charset="-120"/>
-              </a:rPr>
-              <a:t>"파워 700W로 될까?"</a:t>
+                <a:latin typeface="맑은 고딕" pitchFamily="34" charset="0"/>
+                <a:ea typeface="맑은 고딕" pitchFamily="34" charset="-122"/>
+                <a:cs typeface="맑은 고딕" pitchFamily="34" charset="-120"/>
+              </a:rPr>
+              <a:t>"파워 용량도 올려야 하나?"</a:t>
             </a:r>
             <a:endParaRPr lang="en-US" sz="1100" dirty="0"/>
           </a:p>
@@ -6093,11 +6117,11 @@
                 <a:solidFill>
                   <a:srgbClr val="F8FAFC"/>
                 </a:solidFill>
-                <a:latin typeface="Pretendard" pitchFamily="34" charset="0"/>
-                <a:ea typeface="Pretendard" pitchFamily="34" charset="-122"/>
-                <a:cs typeface="Pretendard" pitchFamily="34" charset="-120"/>
-              </a:rPr>
-              <a:t>TDP 스펙표 다시 찾아보기</a:t>
+                <a:latin typeface="맑은 고딕" pitchFamily="34" charset="0"/>
+                <a:ea typeface="맑은 고딕" pitchFamily="34" charset="-122"/>
+                <a:cs typeface="맑은 고딕" pitchFamily="34" charset="-120"/>
+              </a:rPr>
+              <a:t>TDP 소비전력 스펙표 재검색</a:t>
             </a:r>
             <a:endParaRPr lang="en-US" sz="1100" dirty="0"/>
           </a:p>
@@ -6159,11 +6183,11 @@
                 <a:solidFill>
                   <a:srgbClr val="F8FAFC"/>
                 </a:solidFill>
-                <a:latin typeface="Pretendard" pitchFamily="34" charset="0"/>
-                <a:ea typeface="Pretendard" pitchFamily="34" charset="-122"/>
-                <a:cs typeface="Pretendard" pitchFamily="34" charset="-120"/>
-              </a:rPr>
-              <a:t>❓ 4. 커뮤니티 질문글</a:t>
+                <a:latin typeface="맑은 고딕" pitchFamily="34" charset="0"/>
+                <a:ea typeface="맑은 고딕" pitchFamily="34" charset="-122"/>
+                <a:cs typeface="맑은 고딕" pitchFamily="34" charset="-120"/>
+              </a:rPr>
+              <a:t>[4단계] 커뮤니티 질문글 작성</a:t>
             </a:r>
             <a:endParaRPr lang="en-US" sz="1100" dirty="0"/>
           </a:p>
@@ -6176,11 +6200,11 @@
                 <a:solidFill>
                   <a:srgbClr val="F8FAFC"/>
                 </a:solidFill>
-                <a:latin typeface="Pretendard" pitchFamily="34" charset="0"/>
-                <a:ea typeface="Pretendard" pitchFamily="34" charset="-122"/>
-                <a:cs typeface="Pretendard" pitchFamily="34" charset="-120"/>
-              </a:rPr>
-              <a:t>"60만 원 더 쓸까요?"</a:t>
+                <a:latin typeface="맑은 고딕" pitchFamily="34" charset="0"/>
+                <a:ea typeface="맑은 고딕" pitchFamily="34" charset="-122"/>
+                <a:cs typeface="맑은 고딕" pitchFamily="34" charset="-120"/>
+              </a:rPr>
+              <a:t>"이 돈 더 쓸 가치 있나요?"</a:t>
             </a:r>
             <a:endParaRPr lang="en-US" sz="1100" dirty="0"/>
           </a:p>
@@ -6193,11 +6217,11 @@
                 <a:solidFill>
                   <a:srgbClr val="F8FAFC"/>
                 </a:solidFill>
-                <a:latin typeface="Pretendard" pitchFamily="34" charset="0"/>
-                <a:ea typeface="Pretendard" pitchFamily="34" charset="-122"/>
-                <a:cs typeface="Pretendard" pitchFamily="34" charset="-120"/>
-              </a:rPr>
-              <a:t>댓글 달릴 때까지 수 시간 대기</a:t>
+                <a:latin typeface="맑은 고딕" pitchFamily="34" charset="0"/>
+                <a:ea typeface="맑은 고딕" pitchFamily="34" charset="-122"/>
+                <a:cs typeface="맑은 고딕" pitchFamily="34" charset="-120"/>
+              </a:rPr>
+              <a:t>답변 달릴 때까지 대기</a:t>
             </a:r>
             <a:endParaRPr lang="en-US" sz="1100" dirty="0"/>
           </a:p>
@@ -6257,17 +6281,17 @@
               <a:buNone/>
             </a:pPr>
             <a:r>
-              <a:rPr lang="en-US" sz="1200" b="1" dirty="0">
+              <a:rPr lang="en-US" sz="1150" b="1" dirty="0">
                 <a:solidFill>
                   <a:srgbClr val="FF5CA8"/>
                 </a:solidFill>
-                <a:latin typeface="Pretendard" pitchFamily="34" charset="0"/>
-                <a:ea typeface="Pretendard" pitchFamily="34" charset="-122"/>
-                <a:cs typeface="Pretendard" pitchFamily="34" charset="-120"/>
-              </a:rPr>
-              <a:t>❌ 정보 파편화로 피로감 누적 ➔ 결국 과소비하거나 구매 포기</a:t>
-            </a:r>
-            <a:endParaRPr lang="en-US" sz="1200" dirty="0"/>
+                <a:latin typeface="맑은 고딕" pitchFamily="34" charset="0"/>
+                <a:ea typeface="맑은 고딕" pitchFamily="34" charset="-122"/>
+                <a:cs typeface="맑은 고딕" pitchFamily="34" charset="-120"/>
+              </a:rPr>
+              <a:t>[한계] 정보가 여러 사이트에 흩어져 있어 결국 과소비하거나 결정을 못 내림</a:t>
+            </a:r>
+            <a:endParaRPr lang="en-US" sz="1150" dirty="0"/>
           </a:p>
         </p:txBody>
       </p:sp>
@@ -6327,11 +6351,11 @@
                 <a:solidFill>
                   <a:srgbClr val="00F3FF"/>
                 </a:solidFill>
-                <a:latin typeface="Pretendard" pitchFamily="34" charset="0"/>
-                <a:ea typeface="Pretendard" pitchFamily="34" charset="-122"/>
-                <a:cs typeface="Pretendard" pitchFamily="34" charset="-120"/>
-              </a:rPr>
-              <a:t>AFTER : PC-FIT 2.0 AI 부품 비교 어드바이저 (단 3초 ⚡)</a:t>
+                <a:latin typeface="맑은 고딕" pitchFamily="34" charset="0"/>
+                <a:ea typeface="맑은 고딕" pitchFamily="34" charset="-122"/>
+                <a:cs typeface="맑은 고딕" pitchFamily="34" charset="-120"/>
+              </a:rPr>
+              <a:t>AFTER : PC-FIT 2.0 AI 부품 비교 어드바이저 (원클릭 해결)</a:t>
             </a:r>
             <a:endParaRPr lang="en-US" sz="1250" dirty="0"/>
           </a:p>
@@ -6389,51 +6413,74 @@
               <a:buNone/>
             </a:pPr>
             <a:r>
-              <a:rPr lang="en-US" sz="1150" b="1" dirty="0">
-                <a:solidFill>
-                  <a:srgbClr val="F8FAFC"/>
-                </a:solidFill>
-                <a:latin typeface="Pretendard" pitchFamily="34" charset="0"/>
-                <a:ea typeface="Pretendard" pitchFamily="34" charset="-122"/>
-                <a:cs typeface="Pretendard" pitchFamily="34" charset="-120"/>
-              </a:rPr>
-              <a:t>📊</a:t>
-            </a:r>
-            <a:endParaRPr lang="en-US" sz="1150" dirty="0"/>
+              <a:rPr lang="en-US" sz="1100" b="1" dirty="0">
+                <a:solidFill>
+                  <a:srgbClr val="F8FAFC"/>
+                </a:solidFill>
+                <a:latin typeface="맑은 고딕" pitchFamily="34" charset="0"/>
+                <a:ea typeface="맑은 고딕" pitchFamily="34" charset="-122"/>
+                <a:cs typeface="맑은 고딕" pitchFamily="34" charset="-120"/>
+              </a:rPr>
+              <a:t>[핵심 1]</a:t>
+            </a:r>
+            <a:endParaRPr lang="en-US" sz="1100" dirty="0"/>
           </a:p>
           <a:p>
             <a:pPr algn="ctr" indent="0" marL="0">
               <a:buNone/>
             </a:pPr>
-            <a:r>
-              <a:rPr lang="en-US" sz="1150" b="1" dirty="0">
-                <a:solidFill>
-                  <a:srgbClr val="F8FAFC"/>
-                </a:solidFill>
-                <a:latin typeface="Pretendard" pitchFamily="34" charset="0"/>
-                <a:ea typeface="Pretendard" pitchFamily="34" charset="-122"/>
-                <a:cs typeface="Pretendard" pitchFamily="34" charset="-120"/>
-              </a:rPr>
-              <a:t>게임 FPS 차트</a:t>
-            </a:r>
-            <a:endParaRPr lang="en-US" sz="1150" dirty="0"/>
+            <a:endParaRPr lang="en-US" sz="1100" dirty="0"/>
           </a:p>
           <a:p>
             <a:pPr algn="ctr" indent="0" marL="0">
               <a:buNone/>
             </a:pPr>
             <a:r>
-              <a:rPr lang="en-US" sz="1150" b="1" dirty="0">
-                <a:solidFill>
-                  <a:srgbClr val="F8FAFC"/>
-                </a:solidFill>
-                <a:latin typeface="Pretendard" pitchFamily="34" charset="0"/>
-                <a:ea typeface="Pretendard" pitchFamily="34" charset="-122"/>
-                <a:cs typeface="Pretendard" pitchFamily="34" charset="-120"/>
+              <a:rPr lang="en-US" sz="1100" b="1" dirty="0">
+                <a:solidFill>
+                  <a:srgbClr val="F8FAFC"/>
+                </a:solidFill>
+                <a:latin typeface="맑은 고딕" pitchFamily="34" charset="0"/>
+                <a:ea typeface="맑은 고딕" pitchFamily="34" charset="-122"/>
+                <a:cs typeface="맑은 고딕" pitchFamily="34" charset="-120"/>
+              </a:rPr>
+              <a:t>게임 FPS 막대차트</a:t>
+            </a:r>
+            <a:endParaRPr lang="en-US" sz="1100" dirty="0"/>
+          </a:p>
+          <a:p>
+            <a:pPr algn="ctr" indent="0" marL="0">
+              <a:buNone/>
+            </a:pPr>
+            <a:r>
+              <a:rPr lang="en-US" sz="1100" b="1" dirty="0">
+                <a:solidFill>
+                  <a:srgbClr val="F8FAFC"/>
+                </a:solidFill>
+                <a:latin typeface="맑은 고딕" pitchFamily="34" charset="0"/>
+                <a:ea typeface="맑은 고딕" pitchFamily="34" charset="-122"/>
+                <a:cs typeface="맑은 고딕" pitchFamily="34" charset="-120"/>
               </a:rPr>
               <a:t>배그·사펑·3DMark</a:t>
             </a:r>
-            <a:endParaRPr lang="en-US" sz="1150" dirty="0"/>
+            <a:endParaRPr lang="en-US" sz="1100" dirty="0"/>
+          </a:p>
+          <a:p>
+            <a:pPr algn="ctr" indent="0" marL="0">
+              <a:buNone/>
+            </a:pPr>
+            <a:r>
+              <a:rPr lang="en-US" sz="1100" b="1" dirty="0">
+                <a:solidFill>
+                  <a:srgbClr val="F8FAFC"/>
+                </a:solidFill>
+                <a:latin typeface="맑은 고딕" pitchFamily="34" charset="0"/>
+                <a:ea typeface="맑은 고딕" pitchFamily="34" charset="-122"/>
+                <a:cs typeface="맑은 고딕" pitchFamily="34" charset="-120"/>
+              </a:rPr>
+              <a:t>점수 시각 비교</a:t>
+            </a:r>
+            <a:endParaRPr lang="en-US" sz="1100" dirty="0"/>
           </a:p>
         </p:txBody>
       </p:sp>
@@ -6489,51 +6536,74 @@
               <a:buNone/>
             </a:pPr>
             <a:r>
-              <a:rPr lang="en-US" sz="1150" b="1" dirty="0">
-                <a:solidFill>
-                  <a:srgbClr val="F8FAFC"/>
-                </a:solidFill>
-                <a:latin typeface="Pretendard" pitchFamily="34" charset="0"/>
-                <a:ea typeface="Pretendard" pitchFamily="34" charset="-122"/>
-                <a:cs typeface="Pretendard" pitchFamily="34" charset="-120"/>
-              </a:rPr>
-              <a:t>📋</a:t>
-            </a:r>
-            <a:endParaRPr lang="en-US" sz="1150" dirty="0"/>
+              <a:rPr lang="en-US" sz="1100" b="1" dirty="0">
+                <a:solidFill>
+                  <a:srgbClr val="F8FAFC"/>
+                </a:solidFill>
+                <a:latin typeface="맑은 고딕" pitchFamily="34" charset="0"/>
+                <a:ea typeface="맑은 고딕" pitchFamily="34" charset="-122"/>
+                <a:cs typeface="맑은 고딕" pitchFamily="34" charset="-120"/>
+              </a:rPr>
+              <a:t>[핵심 2]</a:t>
+            </a:r>
+            <a:endParaRPr lang="en-US" sz="1100" dirty="0"/>
           </a:p>
           <a:p>
             <a:pPr algn="ctr" indent="0" marL="0">
               <a:buNone/>
             </a:pPr>
-            <a:r>
-              <a:rPr lang="en-US" sz="1150" b="1" dirty="0">
-                <a:solidFill>
-                  <a:srgbClr val="F8FAFC"/>
-                </a:solidFill>
-                <a:latin typeface="Pretendard" pitchFamily="34" charset="0"/>
-                <a:ea typeface="Pretendard" pitchFamily="34" charset="-122"/>
-                <a:cs typeface="Pretendard" pitchFamily="34" charset="-120"/>
+            <a:endParaRPr lang="en-US" sz="1100" dirty="0"/>
+          </a:p>
+          <a:p>
+            <a:pPr algn="ctr" indent="0" marL="0">
+              <a:buNone/>
+            </a:pPr>
+            <a:r>
+              <a:rPr lang="en-US" sz="1100" b="1" dirty="0">
+                <a:solidFill>
+                  <a:srgbClr val="F8FAFC"/>
+                </a:solidFill>
+                <a:latin typeface="맑은 고딕" pitchFamily="34" charset="0"/>
+                <a:ea typeface="맑은 고딕" pitchFamily="34" charset="-122"/>
+                <a:cs typeface="맑은 고딕" pitchFamily="34" charset="-120"/>
               </a:rPr>
               <a:t>가격·스펙 비교표</a:t>
             </a:r>
-            <a:endParaRPr lang="en-US" sz="1150" dirty="0"/>
+            <a:endParaRPr lang="en-US" sz="1100" dirty="0"/>
           </a:p>
           <a:p>
             <a:pPr algn="ctr" indent="0" marL="0">
               <a:buNone/>
             </a:pPr>
             <a:r>
-              <a:rPr lang="en-US" sz="1150" b="1" dirty="0">
-                <a:solidFill>
-                  <a:srgbClr val="F8FAFC"/>
-                </a:solidFill>
-                <a:latin typeface="Pretendard" pitchFamily="34" charset="0"/>
-                <a:ea typeface="Pretendard" pitchFamily="34" charset="-122"/>
-                <a:cs typeface="Pretendard" pitchFamily="34" charset="-120"/>
-              </a:rPr>
-              <a:t>차액·VRAM·권장파워</a:t>
-            </a:r>
-            <a:endParaRPr lang="en-US" sz="1150" dirty="0"/>
+              <a:rPr lang="en-US" sz="1100" b="1" dirty="0">
+                <a:solidFill>
+                  <a:srgbClr val="F8FAFC"/>
+                </a:solidFill>
+                <a:latin typeface="맑은 고딕" pitchFamily="34" charset="0"/>
+                <a:ea typeface="맑은 고딕" pitchFamily="34" charset="-122"/>
+                <a:cs typeface="맑은 고딕" pitchFamily="34" charset="-120"/>
+              </a:rPr>
+              <a:t>가격 차액·VRAM·</a:t>
+            </a:r>
+            <a:endParaRPr lang="en-US" sz="1100" dirty="0"/>
+          </a:p>
+          <a:p>
+            <a:pPr algn="ctr" indent="0" marL="0">
+              <a:buNone/>
+            </a:pPr>
+            <a:r>
+              <a:rPr lang="en-US" sz="1100" b="1" dirty="0">
+                <a:solidFill>
+                  <a:srgbClr val="F8FAFC"/>
+                </a:solidFill>
+                <a:latin typeface="맑은 고딕" pitchFamily="34" charset="0"/>
+                <a:ea typeface="맑은 고딕" pitchFamily="34" charset="-122"/>
+                <a:cs typeface="맑은 고딕" pitchFamily="34" charset="-120"/>
+              </a:rPr>
+              <a:t>권장파워 한눈에 대조</a:t>
+            </a:r>
+            <a:endParaRPr lang="en-US" sz="1100" dirty="0"/>
           </a:p>
         </p:txBody>
       </p:sp>
@@ -6589,51 +6659,74 @@
               <a:buNone/>
             </a:pPr>
             <a:r>
-              <a:rPr lang="en-US" sz="1150" b="1" dirty="0">
-                <a:solidFill>
-                  <a:srgbClr val="F8FAFC"/>
-                </a:solidFill>
-                <a:latin typeface="Pretendard" pitchFamily="34" charset="0"/>
-                <a:ea typeface="Pretendard" pitchFamily="34" charset="-122"/>
-                <a:cs typeface="Pretendard" pitchFamily="34" charset="-120"/>
-              </a:rPr>
-              <a:t>💡</a:t>
-            </a:r>
-            <a:endParaRPr lang="en-US" sz="1150" dirty="0"/>
+              <a:rPr lang="en-US" sz="1100" b="1" dirty="0">
+                <a:solidFill>
+                  <a:srgbClr val="F8FAFC"/>
+                </a:solidFill>
+                <a:latin typeface="맑은 고딕" pitchFamily="34" charset="0"/>
+                <a:ea typeface="맑은 고딕" pitchFamily="34" charset="-122"/>
+                <a:cs typeface="맑은 고딕" pitchFamily="34" charset="-120"/>
+              </a:rPr>
+              <a:t>[핵심 3]</a:t>
+            </a:r>
+            <a:endParaRPr lang="en-US" sz="1100" dirty="0"/>
           </a:p>
           <a:p>
             <a:pPr algn="ctr" indent="0" marL="0">
               <a:buNone/>
             </a:pPr>
-            <a:r>
-              <a:rPr lang="en-US" sz="1150" b="1" dirty="0">
-                <a:solidFill>
-                  <a:srgbClr val="F8FAFC"/>
-                </a:solidFill>
-                <a:latin typeface="Pretendard" pitchFamily="34" charset="0"/>
-                <a:ea typeface="Pretendard" pitchFamily="34" charset="-122"/>
-                <a:cs typeface="Pretendard" pitchFamily="34" charset="-120"/>
-              </a:rPr>
-              <a:t>AI 가성비 판정</a:t>
-            </a:r>
-            <a:endParaRPr lang="en-US" sz="1150" dirty="0"/>
+            <a:endParaRPr lang="en-US" sz="1100" dirty="0"/>
           </a:p>
           <a:p>
             <a:pPr algn="ctr" indent="0" marL="0">
               <a:buNone/>
             </a:pPr>
             <a:r>
-              <a:rPr lang="en-US" sz="1150" b="1" dirty="0">
-                <a:solidFill>
-                  <a:srgbClr val="F8FAFC"/>
-                </a:solidFill>
-                <a:latin typeface="Pretendard" pitchFamily="34" charset="0"/>
-                <a:ea typeface="Pretendard" pitchFamily="34" charset="-122"/>
-                <a:cs typeface="Pretendard" pitchFamily="34" charset="-120"/>
-              </a:rPr>
-              <a:t>유지 vs 업글 명확 결론</a:t>
-            </a:r>
-            <a:endParaRPr lang="en-US" sz="1150" dirty="0"/>
+              <a:rPr lang="en-US" sz="1100" b="1" dirty="0">
+                <a:solidFill>
+                  <a:srgbClr val="F8FAFC"/>
+                </a:solidFill>
+                <a:latin typeface="맑은 고딕" pitchFamily="34" charset="0"/>
+                <a:ea typeface="맑은 고딕" pitchFamily="34" charset="-122"/>
+                <a:cs typeface="맑은 고딕" pitchFamily="34" charset="-120"/>
+              </a:rPr>
+              <a:t>AI 가성비 결론</a:t>
+            </a:r>
+            <a:endParaRPr lang="en-US" sz="1100" dirty="0"/>
+          </a:p>
+          <a:p>
+            <a:pPr algn="ctr" indent="0" marL="0">
+              <a:buNone/>
+            </a:pPr>
+            <a:r>
+              <a:rPr lang="en-US" sz="1100" b="1" dirty="0">
+                <a:solidFill>
+                  <a:srgbClr val="F8FAFC"/>
+                </a:solidFill>
+                <a:latin typeface="맑은 고딕" pitchFamily="34" charset="0"/>
+                <a:ea typeface="맑은 고딕" pitchFamily="34" charset="-122"/>
+                <a:cs typeface="맑은 고딕" pitchFamily="34" charset="-120"/>
+              </a:rPr>
+              <a:t>유지 vs 업그레이드</a:t>
+            </a:r>
+            <a:endParaRPr lang="en-US" sz="1100" dirty="0"/>
+          </a:p>
+          <a:p>
+            <a:pPr algn="ctr" indent="0" marL="0">
+              <a:buNone/>
+            </a:pPr>
+            <a:r>
+              <a:rPr lang="en-US" sz="1100" b="1" dirty="0">
+                <a:solidFill>
+                  <a:srgbClr val="F8FAFC"/>
+                </a:solidFill>
+                <a:latin typeface="맑은 고딕" pitchFamily="34" charset="0"/>
+                <a:ea typeface="맑은 고딕" pitchFamily="34" charset="-122"/>
+                <a:cs typeface="맑은 고딕" pitchFamily="34" charset="-120"/>
+              </a:rPr>
+              <a:t>명확한 한 줄 판정</a:t>
+            </a:r>
+            <a:endParaRPr lang="en-US" sz="1100" dirty="0"/>
           </a:p>
         </p:txBody>
       </p:sp>
@@ -6689,17 +6782,17 @@
               <a:buNone/>
             </a:pPr>
             <a:r>
-              <a:rPr lang="en-US" sz="1150" b="1" dirty="0">
-                <a:solidFill>
-                  <a:srgbClr val="F8FAFC"/>
-                </a:solidFill>
-                <a:latin typeface="Pretendard" pitchFamily="34" charset="0"/>
-                <a:ea typeface="Pretendard" pitchFamily="34" charset="-122"/>
-                <a:cs typeface="Pretendard" pitchFamily="34" charset="-120"/>
-              </a:rPr>
-              <a:t>🛡️ 하단에 실측 데이터 출처(퀘이사존·3DMark·Supabase DB)까지 투명하게 공개!</a:t>
-            </a:r>
-            <a:endParaRPr lang="en-US" sz="1150" dirty="0"/>
+              <a:rPr lang="en-US" sz="1100" b="1" dirty="0">
+                <a:solidFill>
+                  <a:srgbClr val="F8FAFC"/>
+                </a:solidFill>
+                <a:latin typeface="맑은 고딕" pitchFamily="34" charset="0"/>
+                <a:ea typeface="맑은 고딕" pitchFamily="34" charset="-122"/>
+                <a:cs typeface="맑은 고딕" pitchFamily="34" charset="-120"/>
+              </a:rPr>
+              <a:t>하단에 분석 데이터 출처(퀘이사존·3DMark·Supabase DB)를 함께 표시해 신뢰도 확보</a:t>
+            </a:r>
+            <a:endParaRPr lang="en-US" sz="1100" dirty="0"/>
           </a:p>
         </p:txBody>
       </p:sp>
@@ -6757,17 +6850,17 @@
               <a:buNone/>
             </a:pPr>
             <a:r>
-              <a:rPr lang="en-US" sz="1200" b="1" dirty="0">
+              <a:rPr lang="en-US" sz="1150" b="1" dirty="0">
                 <a:solidFill>
                   <a:srgbClr val="00E676"/>
                 </a:solidFill>
-                <a:latin typeface="Pretendard" pitchFamily="34" charset="0"/>
-                <a:ea typeface="Pretendard" pitchFamily="34" charset="-122"/>
-                <a:cs typeface="Pretendard" pitchFamily="34" charset="-120"/>
-              </a:rPr>
-              <a:t>✅ 외부 사이트 이탈 없이 한 화면에서 비교·검증·최저가 확인까지 완결!</a:t>
-            </a:r>
-            <a:endParaRPr lang="en-US" sz="1200" dirty="0"/>
+                <a:latin typeface="맑은 고딕" pitchFamily="34" charset="0"/>
+                <a:ea typeface="맑은 고딕" pitchFamily="34" charset="-122"/>
+                <a:cs typeface="맑은 고딕" pitchFamily="34" charset="-120"/>
+              </a:rPr>
+              <a:t>[해결] 외부 사이트를 돌아다닐 필요 없이 최종 견적 화면 안에서 즉시 비교·결정!</a:t>
+            </a:r>
+            <a:endParaRPr lang="en-US" sz="1150" dirty="0"/>
           </a:p>
         </p:txBody>
       </p:sp>
@@ -6812,14 +6905,14 @@
         <p:spPr>
           <a:xfrm>
             <a:off x="457200" y="228600"/>
-            <a:ext cx="11274552" cy="27432"/>
+            <a:ext cx="11274552" cy="36576"/>
           </a:xfrm>
           <a:prstGeom prst="rect">
             <a:avLst/>
           </a:prstGeom>
           <a:solidFill>
             <a:srgbClr val="00F3FF">
-              <a:alpha val="30000"/>
+              <a:alpha val="40000"/>
             </a:srgbClr>
           </a:solidFill>
           <a:ln w="12700">
@@ -6841,7 +6934,7 @@
         <p:spPr>
           <a:xfrm>
             <a:off x="457200" y="384048"/>
-            <a:ext cx="3474720" cy="310896"/>
+            <a:ext cx="3840480" cy="329184"/>
           </a:xfrm>
           <a:prstGeom prst="roundRect">
             <a:avLst>
@@ -6870,7 +6963,7 @@
         <p:spPr>
           <a:xfrm>
             <a:off x="457200" y="384048"/>
-            <a:ext cx="3474720" cy="310896"/>
+            <a:ext cx="3840480" cy="329184"/>
           </a:xfrm>
           <a:prstGeom prst="rect">
             <a:avLst/>
@@ -6886,17 +6979,17 @@
               <a:buNone/>
             </a:pPr>
             <a:r>
-              <a:rPr lang="en-US" sz="1000" b="1" dirty="0">
+              <a:rPr lang="en-US" sz="1050" b="1" dirty="0">
                 <a:solidFill>
                   <a:srgbClr val="D97BFF"/>
                 </a:solidFill>
-                <a:latin typeface="Pretendard" pitchFamily="34" charset="0"/>
-                <a:ea typeface="Pretendard" pitchFamily="34" charset="-122"/>
-                <a:cs typeface="Pretendard" pitchFamily="34" charset="-120"/>
+                <a:latin typeface="맑은 고딕" pitchFamily="34" charset="0"/>
+                <a:ea typeface="맑은 고딕" pitchFamily="34" charset="-122"/>
+                <a:cs typeface="맑은 고딕" pitchFamily="34" charset="-120"/>
               </a:rPr>
               <a:t>2. 해결을 위해 인공지능을 활용한 방안</a:t>
             </a:r>
-            <a:endParaRPr lang="en-US" sz="1000" dirty="0"/>
+            <a:endParaRPr lang="en-US" sz="1050" dirty="0"/>
           </a:p>
         </p:txBody>
       </p:sp>
@@ -6908,7 +7001,7 @@
         </p:nvSpPr>
         <p:spPr>
           <a:xfrm>
-            <a:off x="457200" y="777240"/>
+            <a:off x="457200" y="786384"/>
             <a:ext cx="11274552" cy="502920"/>
           </a:xfrm>
           <a:prstGeom prst="rect">
@@ -6925,17 +7018,17 @@
               <a:buNone/>
             </a:pPr>
             <a:r>
-              <a:rPr lang="en-US" sz="2400" b="1" dirty="0">
-                <a:solidFill>
-                  <a:srgbClr val="F8FAFC"/>
-                </a:solidFill>
-                <a:latin typeface="Pretendard" pitchFamily="34" charset="0"/>
-                <a:ea typeface="Pretendard" pitchFamily="34" charset="-122"/>
-                <a:cs typeface="Pretendard" pitchFamily="34" charset="-120"/>
-              </a:rPr>
-              <a:t>AI가 거짓 스펙을 말하지 못하도록 3대 실측 DB를 주입(RAG)하여 시각화</a:t>
-            </a:r>
-            <a:endParaRPr lang="en-US" sz="2400" dirty="0"/>
+              <a:rPr lang="en-US" sz="2200" b="1" dirty="0">
+                <a:solidFill>
+                  <a:srgbClr val="F8FAFC"/>
+                </a:solidFill>
+                <a:latin typeface="맑은 고딕" pitchFamily="34" charset="0"/>
+                <a:ea typeface="맑은 고딕" pitchFamily="34" charset="-122"/>
+                <a:cs typeface="맑은 고딕" pitchFamily="34" charset="-120"/>
+              </a:rPr>
+              <a:t>AI가 부정확한 스펙을 말하지 않도록 실제 부품 DB와 벤치마크 표를 함께 전달</a:t>
+            </a:r>
+            <a:endParaRPr lang="en-US" sz="2200" dirty="0"/>
           </a:p>
         </p:txBody>
       </p:sp>
@@ -6991,13 +7084,13 @@
             <a:r>
               <a:rPr lang="en-US" sz="950" dirty="0">
                 <a:solidFill>
-                  <a:srgbClr val="64748B"/>
-                </a:solidFill>
-                <a:latin typeface="Pretendard" pitchFamily="34" charset="0"/>
-                <a:ea typeface="Pretendard" pitchFamily="34" charset="-122"/>
-                <a:cs typeface="Pretendard" pitchFamily="34" charset="-120"/>
-              </a:rPr>
-              <a:t>PC-FIT 2.0 : AI 부품·가격 비교 &amp; 가성비 어드바이저</a:t>
+                  <a:srgbClr val="94A3B8"/>
+                </a:solidFill>
+                <a:latin typeface="맑은 고딕" pitchFamily="34" charset="0"/>
+                <a:ea typeface="맑은 고딕" pitchFamily="34" charset="-122"/>
+                <a:cs typeface="맑은 고딕" pitchFamily="34" charset="-120"/>
+              </a:rPr>
+              <a:t>PC-FIT 2.0 : AI 부품·가격 비교 및 가성비 어드바이저</a:t>
             </a:r>
             <a:endParaRPr lang="en-US" sz="950" dirty="0"/>
           </a:p>
@@ -7032,9 +7125,9 @@
                 <a:solidFill>
                   <a:srgbClr val="00F3FF"/>
                 </a:solidFill>
-                <a:latin typeface="Consolas" pitchFamily="34" charset="0"/>
-                <a:ea typeface="Consolas" pitchFamily="34" charset="-122"/>
-                <a:cs typeface="Consolas" pitchFamily="34" charset="-120"/>
+                <a:latin typeface="맑은 고딕" pitchFamily="34" charset="0"/>
+                <a:ea typeface="맑은 고딕" pitchFamily="34" charset="-122"/>
+                <a:cs typeface="맑은 고딕" pitchFamily="34" charset="-120"/>
               </a:rPr>
               <a:t>SLIDE 05 / 09</a:t>
             </a:r>
@@ -7094,34 +7187,34 @@
               <a:buNone/>
             </a:pPr>
             <a:r>
-              <a:rPr lang="en-US" sz="1400" b="1" dirty="0">
+              <a:rPr lang="en-US" sz="1350" b="1" dirty="0">
                 <a:solidFill>
                   <a:srgbClr val="00F3FF"/>
                 </a:solidFill>
-                <a:latin typeface="Pretendard" pitchFamily="34" charset="0"/>
-                <a:ea typeface="Pretendard" pitchFamily="34" charset="-122"/>
-                <a:cs typeface="Pretendard" pitchFamily="34" charset="-120"/>
-              </a:rPr>
-              <a:t>STEP 01 · 실측 데이터 자동 주입</a:t>
-            </a:r>
-            <a:endParaRPr lang="en-US" sz="1400" dirty="0"/>
-          </a:p>
-          <a:p>
-            <a:pPr indent="0" marL="0">
-              <a:buNone/>
-            </a:pPr>
-            <a:r>
-              <a:rPr lang="en-US" sz="1400" b="1" dirty="0">
+                <a:latin typeface="맑은 고딕" pitchFamily="34" charset="0"/>
+                <a:ea typeface="맑은 고딕" pitchFamily="34" charset="-122"/>
+                <a:cs typeface="맑은 고딕" pitchFamily="34" charset="-120"/>
+              </a:rPr>
+              <a:t>STEP 01 · 기준 데이터 전달</a:t>
+            </a:r>
+            <a:endParaRPr lang="en-US" sz="1350" dirty="0"/>
+          </a:p>
+          <a:p>
+            <a:pPr indent="0" marL="0">
+              <a:buNone/>
+            </a:pPr>
+            <a:r>
+              <a:rPr lang="en-US" sz="1350" b="1" dirty="0">
                 <a:solidFill>
                   <a:srgbClr val="00F3FF"/>
                 </a:solidFill>
-                <a:latin typeface="Pretendard" pitchFamily="34" charset="0"/>
-                <a:ea typeface="Pretendard" pitchFamily="34" charset="-122"/>
-                <a:cs typeface="Pretendard" pitchFamily="34" charset="-120"/>
-              </a:rPr>
-              <a:t>AI에게 전달되는 3대 팩트 데이터</a:t>
-            </a:r>
-            <a:endParaRPr lang="en-US" sz="1400" dirty="0"/>
+                <a:latin typeface="맑은 고딕" pitchFamily="34" charset="0"/>
+                <a:ea typeface="맑은 고딕" pitchFamily="34" charset="-122"/>
+                <a:cs typeface="맑은 고딕" pitchFamily="34" charset="-120"/>
+              </a:rPr>
+              <a:t>AI 프롬프트에 넣어주는 3가지 정보</a:t>
+            </a:r>
+            <a:endParaRPr lang="en-US" sz="1350" dirty="0"/>
           </a:p>
         </p:txBody>
       </p:sp>
@@ -7177,34 +7270,34 @@
               <a:buNone/>
             </a:pPr>
             <a:r>
-              <a:rPr lang="en-US" sz="1100" b="1" dirty="0">
-                <a:solidFill>
-                  <a:srgbClr val="F8FAFC"/>
-                </a:solidFill>
-                <a:latin typeface="Pretendard" pitchFamily="34" charset="0"/>
-                <a:ea typeface="Pretendard" pitchFamily="34" charset="-122"/>
-                <a:cs typeface="Pretendard" pitchFamily="34" charset="-120"/>
-              </a:rPr>
-              <a:t>🖥️ ① 현재 내 견적 &amp; 대안 컨텍스트</a:t>
-            </a:r>
-            <a:endParaRPr lang="en-US" sz="1100" dirty="0"/>
-          </a:p>
-          <a:p>
-            <a:pPr indent="0" marL="0">
-              <a:buNone/>
-            </a:pPr>
-            <a:r>
-              <a:rPr lang="en-US" sz="1100" b="1" dirty="0">
-                <a:solidFill>
-                  <a:srgbClr val="F8FAFC"/>
-                </a:solidFill>
-                <a:latin typeface="Pretendard" pitchFamily="34" charset="0"/>
-                <a:ea typeface="Pretendard" pitchFamily="34" charset="-122"/>
-                <a:cs typeface="Pretendard" pitchFamily="34" charset="-120"/>
-              </a:rPr>
-              <a:t>내 예산, 용도, 상·하위 대안 모델 자동 추출</a:t>
-            </a:r>
-            <a:endParaRPr lang="en-US" sz="1100" dirty="0"/>
+              <a:rPr lang="en-US" sz="1050" b="1" dirty="0">
+                <a:solidFill>
+                  <a:srgbClr val="F8FAFC"/>
+                </a:solidFill>
+                <a:latin typeface="맑은 고딕" pitchFamily="34" charset="0"/>
+                <a:ea typeface="맑은 고딕" pitchFamily="34" charset="-122"/>
+                <a:cs typeface="맑은 고딕" pitchFamily="34" charset="-120"/>
+              </a:rPr>
+              <a:t>1) 현재 내 견적 &amp; 대안 부품 정보</a:t>
+            </a:r>
+            <a:endParaRPr lang="en-US" sz="1050" dirty="0"/>
+          </a:p>
+          <a:p>
+            <a:pPr indent="0" marL="0">
+              <a:buNone/>
+            </a:pPr>
+            <a:r>
+              <a:rPr lang="en-US" sz="1050" b="1" dirty="0">
+                <a:solidFill>
+                  <a:srgbClr val="F8FAFC"/>
+                </a:solidFill>
+                <a:latin typeface="맑은 고딕" pitchFamily="34" charset="0"/>
+                <a:ea typeface="맑은 고딕" pitchFamily="34" charset="-122"/>
+                <a:cs typeface="맑은 고딕" pitchFamily="34" charset="-120"/>
+              </a:rPr>
+              <a:t>내 예산, 용도(게임/작업), 상·하위 대안 모델명 전달</a:t>
+            </a:r>
+            <a:endParaRPr lang="en-US" sz="1050" dirty="0"/>
           </a:p>
         </p:txBody>
       </p:sp>
@@ -7260,34 +7353,34 @@
               <a:buNone/>
             </a:pPr>
             <a:r>
-              <a:rPr lang="en-US" sz="1100" b="1" dirty="0">
-                <a:solidFill>
-                  <a:srgbClr val="F8FAFC"/>
-                </a:solidFill>
-                <a:latin typeface="Pretendard" pitchFamily="34" charset="0"/>
-                <a:ea typeface="Pretendard" pitchFamily="34" charset="-122"/>
-                <a:cs typeface="Pretendard" pitchFamily="34" charset="-120"/>
-              </a:rPr>
-              <a:t>🗄️ ② Supabase 부품 DB (945종)</a:t>
-            </a:r>
-            <a:endParaRPr lang="en-US" sz="1100" dirty="0"/>
-          </a:p>
-          <a:p>
-            <a:pPr indent="0" marL="0">
-              <a:buNone/>
-            </a:pPr>
-            <a:r>
-              <a:rPr lang="en-US" sz="1100" b="1" dirty="0">
-                <a:solidFill>
-                  <a:srgbClr val="F8FAFC"/>
-                </a:solidFill>
-                <a:latin typeface="Pretendard" pitchFamily="34" charset="0"/>
-                <a:ea typeface="Pretendard" pitchFamily="34" charset="-122"/>
-                <a:cs typeface="Pretendard" pitchFamily="34" charset="-120"/>
-              </a:rPr>
-              <a:t>DB 기준가, VRAM, 클럭, 소켓, 정격 파워 조회</a:t>
-            </a:r>
-            <a:endParaRPr lang="en-US" sz="1100" dirty="0"/>
+              <a:rPr lang="en-US" sz="1050" b="1" dirty="0">
+                <a:solidFill>
+                  <a:srgbClr val="F8FAFC"/>
+                </a:solidFill>
+                <a:latin typeface="맑은 고딕" pitchFamily="34" charset="0"/>
+                <a:ea typeface="맑은 고딕" pitchFamily="34" charset="-122"/>
+                <a:cs typeface="맑은 고딕" pitchFamily="34" charset="-120"/>
+              </a:rPr>
+              <a:t>2) Supabase 부품 DB 스펙 조회</a:t>
+            </a:r>
+            <a:endParaRPr lang="en-US" sz="1050" dirty="0"/>
+          </a:p>
+          <a:p>
+            <a:pPr indent="0" marL="0">
+              <a:buNone/>
+            </a:pPr>
+            <a:r>
+              <a:rPr lang="en-US" sz="1050" b="1" dirty="0">
+                <a:solidFill>
+                  <a:srgbClr val="F8FAFC"/>
+                </a:solidFill>
+                <a:latin typeface="맑은 고딕" pitchFamily="34" charset="0"/>
+                <a:ea typeface="맑은 고딕" pitchFamily="34" charset="-122"/>
+                <a:cs typeface="맑은 고딕" pitchFamily="34" charset="-120"/>
+              </a:rPr>
+              <a:t>parts 테이블에서 비교 대상 부품의 스펙과 기준가 조회</a:t>
+            </a:r>
+            <a:endParaRPr lang="en-US" sz="1050" dirty="0"/>
           </a:p>
         </p:txBody>
       </p:sp>
@@ -7343,72 +7436,61 @@
               <a:buNone/>
             </a:pPr>
             <a:r>
-              <a:rPr lang="en-US" sz="1100" b="1" dirty="0">
-                <a:solidFill>
-                  <a:srgbClr val="F8FAFC"/>
-                </a:solidFill>
-                <a:latin typeface="Pretendard" pitchFamily="34" charset="0"/>
-                <a:ea typeface="Pretendard" pitchFamily="34" charset="-122"/>
-                <a:cs typeface="Pretendard" pitchFamily="34" charset="-120"/>
-              </a:rPr>
-              <a:t>🏆 ③ 공인 벤치마크 레퍼런스 DB</a:t>
-            </a:r>
-            <a:endParaRPr lang="en-US" sz="1100" dirty="0"/>
-          </a:p>
-          <a:p>
-            <a:pPr indent="0" marL="0">
-              <a:buNone/>
-            </a:pPr>
-            <a:r>
-              <a:rPr lang="en-US" sz="1100" b="1" dirty="0">
-                <a:solidFill>
-                  <a:srgbClr val="F8FAFC"/>
-                </a:solidFill>
-                <a:latin typeface="Pretendard" pitchFamily="34" charset="0"/>
-                <a:ea typeface="Pretendard" pitchFamily="34" charset="-122"/>
-                <a:cs typeface="Pretendard" pitchFamily="34" charset="-120"/>
-              </a:rPr>
-              <a:t>3DMark Time Spy · 퀘이사존 QHD FPS · Cinebench</a:t>
-            </a:r>
-            <a:endParaRPr lang="en-US" sz="1100" dirty="0"/>
-          </a:p>
-        </p:txBody>
-      </p:sp>
-      <p:sp>
-        <p:nvSpPr>
-          <p:cNvPr id="17" name="Text 15"/>
-          <p:cNvSpPr/>
-          <p:nvPr/>
-        </p:nvSpPr>
-        <p:spPr>
-          <a:xfrm>
-            <a:off x="4069080" y="3474720"/>
-            <a:ext cx="411480" cy="457200"/>
-          </a:xfrm>
-          <a:prstGeom prst="rect">
-            <a:avLst/>
-          </a:prstGeom>
-          <a:noFill/>
-          <a:ln/>
-        </p:spPr>
-        <p:txBody>
-          <a:bodyPr wrap="square" rtlCol="0" anchor="ctr"/>
-          <a:lstStyle/>
-          <a:p>
-            <a:pPr algn="ctr" indent="0" marL="0">
-              <a:buNone/>
-            </a:pPr>
-            <a:r>
-              <a:rPr lang="en-US" sz="2200" b="1" dirty="0">
-                <a:solidFill>
-                  <a:srgbClr val="00F3FF"/>
-                </a:solidFill>
-              </a:rPr>
-              <a:t>➔</a:t>
-            </a:r>
-            <a:endParaRPr lang="en-US" sz="2200" dirty="0"/>
-          </a:p>
-        </p:txBody>
+              <a:rPr lang="en-US" sz="1050" b="1" dirty="0">
+                <a:solidFill>
+                  <a:srgbClr val="F8FAFC"/>
+                </a:solidFill>
+                <a:latin typeface="맑은 고딕" pitchFamily="34" charset="0"/>
+                <a:ea typeface="맑은 고딕" pitchFamily="34" charset="-122"/>
+                <a:cs typeface="맑은 고딕" pitchFamily="34" charset="-120"/>
+              </a:rPr>
+              <a:t>3) 내장 벤치마크 레퍼런스 표 매칭</a:t>
+            </a:r>
+            <a:endParaRPr lang="en-US" sz="1050" dirty="0"/>
+          </a:p>
+          <a:p>
+            <a:pPr indent="0" marL="0">
+              <a:buNone/>
+            </a:pPr>
+            <a:r>
+              <a:rPr lang="en-US" sz="1050" b="1" dirty="0">
+                <a:solidFill>
+                  <a:srgbClr val="F8FAFC"/>
+                </a:solidFill>
+                <a:latin typeface="맑은 고딕" pitchFamily="34" charset="0"/>
+                <a:ea typeface="맑은 고딕" pitchFamily="34" charset="-122"/>
+                <a:cs typeface="맑은 고딕" pitchFamily="34" charset="-120"/>
+              </a:rPr>
+              <a:t>3DMark 점수, 퀘이사존 QHD 배그·사펑 FPS 기준표 전달</a:t>
+            </a:r>
+            <a:endParaRPr lang="en-US" sz="1050" dirty="0"/>
+          </a:p>
+        </p:txBody>
+      </p:sp>
+      <p:sp>
+        <p:nvSpPr>
+          <p:cNvPr id="17" name="Shape 15"/>
+          <p:cNvSpPr/>
+          <p:nvPr/>
+        </p:nvSpPr>
+        <p:spPr>
+          <a:xfrm>
+            <a:off x="4114800" y="3566160"/>
+            <a:ext cx="320040" cy="320040"/>
+          </a:xfrm>
+          <a:prstGeom prst="rightArrow">
+            <a:avLst/>
+          </a:prstGeom>
+          <a:solidFill>
+            <a:srgbClr val="00F3FF"/>
+          </a:solidFill>
+          <a:ln w="12700">
+            <a:solidFill>
+              <a:srgbClr val="00F3FF"/>
+            </a:solidFill>
+            <a:prstDash val="solid"/>
+          </a:ln>
+        </p:spPr>
       </p:sp>
       <p:sp>
         <p:nvSpPr>
@@ -7462,34 +7544,34 @@
               <a:buNone/>
             </a:pPr>
             <a:r>
-              <a:rPr lang="en-US" sz="1400" b="1" dirty="0">
+              <a:rPr lang="en-US" sz="1350" b="1" dirty="0">
                 <a:solidFill>
                   <a:srgbClr val="D97BFF"/>
                 </a:solidFill>
-                <a:latin typeface="Pretendard" pitchFamily="34" charset="0"/>
-                <a:ea typeface="Pretendard" pitchFamily="34" charset="-122"/>
-                <a:cs typeface="Pretendard" pitchFamily="34" charset="-120"/>
-              </a:rPr>
-              <a:t>STEP 02 · AI 연산 엔진</a:t>
-            </a:r>
-            <a:endParaRPr lang="en-US" sz="1400" dirty="0"/>
+                <a:latin typeface="맑은 고딕" pitchFamily="34" charset="0"/>
+                <a:ea typeface="맑은 고딕" pitchFamily="34" charset="-122"/>
+                <a:cs typeface="맑은 고딕" pitchFamily="34" charset="-120"/>
+              </a:rPr>
+              <a:t>STEP 02 · AI 비교 분석</a:t>
+            </a:r>
+            <a:endParaRPr lang="en-US" sz="1350" dirty="0"/>
           </a:p>
           <a:p>
             <a:pPr algn="ctr" indent="0" marL="0">
               <a:buNone/>
             </a:pPr>
             <a:r>
-              <a:rPr lang="en-US" sz="1400" b="1" dirty="0">
+              <a:rPr lang="en-US" sz="1350" b="1" dirty="0">
                 <a:solidFill>
                   <a:srgbClr val="D97BFF"/>
                 </a:solidFill>
-                <a:latin typeface="Pretendard" pitchFamily="34" charset="0"/>
-                <a:ea typeface="Pretendard" pitchFamily="34" charset="-122"/>
-                <a:cs typeface="Pretendard" pitchFamily="34" charset="-120"/>
-              </a:rPr>
-              <a:t>멀티 AI 분석 &amp; JSON 강제</a:t>
-            </a:r>
-            <a:endParaRPr lang="en-US" sz="1400" dirty="0"/>
+                <a:latin typeface="맑은 고딕" pitchFamily="34" charset="0"/>
+                <a:ea typeface="맑은 고딕" pitchFamily="34" charset="-122"/>
+                <a:cs typeface="맑은 고딕" pitchFamily="34" charset="-120"/>
+              </a:rPr>
+              <a:t>정형 JSON 데이터 생성</a:t>
+            </a:r>
+            <a:endParaRPr lang="en-US" sz="1350" dirty="0"/>
           </a:p>
         </p:txBody>
       </p:sp>
@@ -7518,74 +7600,68 @@
               <a:buNone/>
             </a:pPr>
             <a:r>
-              <a:rPr lang="en-US" sz="1200" b="1" dirty="0">
-                <a:solidFill>
-                  <a:srgbClr val="F8FAFC"/>
-                </a:solidFill>
-                <a:latin typeface="Pretendard" pitchFamily="34" charset="0"/>
-                <a:ea typeface="Pretendard" pitchFamily="34" charset="-122"/>
-                <a:cs typeface="Pretendard" pitchFamily="34" charset="-120"/>
-              </a:rPr>
-              <a:t>🧠</a:t>
-            </a:r>
-            <a:endParaRPr lang="en-US" sz="1200" dirty="0"/>
+              <a:rPr lang="en-US" sz="1150" b="1" dirty="0">
+                <a:solidFill>
+                  <a:srgbClr val="F8FAFC"/>
+                </a:solidFill>
+                <a:latin typeface="맑은 고딕" pitchFamily="34" charset="0"/>
+                <a:ea typeface="맑은 고딕" pitchFamily="34" charset="-122"/>
+                <a:cs typeface="맑은 고딕" pitchFamily="34" charset="-120"/>
+              </a:rPr>
+              <a:t>전달받은 실제 벤치마크 수치와</a:t>
+            </a:r>
+            <a:endParaRPr lang="en-US" sz="1150" dirty="0"/>
           </a:p>
           <a:p>
             <a:pPr algn="ctr" indent="0" marL="0">
               <a:buNone/>
             </a:pPr>
-            <a:endParaRPr lang="en-US" sz="1200" dirty="0"/>
+            <a:r>
+              <a:rPr lang="en-US" sz="1150" b="1" dirty="0">
+                <a:solidFill>
+                  <a:srgbClr val="F8FAFC"/>
+                </a:solidFill>
+                <a:latin typeface="맑은 고딕" pitchFamily="34" charset="0"/>
+                <a:ea typeface="맑은 고딕" pitchFamily="34" charset="-122"/>
+                <a:cs typeface="맑은 고딕" pitchFamily="34" charset="-120"/>
+              </a:rPr>
+              <a:t>가격 차이를 바탕으로</a:t>
+            </a:r>
+            <a:endParaRPr lang="en-US" sz="1150" dirty="0"/>
           </a:p>
           <a:p>
             <a:pPr algn="ctr" indent="0" marL="0">
               <a:buNone/>
             </a:pPr>
             <a:r>
-              <a:rPr lang="en-US" sz="1200" b="1" dirty="0">
-                <a:solidFill>
-                  <a:srgbClr val="F8FAFC"/>
-                </a:solidFill>
-                <a:latin typeface="Pretendard" pitchFamily="34" charset="0"/>
-                <a:ea typeface="Pretendard" pitchFamily="34" charset="-122"/>
-                <a:cs typeface="Pretendard" pitchFamily="34" charset="-120"/>
-              </a:rPr>
-              <a:t>주입된 실측 수치만을 근거로</a:t>
-            </a:r>
-            <a:endParaRPr lang="en-US" sz="1200" dirty="0"/>
+              <a:rPr lang="en-US" sz="1150" b="1" dirty="0">
+                <a:solidFill>
+                  <a:srgbClr val="F8FAFC"/>
+                </a:solidFill>
+                <a:latin typeface="맑은 고딕" pitchFamily="34" charset="0"/>
+                <a:ea typeface="맑은 고딕" pitchFamily="34" charset="-122"/>
+                <a:cs typeface="맑은 고딕" pitchFamily="34" charset="-120"/>
+              </a:rPr>
+              <a:t>사용자의 용도에 맞는 가성비를 분석하고</a:t>
+            </a:r>
+            <a:endParaRPr lang="en-US" sz="1150" dirty="0"/>
           </a:p>
           <a:p>
             <a:pPr algn="ctr" indent="0" marL="0">
               <a:buNone/>
             </a:pPr>
             <a:r>
-              <a:rPr lang="en-US" sz="1200" b="1" dirty="0">
-                <a:solidFill>
-                  <a:srgbClr val="F8FAFC"/>
-                </a:solidFill>
-                <a:latin typeface="Pretendard" pitchFamily="34" charset="0"/>
-                <a:ea typeface="Pretendard" pitchFamily="34" charset="-122"/>
-                <a:cs typeface="Pretendard" pitchFamily="34" charset="-120"/>
-              </a:rPr>
-              <a:t>추가 금액 대비 프레임 상승률(%)</a:t>
-            </a:r>
-            <a:endParaRPr lang="en-US" sz="1200" dirty="0"/>
-          </a:p>
-          <a:p>
-            <a:pPr algn="ctr" indent="0" marL="0">
-              <a:buNone/>
-            </a:pPr>
-            <a:r>
-              <a:rPr lang="en-US" sz="1200" b="1" dirty="0">
-                <a:solidFill>
-                  <a:srgbClr val="F8FAFC"/>
-                </a:solidFill>
-                <a:latin typeface="Pretendard" pitchFamily="34" charset="0"/>
-                <a:ea typeface="Pretendard" pitchFamily="34" charset="-122"/>
-                <a:cs typeface="Pretendard" pitchFamily="34" charset="-120"/>
-              </a:rPr>
-              <a:t>및 가성비 결론을 계산합니다.</a:t>
-            </a:r>
-            <a:endParaRPr lang="en-US" sz="1200" dirty="0"/>
+              <a:rPr lang="en-US" sz="1150" b="1" dirty="0">
+                <a:solidFill>
+                  <a:srgbClr val="F8FAFC"/>
+                </a:solidFill>
+                <a:latin typeface="맑은 고딕" pitchFamily="34" charset="0"/>
+                <a:ea typeface="맑은 고딕" pitchFamily="34" charset="-122"/>
+                <a:cs typeface="맑은 고딕" pitchFamily="34" charset="-120"/>
+              </a:rPr>
+              <a:t>지정된 JSON 형식으로 응답합니다.</a:t>
+            </a:r>
+            <a:endParaRPr lang="en-US" sz="1150" dirty="0"/>
           </a:p>
         </p:txBody>
       </p:sp>
@@ -7624,8 +7700,8 @@
         </p:nvSpPr>
         <p:spPr>
           <a:xfrm>
-            <a:off x="4846320" y="4343400"/>
-            <a:ext cx="2468880" cy="1325880"/>
+            <a:off x="4846320" y="4315968"/>
+            <a:ext cx="2468880" cy="1371600"/>
           </a:xfrm>
           <a:prstGeom prst="rect">
             <a:avLst/>
@@ -7641,106 +7717,112 @@
               <a:buNone/>
             </a:pPr>
             <a:r>
-              <a:rPr lang="en-US" sz="1100" b="1" dirty="0">
-                <a:solidFill>
-                  <a:srgbClr val="F8FAFC"/>
-                </a:solidFill>
-                <a:latin typeface="Consolas" pitchFamily="34" charset="0"/>
-                <a:ea typeface="Consolas" pitchFamily="34" charset="-122"/>
-                <a:cs typeface="Consolas" pitchFamily="34" charset="-120"/>
-              </a:rPr>
-              <a:t>멀티 AI 폴백 체인 (무중단)</a:t>
-            </a:r>
-            <a:endParaRPr lang="en-US" sz="1100" dirty="0"/>
+              <a:rPr lang="en-US" sz="1050" b="1" dirty="0">
+                <a:solidFill>
+                  <a:srgbClr val="F8FAFC"/>
+                </a:solidFill>
+                <a:latin typeface="맑은 고딕" pitchFamily="34" charset="0"/>
+                <a:ea typeface="맑은 고딕" pitchFamily="34" charset="-122"/>
+                <a:cs typeface="맑은 고딕" pitchFamily="34" charset="-120"/>
+              </a:rPr>
+              <a:t>[멀티 AI 모델 연동]</a:t>
+            </a:r>
+            <a:endParaRPr lang="en-US" sz="1050" dirty="0"/>
           </a:p>
           <a:p>
             <a:pPr algn="ctr" indent="0" marL="0">
               <a:buNone/>
             </a:pPr>
             <a:r>
-              <a:rPr lang="en-US" sz="1100" b="1" dirty="0">
-                <a:solidFill>
-                  <a:srgbClr val="F8FAFC"/>
-                </a:solidFill>
-                <a:latin typeface="Consolas" pitchFamily="34" charset="0"/>
-                <a:ea typeface="Consolas" pitchFamily="34" charset="-122"/>
-                <a:cs typeface="Consolas" pitchFamily="34" charset="-120"/>
-              </a:rPr>
-              <a:t>Gemini 2.5/3.5 Flash</a:t>
-            </a:r>
-            <a:endParaRPr lang="en-US" sz="1100" dirty="0"/>
+              <a:rPr lang="en-US" sz="1050" b="1" dirty="0">
+                <a:solidFill>
+                  <a:srgbClr val="F8FAFC"/>
+                </a:solidFill>
+                <a:latin typeface="맑은 고딕" pitchFamily="34" charset="0"/>
+                <a:ea typeface="맑은 고딕" pitchFamily="34" charset="-122"/>
+                <a:cs typeface="맑은 고딕" pitchFamily="34" charset="-120"/>
+              </a:rPr>
+              <a:t>Gemini 2.5 / 3.5 Flash</a:t>
+            </a:r>
+            <a:endParaRPr lang="en-US" sz="1050" dirty="0"/>
           </a:p>
           <a:p>
             <a:pPr algn="ctr" indent="0" marL="0">
               <a:buNone/>
             </a:pPr>
             <a:r>
-              <a:rPr lang="en-US" sz="1100" b="1" dirty="0">
-                <a:solidFill>
-                  <a:srgbClr val="F8FAFC"/>
-                </a:solidFill>
-                <a:latin typeface="Consolas" pitchFamily="34" charset="0"/>
-                <a:ea typeface="Consolas" pitchFamily="34" charset="-122"/>
-                <a:cs typeface="Consolas" pitchFamily="34" charset="-120"/>
-              </a:rPr>
-              <a:t>▼</a:t>
-            </a:r>
-            <a:endParaRPr lang="en-US" sz="1100" dirty="0"/>
+              <a:rPr lang="en-US" sz="1050" b="1" dirty="0">
+                <a:solidFill>
+                  <a:srgbClr val="F8FAFC"/>
+                </a:solidFill>
+                <a:latin typeface="맑은 고딕" pitchFamily="34" charset="0"/>
+                <a:ea typeface="맑은 고딕" pitchFamily="34" charset="-122"/>
+                <a:cs typeface="맑은 고딕" pitchFamily="34" charset="-120"/>
+              </a:rPr>
+              <a:t>GPT-5.1</a:t>
+            </a:r>
+            <a:endParaRPr lang="en-US" sz="1050" dirty="0"/>
           </a:p>
           <a:p>
             <a:pPr algn="ctr" indent="0" marL="0">
               <a:buNone/>
             </a:pPr>
             <a:r>
-              <a:rPr lang="en-US" sz="1100" b="1" dirty="0">
-                <a:solidFill>
-                  <a:srgbClr val="F8FAFC"/>
-                </a:solidFill>
-                <a:latin typeface="Consolas" pitchFamily="34" charset="0"/>
-                <a:ea typeface="Consolas" pitchFamily="34" charset="-122"/>
-                <a:cs typeface="Consolas" pitchFamily="34" charset="-120"/>
-              </a:rPr>
-              <a:t>GPT-5.1 / Claude Sonnet</a:t>
-            </a:r>
-            <a:endParaRPr lang="en-US" sz="1100" dirty="0"/>
-          </a:p>
-        </p:txBody>
-      </p:sp>
-      <p:sp>
-        <p:nvSpPr>
-          <p:cNvPr id="23" name="Text 21"/>
-          <p:cNvSpPr/>
-          <p:nvPr/>
-        </p:nvSpPr>
-        <p:spPr>
-          <a:xfrm>
-            <a:off x="7680960" y="3474720"/>
-            <a:ext cx="411480" cy="457200"/>
-          </a:xfrm>
-          <a:prstGeom prst="rect">
-            <a:avLst/>
-          </a:prstGeom>
-          <a:noFill/>
-          <a:ln/>
-        </p:spPr>
-        <p:txBody>
-          <a:bodyPr wrap="square" rtlCol="0" anchor="ctr"/>
-          <a:lstStyle/>
+              <a:rPr lang="en-US" sz="1050" b="1" dirty="0">
+                <a:solidFill>
+                  <a:srgbClr val="F8FAFC"/>
+                </a:solidFill>
+                <a:latin typeface="맑은 고딕" pitchFamily="34" charset="0"/>
+                <a:ea typeface="맑은 고딕" pitchFamily="34" charset="-122"/>
+                <a:cs typeface="맑은 고딕" pitchFamily="34" charset="-120"/>
+              </a:rPr>
+              <a:t>Claude Sonnet 4.6</a:t>
+            </a:r>
+            <a:endParaRPr lang="en-US" sz="1050" dirty="0"/>
+          </a:p>
           <a:p>
             <a:pPr algn="ctr" indent="0" marL="0">
               <a:buNone/>
             </a:pPr>
             <a:r>
-              <a:rPr lang="en-US" sz="2200" b="1" dirty="0">
-                <a:solidFill>
-                  <a:srgbClr val="FF5CA8"/>
-                </a:solidFill>
-              </a:rPr>
-              <a:t>➔</a:t>
-            </a:r>
-            <a:endParaRPr lang="en-US" sz="2200" dirty="0"/>
-          </a:p>
-        </p:txBody>
+              <a:rPr lang="en-US" sz="1050" b="1" dirty="0">
+                <a:solidFill>
+                  <a:srgbClr val="F8FAFC"/>
+                </a:solidFill>
+                <a:latin typeface="맑은 고딕" pitchFamily="34" charset="0"/>
+                <a:ea typeface="맑은 고딕" pitchFamily="34" charset="-122"/>
+                <a:cs typeface="맑은 고딕" pitchFamily="34" charset="-120"/>
+              </a:rPr>
+              <a:t>(장애 시 다음 모델로 자동 전환)</a:t>
+            </a:r>
+            <a:endParaRPr lang="en-US" sz="1050" dirty="0"/>
+          </a:p>
+        </p:txBody>
+      </p:sp>
+      <p:sp>
+        <p:nvSpPr>
+          <p:cNvPr id="23" name="Shape 21"/>
+          <p:cNvSpPr/>
+          <p:nvPr/>
+        </p:nvSpPr>
+        <p:spPr>
+          <a:xfrm>
+            <a:off x="7726680" y="3566160"/>
+            <a:ext cx="320040" cy="320040"/>
+          </a:xfrm>
+          <a:prstGeom prst="rightArrow">
+            <a:avLst/>
+          </a:prstGeom>
+          <a:solidFill>
+            <a:srgbClr val="FF5CA8"/>
+          </a:solidFill>
+          <a:ln w="12700">
+            <a:solidFill>
+              <a:srgbClr val="FF5CA8"/>
+            </a:solidFill>
+            <a:prstDash val="solid"/>
+          </a:ln>
+        </p:spPr>
       </p:sp>
       <p:sp>
         <p:nvSpPr>
@@ -7794,34 +7876,34 @@
               <a:buNone/>
             </a:pPr>
             <a:r>
-              <a:rPr lang="en-US" sz="1400" b="1" dirty="0">
+              <a:rPr lang="en-US" sz="1350" b="1" dirty="0">
                 <a:solidFill>
                   <a:srgbClr val="FF5CA8"/>
                 </a:solidFill>
-                <a:latin typeface="Pretendard" pitchFamily="34" charset="0"/>
-                <a:ea typeface="Pretendard" pitchFamily="34" charset="-122"/>
-                <a:cs typeface="Pretendard" pitchFamily="34" charset="-120"/>
-              </a:rPr>
-              <a:t>STEP 03 · 3단 인포그래픽 출력</a:t>
-            </a:r>
-            <a:endParaRPr lang="en-US" sz="1400" dirty="0"/>
-          </a:p>
-          <a:p>
-            <a:pPr indent="0" marL="0">
-              <a:buNone/>
-            </a:pPr>
-            <a:r>
-              <a:rPr lang="en-US" sz="1400" b="1" dirty="0">
+                <a:latin typeface="맑은 고딕" pitchFamily="34" charset="0"/>
+                <a:ea typeface="맑은 고딕" pitchFamily="34" charset="-122"/>
+                <a:cs typeface="맑은 고딕" pitchFamily="34" charset="-120"/>
+              </a:rPr>
+              <a:t>STEP 03 · 화면 시각화 출력</a:t>
+            </a:r>
+            <a:endParaRPr lang="en-US" sz="1350" dirty="0"/>
+          </a:p>
+          <a:p>
+            <a:pPr indent="0" marL="0">
+              <a:buNone/>
+            </a:pPr>
+            <a:r>
+              <a:rPr lang="en-US" sz="1350" b="1" dirty="0">
                 <a:solidFill>
                   <a:srgbClr val="FF5CA8"/>
                 </a:solidFill>
-                <a:latin typeface="Pretendard" pitchFamily="34" charset="0"/>
-                <a:ea typeface="Pretendard" pitchFamily="34" charset="-122"/>
-                <a:cs typeface="Pretendard" pitchFamily="34" charset="-120"/>
-              </a:rPr>
-              <a:t>줄글 대신 직관적 차트·표 렌더링</a:t>
-            </a:r>
-            <a:endParaRPr lang="en-US" sz="1400" dirty="0"/>
+                <a:latin typeface="맑은 고딕" pitchFamily="34" charset="0"/>
+                <a:ea typeface="맑은 고딕" pitchFamily="34" charset="-122"/>
+                <a:cs typeface="맑은 고딕" pitchFamily="34" charset="-120"/>
+              </a:rPr>
+              <a:t>줄글 대신 차트와 비교표로 표시</a:t>
+            </a:r>
+            <a:endParaRPr lang="en-US" sz="1350" dirty="0"/>
           </a:p>
         </p:txBody>
       </p:sp>
@@ -7877,34 +7959,34 @@
               <a:buNone/>
             </a:pPr>
             <a:r>
-              <a:rPr lang="en-US" sz="1100" b="1" dirty="0">
-                <a:solidFill>
-                  <a:srgbClr val="F8FAFC"/>
-                </a:solidFill>
-                <a:latin typeface="Pretendard" pitchFamily="34" charset="0"/>
-                <a:ea typeface="Pretendard" pitchFamily="34" charset="-122"/>
-                <a:cs typeface="Pretendard" pitchFamily="34" charset="-120"/>
-              </a:rPr>
-              <a:t>Tier 1 · 한 줄 가성비 결론 배지 (verdict)</a:t>
-            </a:r>
-            <a:endParaRPr lang="en-US" sz="1100" dirty="0"/>
-          </a:p>
-          <a:p>
-            <a:pPr indent="0" marL="0">
-              <a:buNone/>
-            </a:pPr>
-            <a:r>
-              <a:rPr lang="en-US" sz="1100" b="1" dirty="0">
-                <a:solidFill>
-                  <a:srgbClr val="F8FAFC"/>
-                </a:solidFill>
-                <a:latin typeface="Pretendard" pitchFamily="34" charset="0"/>
-                <a:ea typeface="Pretendard" pitchFamily="34" charset="-122"/>
-                <a:cs typeface="Pretendard" pitchFamily="34" charset="-120"/>
-              </a:rPr>
-              <a:t>"💡 QHD 게이밍 기준 RTX 5070 유지 추천!"</a:t>
-            </a:r>
-            <a:endParaRPr lang="en-US" sz="1100" dirty="0"/>
+              <a:rPr lang="en-US" sz="1050" b="1" dirty="0">
+                <a:solidFill>
+                  <a:srgbClr val="F8FAFC"/>
+                </a:solidFill>
+                <a:latin typeface="맑은 고딕" pitchFamily="34" charset="0"/>
+                <a:ea typeface="맑은 고딕" pitchFamily="34" charset="-122"/>
+                <a:cs typeface="맑은 고딕" pitchFamily="34" charset="-120"/>
+              </a:rPr>
+              <a:t>Tier 1 · 한 줄 최종 추천 결론 (verdict)</a:t>
+            </a:r>
+            <a:endParaRPr lang="en-US" sz="1050" dirty="0"/>
+          </a:p>
+          <a:p>
+            <a:pPr indent="0" marL="0">
+              <a:buNone/>
+            </a:pPr>
+            <a:r>
+              <a:rPr lang="en-US" sz="1050" b="1" dirty="0">
+                <a:solidFill>
+                  <a:srgbClr val="F8FAFC"/>
+                </a:solidFill>
+                <a:latin typeface="맑은 고딕" pitchFamily="34" charset="0"/>
+                <a:ea typeface="맑은 고딕" pitchFamily="34" charset="-122"/>
+                <a:cs typeface="맑은 고딕" pitchFamily="34" charset="-120"/>
+              </a:rPr>
+              <a:t>어떤 부품을 선택해야 이득인지 3줄 요약과 함께 표시</a:t>
+            </a:r>
+            <a:endParaRPr lang="en-US" sz="1050" dirty="0"/>
           </a:p>
         </p:txBody>
       </p:sp>
@@ -7960,34 +8042,34 @@
               <a:buNone/>
             </a:pPr>
             <a:r>
-              <a:rPr lang="en-US" sz="1100" b="1" dirty="0">
-                <a:solidFill>
-                  <a:srgbClr val="F8FAFC"/>
-                </a:solidFill>
-                <a:latin typeface="Pretendard" pitchFamily="34" charset="0"/>
-                <a:ea typeface="Pretendard" pitchFamily="34" charset="-122"/>
-                <a:cs typeface="Pretendard" pitchFamily="34" charset="-120"/>
-              </a:rPr>
-              <a:t>Tier 2 · 가로 막대차트 &amp; 스펙 비교표</a:t>
-            </a:r>
-            <a:endParaRPr lang="en-US" sz="1100" dirty="0"/>
-          </a:p>
-          <a:p>
-            <a:pPr indent="0" marL="0">
-              <a:buNone/>
-            </a:pPr>
-            <a:r>
-              <a:rPr lang="en-US" sz="1100" b="1" dirty="0">
-                <a:solidFill>
-                  <a:srgbClr val="F8FAFC"/>
-                </a:solidFill>
-                <a:latin typeface="Pretendard" pitchFamily="34" charset="0"/>
-                <a:ea typeface="Pretendard" pitchFamily="34" charset="-122"/>
-                <a:cs typeface="Pretendard" pitchFamily="34" charset="-120"/>
-              </a:rPr>
-              <a:t>게임별 FPS 그래프(chartData) + 비교표(tableData)</a:t>
-            </a:r>
-            <a:endParaRPr lang="en-US" sz="1100" dirty="0"/>
+              <a:rPr lang="en-US" sz="1050" b="1" dirty="0">
+                <a:solidFill>
+                  <a:srgbClr val="F8FAFC"/>
+                </a:solidFill>
+                <a:latin typeface="맑은 고딕" pitchFamily="34" charset="0"/>
+                <a:ea typeface="맑은 고딕" pitchFamily="34" charset="-122"/>
+                <a:cs typeface="맑은 고딕" pitchFamily="34" charset="-120"/>
+              </a:rPr>
+              <a:t>Tier 2 · 가로 막대그래프 &amp; 스펙 비교표</a:t>
+            </a:r>
+            <a:endParaRPr lang="en-US" sz="1050" dirty="0"/>
+          </a:p>
+          <a:p>
+            <a:pPr indent="0" marL="0">
+              <a:buNone/>
+            </a:pPr>
+            <a:r>
+              <a:rPr lang="en-US" sz="1050" b="1" dirty="0">
+                <a:solidFill>
+                  <a:srgbClr val="F8FAFC"/>
+                </a:solidFill>
+                <a:latin typeface="맑은 고딕" pitchFamily="34" charset="0"/>
+                <a:ea typeface="맑은 고딕" pitchFamily="34" charset="-122"/>
+                <a:cs typeface="맑은 고딕" pitchFamily="34" charset="-120"/>
+              </a:rPr>
+              <a:t>게임 프레임 막대차트(chartData) + 비교표(tableData)</a:t>
+            </a:r>
+            <a:endParaRPr lang="en-US" sz="1050" dirty="0"/>
           </a:p>
         </p:txBody>
       </p:sp>
@@ -8043,34 +8125,34 @@
               <a:buNone/>
             </a:pPr>
             <a:r>
-              <a:rPr lang="en-US" sz="1100" b="1" dirty="0">
-                <a:solidFill>
-                  <a:srgbClr val="F8FAFC"/>
-                </a:solidFill>
-                <a:latin typeface="Pretendard" pitchFamily="34" charset="0"/>
-                <a:ea typeface="Pretendard" pitchFamily="34" charset="-122"/>
-                <a:cs typeface="Pretendard" pitchFamily="34" charset="-120"/>
-              </a:rPr>
-              <a:t>Tier 3 · 데이터 출처 &amp; DB 매칭 검증 배지</a:t>
-            </a:r>
-            <a:endParaRPr lang="en-US" sz="1100" dirty="0"/>
-          </a:p>
-          <a:p>
-            <a:pPr indent="0" marL="0">
-              <a:buNone/>
-            </a:pPr>
-            <a:r>
-              <a:rPr lang="en-US" sz="1100" b="1" dirty="0">
-                <a:solidFill>
-                  <a:srgbClr val="F8FAFC"/>
-                </a:solidFill>
-                <a:latin typeface="Pretendard" pitchFamily="34" charset="0"/>
-                <a:ea typeface="Pretendard" pitchFamily="34" charset="-122"/>
-                <a:cs typeface="Pretendard" pitchFamily="34" charset="-120"/>
-              </a:rPr>
-              <a:t>"Supabase DB 실측 스펙 대조됨" + 퀘이사존/3DMark</a:t>
-            </a:r>
-            <a:endParaRPr lang="en-US" sz="1100" dirty="0"/>
+              <a:rPr lang="en-US" sz="1050" b="1" dirty="0">
+                <a:solidFill>
+                  <a:srgbClr val="F8FAFC"/>
+                </a:solidFill>
+                <a:latin typeface="맑은 고딕" pitchFamily="34" charset="0"/>
+                <a:ea typeface="맑은 고딕" pitchFamily="34" charset="-122"/>
+                <a:cs typeface="맑은 고딕" pitchFamily="34" charset="-120"/>
+              </a:rPr>
+              <a:t>Tier 3 · 데이터 출처 배지 (sources)</a:t>
+            </a:r>
+            <a:endParaRPr lang="en-US" sz="1050" dirty="0"/>
+          </a:p>
+          <a:p>
+            <a:pPr indent="0" marL="0">
+              <a:buNone/>
+            </a:pPr>
+            <a:r>
+              <a:rPr lang="en-US" sz="1050" b="1" dirty="0">
+                <a:solidFill>
+                  <a:srgbClr val="F8FAFC"/>
+                </a:solidFill>
+                <a:latin typeface="맑은 고딕" pitchFamily="34" charset="0"/>
+                <a:ea typeface="맑은 고딕" pitchFamily="34" charset="-122"/>
+                <a:cs typeface="맑은 고딕" pitchFamily="34" charset="-120"/>
+              </a:rPr>
+              <a:t>참조한 벤치마크 출처(3DMark, 퀘이사존, DB) 하단 표시</a:t>
+            </a:r>
+            <a:endParaRPr lang="en-US" sz="1050" dirty="0"/>
           </a:p>
         </p:txBody>
       </p:sp>
@@ -8115,14 +8197,14 @@
         <p:spPr>
           <a:xfrm>
             <a:off x="457200" y="228600"/>
-            <a:ext cx="11274552" cy="27432"/>
+            <a:ext cx="11274552" cy="36576"/>
           </a:xfrm>
           <a:prstGeom prst="rect">
             <a:avLst/>
           </a:prstGeom>
           <a:solidFill>
             <a:srgbClr val="00F3FF">
-              <a:alpha val="30000"/>
+              <a:alpha val="40000"/>
             </a:srgbClr>
           </a:solidFill>
           <a:ln w="12700">
@@ -8144,7 +8226,7 @@
         <p:spPr>
           <a:xfrm>
             <a:off x="457200" y="384048"/>
-            <a:ext cx="3474720" cy="310896"/>
+            <a:ext cx="3840480" cy="329184"/>
           </a:xfrm>
           <a:prstGeom prst="roundRect">
             <a:avLst>
@@ -8173,7 +8255,7 @@
         <p:spPr>
           <a:xfrm>
             <a:off x="457200" y="384048"/>
-            <a:ext cx="3474720" cy="310896"/>
+            <a:ext cx="3840480" cy="329184"/>
           </a:xfrm>
           <a:prstGeom prst="rect">
             <a:avLst/>
@@ -8189,17 +8271,17 @@
               <a:buNone/>
             </a:pPr>
             <a:r>
-              <a:rPr lang="en-US" sz="1000" b="1" dirty="0">
+              <a:rPr lang="en-US" sz="1050" b="1" dirty="0">
                 <a:solidFill>
                   <a:srgbClr val="00F3FF"/>
                 </a:solidFill>
-                <a:latin typeface="Pretendard" pitchFamily="34" charset="0"/>
-                <a:ea typeface="Pretendard" pitchFamily="34" charset="-122"/>
-                <a:cs typeface="Pretendard" pitchFamily="34" charset="-120"/>
+                <a:latin typeface="맑은 고딕" pitchFamily="34" charset="0"/>
+                <a:ea typeface="맑은 고딕" pitchFamily="34" charset="-122"/>
+                <a:cs typeface="맑은 고딕" pitchFamily="34" charset="-120"/>
               </a:rPr>
               <a:t>3. 서비스 기획서 — 실제 구현된 4대 핵심 기능</a:t>
             </a:r>
-            <a:endParaRPr lang="en-US" sz="1000" dirty="0"/>
+            <a:endParaRPr lang="en-US" sz="1050" dirty="0"/>
           </a:p>
         </p:txBody>
       </p:sp>
@@ -8211,7 +8293,7 @@
         </p:nvSpPr>
         <p:spPr>
           <a:xfrm>
-            <a:off x="457200" y="777240"/>
+            <a:off x="457200" y="786384"/>
             <a:ext cx="11274552" cy="502920"/>
           </a:xfrm>
           <a:prstGeom prst="rect">
@@ -8228,17 +8310,17 @@
               <a:buNone/>
             </a:pPr>
             <a:r>
-              <a:rPr lang="en-US" sz="2400" b="1" dirty="0">
-                <a:solidFill>
-                  <a:srgbClr val="F8FAFC"/>
-                </a:solidFill>
-                <a:latin typeface="Pretendard" pitchFamily="34" charset="0"/>
-                <a:ea typeface="Pretendard" pitchFamily="34" charset="-122"/>
-                <a:cs typeface="Pretendard" pitchFamily="34" charset="-120"/>
-              </a:rPr>
-              <a:t>사용자가 최종 견적 페이지에서 경험하는 4가지 핵심 기능</a:t>
-            </a:r>
-            <a:endParaRPr lang="en-US" sz="2400" dirty="0"/>
+              <a:rPr lang="en-US" sz="2200" b="1" dirty="0">
+                <a:solidFill>
+                  <a:srgbClr val="F8FAFC"/>
+                </a:solidFill>
+                <a:latin typeface="맑은 고딕" pitchFamily="34" charset="0"/>
+                <a:ea typeface="맑은 고딕" pitchFamily="34" charset="-122"/>
+                <a:cs typeface="맑은 고딕" pitchFamily="34" charset="-120"/>
+              </a:rPr>
+              <a:t>최종 견적 페이지(BuilderResultPage.vue)에 구현된 4가지 핵심 기능</a:t>
+            </a:r>
+            <a:endParaRPr lang="en-US" sz="2200" dirty="0"/>
           </a:p>
         </p:txBody>
       </p:sp>
@@ -8294,13 +8376,13 @@
             <a:r>
               <a:rPr lang="en-US" sz="950" dirty="0">
                 <a:solidFill>
-                  <a:srgbClr val="64748B"/>
-                </a:solidFill>
-                <a:latin typeface="Pretendard" pitchFamily="34" charset="0"/>
-                <a:ea typeface="Pretendard" pitchFamily="34" charset="-122"/>
-                <a:cs typeface="Pretendard" pitchFamily="34" charset="-120"/>
-              </a:rPr>
-              <a:t>PC-FIT 2.0 : AI 부품·가격 비교 &amp; 가성비 어드바이저</a:t>
+                  <a:srgbClr val="94A3B8"/>
+                </a:solidFill>
+                <a:latin typeface="맑은 고딕" pitchFamily="34" charset="0"/>
+                <a:ea typeface="맑은 고딕" pitchFamily="34" charset="-122"/>
+                <a:cs typeface="맑은 고딕" pitchFamily="34" charset="-120"/>
+              </a:rPr>
+              <a:t>PC-FIT 2.0 : AI 부품·가격 비교 및 가성비 어드바이저</a:t>
             </a:r>
             <a:endParaRPr lang="en-US" sz="950" dirty="0"/>
           </a:p>
@@ -8335,9 +8417,9 @@
                 <a:solidFill>
                   <a:srgbClr val="00F3FF"/>
                 </a:solidFill>
-                <a:latin typeface="Consolas" pitchFamily="34" charset="0"/>
-                <a:ea typeface="Consolas" pitchFamily="34" charset="-122"/>
-                <a:cs typeface="Consolas" pitchFamily="34" charset="-120"/>
+                <a:latin typeface="맑은 고딕" pitchFamily="34" charset="0"/>
+                <a:ea typeface="맑은 고딕" pitchFamily="34" charset="-122"/>
+                <a:cs typeface="맑은 고딕" pitchFamily="34" charset="-120"/>
               </a:rPr>
               <a:t>SLIDE 06 / 09</a:t>
             </a:r>
@@ -8374,14 +8456,43 @@
       </p:sp>
       <p:sp>
         <p:nvSpPr>
-          <p:cNvPr id="10" name="Text 8"/>
-          <p:cNvSpPr/>
-          <p:nvPr/>
-        </p:nvSpPr>
-        <p:spPr>
-          <a:xfrm>
-            <a:off x="594360" y="1645920"/>
-            <a:ext cx="2423160" cy="1371600"/>
+          <p:cNvPr id="10" name="Shape 8"/>
+          <p:cNvSpPr/>
+          <p:nvPr/>
+        </p:nvSpPr>
+        <p:spPr>
+          <a:xfrm>
+            <a:off x="960120" y="1691640"/>
+            <a:ext cx="1691640" cy="329184"/>
+          </a:xfrm>
+          <a:prstGeom prst="roundRect">
+            <a:avLst>
+              <a:gd name="adj" fmla="val 50000"/>
+            </a:avLst>
+          </a:prstGeom>
+          <a:solidFill>
+            <a:srgbClr val="00F3FF">
+              <a:alpha val="18000"/>
+            </a:srgbClr>
+          </a:solidFill>
+          <a:ln w="12700">
+            <a:solidFill>
+              <a:srgbClr val="00F3FF"/>
+            </a:solidFill>
+            <a:prstDash val="solid"/>
+          </a:ln>
+        </p:spPr>
+      </p:sp>
+      <p:sp>
+        <p:nvSpPr>
+          <p:cNvPr id="11" name="Text 9"/>
+          <p:cNvSpPr/>
+          <p:nvPr/>
+        </p:nvSpPr>
+        <p:spPr>
+          <a:xfrm>
+            <a:off x="960120" y="1691640"/>
+            <a:ext cx="1691640" cy="329184"/>
           </a:xfrm>
           <a:prstGeom prst="rect">
             <a:avLst/>
@@ -8397,76 +8508,84 @@
               <a:buNone/>
             </a:pPr>
             <a:r>
-              <a:rPr lang="en-US" sz="1500" b="1" dirty="0">
-                <a:solidFill>
-                  <a:srgbClr val="F8FAFC"/>
-                </a:solidFill>
-                <a:latin typeface="Pretendard" pitchFamily="34" charset="0"/>
-                <a:ea typeface="Pretendard" pitchFamily="34" charset="-122"/>
-                <a:cs typeface="Pretendard" pitchFamily="34" charset="-120"/>
-              </a:rPr>
-              <a:t>⚡</a:t>
-            </a:r>
-            <a:endParaRPr lang="en-US" sz="1500" dirty="0"/>
-          </a:p>
+              <a:rPr lang="en-US" sz="1000" b="1" dirty="0">
+                <a:solidFill>
+                  <a:srgbClr val="00F3FF"/>
+                </a:solidFill>
+                <a:latin typeface="맑은 고딕" pitchFamily="34" charset="0"/>
+                <a:ea typeface="맑은 고딕" pitchFamily="34" charset="-122"/>
+                <a:cs typeface="맑은 고딕" pitchFamily="34" charset="-120"/>
+              </a:rPr>
+              <a:t>FUNCTION 01</a:t>
+            </a:r>
+            <a:endParaRPr lang="en-US" sz="1000" dirty="0"/>
+          </a:p>
+        </p:txBody>
+      </p:sp>
+      <p:sp>
+        <p:nvSpPr>
+          <p:cNvPr id="12" name="Text 10"/>
+          <p:cNvSpPr/>
+          <p:nvPr/>
+        </p:nvSpPr>
+        <p:spPr>
+          <a:xfrm>
+            <a:off x="594360" y="2194560"/>
+            <a:ext cx="2423160" cy="548640"/>
+          </a:xfrm>
+          <a:prstGeom prst="rect">
+            <a:avLst/>
+          </a:prstGeom>
+          <a:noFill/>
+          <a:ln/>
+        </p:spPr>
+        <p:txBody>
+          <a:bodyPr wrap="square" rtlCol="0" anchor="ctr"/>
+          <a:lstStyle/>
           <a:p>
             <a:pPr algn="ctr" indent="0" marL="0">
               <a:buNone/>
             </a:pPr>
             <a:r>
-              <a:rPr lang="en-US" sz="1500" b="1" dirty="0">
-                <a:solidFill>
-                  <a:srgbClr val="F8FAFC"/>
-                </a:solidFill>
-                <a:latin typeface="Pretendard" pitchFamily="34" charset="0"/>
-                <a:ea typeface="Pretendard" pitchFamily="34" charset="-122"/>
-                <a:cs typeface="Pretendard" pitchFamily="34" charset="-120"/>
-              </a:rPr>
-              <a:t>FEATURE 01</a:t>
-            </a:r>
-            <a:endParaRPr lang="en-US" sz="1500" dirty="0"/>
-          </a:p>
+              <a:rPr lang="en-US" sz="1600" b="1" dirty="0">
+                <a:solidFill>
+                  <a:srgbClr val="F8FAFC"/>
+                </a:solidFill>
+                <a:latin typeface="맑은 고딕" pitchFamily="34" charset="0"/>
+                <a:ea typeface="맑은 고딕" pitchFamily="34" charset="-122"/>
+                <a:cs typeface="맑은 고딕" pitchFamily="34" charset="-120"/>
+              </a:rPr>
+              <a:t>맞춤형 빠른 질문 칩</a:t>
+            </a:r>
+            <a:endParaRPr lang="en-US" sz="1600" dirty="0"/>
+          </a:p>
+        </p:txBody>
+      </p:sp>
+      <p:sp>
+        <p:nvSpPr>
+          <p:cNvPr id="13" name="Text 11"/>
+          <p:cNvSpPr/>
+          <p:nvPr/>
+        </p:nvSpPr>
+        <p:spPr>
+          <a:xfrm>
+            <a:off x="640080" y="2880360"/>
+            <a:ext cx="2331720" cy="1920240"/>
+          </a:xfrm>
+          <a:prstGeom prst="rect">
+            <a:avLst/>
+          </a:prstGeom>
+          <a:noFill/>
+          <a:ln/>
+        </p:spPr>
+        <p:txBody>
+          <a:bodyPr wrap="square" rtlCol="0" anchor="t"/>
+          <a:lstStyle/>
           <a:p>
             <a:pPr algn="ctr" indent="0" marL="0">
-              <a:buNone/>
-            </a:pPr>
-            <a:r>
-              <a:rPr lang="en-US" sz="1500" b="1" dirty="0">
-                <a:solidFill>
-                  <a:srgbClr val="F8FAFC"/>
-                </a:solidFill>
-                <a:latin typeface="Pretendard" pitchFamily="34" charset="0"/>
-                <a:ea typeface="Pretendard" pitchFamily="34" charset="-122"/>
-                <a:cs typeface="Pretendard" pitchFamily="34" charset="-120"/>
-              </a:rPr>
-              <a:t>맞춤형 빠른 질문 칩</a:t>
-            </a:r>
-            <a:endParaRPr lang="en-US" sz="1500" dirty="0"/>
-          </a:p>
-        </p:txBody>
-      </p:sp>
-      <p:sp>
-        <p:nvSpPr>
-          <p:cNvPr id="11" name="Text 9"/>
-          <p:cNvSpPr/>
-          <p:nvPr/>
-        </p:nvSpPr>
-        <p:spPr>
-          <a:xfrm>
-            <a:off x="640080" y="3108960"/>
-            <a:ext cx="2331720" cy="1554480"/>
-          </a:xfrm>
-          <a:prstGeom prst="rect">
-            <a:avLst/>
-          </a:prstGeom>
-          <a:noFill/>
-          <a:ln/>
-        </p:spPr>
-        <p:txBody>
-          <a:bodyPr wrap="square" rtlCol="0" anchor="t"/>
-          <a:lstStyle/>
-          <a:p>
-            <a:pPr algn="ctr" indent="0" marL="0">
+              <a:lnSpc>
+                <a:spcPct val="130000"/>
+              </a:lnSpc>
               <a:buNone/>
             </a:pPr>
             <a:r>
@@ -8474,11 +8593,11 @@
                 <a:solidFill>
                   <a:srgbClr val="CBD5E1"/>
                 </a:solidFill>
-                <a:latin typeface="Pretendard" pitchFamily="34" charset="0"/>
-                <a:ea typeface="Pretendard" pitchFamily="34" charset="-122"/>
-                <a:cs typeface="Pretendard" pitchFamily="34" charset="-120"/>
-              </a:rPr>
-              <a:t>내 견적의 GPU·CPU 대안 부품과 예산 초과분을 계산해 가장 고민할 비교 질문 버튼 3개 자동 생성</a:t>
+                <a:latin typeface="맑은 고딕" pitchFamily="34" charset="0"/>
+                <a:ea typeface="맑은 고딕" pitchFamily="34" charset="-122"/>
+                <a:cs typeface="맑은 고딕" pitchFamily="34" charset="-120"/>
+              </a:rPr>
+              <a:t>현재 견적의 GPU·CPU 대안 부품과 예산 초과 여부를 계산해 가장 많이 고민하는 비교 질문 버튼 3개를 자동 생성합니다.</a:t>
             </a:r>
             <a:endParaRPr lang="en-US" sz="1150" dirty="0"/>
           </a:p>
@@ -8486,7 +8605,7 @@
       </p:sp>
       <p:sp>
         <p:nvSpPr>
-          <p:cNvPr id="12" name="Shape 10"/>
+          <p:cNvPr id="14" name="Shape 12"/>
           <p:cNvSpPr/>
           <p:nvPr/>
         </p:nvSpPr>
@@ -8513,7 +8632,7 @@
       </p:sp>
       <p:sp>
         <p:nvSpPr>
-          <p:cNvPr id="13" name="Text 11"/>
+          <p:cNvPr id="15" name="Text 13"/>
           <p:cNvSpPr/>
           <p:nvPr/>
         </p:nvSpPr>
@@ -8536,23 +8655,23 @@
               <a:buNone/>
             </a:pPr>
             <a:r>
-              <a:rPr lang="en-US" sz="1100" b="1" dirty="0">
+              <a:rPr lang="en-US" sz="1050" b="1" dirty="0">
                 <a:solidFill>
                   <a:srgbClr val="00F3FF"/>
                 </a:solidFill>
-                <a:latin typeface="Pretendard" pitchFamily="34" charset="0"/>
-                <a:ea typeface="Pretendard" pitchFamily="34" charset="-122"/>
-                <a:cs typeface="Pretendard" pitchFamily="34" charset="-120"/>
-              </a:rPr>
-              <a:t>타자 입력 없이 원클릭 비교!</a:t>
-            </a:r>
-            <a:endParaRPr lang="en-US" sz="1100" dirty="0"/>
-          </a:p>
-        </p:txBody>
-      </p:sp>
-      <p:sp>
-        <p:nvSpPr>
-          <p:cNvPr id="14" name="Shape 12"/>
+                <a:latin typeface="맑은 고딕" pitchFamily="34" charset="0"/>
+                <a:ea typeface="맑은 고딕" pitchFamily="34" charset="-122"/>
+                <a:cs typeface="맑은 고딕" pitchFamily="34" charset="-120"/>
+              </a:rPr>
+              <a:t>직접 타자 칠 필요 없이 클릭 비교</a:t>
+            </a:r>
+            <a:endParaRPr lang="en-US" sz="1050" dirty="0"/>
+          </a:p>
+        </p:txBody>
+      </p:sp>
+      <p:sp>
+        <p:nvSpPr>
+          <p:cNvPr id="16" name="Shape 14"/>
           <p:cNvSpPr/>
           <p:nvPr/>
         </p:nvSpPr>
@@ -8579,14 +8698,43 @@
       </p:sp>
       <p:sp>
         <p:nvSpPr>
-          <p:cNvPr id="15" name="Text 13"/>
-          <p:cNvSpPr/>
-          <p:nvPr/>
-        </p:nvSpPr>
-        <p:spPr>
-          <a:xfrm>
-            <a:off x="3447288" y="1645920"/>
-            <a:ext cx="2423160" cy="1371600"/>
+          <p:cNvPr id="17" name="Shape 15"/>
+          <p:cNvSpPr/>
+          <p:nvPr/>
+        </p:nvSpPr>
+        <p:spPr>
+          <a:xfrm>
+            <a:off x="3813048" y="1691640"/>
+            <a:ext cx="1691640" cy="329184"/>
+          </a:xfrm>
+          <a:prstGeom prst="roundRect">
+            <a:avLst>
+              <a:gd name="adj" fmla="val 50000"/>
+            </a:avLst>
+          </a:prstGeom>
+          <a:solidFill>
+            <a:srgbClr val="FF5CA8">
+              <a:alpha val="18000"/>
+            </a:srgbClr>
+          </a:solidFill>
+          <a:ln w="12700">
+            <a:solidFill>
+              <a:srgbClr val="FF5CA8"/>
+            </a:solidFill>
+            <a:prstDash val="solid"/>
+          </a:ln>
+        </p:spPr>
+      </p:sp>
+      <p:sp>
+        <p:nvSpPr>
+          <p:cNvPr id="18" name="Text 16"/>
+          <p:cNvSpPr/>
+          <p:nvPr/>
+        </p:nvSpPr>
+        <p:spPr>
+          <a:xfrm>
+            <a:off x="3813048" y="1691640"/>
+            <a:ext cx="1691640" cy="329184"/>
           </a:xfrm>
           <a:prstGeom prst="rect">
             <a:avLst/>
@@ -8602,76 +8750,84 @@
               <a:buNone/>
             </a:pPr>
             <a:r>
-              <a:rPr lang="en-US" sz="1500" b="1" dirty="0">
-                <a:solidFill>
-                  <a:srgbClr val="F8FAFC"/>
-                </a:solidFill>
-                <a:latin typeface="Pretendard" pitchFamily="34" charset="0"/>
-                <a:ea typeface="Pretendard" pitchFamily="34" charset="-122"/>
-                <a:cs typeface="Pretendard" pitchFamily="34" charset="-120"/>
-              </a:rPr>
-              <a:t>📊</a:t>
-            </a:r>
-            <a:endParaRPr lang="en-US" sz="1500" dirty="0"/>
-          </a:p>
+              <a:rPr lang="en-US" sz="1000" b="1" dirty="0">
+                <a:solidFill>
+                  <a:srgbClr val="FF5CA8"/>
+                </a:solidFill>
+                <a:latin typeface="맑은 고딕" pitchFamily="34" charset="0"/>
+                <a:ea typeface="맑은 고딕" pitchFamily="34" charset="-122"/>
+                <a:cs typeface="맑은 고딕" pitchFamily="34" charset="-120"/>
+              </a:rPr>
+              <a:t>FUNCTION 02</a:t>
+            </a:r>
+            <a:endParaRPr lang="en-US" sz="1000" dirty="0"/>
+          </a:p>
+        </p:txBody>
+      </p:sp>
+      <p:sp>
+        <p:nvSpPr>
+          <p:cNvPr id="19" name="Text 17"/>
+          <p:cNvSpPr/>
+          <p:nvPr/>
+        </p:nvSpPr>
+        <p:spPr>
+          <a:xfrm>
+            <a:off x="3447288" y="2194560"/>
+            <a:ext cx="2423160" cy="548640"/>
+          </a:xfrm>
+          <a:prstGeom prst="rect">
+            <a:avLst/>
+          </a:prstGeom>
+          <a:noFill/>
+          <a:ln/>
+        </p:spPr>
+        <p:txBody>
+          <a:bodyPr wrap="square" rtlCol="0" anchor="ctr"/>
+          <a:lstStyle/>
           <a:p>
             <a:pPr algn="ctr" indent="0" marL="0">
               <a:buNone/>
             </a:pPr>
             <a:r>
-              <a:rPr lang="en-US" sz="1500" b="1" dirty="0">
-                <a:solidFill>
-                  <a:srgbClr val="F8FAFC"/>
-                </a:solidFill>
-                <a:latin typeface="Pretendard" pitchFamily="34" charset="0"/>
-                <a:ea typeface="Pretendard" pitchFamily="34" charset="-122"/>
-                <a:cs typeface="Pretendard" pitchFamily="34" charset="-120"/>
-              </a:rPr>
-              <a:t>FEATURE 02</a:t>
-            </a:r>
-            <a:endParaRPr lang="en-US" sz="1500" dirty="0"/>
-          </a:p>
+              <a:rPr lang="en-US" sz="1600" b="1" dirty="0">
+                <a:solidFill>
+                  <a:srgbClr val="F8FAFC"/>
+                </a:solidFill>
+                <a:latin typeface="맑은 고딕" pitchFamily="34" charset="0"/>
+                <a:ea typeface="맑은 고딕" pitchFamily="34" charset="-122"/>
+                <a:cs typeface="맑은 고딕" pitchFamily="34" charset="-120"/>
+              </a:rPr>
+              <a:t>FPS 차트 &amp; 스펙 비교표</a:t>
+            </a:r>
+            <a:endParaRPr lang="en-US" sz="1600" dirty="0"/>
+          </a:p>
+        </p:txBody>
+      </p:sp>
+      <p:sp>
+        <p:nvSpPr>
+          <p:cNvPr id="20" name="Text 18"/>
+          <p:cNvSpPr/>
+          <p:nvPr/>
+        </p:nvSpPr>
+        <p:spPr>
+          <a:xfrm>
+            <a:off x="3493008" y="2880360"/>
+            <a:ext cx="2331720" cy="1920240"/>
+          </a:xfrm>
+          <a:prstGeom prst="rect">
+            <a:avLst/>
+          </a:prstGeom>
+          <a:noFill/>
+          <a:ln/>
+        </p:spPr>
+        <p:txBody>
+          <a:bodyPr wrap="square" rtlCol="0" anchor="t"/>
+          <a:lstStyle/>
           <a:p>
             <a:pPr algn="ctr" indent="0" marL="0">
-              <a:buNone/>
-            </a:pPr>
-            <a:r>
-              <a:rPr lang="en-US" sz="1500" b="1" dirty="0">
-                <a:solidFill>
-                  <a:srgbClr val="F8FAFC"/>
-                </a:solidFill>
-                <a:latin typeface="Pretendard" pitchFamily="34" charset="0"/>
-                <a:ea typeface="Pretendard" pitchFamily="34" charset="-122"/>
-                <a:cs typeface="Pretendard" pitchFamily="34" charset="-120"/>
-              </a:rPr>
-              <a:t>FPS 차트 &amp; 스펙 비교표</a:t>
-            </a:r>
-            <a:endParaRPr lang="en-US" sz="1500" dirty="0"/>
-          </a:p>
-        </p:txBody>
-      </p:sp>
-      <p:sp>
-        <p:nvSpPr>
-          <p:cNvPr id="16" name="Text 14"/>
-          <p:cNvSpPr/>
-          <p:nvPr/>
-        </p:nvSpPr>
-        <p:spPr>
-          <a:xfrm>
-            <a:off x="3493008" y="3108960"/>
-            <a:ext cx="2331720" cy="1554480"/>
-          </a:xfrm>
-          <a:prstGeom prst="rect">
-            <a:avLst/>
-          </a:prstGeom>
-          <a:noFill/>
-          <a:ln/>
-        </p:spPr>
-        <p:txBody>
-          <a:bodyPr wrap="square" rtlCol="0" anchor="t"/>
-          <a:lstStyle/>
-          <a:p>
-            <a:pPr algn="ctr" indent="0" marL="0">
+              <a:lnSpc>
+                <a:spcPct val="130000"/>
+              </a:lnSpc>
               <a:buNone/>
             </a:pPr>
             <a:r>
@@ -8679,11 +8835,11 @@
                 <a:solidFill>
                   <a:srgbClr val="CBD5E1"/>
                 </a:solidFill>
-                <a:latin typeface="Pretendard" pitchFamily="34" charset="0"/>
-                <a:ea typeface="Pretendard" pitchFamily="34" charset="-122"/>
-                <a:cs typeface="Pretendard" pitchFamily="34" charset="-120"/>
-              </a:rPr>
-              <a:t>두 부품의 게임 평균 FPS·3DMark 점수 막대그래프와 실구매가 차이·VRAM·권장파워 비교표 동시 출력</a:t>
+                <a:latin typeface="맑은 고딕" pitchFamily="34" charset="0"/>
+                <a:ea typeface="맑은 고딕" pitchFamily="34" charset="-122"/>
+                <a:cs typeface="맑은 고딕" pitchFamily="34" charset="-120"/>
+              </a:rPr>
+              <a:t>두 부품의 게임 평균 프레임·3DMark 점수 가로 막대그래프와 가격 차이·VRAM·소비전력 비교표를 나란히 보여줍니다.</a:t>
             </a:r>
             <a:endParaRPr lang="en-US" sz="1150" dirty="0"/>
           </a:p>
@@ -8691,7 +8847,7 @@
       </p:sp>
       <p:sp>
         <p:nvSpPr>
-          <p:cNvPr id="17" name="Shape 15"/>
+          <p:cNvPr id="21" name="Shape 19"/>
           <p:cNvSpPr/>
           <p:nvPr/>
         </p:nvSpPr>
@@ -8718,7 +8874,7 @@
       </p:sp>
       <p:sp>
         <p:nvSpPr>
-          <p:cNvPr id="18" name="Text 16"/>
+          <p:cNvPr id="22" name="Text 20"/>
           <p:cNvSpPr/>
           <p:nvPr/>
         </p:nvSpPr>
@@ -8741,23 +8897,23 @@
               <a:buNone/>
             </a:pPr>
             <a:r>
-              <a:rPr lang="en-US" sz="1100" b="1" dirty="0">
+              <a:rPr lang="en-US" sz="1050" b="1" dirty="0">
                 <a:solidFill>
                   <a:srgbClr val="FF5CA8"/>
                 </a:solidFill>
-                <a:latin typeface="Pretendard" pitchFamily="34" charset="0"/>
-                <a:ea typeface="Pretendard" pitchFamily="34" charset="-122"/>
-                <a:cs typeface="Pretendard" pitchFamily="34" charset="-120"/>
-              </a:rPr>
-              <a:t>가격 vs 성능을 한눈에 비교!</a:t>
-            </a:r>
-            <a:endParaRPr lang="en-US" sz="1100" dirty="0"/>
-          </a:p>
-        </p:txBody>
-      </p:sp>
-      <p:sp>
-        <p:nvSpPr>
-          <p:cNvPr id="19" name="Shape 17"/>
+                <a:latin typeface="맑은 고딕" pitchFamily="34" charset="0"/>
+                <a:ea typeface="맑은 고딕" pitchFamily="34" charset="-122"/>
+                <a:cs typeface="맑은 고딕" pitchFamily="34" charset="-120"/>
+              </a:rPr>
+              <a:t>가격 차이 vs 성능 차이 직관적 확인</a:t>
+            </a:r>
+            <a:endParaRPr lang="en-US" sz="1050" dirty="0"/>
+          </a:p>
+        </p:txBody>
+      </p:sp>
+      <p:sp>
+        <p:nvSpPr>
+          <p:cNvPr id="23" name="Shape 21"/>
           <p:cNvSpPr/>
           <p:nvPr/>
         </p:nvSpPr>
@@ -8784,14 +8940,43 @@
       </p:sp>
       <p:sp>
         <p:nvSpPr>
-          <p:cNvPr id="20" name="Text 18"/>
-          <p:cNvSpPr/>
-          <p:nvPr/>
-        </p:nvSpPr>
-        <p:spPr>
-          <a:xfrm>
-            <a:off x="6300216" y="1645920"/>
-            <a:ext cx="2423160" cy="1371600"/>
+          <p:cNvPr id="24" name="Shape 22"/>
+          <p:cNvSpPr/>
+          <p:nvPr/>
+        </p:nvSpPr>
+        <p:spPr>
+          <a:xfrm>
+            <a:off x="6665976" y="1691640"/>
+            <a:ext cx="1691640" cy="329184"/>
+          </a:xfrm>
+          <a:prstGeom prst="roundRect">
+            <a:avLst>
+              <a:gd name="adj" fmla="val 50000"/>
+            </a:avLst>
+          </a:prstGeom>
+          <a:solidFill>
+            <a:srgbClr val="D97BFF">
+              <a:alpha val="18000"/>
+            </a:srgbClr>
+          </a:solidFill>
+          <a:ln w="12700">
+            <a:solidFill>
+              <a:srgbClr val="D97BFF"/>
+            </a:solidFill>
+            <a:prstDash val="solid"/>
+          </a:ln>
+        </p:spPr>
+      </p:sp>
+      <p:sp>
+        <p:nvSpPr>
+          <p:cNvPr id="25" name="Text 23"/>
+          <p:cNvSpPr/>
+          <p:nvPr/>
+        </p:nvSpPr>
+        <p:spPr>
+          <a:xfrm>
+            <a:off x="6665976" y="1691640"/>
+            <a:ext cx="1691640" cy="329184"/>
           </a:xfrm>
           <a:prstGeom prst="rect">
             <a:avLst/>
@@ -8807,76 +8992,84 @@
               <a:buNone/>
             </a:pPr>
             <a:r>
-              <a:rPr lang="en-US" sz="1500" b="1" dirty="0">
-                <a:solidFill>
-                  <a:srgbClr val="F8FAFC"/>
-                </a:solidFill>
-                <a:latin typeface="Pretendard" pitchFamily="34" charset="0"/>
-                <a:ea typeface="Pretendard" pitchFamily="34" charset="-122"/>
-                <a:cs typeface="Pretendard" pitchFamily="34" charset="-120"/>
-              </a:rPr>
-              <a:t>🛡️</a:t>
-            </a:r>
-            <a:endParaRPr lang="en-US" sz="1500" dirty="0"/>
-          </a:p>
+              <a:rPr lang="en-US" sz="1000" b="1" dirty="0">
+                <a:solidFill>
+                  <a:srgbClr val="D97BFF"/>
+                </a:solidFill>
+                <a:latin typeface="맑은 고딕" pitchFamily="34" charset="0"/>
+                <a:ea typeface="맑은 고딕" pitchFamily="34" charset="-122"/>
+                <a:cs typeface="맑은 고딕" pitchFamily="34" charset="-120"/>
+              </a:rPr>
+              <a:t>FUNCTION 03</a:t>
+            </a:r>
+            <a:endParaRPr lang="en-US" sz="1000" dirty="0"/>
+          </a:p>
+        </p:txBody>
+      </p:sp>
+      <p:sp>
+        <p:nvSpPr>
+          <p:cNvPr id="26" name="Text 24"/>
+          <p:cNvSpPr/>
+          <p:nvPr/>
+        </p:nvSpPr>
+        <p:spPr>
+          <a:xfrm>
+            <a:off x="6300216" y="2194560"/>
+            <a:ext cx="2423160" cy="548640"/>
+          </a:xfrm>
+          <a:prstGeom prst="rect">
+            <a:avLst/>
+          </a:prstGeom>
+          <a:noFill/>
+          <a:ln/>
+        </p:spPr>
+        <p:txBody>
+          <a:bodyPr wrap="square" rtlCol="0" anchor="ctr"/>
+          <a:lstStyle/>
           <a:p>
             <a:pPr algn="ctr" indent="0" marL="0">
               <a:buNone/>
             </a:pPr>
             <a:r>
-              <a:rPr lang="en-US" sz="1500" b="1" dirty="0">
-                <a:solidFill>
-                  <a:srgbClr val="F8FAFC"/>
-                </a:solidFill>
-                <a:latin typeface="Pretendard" pitchFamily="34" charset="0"/>
-                <a:ea typeface="Pretendard" pitchFamily="34" charset="-122"/>
-                <a:cs typeface="Pretendard" pitchFamily="34" charset="-120"/>
-              </a:rPr>
-              <a:t>FEATURE 03</a:t>
-            </a:r>
-            <a:endParaRPr lang="en-US" sz="1500" dirty="0"/>
-          </a:p>
+              <a:rPr lang="en-US" sz="1600" b="1" dirty="0">
+                <a:solidFill>
+                  <a:srgbClr val="F8FAFC"/>
+                </a:solidFill>
+                <a:latin typeface="맑은 고딕" pitchFamily="34" charset="0"/>
+                <a:ea typeface="맑은 고딕" pitchFamily="34" charset="-122"/>
+                <a:cs typeface="맑은 고딕" pitchFamily="34" charset="-120"/>
+              </a:rPr>
+              <a:t>분석 데이터 출처 표시</a:t>
+            </a:r>
+            <a:endParaRPr lang="en-US" sz="1600" dirty="0"/>
+          </a:p>
+        </p:txBody>
+      </p:sp>
+      <p:sp>
+        <p:nvSpPr>
+          <p:cNvPr id="27" name="Text 25"/>
+          <p:cNvSpPr/>
+          <p:nvPr/>
+        </p:nvSpPr>
+        <p:spPr>
+          <a:xfrm>
+            <a:off x="6345936" y="2880360"/>
+            <a:ext cx="2331720" cy="1920240"/>
+          </a:xfrm>
+          <a:prstGeom prst="rect">
+            <a:avLst/>
+          </a:prstGeom>
+          <a:noFill/>
+          <a:ln/>
+        </p:spPr>
+        <p:txBody>
+          <a:bodyPr wrap="square" rtlCol="0" anchor="t"/>
+          <a:lstStyle/>
           <a:p>
             <a:pPr algn="ctr" indent="0" marL="0">
-              <a:buNone/>
-            </a:pPr>
-            <a:r>
-              <a:rPr lang="en-US" sz="1500" b="1" dirty="0">
-                <a:solidFill>
-                  <a:srgbClr val="F8FAFC"/>
-                </a:solidFill>
-                <a:latin typeface="Pretendard" pitchFamily="34" charset="0"/>
-                <a:ea typeface="Pretendard" pitchFamily="34" charset="-122"/>
-                <a:cs typeface="Pretendard" pitchFamily="34" charset="-120"/>
-              </a:rPr>
-              <a:t>실측 데이터 출처 배지</a:t>
-            </a:r>
-            <a:endParaRPr lang="en-US" sz="1500" dirty="0"/>
-          </a:p>
-        </p:txBody>
-      </p:sp>
-      <p:sp>
-        <p:nvSpPr>
-          <p:cNvPr id="21" name="Text 19"/>
-          <p:cNvSpPr/>
-          <p:nvPr/>
-        </p:nvSpPr>
-        <p:spPr>
-          <a:xfrm>
-            <a:off x="6345936" y="3108960"/>
-            <a:ext cx="2331720" cy="1554480"/>
-          </a:xfrm>
-          <a:prstGeom prst="rect">
-            <a:avLst/>
-          </a:prstGeom>
-          <a:noFill/>
-          <a:ln/>
-        </p:spPr>
-        <p:txBody>
-          <a:bodyPr wrap="square" rtlCol="0" anchor="t"/>
-          <a:lstStyle/>
-          <a:p>
-            <a:pPr algn="ctr" indent="0" marL="0">
+              <a:lnSpc>
+                <a:spcPct val="130000"/>
+              </a:lnSpc>
               <a:buNone/>
             </a:pPr>
             <a:r>
@@ -8884,11 +9077,11 @@
                 <a:solidFill>
                   <a:srgbClr val="CBD5E1"/>
                 </a:solidFill>
-                <a:latin typeface="Pretendard" pitchFamily="34" charset="0"/>
-                <a:ea typeface="Pretendard" pitchFamily="34" charset="-122"/>
-                <a:cs typeface="Pretendard" pitchFamily="34" charset="-120"/>
-              </a:rPr>
-              <a:t>분석 결과 하단에 Supabase DB 실측 스펙 대조 건수와 퀘이사존·3DMark·TechPowerUp 출처 명시</a:t>
+                <a:latin typeface="맑은 고딕" pitchFamily="34" charset="0"/>
+                <a:ea typeface="맑은 고딕" pitchFamily="34" charset="-122"/>
+                <a:cs typeface="맑은 고딕" pitchFamily="34" charset="-120"/>
+              </a:rPr>
+              <a:t>비교 결과 하단에 Supabase DB 부품 매칭 건수와 3DMark·퀘이사존·TechPowerUp 등 참조 출처를 투명하게 표시합니다.</a:t>
             </a:r>
             <a:endParaRPr lang="en-US" sz="1150" dirty="0"/>
           </a:p>
@@ -8896,7 +9089,7 @@
       </p:sp>
       <p:sp>
         <p:nvSpPr>
-          <p:cNvPr id="22" name="Shape 20"/>
+          <p:cNvPr id="28" name="Shape 26"/>
           <p:cNvSpPr/>
           <p:nvPr/>
         </p:nvSpPr>
@@ -8923,7 +9116,7 @@
       </p:sp>
       <p:sp>
         <p:nvSpPr>
-          <p:cNvPr id="23" name="Text 21"/>
+          <p:cNvPr id="29" name="Text 27"/>
           <p:cNvSpPr/>
           <p:nvPr/>
         </p:nvSpPr>
@@ -8946,23 +9139,23 @@
               <a:buNone/>
             </a:pPr>
             <a:r>
-              <a:rPr lang="en-US" sz="1100" b="1" dirty="0">
+              <a:rPr lang="en-US" sz="1050" b="1" dirty="0">
                 <a:solidFill>
                   <a:srgbClr val="D97BFF"/>
                 </a:solidFill>
-                <a:latin typeface="Pretendard" pitchFamily="34" charset="0"/>
-                <a:ea typeface="Pretendard" pitchFamily="34" charset="-122"/>
-                <a:cs typeface="Pretendard" pitchFamily="34" charset="-120"/>
-              </a:rPr>
-              <a:t>하드코딩·거짓말 없는 신뢰도!</a:t>
-            </a:r>
-            <a:endParaRPr lang="en-US" sz="1100" dirty="0"/>
-          </a:p>
-        </p:txBody>
-      </p:sp>
-      <p:sp>
-        <p:nvSpPr>
-          <p:cNvPr id="24" name="Shape 22"/>
+                <a:latin typeface="맑은 고딕" pitchFamily="34" charset="0"/>
+                <a:ea typeface="맑은 고딕" pitchFamily="34" charset="-122"/>
+                <a:cs typeface="맑은 고딕" pitchFamily="34" charset="-120"/>
+              </a:rPr>
+              <a:t>객관적 수치 근거로 신뢰도 향상</a:t>
+            </a:r>
+            <a:endParaRPr lang="en-US" sz="1050" dirty="0"/>
+          </a:p>
+        </p:txBody>
+      </p:sp>
+      <p:sp>
+        <p:nvSpPr>
+          <p:cNvPr id="30" name="Shape 28"/>
           <p:cNvSpPr/>
           <p:nvPr/>
         </p:nvSpPr>
@@ -8989,14 +9182,43 @@
       </p:sp>
       <p:sp>
         <p:nvSpPr>
-          <p:cNvPr id="25" name="Text 23"/>
-          <p:cNvSpPr/>
-          <p:nvPr/>
-        </p:nvSpPr>
-        <p:spPr>
-          <a:xfrm>
-            <a:off x="9153144" y="1645920"/>
-            <a:ext cx="2423160" cy="1371600"/>
+          <p:cNvPr id="31" name="Shape 29"/>
+          <p:cNvSpPr/>
+          <p:nvPr/>
+        </p:nvSpPr>
+        <p:spPr>
+          <a:xfrm>
+            <a:off x="9518904" y="1691640"/>
+            <a:ext cx="1691640" cy="329184"/>
+          </a:xfrm>
+          <a:prstGeom prst="roundRect">
+            <a:avLst>
+              <a:gd name="adj" fmla="val 50000"/>
+            </a:avLst>
+          </a:prstGeom>
+          <a:solidFill>
+            <a:srgbClr val="00E676">
+              <a:alpha val="18000"/>
+            </a:srgbClr>
+          </a:solidFill>
+          <a:ln w="12700">
+            <a:solidFill>
+              <a:srgbClr val="00E676"/>
+            </a:solidFill>
+            <a:prstDash val="solid"/>
+          </a:ln>
+        </p:spPr>
+      </p:sp>
+      <p:sp>
+        <p:nvSpPr>
+          <p:cNvPr id="32" name="Text 30"/>
+          <p:cNvSpPr/>
+          <p:nvPr/>
+        </p:nvSpPr>
+        <p:spPr>
+          <a:xfrm>
+            <a:off x="9518904" y="1691640"/>
+            <a:ext cx="1691640" cy="329184"/>
           </a:xfrm>
           <a:prstGeom prst="rect">
             <a:avLst/>
@@ -9012,76 +9234,84 @@
               <a:buNone/>
             </a:pPr>
             <a:r>
-              <a:rPr lang="en-US" sz="1500" b="1" dirty="0">
-                <a:solidFill>
-                  <a:srgbClr val="F8FAFC"/>
-                </a:solidFill>
-                <a:latin typeface="Pretendard" pitchFamily="34" charset="0"/>
-                <a:ea typeface="Pretendard" pitchFamily="34" charset="-122"/>
-                <a:cs typeface="Pretendard" pitchFamily="34" charset="-120"/>
-              </a:rPr>
-              <a:t>🛒</a:t>
-            </a:r>
-            <a:endParaRPr lang="en-US" sz="1500" dirty="0"/>
-          </a:p>
+              <a:rPr lang="en-US" sz="1000" b="1" dirty="0">
+                <a:solidFill>
+                  <a:srgbClr val="00E676"/>
+                </a:solidFill>
+                <a:latin typeface="맑은 고딕" pitchFamily="34" charset="0"/>
+                <a:ea typeface="맑은 고딕" pitchFamily="34" charset="-122"/>
+                <a:cs typeface="맑은 고딕" pitchFamily="34" charset="-120"/>
+              </a:rPr>
+              <a:t>FUNCTION 04</a:t>
+            </a:r>
+            <a:endParaRPr lang="en-US" sz="1000" dirty="0"/>
+          </a:p>
+        </p:txBody>
+      </p:sp>
+      <p:sp>
+        <p:nvSpPr>
+          <p:cNvPr id="33" name="Text 31"/>
+          <p:cNvSpPr/>
+          <p:nvPr/>
+        </p:nvSpPr>
+        <p:spPr>
+          <a:xfrm>
+            <a:off x="9153144" y="2194560"/>
+            <a:ext cx="2423160" cy="548640"/>
+          </a:xfrm>
+          <a:prstGeom prst="rect">
+            <a:avLst/>
+          </a:prstGeom>
+          <a:noFill/>
+          <a:ln/>
+        </p:spPr>
+        <p:txBody>
+          <a:bodyPr wrap="square" rtlCol="0" anchor="ctr"/>
+          <a:lstStyle/>
           <a:p>
             <a:pPr algn="ctr" indent="0" marL="0">
               <a:buNone/>
             </a:pPr>
             <a:r>
-              <a:rPr lang="en-US" sz="1500" b="1" dirty="0">
-                <a:solidFill>
-                  <a:srgbClr val="F8FAFC"/>
-                </a:solidFill>
-                <a:latin typeface="Pretendard" pitchFamily="34" charset="0"/>
-                <a:ea typeface="Pretendard" pitchFamily="34" charset="-122"/>
-                <a:cs typeface="Pretendard" pitchFamily="34" charset="-120"/>
-              </a:rPr>
-              <a:t>FEATURE 04</a:t>
-            </a:r>
-            <a:endParaRPr lang="en-US" sz="1500" dirty="0"/>
-          </a:p>
+              <a:rPr lang="en-US" sz="1600" b="1" dirty="0">
+                <a:solidFill>
+                  <a:srgbClr val="F8FAFC"/>
+                </a:solidFill>
+                <a:latin typeface="맑은 고딕" pitchFamily="34" charset="0"/>
+                <a:ea typeface="맑은 고딕" pitchFamily="34" charset="-122"/>
+                <a:cs typeface="맑은 고딕" pitchFamily="34" charset="-120"/>
+              </a:rPr>
+              <a:t>네이버 쇼핑 구매 연동</a:t>
+            </a:r>
+            <a:endParaRPr lang="en-US" sz="1600" dirty="0"/>
+          </a:p>
+        </p:txBody>
+      </p:sp>
+      <p:sp>
+        <p:nvSpPr>
+          <p:cNvPr id="34" name="Text 32"/>
+          <p:cNvSpPr/>
+          <p:nvPr/>
+        </p:nvSpPr>
+        <p:spPr>
+          <a:xfrm>
+            <a:off x="9198864" y="2880360"/>
+            <a:ext cx="2331720" cy="1920240"/>
+          </a:xfrm>
+          <a:prstGeom prst="rect">
+            <a:avLst/>
+          </a:prstGeom>
+          <a:noFill/>
+          <a:ln/>
+        </p:spPr>
+        <p:txBody>
+          <a:bodyPr wrap="square" rtlCol="0" anchor="t"/>
+          <a:lstStyle/>
           <a:p>
             <a:pPr algn="ctr" indent="0" marL="0">
-              <a:buNone/>
-            </a:pPr>
-            <a:r>
-              <a:rPr lang="en-US" sz="1500" b="1" dirty="0">
-                <a:solidFill>
-                  <a:srgbClr val="F8FAFC"/>
-                </a:solidFill>
-                <a:latin typeface="Pretendard" pitchFamily="34" charset="0"/>
-                <a:ea typeface="Pretendard" pitchFamily="34" charset="-122"/>
-                <a:cs typeface="Pretendard" pitchFamily="34" charset="-120"/>
-              </a:rPr>
-              <a:t>네이버 쇼핑 최저가 연동</a:t>
-            </a:r>
-            <a:endParaRPr lang="en-US" sz="1500" dirty="0"/>
-          </a:p>
-        </p:txBody>
-      </p:sp>
-      <p:sp>
-        <p:nvSpPr>
-          <p:cNvPr id="26" name="Text 24"/>
-          <p:cNvSpPr/>
-          <p:nvPr/>
-        </p:nvSpPr>
-        <p:spPr>
-          <a:xfrm>
-            <a:off x="9198864" y="3108960"/>
-            <a:ext cx="2331720" cy="1554480"/>
-          </a:xfrm>
-          <a:prstGeom prst="rect">
-            <a:avLst/>
-          </a:prstGeom>
-          <a:noFill/>
-          <a:ln/>
-        </p:spPr>
-        <p:txBody>
-          <a:bodyPr wrap="square" rtlCol="0" anchor="t"/>
-          <a:lstStyle/>
-          <a:p>
-            <a:pPr algn="ctr" indent="0" marL="0">
+              <a:lnSpc>
+                <a:spcPct val="130000"/>
+              </a:lnSpc>
               <a:buNone/>
             </a:pPr>
             <a:r>
@@ -9089,11 +9319,11 @@
                 <a:solidFill>
                   <a:srgbClr val="CBD5E1"/>
                 </a:solidFill>
-                <a:latin typeface="Pretendard" pitchFamily="34" charset="0"/>
-                <a:ea typeface="Pretendard" pitchFamily="34" charset="-122"/>
-                <a:cs typeface="Pretendard" pitchFamily="34" charset="-120"/>
-              </a:rPr>
-              <a:t>비교 후 결정한 부품을 [네이버 쇼핑 구매] 버튼으로 즉시 최저가 검색 및 실물 이미지 확인 가능</a:t>
+                <a:latin typeface="맑은 고딕" pitchFamily="34" charset="0"/>
+                <a:ea typeface="맑은 고딕" pitchFamily="34" charset="-122"/>
+                <a:cs typeface="맑은 고딕" pitchFamily="34" charset="-120"/>
+              </a:rPr>
+              <a:t>최종 견적의 각 부품 카드에 [네이버 쇼핑 구매] 버튼을 연동하여 클릭 시 해당 부품의 가격비교 검색창으로 바로 이동합니다.</a:t>
             </a:r>
             <a:endParaRPr lang="en-US" sz="1150" dirty="0"/>
           </a:p>
@@ -9101,7 +9331,7 @@
       </p:sp>
       <p:sp>
         <p:nvSpPr>
-          <p:cNvPr id="27" name="Shape 25"/>
+          <p:cNvPr id="35" name="Shape 33"/>
           <p:cNvSpPr/>
           <p:nvPr/>
         </p:nvSpPr>
@@ -9128,7 +9358,7 @@
       </p:sp>
       <p:sp>
         <p:nvSpPr>
-          <p:cNvPr id="28" name="Text 26"/>
+          <p:cNvPr id="36" name="Text 34"/>
           <p:cNvSpPr/>
           <p:nvPr/>
         </p:nvSpPr>
@@ -9151,17 +9381,17 @@
               <a:buNone/>
             </a:pPr>
             <a:r>
-              <a:rPr lang="en-US" sz="1100" b="1" dirty="0">
+              <a:rPr lang="en-US" sz="1050" b="1" dirty="0">
                 <a:solidFill>
                   <a:srgbClr val="00E676"/>
                 </a:solidFill>
-                <a:latin typeface="Pretendard" pitchFamily="34" charset="0"/>
-                <a:ea typeface="Pretendard" pitchFamily="34" charset="-122"/>
-                <a:cs typeface="Pretendard" pitchFamily="34" charset="-120"/>
-              </a:rPr>
-              <a:t>검증 직후 최저가 구매 연결!</a:t>
-            </a:r>
-            <a:endParaRPr lang="en-US" sz="1100" dirty="0"/>
+                <a:latin typeface="맑은 고딕" pitchFamily="34" charset="0"/>
+                <a:ea typeface="맑은 고딕" pitchFamily="34" charset="-122"/>
+                <a:cs typeface="맑은 고딕" pitchFamily="34" charset="-120"/>
+              </a:rPr>
+              <a:t>비교 검증 후 실제 구매까지 연결</a:t>
+            </a:r>
+            <a:endParaRPr lang="en-US" sz="1050" dirty="0"/>
           </a:p>
         </p:txBody>
       </p:sp>
@@ -9206,14 +9436,14 @@
         <p:spPr>
           <a:xfrm>
             <a:off x="457200" y="228600"/>
-            <a:ext cx="11274552" cy="27432"/>
+            <a:ext cx="11274552" cy="36576"/>
           </a:xfrm>
           <a:prstGeom prst="rect">
             <a:avLst/>
           </a:prstGeom>
           <a:solidFill>
             <a:srgbClr val="00F3FF">
-              <a:alpha val="30000"/>
+              <a:alpha val="40000"/>
             </a:srgbClr>
           </a:solidFill>
           <a:ln w="12700">
@@ -9235,7 +9465,7 @@
         <p:spPr>
           <a:xfrm>
             <a:off x="457200" y="384048"/>
-            <a:ext cx="3474720" cy="310896"/>
+            <a:ext cx="3840480" cy="329184"/>
           </a:xfrm>
           <a:prstGeom prst="roundRect">
             <a:avLst>
@@ -9264,7 +9494,7 @@
         <p:spPr>
           <a:xfrm>
             <a:off x="457200" y="384048"/>
-            <a:ext cx="3474720" cy="310896"/>
+            <a:ext cx="3840480" cy="329184"/>
           </a:xfrm>
           <a:prstGeom prst="rect">
             <a:avLst/>
@@ -9280,17 +9510,17 @@
               <a:buNone/>
             </a:pPr>
             <a:r>
-              <a:rPr lang="en-US" sz="1000" b="1" dirty="0">
+              <a:rPr lang="en-US" sz="1050" b="1" dirty="0">
                 <a:solidFill>
                   <a:srgbClr val="00F3FF"/>
                 </a:solidFill>
-                <a:latin typeface="Pretendard" pitchFamily="34" charset="0"/>
-                <a:ea typeface="Pretendard" pitchFamily="34" charset="-122"/>
-                <a:cs typeface="Pretendard" pitchFamily="34" charset="-120"/>
+                <a:latin typeface="맑은 고딕" pitchFamily="34" charset="0"/>
+                <a:ea typeface="맑은 고딕" pitchFamily="34" charset="-122"/>
+                <a:cs typeface="맑은 고딕" pitchFamily="34" charset="-120"/>
               </a:rPr>
               <a:t>3. 서비스 기획서 — 실제 구현 화면 (PartAdvisorCard.vue)</a:t>
             </a:r>
-            <a:endParaRPr lang="en-US" sz="1000" dirty="0"/>
+            <a:endParaRPr lang="en-US" sz="1050" dirty="0"/>
           </a:p>
         </p:txBody>
       </p:sp>
@@ -9302,7 +9532,7 @@
         </p:nvSpPr>
         <p:spPr>
           <a:xfrm>
-            <a:off x="457200" y="777240"/>
+            <a:off x="457200" y="786384"/>
             <a:ext cx="11274552" cy="502920"/>
           </a:xfrm>
           <a:prstGeom prst="rect">
@@ -9319,17 +9549,17 @@
               <a:buNone/>
             </a:pPr>
             <a:r>
-              <a:rPr lang="en-US" sz="2400" b="1" dirty="0">
-                <a:solidFill>
-                  <a:srgbClr val="F8FAFC"/>
-                </a:solidFill>
-                <a:latin typeface="Pretendard" pitchFamily="34" charset="0"/>
-                <a:ea typeface="Pretendard" pitchFamily="34" charset="-122"/>
-                <a:cs typeface="Pretendard" pitchFamily="34" charset="-120"/>
+              <a:rPr lang="en-US" sz="2200" b="1" dirty="0">
+                <a:solidFill>
+                  <a:srgbClr val="F8FAFC"/>
+                </a:solidFill>
+                <a:latin typeface="맑은 고딕" pitchFamily="34" charset="0"/>
+                <a:ea typeface="맑은 고딕" pitchFamily="34" charset="-122"/>
+                <a:cs typeface="맑은 고딕" pitchFamily="34" charset="-120"/>
               </a:rPr>
               <a:t>친구의 고민(RTX 5070 vs RTX 5070 Ti)을 실제 사이트에서 분석한 화면</a:t>
             </a:r>
-            <a:endParaRPr lang="en-US" sz="2400" dirty="0"/>
+            <a:endParaRPr lang="en-US" sz="2200" dirty="0"/>
           </a:p>
         </p:txBody>
       </p:sp>
@@ -9385,13 +9615,13 @@
             <a:r>
               <a:rPr lang="en-US" sz="950" dirty="0">
                 <a:solidFill>
-                  <a:srgbClr val="64748B"/>
-                </a:solidFill>
-                <a:latin typeface="Pretendard" pitchFamily="34" charset="0"/>
-                <a:ea typeface="Pretendard" pitchFamily="34" charset="-122"/>
-                <a:cs typeface="Pretendard" pitchFamily="34" charset="-120"/>
-              </a:rPr>
-              <a:t>PC-FIT 2.0 : AI 부품·가격 비교 &amp; 가성비 어드바이저</a:t>
+                  <a:srgbClr val="94A3B8"/>
+                </a:solidFill>
+                <a:latin typeface="맑은 고딕" pitchFamily="34" charset="0"/>
+                <a:ea typeface="맑은 고딕" pitchFamily="34" charset="-122"/>
+                <a:cs typeface="맑은 고딕" pitchFamily="34" charset="-120"/>
+              </a:rPr>
+              <a:t>PC-FIT 2.0 : AI 부품·가격 비교 및 가성비 어드바이저</a:t>
             </a:r>
             <a:endParaRPr lang="en-US" sz="950" dirty="0"/>
           </a:p>
@@ -9426,9 +9656,9 @@
                 <a:solidFill>
                   <a:srgbClr val="00F3FF"/>
                 </a:solidFill>
-                <a:latin typeface="Consolas" pitchFamily="34" charset="0"/>
-                <a:ea typeface="Consolas" pitchFamily="34" charset="-122"/>
-                <a:cs typeface="Consolas" pitchFamily="34" charset="-120"/>
+                <a:latin typeface="맑은 고딕" pitchFamily="34" charset="0"/>
+                <a:ea typeface="맑은 고딕" pitchFamily="34" charset="-122"/>
+                <a:cs typeface="맑은 고딕" pitchFamily="34" charset="-120"/>
               </a:rPr>
               <a:t>SLIDE 07 / 09</a:t>
             </a:r>
@@ -9471,7 +9701,7 @@
         </p:nvSpPr>
         <p:spPr>
           <a:xfrm>
-            <a:off x="731520" y="1600200"/>
+            <a:off x="731520" y="1572768"/>
             <a:ext cx="10725912" cy="594360"/>
           </a:xfrm>
           <a:prstGeom prst="roundRect">
@@ -9500,7 +9730,7 @@
         </p:nvSpPr>
         <p:spPr>
           <a:xfrm>
-            <a:off x="868680" y="1600200"/>
+            <a:off x="868680" y="1572768"/>
             <a:ext cx="10424160" cy="594360"/>
           </a:xfrm>
           <a:prstGeom prst="rect">
@@ -9521,11 +9751,11 @@
                 <a:solidFill>
                   <a:srgbClr val="F8FAFC"/>
                 </a:solidFill>
-                <a:latin typeface="Pretendard" pitchFamily="34" charset="0"/>
-                <a:ea typeface="Pretendard" pitchFamily="34" charset="-122"/>
-                <a:cs typeface="Pretendard" pitchFamily="34" charset="-120"/>
-              </a:rPr>
-              <a:t>💡 AI 최종 결론 (verdict): QHD 게이밍 기준 평균 프레임 격차는 약 18%이나 가격 차이는 37~60만 원에 달하므로 RTX 5070 유지 추천!</a:t>
+                <a:latin typeface="맑은 고딕" pitchFamily="34" charset="0"/>
+                <a:ea typeface="맑은 고딕" pitchFamily="34" charset="-122"/>
+                <a:cs typeface="맑은 고딕" pitchFamily="34" charset="-120"/>
+              </a:rPr>
+              <a:t>[AI 최종 결론 (verdict)] QHD 게이밍 기준 평균 프레임 격차는 약 18%이나 가격 차이가 크므로 RTX 5070 유지 추천!</a:t>
             </a:r>
             <a:endParaRPr lang="en-US" sz="1200" dirty="0"/>
           </a:p>
@@ -9539,12 +9769,12 @@
         </p:nvSpPr>
         <p:spPr>
           <a:xfrm>
-            <a:off x="731520" y="2331720"/>
-            <a:ext cx="5212080" cy="3108960"/>
+            <a:off x="731520" y="2304288"/>
+            <a:ext cx="5212080" cy="3154680"/>
           </a:xfrm>
           <a:prstGeom prst="roundRect">
             <a:avLst>
-              <a:gd name="adj" fmla="val 4118"/>
+              <a:gd name="adj" fmla="val 4058"/>
             </a:avLst>
           </a:prstGeom>
           <a:solidFill>
@@ -9566,8 +9796,8 @@
         </p:nvSpPr>
         <p:spPr>
           <a:xfrm>
-            <a:off x="914400" y="2468880"/>
-            <a:ext cx="4846320" cy="320040"/>
+            <a:off x="914400" y="2450592"/>
+            <a:ext cx="4846320" cy="292608"/>
           </a:xfrm>
           <a:prstGeom prst="rect">
             <a:avLst/>
@@ -9587,11 +9817,11 @@
                 <a:solidFill>
                   <a:srgbClr val="00F3FF"/>
                 </a:solidFill>
-                <a:latin typeface="Pretendard" pitchFamily="34" charset="0"/>
-                <a:ea typeface="Pretendard" pitchFamily="34" charset="-122"/>
-                <a:cs typeface="Pretendard" pitchFamily="34" charset="-120"/>
-              </a:rPr>
-              <a:t>📊 게임 프레임 &amp; 벤치마크 비교 (chartData)</a:t>
+                <a:latin typeface="맑은 고딕" pitchFamily="34" charset="0"/>
+                <a:ea typeface="맑은 고딕" pitchFamily="34" charset="-122"/>
+                <a:cs typeface="맑은 고딕" pitchFamily="34" charset="-120"/>
+              </a:rPr>
+              <a:t>게임 프레임 &amp; 벤치마크 비교 (chartData)</a:t>
             </a:r>
             <a:endParaRPr lang="en-US" sz="1200" dirty="0"/>
           </a:p>
@@ -9605,163 +9835,549 @@
         </p:nvSpPr>
         <p:spPr>
           <a:xfrm>
-            <a:off x="914400" y="2880360"/>
-            <a:ext cx="4846320" cy="2377440"/>
-          </a:xfrm>
-          <a:prstGeom prst="rect">
-            <a:avLst/>
-          </a:prstGeom>
-          <a:noFill/>
-          <a:ln/>
-        </p:spPr>
-        <p:txBody>
-          <a:bodyPr wrap="square" rtlCol="0" anchor="ctr"/>
-          <a:lstStyle/>
-          <a:p>
-            <a:pPr indent="0" marL="0">
-              <a:lnSpc>
-                <a:spcPct val="125000"/>
-              </a:lnSpc>
-              <a:buNone/>
-            </a:pPr>
-            <a:r>
-              <a:rPr lang="en-US" sz="1150" b="1" dirty="0">
-                <a:solidFill>
-                  <a:srgbClr val="F8FAFC"/>
-                </a:solidFill>
-                <a:latin typeface="Consolas" pitchFamily="34" charset="0"/>
-                <a:ea typeface="Consolas" pitchFamily="34" charset="-122"/>
-                <a:cs typeface="Consolas" pitchFamily="34" charset="-120"/>
-              </a:rPr>
-              <a:t>• 배틀그라운드 (QHD 울트라) — +17% 차이</a:t>
-            </a:r>
-            <a:endParaRPr lang="en-US" sz="1150" dirty="0"/>
-          </a:p>
-          <a:p>
-            <a:pPr indent="0" marL="0">
-              <a:lnSpc>
-                <a:spcPct val="125000"/>
-              </a:lnSpc>
-              <a:buNone/>
-            </a:pPr>
-            <a:r>
-              <a:rPr lang="en-US" sz="1150" b="1" dirty="0">
-                <a:solidFill>
-                  <a:srgbClr val="F8FAFC"/>
-                </a:solidFill>
-                <a:latin typeface="Consolas" pitchFamily="34" charset="0"/>
-                <a:ea typeface="Consolas" pitchFamily="34" charset="-122"/>
-                <a:cs typeface="Consolas" pitchFamily="34" charset="-120"/>
-              </a:rPr>
-              <a:t>   RTX 5070 : ████████████████ 232 FPS</a:t>
-            </a:r>
-            <a:endParaRPr lang="en-US" sz="1150" dirty="0"/>
-          </a:p>
-          <a:p>
-            <a:pPr indent="0" marL="0">
-              <a:lnSpc>
-                <a:spcPct val="125000"/>
-              </a:lnSpc>
-              <a:buNone/>
-            </a:pPr>
-            <a:r>
-              <a:rPr lang="en-US" sz="1150" b="1" dirty="0">
-                <a:solidFill>
-                  <a:srgbClr val="F8FAFC"/>
-                </a:solidFill>
-                <a:latin typeface="Consolas" pitchFamily="34" charset="0"/>
-                <a:ea typeface="Consolas" pitchFamily="34" charset="-122"/>
-                <a:cs typeface="Consolas" pitchFamily="34" charset="-120"/>
-              </a:rPr>
-              <a:t>   5070 Ti    : ███████████████████ 272 FPS</a:t>
-            </a:r>
-            <a:endParaRPr lang="en-US" sz="1150" dirty="0"/>
-          </a:p>
-          <a:p>
-            <a:pPr indent="0" marL="0">
-              <a:lnSpc>
-                <a:spcPct val="125000"/>
-              </a:lnSpc>
-              <a:buNone/>
-            </a:pPr>
-            <a:endParaRPr lang="en-US" sz="1150" dirty="0"/>
-          </a:p>
-          <a:p>
-            <a:pPr indent="0" marL="0">
-              <a:lnSpc>
-                <a:spcPct val="125000"/>
-              </a:lnSpc>
-              <a:buNone/>
-            </a:pPr>
-            <a:r>
-              <a:rPr lang="en-US" sz="1150" b="1" dirty="0">
-                <a:solidFill>
-                  <a:srgbClr val="F8FAFC"/>
-                </a:solidFill>
-                <a:latin typeface="Consolas" pitchFamily="34" charset="0"/>
-                <a:ea typeface="Consolas" pitchFamily="34" charset="-122"/>
-                <a:cs typeface="Consolas" pitchFamily="34" charset="-120"/>
-              </a:rPr>
-              <a:t>• 사이버펑크 2077 (QHD 높음) — +23% 차이</a:t>
-            </a:r>
-            <a:endParaRPr lang="en-US" sz="1150" dirty="0"/>
-          </a:p>
-          <a:p>
-            <a:pPr indent="0" marL="0">
-              <a:lnSpc>
-                <a:spcPct val="125000"/>
-              </a:lnSpc>
-              <a:buNone/>
-            </a:pPr>
-            <a:r>
-              <a:rPr lang="en-US" sz="1150" b="1" dirty="0">
-                <a:solidFill>
-                  <a:srgbClr val="F8FAFC"/>
-                </a:solidFill>
-                <a:latin typeface="Consolas" pitchFamily="34" charset="0"/>
-                <a:ea typeface="Consolas" pitchFamily="34" charset="-122"/>
-                <a:cs typeface="Consolas" pitchFamily="34" charset="-120"/>
-              </a:rPr>
-              <a:t>   RTX 5070 : ██████████████ 94 FPS</a:t>
-            </a:r>
-            <a:endParaRPr lang="en-US" sz="1150" dirty="0"/>
-          </a:p>
-          <a:p>
-            <a:pPr indent="0" marL="0">
-              <a:lnSpc>
-                <a:spcPct val="125000"/>
-              </a:lnSpc>
-              <a:buNone/>
-            </a:pPr>
-            <a:r>
-              <a:rPr lang="en-US" sz="1150" b="1" dirty="0">
-                <a:solidFill>
-                  <a:srgbClr val="F8FAFC"/>
-                </a:solidFill>
-                <a:latin typeface="Consolas" pitchFamily="34" charset="0"/>
-                <a:ea typeface="Consolas" pitchFamily="34" charset="-122"/>
-                <a:cs typeface="Consolas" pitchFamily="34" charset="-120"/>
-              </a:rPr>
-              <a:t>   5070 Ti    : █████████████████ 116 FPS</a:t>
-            </a:r>
-            <a:endParaRPr lang="en-US" sz="1150" dirty="0"/>
-          </a:p>
-        </p:txBody>
-      </p:sp>
-      <p:sp>
-        <p:nvSpPr>
-          <p:cNvPr id="15" name="Shape 13"/>
-          <p:cNvSpPr/>
-          <p:nvPr/>
-        </p:nvSpPr>
-        <p:spPr>
-          <a:xfrm>
-            <a:off x="6126480" y="2331720"/>
-            <a:ext cx="5330952" cy="3108960"/>
+            <a:off x="914400" y="2834640"/>
+            <a:ext cx="4754880" cy="256032"/>
+          </a:xfrm>
+          <a:prstGeom prst="rect">
+            <a:avLst/>
+          </a:prstGeom>
+          <a:noFill/>
+          <a:ln/>
+        </p:spPr>
+        <p:txBody>
+          <a:bodyPr wrap="square" rtlCol="0" anchor="ctr"/>
+          <a:lstStyle/>
+          <a:p>
+            <a:pPr indent="0" marL="0">
+              <a:buNone/>
+            </a:pPr>
+            <a:r>
+              <a:rPr lang="en-US" sz="1050" b="1" dirty="0">
+                <a:solidFill>
+                  <a:srgbClr val="F8FAFC"/>
+                </a:solidFill>
+                <a:latin typeface="맑은 고딕" pitchFamily="34" charset="0"/>
+                <a:ea typeface="맑은 고딕" pitchFamily="34" charset="-122"/>
+                <a:cs typeface="맑은 고딕" pitchFamily="34" charset="-120"/>
+              </a:rPr>
+              <a:t>배틀그라운드 (QHD 울트라) — 5070 Ti +17% 우세</a:t>
+            </a:r>
+            <a:endParaRPr lang="en-US" sz="1050" dirty="0"/>
+          </a:p>
+        </p:txBody>
+      </p:sp>
+      <p:sp>
+        <p:nvSpPr>
+          <p:cNvPr id="15" name="Text 13"/>
+          <p:cNvSpPr/>
+          <p:nvPr/>
+        </p:nvSpPr>
+        <p:spPr>
+          <a:xfrm>
+            <a:off x="914400" y="3127248"/>
+            <a:ext cx="914400" cy="237744"/>
+          </a:xfrm>
+          <a:prstGeom prst="rect">
+            <a:avLst/>
+          </a:prstGeom>
+          <a:noFill/>
+          <a:ln/>
+        </p:spPr>
+        <p:txBody>
+          <a:bodyPr wrap="square" rtlCol="0" anchor="ctr"/>
+          <a:lstStyle/>
+          <a:p>
+            <a:pPr indent="0" marL="0">
+              <a:buNone/>
+            </a:pPr>
+            <a:r>
+              <a:rPr lang="en-US" sz="950" b="1" dirty="0">
+                <a:solidFill>
+                  <a:srgbClr val="00F3FF"/>
+                </a:solidFill>
+                <a:latin typeface="맑은 고딕" pitchFamily="34" charset="0"/>
+                <a:ea typeface="맑은 고딕" pitchFamily="34" charset="-122"/>
+                <a:cs typeface="맑은 고딕" pitchFamily="34" charset="-120"/>
+              </a:rPr>
+              <a:t>RTX 5070</a:t>
+            </a:r>
+            <a:endParaRPr lang="en-US" sz="950" dirty="0"/>
+          </a:p>
+        </p:txBody>
+      </p:sp>
+      <p:sp>
+        <p:nvSpPr>
+          <p:cNvPr id="16" name="Shape 14"/>
+          <p:cNvSpPr/>
+          <p:nvPr/>
+        </p:nvSpPr>
+        <p:spPr>
+          <a:xfrm>
+            <a:off x="1874520" y="3145536"/>
+            <a:ext cx="2651760" cy="201168"/>
           </a:xfrm>
           <a:prstGeom prst="roundRect">
             <a:avLst>
-              <a:gd name="adj" fmla="val 4118"/>
+              <a:gd name="adj" fmla="val 45455"/>
+            </a:avLst>
+          </a:prstGeom>
+          <a:solidFill>
+            <a:srgbClr val="00F3FF"/>
+          </a:solidFill>
+          <a:ln w="12700">
+            <a:solidFill>
+              <a:srgbClr val="00F3FF"/>
+            </a:solidFill>
+            <a:prstDash val="solid"/>
+          </a:ln>
+        </p:spPr>
+      </p:sp>
+      <p:sp>
+        <p:nvSpPr>
+          <p:cNvPr id="17" name="Text 15"/>
+          <p:cNvSpPr/>
+          <p:nvPr/>
+        </p:nvSpPr>
+        <p:spPr>
+          <a:xfrm>
+            <a:off x="4617720" y="3127248"/>
+            <a:ext cx="1005840" cy="237744"/>
+          </a:xfrm>
+          <a:prstGeom prst="rect">
+            <a:avLst/>
+          </a:prstGeom>
+          <a:noFill/>
+          <a:ln/>
+        </p:spPr>
+        <p:txBody>
+          <a:bodyPr wrap="square" rtlCol="0" anchor="ctr"/>
+          <a:lstStyle/>
+          <a:p>
+            <a:pPr indent="0" marL="0">
+              <a:buNone/>
+            </a:pPr>
+            <a:r>
+              <a:rPr lang="en-US" sz="950" b="1" dirty="0">
+                <a:solidFill>
+                  <a:srgbClr val="00F3FF"/>
+                </a:solidFill>
+                <a:latin typeface="맑은 고딕" pitchFamily="34" charset="0"/>
+                <a:ea typeface="맑은 고딕" pitchFamily="34" charset="-122"/>
+                <a:cs typeface="맑은 고딕" pitchFamily="34" charset="-120"/>
+              </a:rPr>
+              <a:t>232 FPS</a:t>
+            </a:r>
+            <a:endParaRPr lang="en-US" sz="950" dirty="0"/>
+          </a:p>
+        </p:txBody>
+      </p:sp>
+      <p:sp>
+        <p:nvSpPr>
+          <p:cNvPr id="18" name="Text 16"/>
+          <p:cNvSpPr/>
+          <p:nvPr/>
+        </p:nvSpPr>
+        <p:spPr>
+          <a:xfrm>
+            <a:off x="914400" y="3419856"/>
+            <a:ext cx="914400" cy="237744"/>
+          </a:xfrm>
+          <a:prstGeom prst="rect">
+            <a:avLst/>
+          </a:prstGeom>
+          <a:noFill/>
+          <a:ln/>
+        </p:spPr>
+        <p:txBody>
+          <a:bodyPr wrap="square" rtlCol="0" anchor="ctr"/>
+          <a:lstStyle/>
+          <a:p>
+            <a:pPr indent="0" marL="0">
+              <a:buNone/>
+            </a:pPr>
+            <a:r>
+              <a:rPr lang="en-US" sz="950" b="1" dirty="0">
+                <a:solidFill>
+                  <a:srgbClr val="FF5CA8"/>
+                </a:solidFill>
+                <a:latin typeface="맑은 고딕" pitchFamily="34" charset="0"/>
+                <a:ea typeface="맑은 고딕" pitchFamily="34" charset="-122"/>
+                <a:cs typeface="맑은 고딕" pitchFamily="34" charset="-120"/>
+              </a:rPr>
+              <a:t>5070 Ti</a:t>
+            </a:r>
+            <a:endParaRPr lang="en-US" sz="950" dirty="0"/>
+          </a:p>
+        </p:txBody>
+      </p:sp>
+      <p:sp>
+        <p:nvSpPr>
+          <p:cNvPr id="19" name="Shape 17"/>
+          <p:cNvSpPr/>
+          <p:nvPr/>
+        </p:nvSpPr>
+        <p:spPr>
+          <a:xfrm>
+            <a:off x="1874520" y="3438144"/>
+            <a:ext cx="3108960" cy="201168"/>
+          </a:xfrm>
+          <a:prstGeom prst="roundRect">
+            <a:avLst>
+              <a:gd name="adj" fmla="val 45455"/>
+            </a:avLst>
+          </a:prstGeom>
+          <a:solidFill>
+            <a:srgbClr val="FF0080"/>
+          </a:solidFill>
+          <a:ln w="12700">
+            <a:solidFill>
+              <a:srgbClr val="FF0080"/>
+            </a:solidFill>
+            <a:prstDash val="solid"/>
+          </a:ln>
+        </p:spPr>
+      </p:sp>
+      <p:sp>
+        <p:nvSpPr>
+          <p:cNvPr id="20" name="Text 18"/>
+          <p:cNvSpPr/>
+          <p:nvPr/>
+        </p:nvSpPr>
+        <p:spPr>
+          <a:xfrm>
+            <a:off x="5074920" y="3419856"/>
+            <a:ext cx="822960" cy="237744"/>
+          </a:xfrm>
+          <a:prstGeom prst="rect">
+            <a:avLst/>
+          </a:prstGeom>
+          <a:noFill/>
+          <a:ln/>
+        </p:spPr>
+        <p:txBody>
+          <a:bodyPr wrap="square" rtlCol="0" anchor="ctr"/>
+          <a:lstStyle/>
+          <a:p>
+            <a:pPr indent="0" marL="0">
+              <a:buNone/>
+            </a:pPr>
+            <a:r>
+              <a:rPr lang="en-US" sz="950" b="1" dirty="0">
+                <a:solidFill>
+                  <a:srgbClr val="FF5CA8"/>
+                </a:solidFill>
+                <a:latin typeface="맑은 고딕" pitchFamily="34" charset="0"/>
+                <a:ea typeface="맑은 고딕" pitchFamily="34" charset="-122"/>
+                <a:cs typeface="맑은 고딕" pitchFamily="34" charset="-120"/>
+              </a:rPr>
+              <a:t>272 FPS</a:t>
+            </a:r>
+            <a:endParaRPr lang="en-US" sz="950" dirty="0"/>
+          </a:p>
+        </p:txBody>
+      </p:sp>
+      <p:sp>
+        <p:nvSpPr>
+          <p:cNvPr id="21" name="Text 19"/>
+          <p:cNvSpPr/>
+          <p:nvPr/>
+        </p:nvSpPr>
+        <p:spPr>
+          <a:xfrm>
+            <a:off x="914400" y="3840480"/>
+            <a:ext cx="4754880" cy="256032"/>
+          </a:xfrm>
+          <a:prstGeom prst="rect">
+            <a:avLst/>
+          </a:prstGeom>
+          <a:noFill/>
+          <a:ln/>
+        </p:spPr>
+        <p:txBody>
+          <a:bodyPr wrap="square" rtlCol="0" anchor="ctr"/>
+          <a:lstStyle/>
+          <a:p>
+            <a:pPr indent="0" marL="0">
+              <a:buNone/>
+            </a:pPr>
+            <a:r>
+              <a:rPr lang="en-US" sz="1050" b="1" dirty="0">
+                <a:solidFill>
+                  <a:srgbClr val="F8FAFC"/>
+                </a:solidFill>
+                <a:latin typeface="맑은 고딕" pitchFamily="34" charset="0"/>
+                <a:ea typeface="맑은 고딕" pitchFamily="34" charset="-122"/>
+                <a:cs typeface="맑은 고딕" pitchFamily="34" charset="-120"/>
+              </a:rPr>
+              <a:t>사이버펑크 2077 (QHD 높음) — 5070 Ti +23% 우세</a:t>
+            </a:r>
+            <a:endParaRPr lang="en-US" sz="1050" dirty="0"/>
+          </a:p>
+        </p:txBody>
+      </p:sp>
+      <p:sp>
+        <p:nvSpPr>
+          <p:cNvPr id="22" name="Text 20"/>
+          <p:cNvSpPr/>
+          <p:nvPr/>
+        </p:nvSpPr>
+        <p:spPr>
+          <a:xfrm>
+            <a:off x="914400" y="4133088"/>
+            <a:ext cx="914400" cy="237744"/>
+          </a:xfrm>
+          <a:prstGeom prst="rect">
+            <a:avLst/>
+          </a:prstGeom>
+          <a:noFill/>
+          <a:ln/>
+        </p:spPr>
+        <p:txBody>
+          <a:bodyPr wrap="square" rtlCol="0" anchor="ctr"/>
+          <a:lstStyle/>
+          <a:p>
+            <a:pPr indent="0" marL="0">
+              <a:buNone/>
+            </a:pPr>
+            <a:r>
+              <a:rPr lang="en-US" sz="950" b="1" dirty="0">
+                <a:solidFill>
+                  <a:srgbClr val="00F3FF"/>
+                </a:solidFill>
+                <a:latin typeface="맑은 고딕" pitchFamily="34" charset="0"/>
+                <a:ea typeface="맑은 고딕" pitchFamily="34" charset="-122"/>
+                <a:cs typeface="맑은 고딕" pitchFamily="34" charset="-120"/>
+              </a:rPr>
+              <a:t>RTX 5070</a:t>
+            </a:r>
+            <a:endParaRPr lang="en-US" sz="950" dirty="0"/>
+          </a:p>
+        </p:txBody>
+      </p:sp>
+      <p:sp>
+        <p:nvSpPr>
+          <p:cNvPr id="23" name="Shape 21"/>
+          <p:cNvSpPr/>
+          <p:nvPr/>
+        </p:nvSpPr>
+        <p:spPr>
+          <a:xfrm>
+            <a:off x="1874520" y="4151376"/>
+            <a:ext cx="2514600" cy="201168"/>
+          </a:xfrm>
+          <a:prstGeom prst="roundRect">
+            <a:avLst>
+              <a:gd name="adj" fmla="val 45455"/>
+            </a:avLst>
+          </a:prstGeom>
+          <a:solidFill>
+            <a:srgbClr val="00F3FF"/>
+          </a:solidFill>
+          <a:ln w="12700">
+            <a:solidFill>
+              <a:srgbClr val="00F3FF"/>
+            </a:solidFill>
+            <a:prstDash val="solid"/>
+          </a:ln>
+        </p:spPr>
+      </p:sp>
+      <p:sp>
+        <p:nvSpPr>
+          <p:cNvPr id="24" name="Text 22"/>
+          <p:cNvSpPr/>
+          <p:nvPr/>
+        </p:nvSpPr>
+        <p:spPr>
+          <a:xfrm>
+            <a:off x="4480560" y="4133088"/>
+            <a:ext cx="1005840" cy="237744"/>
+          </a:xfrm>
+          <a:prstGeom prst="rect">
+            <a:avLst/>
+          </a:prstGeom>
+          <a:noFill/>
+          <a:ln/>
+        </p:spPr>
+        <p:txBody>
+          <a:bodyPr wrap="square" rtlCol="0" anchor="ctr"/>
+          <a:lstStyle/>
+          <a:p>
+            <a:pPr indent="0" marL="0">
+              <a:buNone/>
+            </a:pPr>
+            <a:r>
+              <a:rPr lang="en-US" sz="950" b="1" dirty="0">
+                <a:solidFill>
+                  <a:srgbClr val="00F3FF"/>
+                </a:solidFill>
+                <a:latin typeface="맑은 고딕" pitchFamily="34" charset="0"/>
+                <a:ea typeface="맑은 고딕" pitchFamily="34" charset="-122"/>
+                <a:cs typeface="맑은 고딕" pitchFamily="34" charset="-120"/>
+              </a:rPr>
+              <a:t>94 FPS</a:t>
+            </a:r>
+            <a:endParaRPr lang="en-US" sz="950" dirty="0"/>
+          </a:p>
+        </p:txBody>
+      </p:sp>
+      <p:sp>
+        <p:nvSpPr>
+          <p:cNvPr id="25" name="Text 23"/>
+          <p:cNvSpPr/>
+          <p:nvPr/>
+        </p:nvSpPr>
+        <p:spPr>
+          <a:xfrm>
+            <a:off x="914400" y="4425696"/>
+            <a:ext cx="914400" cy="237744"/>
+          </a:xfrm>
+          <a:prstGeom prst="rect">
+            <a:avLst/>
+          </a:prstGeom>
+          <a:noFill/>
+          <a:ln/>
+        </p:spPr>
+        <p:txBody>
+          <a:bodyPr wrap="square" rtlCol="0" anchor="ctr"/>
+          <a:lstStyle/>
+          <a:p>
+            <a:pPr indent="0" marL="0">
+              <a:buNone/>
+            </a:pPr>
+            <a:r>
+              <a:rPr lang="en-US" sz="950" b="1" dirty="0">
+                <a:solidFill>
+                  <a:srgbClr val="FF5CA8"/>
+                </a:solidFill>
+                <a:latin typeface="맑은 고딕" pitchFamily="34" charset="0"/>
+                <a:ea typeface="맑은 고딕" pitchFamily="34" charset="-122"/>
+                <a:cs typeface="맑은 고딕" pitchFamily="34" charset="-120"/>
+              </a:rPr>
+              <a:t>5070 Ti</a:t>
+            </a:r>
+            <a:endParaRPr lang="en-US" sz="950" dirty="0"/>
+          </a:p>
+        </p:txBody>
+      </p:sp>
+      <p:sp>
+        <p:nvSpPr>
+          <p:cNvPr id="26" name="Shape 24"/>
+          <p:cNvSpPr/>
+          <p:nvPr/>
+        </p:nvSpPr>
+        <p:spPr>
+          <a:xfrm>
+            <a:off x="1874520" y="4443984"/>
+            <a:ext cx="3108960" cy="201168"/>
+          </a:xfrm>
+          <a:prstGeom prst="roundRect">
+            <a:avLst>
+              <a:gd name="adj" fmla="val 45455"/>
+            </a:avLst>
+          </a:prstGeom>
+          <a:solidFill>
+            <a:srgbClr val="FF0080"/>
+          </a:solidFill>
+          <a:ln w="12700">
+            <a:solidFill>
+              <a:srgbClr val="FF0080"/>
+            </a:solidFill>
+            <a:prstDash val="solid"/>
+          </a:ln>
+        </p:spPr>
+      </p:sp>
+      <p:sp>
+        <p:nvSpPr>
+          <p:cNvPr id="27" name="Text 25"/>
+          <p:cNvSpPr/>
+          <p:nvPr/>
+        </p:nvSpPr>
+        <p:spPr>
+          <a:xfrm>
+            <a:off x="5074920" y="4425696"/>
+            <a:ext cx="822960" cy="237744"/>
+          </a:xfrm>
+          <a:prstGeom prst="rect">
+            <a:avLst/>
+          </a:prstGeom>
+          <a:noFill/>
+          <a:ln/>
+        </p:spPr>
+        <p:txBody>
+          <a:bodyPr wrap="square" rtlCol="0" anchor="ctr"/>
+          <a:lstStyle/>
+          <a:p>
+            <a:pPr indent="0" marL="0">
+              <a:buNone/>
+            </a:pPr>
+            <a:r>
+              <a:rPr lang="en-US" sz="950" b="1" dirty="0">
+                <a:solidFill>
+                  <a:srgbClr val="FF5CA8"/>
+                </a:solidFill>
+                <a:latin typeface="맑은 고딕" pitchFamily="34" charset="0"/>
+                <a:ea typeface="맑은 고딕" pitchFamily="34" charset="-122"/>
+                <a:cs typeface="맑은 고딕" pitchFamily="34" charset="-120"/>
+              </a:rPr>
+              <a:t>116 FPS</a:t>
+            </a:r>
+            <a:endParaRPr lang="en-US" sz="950" dirty="0"/>
+          </a:p>
+        </p:txBody>
+      </p:sp>
+      <p:sp>
+        <p:nvSpPr>
+          <p:cNvPr id="28" name="Text 26"/>
+          <p:cNvSpPr/>
+          <p:nvPr/>
+        </p:nvSpPr>
+        <p:spPr>
+          <a:xfrm>
+            <a:off x="914400" y="4892040"/>
+            <a:ext cx="4846320" cy="320040"/>
+          </a:xfrm>
+          <a:prstGeom prst="rect">
+            <a:avLst/>
+          </a:prstGeom>
+          <a:noFill/>
+          <a:ln/>
+        </p:spPr>
+        <p:txBody>
+          <a:bodyPr wrap="square" rtlCol="0" anchor="ctr"/>
+          <a:lstStyle/>
+          <a:p>
+            <a:pPr indent="0" marL="0">
+              <a:buNone/>
+            </a:pPr>
+            <a:r>
+              <a:rPr lang="en-US" sz="1000" b="1" dirty="0">
+                <a:solidFill>
+                  <a:srgbClr val="00E676"/>
+                </a:solidFill>
+                <a:latin typeface="맑은 고딕" pitchFamily="34" charset="0"/>
+                <a:ea typeface="맑은 고딕" pitchFamily="34" charset="-122"/>
+                <a:cs typeface="맑은 고딕" pitchFamily="34" charset="-120"/>
+              </a:rPr>
+              <a:t>3DMark Time Spy 그래픽 점수 — 22,900점 vs 27,800점 (+21% 차이)</a:t>
+            </a:r>
+            <a:endParaRPr lang="en-US" sz="1000" dirty="0"/>
+          </a:p>
+        </p:txBody>
+      </p:sp>
+      <p:sp>
+        <p:nvSpPr>
+          <p:cNvPr id="29" name="Shape 27"/>
+          <p:cNvSpPr/>
+          <p:nvPr/>
+        </p:nvSpPr>
+        <p:spPr>
+          <a:xfrm>
+            <a:off x="6126480" y="2304288"/>
+            <a:ext cx="5330952" cy="3154680"/>
+          </a:xfrm>
+          <a:prstGeom prst="roundRect">
+            <a:avLst>
+              <a:gd name="adj" fmla="val 4058"/>
             </a:avLst>
           </a:prstGeom>
           <a:solidFill>
@@ -9777,14 +10393,14 @@
       </p:sp>
       <p:sp>
         <p:nvSpPr>
-          <p:cNvPr id="16" name="Text 14"/>
-          <p:cNvSpPr/>
-          <p:nvPr/>
-        </p:nvSpPr>
-        <p:spPr>
-          <a:xfrm>
-            <a:off x="6309360" y="2468880"/>
-            <a:ext cx="4937760" cy="320040"/>
+          <p:cNvPr id="30" name="Text 28"/>
+          <p:cNvSpPr/>
+          <p:nvPr/>
+        </p:nvSpPr>
+        <p:spPr>
+          <a:xfrm>
+            <a:off x="6309360" y="2450592"/>
+            <a:ext cx="4937760" cy="292608"/>
           </a:xfrm>
           <a:prstGeom prst="rect">
             <a:avLst/>
@@ -9804,11 +10420,11 @@
                 <a:solidFill>
                   <a:srgbClr val="FF5CA8"/>
                 </a:solidFill>
-                <a:latin typeface="Pretendard" pitchFamily="34" charset="0"/>
-                <a:ea typeface="Pretendard" pitchFamily="34" charset="-122"/>
-                <a:cs typeface="Pretendard" pitchFamily="34" charset="-120"/>
-              </a:rPr>
-              <a:t>📋 핵심 스펙 &amp; 가성비 비교표 (tableData)</a:t>
+                <a:latin typeface="맑은 고딕" pitchFamily="34" charset="0"/>
+                <a:ea typeface="맑은 고딕" pitchFamily="34" charset="-122"/>
+                <a:cs typeface="맑은 고딕" pitchFamily="34" charset="-120"/>
+              </a:rPr>
+              <a:t>핵심 스펙 &amp; 가성비 비교표 (tableData)</a:t>
             </a:r>
             <a:endParaRPr lang="en-US" sz="1200" dirty="0"/>
           </a:p>
@@ -9829,8 +10445,8 @@
           </p:nvPr>
         </p:nvGraphicFramePr>
         <p:xfrm>
-          <a:off x="6309360" y="2880360"/>
-          <a:ext cx="4965192" cy="2286000"/>
+          <a:off x="6309360" y="2852928"/>
+          <a:ext cx="4965192" cy="2331720"/>
         </p:xfrm>
         <a:graphic>
           <a:graphicData uri="http://schemas.openxmlformats.org/drawingml/2006/table">
@@ -9841,7 +10457,7 @@
                 <a:gridCol w="1655064"/>
                 <a:gridCol w="1655064"/>
               </a:tblGrid>
-              <a:tr h="457200">
+              <a:tr h="466344">
                 <a:tc>
                   <a:txBody>
                     <a:bodyPr/>
@@ -9853,18 +10469,18 @@
                       <a:r>
                         <a:rPr lang="en-US" sz="1050" b="1" dirty="0">
                           <a:solidFill>
-                            <a:srgbClr val="64748B"/>
+                            <a:srgbClr val="CBD5E1"/>
                           </a:solidFill>
-                          <a:latin typeface="Pretendard" pitchFamily="34" charset="0"/>
-                          <a:ea typeface="Pretendard" pitchFamily="34" charset="-122"/>
-                          <a:cs typeface="Pretendard" pitchFamily="34" charset="-120"/>
+                          <a:latin typeface="맑은 고딕" pitchFamily="34" charset="0"/>
+                          <a:ea typeface="맑은 고딕" pitchFamily="34" charset="-122"/>
+                          <a:cs typeface="맑은 고딕" pitchFamily="34" charset="-120"/>
                         </a:rPr>
                         <a:t>비교 항목</a:t>
                       </a:r>
                       <a:endParaRPr lang="en-US" sz="1050" dirty="0">
-                        <a:latin typeface="Pretendard" charset="0"/>
-                        <a:ea typeface="Pretendard" charset="0"/>
-                        <a:cs typeface="Pretendard" charset="0"/>
+                        <a:latin typeface="맑은 고딕" charset="0"/>
+                        <a:ea typeface="맑은 고딕" charset="0"/>
+                        <a:cs typeface="맑은 고딕" charset="0"/>
                       </a:endParaRPr>
                     </a:p>
                   </a:txBody>
@@ -9923,16 +10539,16 @@
                           <a:solidFill>
                             <a:srgbClr val="00F3FF"/>
                           </a:solidFill>
-                          <a:latin typeface="Pretendard" pitchFamily="34" charset="0"/>
-                          <a:ea typeface="Pretendard" pitchFamily="34" charset="-122"/>
-                          <a:cs typeface="Pretendard" pitchFamily="34" charset="-120"/>
+                          <a:latin typeface="맑은 고딕" pitchFamily="34" charset="0"/>
+                          <a:ea typeface="맑은 고딕" pitchFamily="34" charset="-122"/>
+                          <a:cs typeface="맑은 고딕" pitchFamily="34" charset="-120"/>
                         </a:rPr>
                         <a:t>RTX 5070 (현재)</a:t>
                       </a:r>
                       <a:endParaRPr lang="en-US" sz="1050" dirty="0">
-                        <a:latin typeface="Pretendard" charset="0"/>
-                        <a:ea typeface="Pretendard" charset="0"/>
-                        <a:cs typeface="Pretendard" charset="0"/>
+                        <a:latin typeface="맑은 고딕" charset="0"/>
+                        <a:ea typeface="맑은 고딕" charset="0"/>
+                        <a:cs typeface="맑은 고딕" charset="0"/>
                       </a:endParaRPr>
                     </a:p>
                   </a:txBody>
@@ -9991,16 +10607,16 @@
                           <a:solidFill>
                             <a:srgbClr val="FF5CA8"/>
                           </a:solidFill>
-                          <a:latin typeface="Pretendard" pitchFamily="34" charset="0"/>
-                          <a:ea typeface="Pretendard" pitchFamily="34" charset="-122"/>
-                          <a:cs typeface="Pretendard" pitchFamily="34" charset="-120"/>
+                          <a:latin typeface="맑은 고딕" pitchFamily="34" charset="0"/>
+                          <a:ea typeface="맑은 고딕" pitchFamily="34" charset="-122"/>
+                          <a:cs typeface="맑은 고딕" pitchFamily="34" charset="-120"/>
                         </a:rPr>
                         <a:t>RTX 5070 Ti (비교)</a:t>
                       </a:r>
                       <a:endParaRPr lang="en-US" sz="1050" dirty="0">
-                        <a:latin typeface="Pretendard" charset="0"/>
-                        <a:ea typeface="Pretendard" charset="0"/>
-                        <a:cs typeface="Pretendard" charset="0"/>
+                        <a:latin typeface="맑은 고딕" charset="0"/>
+                        <a:ea typeface="맑은 고딕" charset="0"/>
+                        <a:cs typeface="맑은 고딕" charset="0"/>
                       </a:endParaRPr>
                     </a:p>
                   </a:txBody>
@@ -10047,7 +10663,7 @@
                   </a:tcPr>
                 </a:tc>
               </a:tr>
-              <a:tr h="457200">
+              <a:tr h="466344">
                 <a:tc>
                   <a:txBody>
                     <a:bodyPr/>
@@ -10061,16 +10677,16 @@
                           <a:solidFill>
                             <a:srgbClr val="F8FAFC"/>
                           </a:solidFill>
-                          <a:latin typeface="Pretendard" pitchFamily="34" charset="0"/>
-                          <a:ea typeface="Pretendard" pitchFamily="34" charset="-122"/>
-                          <a:cs typeface="Pretendard" pitchFamily="34" charset="-120"/>
+                          <a:latin typeface="맑은 고딕" pitchFamily="34" charset="0"/>
+                          <a:ea typeface="맑은 고딕" pitchFamily="34" charset="-122"/>
+                          <a:cs typeface="맑은 고딕" pitchFamily="34" charset="-120"/>
                         </a:rPr>
                         <a:t>실구매가 및 차액</a:t>
                       </a:r>
                       <a:endParaRPr lang="en-US" sz="1050" dirty="0">
-                        <a:latin typeface="Pretendard" charset="0"/>
-                        <a:ea typeface="Pretendard" charset="0"/>
-                        <a:cs typeface="Pretendard" charset="0"/>
+                        <a:latin typeface="맑은 고딕" charset="0"/>
+                        <a:ea typeface="맑은 고딕" charset="0"/>
+                        <a:cs typeface="맑은 고딕" charset="0"/>
                       </a:endParaRPr>
                     </a:p>
                   </a:txBody>
@@ -10129,16 +10745,16 @@
                           <a:solidFill>
                             <a:srgbClr val="F8FAFC"/>
                           </a:solidFill>
-                          <a:latin typeface="Pretendard" pitchFamily="34" charset="0"/>
-                          <a:ea typeface="Pretendard" pitchFamily="34" charset="-122"/>
-                          <a:cs typeface="Pretendard" pitchFamily="34" charset="-120"/>
+                          <a:latin typeface="맑은 고딕" pitchFamily="34" charset="0"/>
+                          <a:ea typeface="맑은 고딕" pitchFamily="34" charset="-122"/>
+                          <a:cs typeface="맑은 고딕" pitchFamily="34" charset="-120"/>
                         </a:rPr>
-                        <a:t>기준가 (절약)</a:t>
+                        <a:t>기준 부품 (예산 절약)</a:t>
                       </a:r>
                       <a:endParaRPr lang="en-US" sz="1050" dirty="0">
-                        <a:latin typeface="Pretendard" charset="0"/>
-                        <a:ea typeface="Pretendard" charset="0"/>
-                        <a:cs typeface="Pretendard" charset="0"/>
+                        <a:latin typeface="맑은 고딕" charset="0"/>
+                        <a:ea typeface="맑은 고딕" charset="0"/>
+                        <a:cs typeface="맑은 고딕" charset="0"/>
                       </a:endParaRPr>
                     </a:p>
                   </a:txBody>
@@ -10197,16 +10813,16 @@
                           <a:solidFill>
                             <a:srgbClr val="F8FAFC"/>
                           </a:solidFill>
-                          <a:latin typeface="Pretendard" pitchFamily="34" charset="0"/>
-                          <a:ea typeface="Pretendard" pitchFamily="34" charset="-122"/>
-                          <a:cs typeface="Pretendard" pitchFamily="34" charset="-120"/>
+                          <a:latin typeface="맑은 고딕" pitchFamily="34" charset="0"/>
+                          <a:ea typeface="맑은 고딕" pitchFamily="34" charset="-122"/>
+                          <a:cs typeface="맑은 고딕" pitchFamily="34" charset="-120"/>
                         </a:rPr>
-                        <a:t>+37~60만 원 추가</a:t>
+                        <a:t>+약 40~60만 원 추가 지출</a:t>
                       </a:r>
                       <a:endParaRPr lang="en-US" sz="1050" dirty="0">
-                        <a:latin typeface="Pretendard" charset="0"/>
-                        <a:ea typeface="Pretendard" charset="0"/>
-                        <a:cs typeface="Pretendard" charset="0"/>
+                        <a:latin typeface="맑은 고딕" charset="0"/>
+                        <a:ea typeface="맑은 고딕" charset="0"/>
+                        <a:cs typeface="맑은 고딕" charset="0"/>
                       </a:endParaRPr>
                     </a:p>
                   </a:txBody>
@@ -10253,7 +10869,7 @@
                   </a:tcPr>
                 </a:tc>
               </a:tr>
-              <a:tr h="457200">
+              <a:tr h="466344">
                 <a:tc>
                   <a:txBody>
                     <a:bodyPr/>
@@ -10267,16 +10883,16 @@
                           <a:solidFill>
                             <a:srgbClr val="F8FAFC"/>
                           </a:solidFill>
-                          <a:latin typeface="Pretendard" pitchFamily="34" charset="0"/>
-                          <a:ea typeface="Pretendard" pitchFamily="34" charset="-122"/>
-                          <a:cs typeface="Pretendard" pitchFamily="34" charset="-120"/>
+                          <a:latin typeface="맑은 고딕" pitchFamily="34" charset="0"/>
+                          <a:ea typeface="맑은 고딕" pitchFamily="34" charset="-122"/>
+                          <a:cs typeface="맑은 고딕" pitchFamily="34" charset="-120"/>
                         </a:rPr>
                         <a:t>3DMark Time Spy</a:t>
                       </a:r>
                       <a:endParaRPr lang="en-US" sz="1050" dirty="0">
-                        <a:latin typeface="Pretendard" charset="0"/>
-                        <a:ea typeface="Pretendard" charset="0"/>
-                        <a:cs typeface="Pretendard" charset="0"/>
+                        <a:latin typeface="맑은 고딕" charset="0"/>
+                        <a:ea typeface="맑은 고딕" charset="0"/>
+                        <a:cs typeface="맑은 고딕" charset="0"/>
                       </a:endParaRPr>
                     </a:p>
                   </a:txBody>
@@ -10335,16 +10951,16 @@
                           <a:solidFill>
                             <a:srgbClr val="F8FAFC"/>
                           </a:solidFill>
-                          <a:latin typeface="Pretendard" pitchFamily="34" charset="0"/>
-                          <a:ea typeface="Pretendard" pitchFamily="34" charset="-122"/>
-                          <a:cs typeface="Pretendard" pitchFamily="34" charset="-120"/>
+                          <a:latin typeface="맑은 고딕" pitchFamily="34" charset="0"/>
+                          <a:ea typeface="맑은 고딕" pitchFamily="34" charset="-122"/>
+                          <a:cs typeface="맑은 고딕" pitchFamily="34" charset="-120"/>
                         </a:rPr>
                         <a:t>22,900점 (100%)</a:t>
                       </a:r>
                       <a:endParaRPr lang="en-US" sz="1050" dirty="0">
-                        <a:latin typeface="Pretendard" charset="0"/>
-                        <a:ea typeface="Pretendard" charset="0"/>
-                        <a:cs typeface="Pretendard" charset="0"/>
+                        <a:latin typeface="맑은 고딕" charset="0"/>
+                        <a:ea typeface="맑은 고딕" charset="0"/>
+                        <a:cs typeface="맑은 고딕" charset="0"/>
                       </a:endParaRPr>
                     </a:p>
                   </a:txBody>
@@ -10403,16 +11019,16 @@
                           <a:solidFill>
                             <a:srgbClr val="F8FAFC"/>
                           </a:solidFill>
-                          <a:latin typeface="Pretendard" pitchFamily="34" charset="0"/>
-                          <a:ea typeface="Pretendard" pitchFamily="34" charset="-122"/>
-                          <a:cs typeface="Pretendard" pitchFamily="34" charset="-120"/>
+                          <a:latin typeface="맑은 고딕" pitchFamily="34" charset="0"/>
+                          <a:ea typeface="맑은 고딕" pitchFamily="34" charset="-122"/>
+                          <a:cs typeface="맑은 고딕" pitchFamily="34" charset="-120"/>
                         </a:rPr>
-                        <a:t>27,800점 (+21%)</a:t>
+                        <a:t>27,800점 (+21% 우세)</a:t>
                       </a:r>
                       <a:endParaRPr lang="en-US" sz="1050" dirty="0">
-                        <a:latin typeface="Pretendard" charset="0"/>
-                        <a:ea typeface="Pretendard" charset="0"/>
-                        <a:cs typeface="Pretendard" charset="0"/>
+                        <a:latin typeface="맑은 고딕" charset="0"/>
+                        <a:ea typeface="맑은 고딕" charset="0"/>
+                        <a:cs typeface="맑은 고딕" charset="0"/>
                       </a:endParaRPr>
                     </a:p>
                   </a:txBody>
@@ -10459,7 +11075,7 @@
                   </a:tcPr>
                 </a:tc>
               </a:tr>
-              <a:tr h="457200">
+              <a:tr h="466344">
                 <a:tc>
                   <a:txBody>
                     <a:bodyPr/>
@@ -10473,16 +11089,16 @@
                           <a:solidFill>
                             <a:srgbClr val="F8FAFC"/>
                           </a:solidFill>
-                          <a:latin typeface="Pretendard" pitchFamily="34" charset="0"/>
-                          <a:ea typeface="Pretendard" pitchFamily="34" charset="-122"/>
-                          <a:cs typeface="Pretendard" pitchFamily="34" charset="-120"/>
+                          <a:latin typeface="맑은 고딕" pitchFamily="34" charset="0"/>
+                          <a:ea typeface="맑은 고딕" pitchFamily="34" charset="-122"/>
+                          <a:cs typeface="맑은 고딕" pitchFamily="34" charset="-120"/>
                         </a:rPr>
                         <a:t>VRAM / 소비전력</a:t>
                       </a:r>
                       <a:endParaRPr lang="en-US" sz="1050" dirty="0">
-                        <a:latin typeface="Pretendard" charset="0"/>
-                        <a:ea typeface="Pretendard" charset="0"/>
-                        <a:cs typeface="Pretendard" charset="0"/>
+                        <a:latin typeface="맑은 고딕" charset="0"/>
+                        <a:ea typeface="맑은 고딕" charset="0"/>
+                        <a:cs typeface="맑은 고딕" charset="0"/>
                       </a:endParaRPr>
                     </a:p>
                   </a:txBody>
@@ -10541,16 +11157,16 @@
                           <a:solidFill>
                             <a:srgbClr val="F8FAFC"/>
                           </a:solidFill>
-                          <a:latin typeface="Pretendard" pitchFamily="34" charset="0"/>
-                          <a:ea typeface="Pretendard" pitchFamily="34" charset="-122"/>
-                          <a:cs typeface="Pretendard" pitchFamily="34" charset="-120"/>
+                          <a:latin typeface="맑은 고딕" pitchFamily="34" charset="0"/>
+                          <a:ea typeface="맑은 고딕" pitchFamily="34" charset="-122"/>
+                          <a:cs typeface="맑은 고딕" pitchFamily="34" charset="-120"/>
                         </a:rPr>
                         <a:t>GDDR7 12GB / 250W</a:t>
                       </a:r>
                       <a:endParaRPr lang="en-US" sz="1050" dirty="0">
-                        <a:latin typeface="Pretendard" charset="0"/>
-                        <a:ea typeface="Pretendard" charset="0"/>
-                        <a:cs typeface="Pretendard" charset="0"/>
+                        <a:latin typeface="맑은 고딕" charset="0"/>
+                        <a:ea typeface="맑은 고딕" charset="0"/>
+                        <a:cs typeface="맑은 고딕" charset="0"/>
                       </a:endParaRPr>
                     </a:p>
                   </a:txBody>
@@ -10609,16 +11225,16 @@
                           <a:solidFill>
                             <a:srgbClr val="F8FAFC"/>
                           </a:solidFill>
-                          <a:latin typeface="Pretendard" pitchFamily="34" charset="0"/>
-                          <a:ea typeface="Pretendard" pitchFamily="34" charset="-122"/>
-                          <a:cs typeface="Pretendard" pitchFamily="34" charset="-120"/>
+                          <a:latin typeface="맑은 고딕" pitchFamily="34" charset="0"/>
+                          <a:ea typeface="맑은 고딕" pitchFamily="34" charset="-122"/>
+                          <a:cs typeface="맑은 고딕" pitchFamily="34" charset="-120"/>
                         </a:rPr>
                         <a:t>GDDR7 16GB / 300W</a:t>
                       </a:r>
                       <a:endParaRPr lang="en-US" sz="1050" dirty="0">
-                        <a:latin typeface="Pretendard" charset="0"/>
-                        <a:ea typeface="Pretendard" charset="0"/>
-                        <a:cs typeface="Pretendard" charset="0"/>
+                        <a:latin typeface="맑은 고딕" charset="0"/>
+                        <a:ea typeface="맑은 고딕" charset="0"/>
+                        <a:cs typeface="맑은 고딕" charset="0"/>
                       </a:endParaRPr>
                     </a:p>
                   </a:txBody>
@@ -10665,7 +11281,7 @@
                   </a:tcPr>
                 </a:tc>
               </a:tr>
-              <a:tr h="457200">
+              <a:tr h="466344">
                 <a:tc>
                   <a:txBody>
                     <a:bodyPr/>
@@ -10679,16 +11295,16 @@
                           <a:solidFill>
                             <a:srgbClr val="F8FAFC"/>
                           </a:solidFill>
-                          <a:latin typeface="Pretendard" pitchFamily="34" charset="0"/>
-                          <a:ea typeface="Pretendard" pitchFamily="34" charset="-122"/>
-                          <a:cs typeface="Pretendard" pitchFamily="34" charset="-120"/>
+                          <a:latin typeface="맑은 고딕" pitchFamily="34" charset="0"/>
+                          <a:ea typeface="맑은 고딕" pitchFamily="34" charset="-122"/>
+                          <a:cs typeface="맑은 고딕" pitchFamily="34" charset="-120"/>
                         </a:rPr>
                         <a:t>추천 선택 기준</a:t>
                       </a:r>
                       <a:endParaRPr lang="en-US" sz="1050" dirty="0">
-                        <a:latin typeface="Pretendard" charset="0"/>
-                        <a:ea typeface="Pretendard" charset="0"/>
-                        <a:cs typeface="Pretendard" charset="0"/>
+                        <a:latin typeface="맑은 고딕" charset="0"/>
+                        <a:ea typeface="맑은 고딕" charset="0"/>
+                        <a:cs typeface="맑은 고딕" charset="0"/>
                       </a:endParaRPr>
                     </a:p>
                   </a:txBody>
@@ -10747,16 +11363,16 @@
                           <a:solidFill>
                             <a:srgbClr val="F8FAFC"/>
                           </a:solidFill>
-                          <a:latin typeface="Pretendard" pitchFamily="34" charset="0"/>
-                          <a:ea typeface="Pretendard" pitchFamily="34" charset="-122"/>
-                          <a:cs typeface="Pretendard" pitchFamily="34" charset="-120"/>
+                          <a:latin typeface="맑은 고딕" pitchFamily="34" charset="0"/>
+                          <a:ea typeface="맑은 고딕" pitchFamily="34" charset="-122"/>
+                          <a:cs typeface="맑은 고딕" pitchFamily="34" charset="-120"/>
                         </a:rPr>
                         <a:t>FHD·QHD 가성비 게이밍</a:t>
                       </a:r>
                       <a:endParaRPr lang="en-US" sz="1050" dirty="0">
-                        <a:latin typeface="Pretendard" charset="0"/>
-                        <a:ea typeface="Pretendard" charset="0"/>
-                        <a:cs typeface="Pretendard" charset="0"/>
+                        <a:latin typeface="맑은 고딕" charset="0"/>
+                        <a:ea typeface="맑은 고딕" charset="0"/>
+                        <a:cs typeface="맑은 고딕" charset="0"/>
                       </a:endParaRPr>
                     </a:p>
                   </a:txBody>
@@ -10815,16 +11431,16 @@
                           <a:solidFill>
                             <a:srgbClr val="F8FAFC"/>
                           </a:solidFill>
-                          <a:latin typeface="Pretendard" pitchFamily="34" charset="0"/>
-                          <a:ea typeface="Pretendard" pitchFamily="34" charset="-122"/>
-                          <a:cs typeface="Pretendard" pitchFamily="34" charset="-120"/>
+                          <a:latin typeface="맑은 고딕" pitchFamily="34" charset="0"/>
+                          <a:ea typeface="맑은 고딕" pitchFamily="34" charset="-122"/>
+                          <a:cs typeface="맑은 고딕" pitchFamily="34" charset="-120"/>
                         </a:rPr>
                         <a:t>4K 고해상도·16GB 필요 시</a:t>
                       </a:r>
                       <a:endParaRPr lang="en-US" sz="1050" dirty="0">
-                        <a:latin typeface="Pretendard" charset="0"/>
-                        <a:ea typeface="Pretendard" charset="0"/>
-                        <a:cs typeface="Pretendard" charset="0"/>
+                        <a:latin typeface="맑은 고딕" charset="0"/>
+                        <a:ea typeface="맑은 고딕" charset="0"/>
+                        <a:cs typeface="맑은 고딕" charset="0"/>
                       </a:endParaRPr>
                     </a:p>
                   </a:txBody>
@@ -10877,7 +11493,7 @@
       </p:graphicFrame>
       <p:sp>
         <p:nvSpPr>
-          <p:cNvPr id="18" name="Shape 15"/>
+          <p:cNvPr id="32" name="Shape 29"/>
           <p:cNvSpPr/>
           <p:nvPr/>
         </p:nvSpPr>
@@ -10906,7 +11522,7 @@
       </p:sp>
       <p:sp>
         <p:nvSpPr>
-          <p:cNvPr id="19" name="Text 16"/>
+          <p:cNvPr id="33" name="Text 30"/>
           <p:cNvSpPr/>
           <p:nvPr/>
         </p:nvSpPr>
@@ -10933,11 +11549,11 @@
                 <a:solidFill>
                   <a:srgbClr val="00E676"/>
                 </a:solidFill>
-                <a:latin typeface="Pretendard" pitchFamily="34" charset="0"/>
-                <a:ea typeface="Pretendard" pitchFamily="34" charset="-122"/>
-                <a:cs typeface="Pretendard" pitchFamily="34" charset="-120"/>
-              </a:rPr>
-              <a:t>🛡️ 분석 데이터 출처 (Verified Sources): UL 3DMark Time Spy · 퀘이사존 QHD 실측 벤치마크 | [Supabase DB 실측 스펙 2건 직접 대조됨]</a:t>
+                <a:latin typeface="맑은 고딕" pitchFamily="34" charset="0"/>
+                <a:ea typeface="맑은 고딕" pitchFamily="34" charset="-122"/>
+                <a:cs typeface="맑은 고딕" pitchFamily="34" charset="-120"/>
+              </a:rPr>
+              <a:t>[분석 데이터 출처 (sources)] UL 3DMark Time Spy · 퀘이사존 QHD 실측 벤치마크 · PC-Fit Supabase 부품 DB</a:t>
             </a:r>
             <a:endParaRPr lang="en-US" sz="1050" dirty="0"/>
           </a:p>
@@ -10984,14 +11600,14 @@
         <p:spPr>
           <a:xfrm>
             <a:off x="457200" y="228600"/>
-            <a:ext cx="11274552" cy="27432"/>
+            <a:ext cx="11274552" cy="36576"/>
           </a:xfrm>
           <a:prstGeom prst="rect">
             <a:avLst/>
           </a:prstGeom>
           <a:solidFill>
             <a:srgbClr val="00F3FF">
-              <a:alpha val="30000"/>
+              <a:alpha val="40000"/>
             </a:srgbClr>
           </a:solidFill>
           <a:ln w="12700">
@@ -11013,7 +11629,7 @@
         <p:spPr>
           <a:xfrm>
             <a:off x="457200" y="384048"/>
-            <a:ext cx="3474720" cy="310896"/>
+            <a:ext cx="3840480" cy="329184"/>
           </a:xfrm>
           <a:prstGeom prst="roundRect">
             <a:avLst>
@@ -11042,7 +11658,7 @@
         <p:spPr>
           <a:xfrm>
             <a:off x="457200" y="384048"/>
-            <a:ext cx="3474720" cy="310896"/>
+            <a:ext cx="3840480" cy="329184"/>
           </a:xfrm>
           <a:prstGeom prst="rect">
             <a:avLst/>
@@ -11058,17 +11674,17 @@
               <a:buNone/>
             </a:pPr>
             <a:r>
-              <a:rPr lang="en-US" sz="1000" b="1" dirty="0">
+              <a:rPr lang="en-US" sz="1050" b="1" dirty="0">
                 <a:solidFill>
                   <a:srgbClr val="00F3FF"/>
                 </a:solidFill>
-                <a:latin typeface="Pretendard" pitchFamily="34" charset="0"/>
-                <a:ea typeface="Pretendard" pitchFamily="34" charset="-122"/>
-                <a:cs typeface="Pretendard" pitchFamily="34" charset="-120"/>
+                <a:latin typeface="맑은 고딕" pitchFamily="34" charset="0"/>
+                <a:ea typeface="맑은 고딕" pitchFamily="34" charset="-122"/>
+                <a:cs typeface="맑은 고딕" pitchFamily="34" charset="-120"/>
               </a:rPr>
               <a:t>3. 동작하는 코드 (Working Code)</a:t>
             </a:r>
-            <a:endParaRPr lang="en-US" sz="1000" dirty="0"/>
+            <a:endParaRPr lang="en-US" sz="1050" dirty="0"/>
           </a:p>
         </p:txBody>
       </p:sp>
@@ -11080,7 +11696,7 @@
         </p:nvSpPr>
         <p:spPr>
           <a:xfrm>
-            <a:off x="457200" y="777240"/>
+            <a:off x="457200" y="786384"/>
             <a:ext cx="11274552" cy="502920"/>
           </a:xfrm>
           <a:prstGeom prst="rect">
@@ -11097,17 +11713,17 @@
               <a:buNone/>
             </a:pPr>
             <a:r>
-              <a:rPr lang="en-US" sz="2400" b="1" dirty="0">
-                <a:solidFill>
-                  <a:srgbClr val="F8FAFC"/>
-                </a:solidFill>
-                <a:latin typeface="Pretendard" pitchFamily="34" charset="0"/>
-                <a:ea typeface="Pretendard" pitchFamily="34" charset="-122"/>
-                <a:cs typeface="Pretendard" pitchFamily="34" charset="-120"/>
+              <a:rPr lang="en-US" sz="2200" b="1" dirty="0">
+                <a:solidFill>
+                  <a:srgbClr val="F8FAFC"/>
+                </a:solidFill>
+                <a:latin typeface="맑은 고딕" pitchFamily="34" charset="0"/>
+                <a:ea typeface="맑은 고딕" pitchFamily="34" charset="-122"/>
+                <a:cs typeface="맑은 고딕" pitchFamily="34" charset="-120"/>
               </a:rPr>
               <a:t>내 프로젝트에 실제 구현된 advisorController.js &amp; PartAdvisorCard.vue 코드</a:t>
             </a:r>
-            <a:endParaRPr lang="en-US" sz="2400" dirty="0"/>
+            <a:endParaRPr lang="en-US" sz="2200" dirty="0"/>
           </a:p>
         </p:txBody>
       </p:sp>
@@ -11163,13 +11779,13 @@
             <a:r>
               <a:rPr lang="en-US" sz="950" dirty="0">
                 <a:solidFill>
-                  <a:srgbClr val="64748B"/>
-                </a:solidFill>
-                <a:latin typeface="Pretendard" pitchFamily="34" charset="0"/>
-                <a:ea typeface="Pretendard" pitchFamily="34" charset="-122"/>
-                <a:cs typeface="Pretendard" pitchFamily="34" charset="-120"/>
-              </a:rPr>
-              <a:t>PC-FIT 2.0 : AI 부품·가격 비교 &amp; 가성비 어드바이저</a:t>
+                  <a:srgbClr val="94A3B8"/>
+                </a:solidFill>
+                <a:latin typeface="맑은 고딕" pitchFamily="34" charset="0"/>
+                <a:ea typeface="맑은 고딕" pitchFamily="34" charset="-122"/>
+                <a:cs typeface="맑은 고딕" pitchFamily="34" charset="-120"/>
+              </a:rPr>
+              <a:t>PC-FIT 2.0 : AI 부품·가격 비교 및 가성비 어드바이저</a:t>
             </a:r>
             <a:endParaRPr lang="en-US" sz="950" dirty="0"/>
           </a:p>
@@ -11204,9 +11820,9 @@
                 <a:solidFill>
                   <a:srgbClr val="00F3FF"/>
                 </a:solidFill>
-                <a:latin typeface="Consolas" pitchFamily="34" charset="0"/>
-                <a:ea typeface="Consolas" pitchFamily="34" charset="-122"/>
-                <a:cs typeface="Consolas" pitchFamily="34" charset="-120"/>
+                <a:latin typeface="맑은 고딕" pitchFamily="34" charset="0"/>
+                <a:ea typeface="맑은 고딕" pitchFamily="34" charset="-122"/>
+                <a:cs typeface="맑은 고딕" pitchFamily="34" charset="-120"/>
               </a:rPr>
               <a:t>SLIDE 08 / 09</a:t>
             </a:r>
@@ -11270,11 +11886,11 @@
                 <a:solidFill>
                   <a:srgbClr val="00F3FF"/>
                 </a:solidFill>
-                <a:latin typeface="Consolas" pitchFamily="34" charset="0"/>
-                <a:ea typeface="Consolas" pitchFamily="34" charset="-122"/>
-                <a:cs typeface="Consolas" pitchFamily="34" charset="-120"/>
-              </a:rPr>
-              <a:t>📁 back/src/controllers/advisorController.js (Backend)</a:t>
+                <a:latin typeface="맑은 고딕" pitchFamily="34" charset="0"/>
+                <a:ea typeface="맑은 고딕" pitchFamily="34" charset="-122"/>
+                <a:cs typeface="맑은 고딕" pitchFamily="34" charset="-120"/>
+              </a:rPr>
+              <a:t>back/src/controllers/advisorController.js (Backend)</a:t>
             </a:r>
             <a:endParaRPr lang="en-US" sz="1100" dirty="0"/>
           </a:p>
@@ -11305,267 +11921,267 @@
               <a:buNone/>
             </a:pPr>
             <a:r>
-              <a:rPr lang="en-US" sz="980" dirty="0">
-                <a:solidFill>
-                  <a:srgbClr val="F8FAFC"/>
-                </a:solidFill>
-                <a:latin typeface="Consolas" pitchFamily="34" charset="0"/>
-                <a:ea typeface="Consolas" pitchFamily="34" charset="-122"/>
-                <a:cs typeface="Consolas" pitchFamily="34" charset="-120"/>
-              </a:rPr>
-              <a:t>// POST /api/recommend/compare-advisor</a:t>
-            </a:r>
-            <a:endParaRPr lang="en-US" sz="980" dirty="0"/>
-          </a:p>
-          <a:p>
-            <a:pPr indent="0" marL="0">
-              <a:buNone/>
-            </a:pPr>
-            <a:r>
-              <a:rPr lang="en-US" sz="980" dirty="0">
-                <a:solidFill>
-                  <a:srgbClr val="F8FAFC"/>
-                </a:solidFill>
-                <a:latin typeface="Consolas" pitchFamily="34" charset="0"/>
-                <a:ea typeface="Consolas" pitchFamily="34" charset="-122"/>
-                <a:cs typeface="Consolas" pitchFamily="34" charset="-120"/>
+              <a:rPr lang="en-US" sz="950" dirty="0">
+                <a:solidFill>
+                  <a:srgbClr val="F8FAFC"/>
+                </a:solidFill>
+                <a:latin typeface="맑은 고딕" pitchFamily="34" charset="0"/>
+                <a:ea typeface="맑은 고딕" pitchFamily="34" charset="-122"/>
+                <a:cs typeface="맑은 고딕" pitchFamily="34" charset="-120"/>
+              </a:rPr>
+              <a:t>// POST /api/v1/recommend/compare-advisor</a:t>
+            </a:r>
+            <a:endParaRPr lang="en-US" sz="950" dirty="0"/>
+          </a:p>
+          <a:p>
+            <a:pPr indent="0" marL="0">
+              <a:buNone/>
+            </a:pPr>
+            <a:r>
+              <a:rPr lang="en-US" sz="950" dirty="0">
+                <a:solidFill>
+                  <a:srgbClr val="F8FAFC"/>
+                </a:solidFill>
+                <a:latin typeface="맑은 고딕" pitchFamily="34" charset="0"/>
+                <a:ea typeface="맑은 고딕" pitchFamily="34" charset="-122"/>
+                <a:cs typeface="맑은 고딕" pitchFamily="34" charset="-120"/>
               </a:rPr>
               <a:t>exports.compareAdvisor = async (req, res) =&gt; {</a:t>
             </a:r>
-            <a:endParaRPr lang="en-US" sz="980" dirty="0"/>
-          </a:p>
-          <a:p>
-            <a:pPr indent="0" marL="0">
-              <a:buNone/>
-            </a:pPr>
-            <a:r>
-              <a:rPr lang="en-US" sz="980" dirty="0">
-                <a:solidFill>
-                  <a:srgbClr val="F8FAFC"/>
-                </a:solidFill>
-                <a:latin typeface="Consolas" pitchFamily="34" charset="0"/>
-                <a:ea typeface="Consolas" pitchFamily="34" charset="-122"/>
-                <a:cs typeface="Consolas" pitchFamily="34" charset="-120"/>
+            <a:endParaRPr lang="en-US" sz="950" dirty="0"/>
+          </a:p>
+          <a:p>
+            <a:pPr indent="0" marL="0">
+              <a:buNone/>
+            </a:pPr>
+            <a:r>
+              <a:rPr lang="en-US" sz="950" dirty="0">
+                <a:solidFill>
+                  <a:srgbClr val="F8FAFC"/>
+                </a:solidFill>
+                <a:latin typeface="맑은 고딕" pitchFamily="34" charset="0"/>
+                <a:ea typeface="맑은 고딕" pitchFamily="34" charset="-122"/>
+                <a:cs typeface="맑은 고딕" pitchFamily="34" charset="-120"/>
               </a:rPr>
               <a:t>  const { question, currentBuild, totalPrice, budget, usage } = req.body;</a:t>
             </a:r>
-            <a:endParaRPr lang="en-US" sz="980" dirty="0"/>
-          </a:p>
-          <a:p>
-            <a:pPr indent="0" marL="0">
-              <a:buNone/>
-            </a:pPr>
-            <a:endParaRPr lang="en-US" sz="980" dirty="0"/>
-          </a:p>
-          <a:p>
-            <a:pPr indent="0" marL="0">
-              <a:buNone/>
-            </a:pPr>
-            <a:r>
-              <a:rPr lang="en-US" sz="980" dirty="0">
-                <a:solidFill>
-                  <a:srgbClr val="F8FAFC"/>
-                </a:solidFill>
-                <a:latin typeface="Consolas" pitchFamily="34" charset="0"/>
-                <a:ea typeface="Consolas" pitchFamily="34" charset="-122"/>
-                <a:cs typeface="Consolas" pitchFamily="34" charset="-120"/>
+            <a:endParaRPr lang="en-US" sz="950" dirty="0"/>
+          </a:p>
+          <a:p>
+            <a:pPr indent="0" marL="0">
+              <a:buNone/>
+            </a:pPr>
+            <a:endParaRPr lang="en-US" sz="950" dirty="0"/>
+          </a:p>
+          <a:p>
+            <a:pPr indent="0" marL="0">
+              <a:buNone/>
+            </a:pPr>
+            <a:r>
+              <a:rPr lang="en-US" sz="950" dirty="0">
+                <a:solidFill>
+                  <a:srgbClr val="F8FAFC"/>
+                </a:solidFill>
+                <a:latin typeface="맑은 고딕" pitchFamily="34" charset="0"/>
+                <a:ea typeface="맑은 고딕" pitchFamily="34" charset="-122"/>
+                <a:cs typeface="맑은 고딕" pitchFamily="34" charset="-120"/>
               </a:rPr>
               <a:t>  // 1. Supabase parts DB 조회 + 공인 벤치마크(3DMark·퀘이사존) 매칭</a:t>
             </a:r>
-            <a:endParaRPr lang="en-US" sz="980" dirty="0"/>
-          </a:p>
-          <a:p>
-            <a:pPr indent="0" marL="0">
-              <a:buNone/>
-            </a:pPr>
-            <a:r>
-              <a:rPr lang="en-US" sz="980" dirty="0">
-                <a:solidFill>
-                  <a:srgbClr val="F8FAFC"/>
-                </a:solidFill>
-                <a:latin typeface="Consolas" pitchFamily="34" charset="0"/>
-                <a:ea typeface="Consolas" pitchFamily="34" charset="-122"/>
-                <a:cs typeface="Consolas" pitchFamily="34" charset="-120"/>
+            <a:endParaRPr lang="en-US" sz="950" dirty="0"/>
+          </a:p>
+          <a:p>
+            <a:pPr indent="0" marL="0">
+              <a:buNone/>
+            </a:pPr>
+            <a:r>
+              <a:rPr lang="en-US" sz="950" dirty="0">
+                <a:solidFill>
+                  <a:srgbClr val="F8FAFC"/>
+                </a:solidFill>
+                <a:latin typeface="맑은 고딕" pitchFamily="34" charset="0"/>
+                <a:ea typeface="맑은 고딕" pitchFamily="34" charset="-122"/>
+                <a:cs typeface="맑은 고딕" pitchFamily="34" charset="-120"/>
               </a:rPr>
               <a:t>  const [dbParts, benchRef] = await Promise.all([</a:t>
             </a:r>
-            <a:endParaRPr lang="en-US" sz="980" dirty="0"/>
-          </a:p>
-          <a:p>
-            <a:pPr indent="0" marL="0">
-              <a:buNone/>
-            </a:pPr>
-            <a:r>
-              <a:rPr lang="en-US" sz="980" dirty="0">
-                <a:solidFill>
-                  <a:srgbClr val="F8FAFC"/>
-                </a:solidFill>
-                <a:latin typeface="Consolas" pitchFamily="34" charset="0"/>
-                <a:ea typeface="Consolas" pitchFamily="34" charset="-122"/>
-                <a:cs typeface="Consolas" pitchFamily="34" charset="-120"/>
+            <a:endParaRPr lang="en-US" sz="950" dirty="0"/>
+          </a:p>
+          <a:p>
+            <a:pPr indent="0" marL="0">
+              <a:buNone/>
+            </a:pPr>
+            <a:r>
+              <a:rPr lang="en-US" sz="950" dirty="0">
+                <a:solidFill>
+                  <a:srgbClr val="F8FAFC"/>
+                </a:solidFill>
+                <a:latin typeface="맑은 고딕" pitchFamily="34" charset="0"/>
+                <a:ea typeface="맑은 고딕" pitchFamily="34" charset="-122"/>
+                <a:cs typeface="맑은 고딕" pitchFamily="34" charset="-120"/>
               </a:rPr>
               <a:t>    queryDbPartsForComparison(currentBuild, question),</a:t>
             </a:r>
-            <a:endParaRPr lang="en-US" sz="980" dirty="0"/>
-          </a:p>
-          <a:p>
-            <a:pPr indent="0" marL="0">
-              <a:buNone/>
-            </a:pPr>
-            <a:r>
-              <a:rPr lang="en-US" sz="980" dirty="0">
-                <a:solidFill>
-                  <a:srgbClr val="F8FAFC"/>
-                </a:solidFill>
-                <a:latin typeface="Consolas" pitchFamily="34" charset="0"/>
-                <a:ea typeface="Consolas" pitchFamily="34" charset="-122"/>
-                <a:cs typeface="Consolas" pitchFamily="34" charset="-120"/>
+            <a:endParaRPr lang="en-US" sz="950" dirty="0"/>
+          </a:p>
+          <a:p>
+            <a:pPr indent="0" marL="0">
+              <a:buNone/>
+            </a:pPr>
+            <a:r>
+              <a:rPr lang="en-US" sz="950" dirty="0">
+                <a:solidFill>
+                  <a:srgbClr val="F8FAFC"/>
+                </a:solidFill>
+                <a:latin typeface="맑은 고딕" pitchFamily="34" charset="0"/>
+                <a:ea typeface="맑은 고딕" pitchFamily="34" charset="-122"/>
+                <a:cs typeface="맑은 고딕" pitchFamily="34" charset="-120"/>
               </a:rPr>
               <a:t>    Promise.resolve(matchBenchmarksForContext(currentBuild, question))</a:t>
             </a:r>
-            <a:endParaRPr lang="en-US" sz="980" dirty="0"/>
-          </a:p>
-          <a:p>
-            <a:pPr indent="0" marL="0">
-              <a:buNone/>
-            </a:pPr>
-            <a:r>
-              <a:rPr lang="en-US" sz="980" dirty="0">
-                <a:solidFill>
-                  <a:srgbClr val="F8FAFC"/>
-                </a:solidFill>
-                <a:latin typeface="Consolas" pitchFamily="34" charset="0"/>
-                <a:ea typeface="Consolas" pitchFamily="34" charset="-122"/>
-                <a:cs typeface="Consolas" pitchFamily="34" charset="-120"/>
+            <a:endParaRPr lang="en-US" sz="950" dirty="0"/>
+          </a:p>
+          <a:p>
+            <a:pPr indent="0" marL="0">
+              <a:buNone/>
+            </a:pPr>
+            <a:r>
+              <a:rPr lang="en-US" sz="950" dirty="0">
+                <a:solidFill>
+                  <a:srgbClr val="F8FAFC"/>
+                </a:solidFill>
+                <a:latin typeface="맑은 고딕" pitchFamily="34" charset="0"/>
+                <a:ea typeface="맑은 고딕" pitchFamily="34" charset="-122"/>
+                <a:cs typeface="맑은 고딕" pitchFamily="34" charset="-120"/>
               </a:rPr>
               <a:t>  ]);</a:t>
             </a:r>
-            <a:endParaRPr lang="en-US" sz="980" dirty="0"/>
-          </a:p>
-          <a:p>
-            <a:pPr indent="0" marL="0">
-              <a:buNone/>
-            </a:pPr>
-            <a:endParaRPr lang="en-US" sz="980" dirty="0"/>
-          </a:p>
-          <a:p>
-            <a:pPr indent="0" marL="0">
-              <a:buNone/>
-            </a:pPr>
-            <a:r>
-              <a:rPr lang="en-US" sz="980" dirty="0">
-                <a:solidFill>
-                  <a:srgbClr val="F8FAFC"/>
-                </a:solidFill>
-                <a:latin typeface="Consolas" pitchFamily="34" charset="0"/>
-                <a:ea typeface="Consolas" pitchFamily="34" charset="-122"/>
-                <a:cs typeface="Consolas" pitchFamily="34" charset="-120"/>
-              </a:rPr>
-              <a:t>  // 2. 컨텍스트 주입 후 AI 호출 &amp; 정형 JSON 정규화 반환</a:t>
-            </a:r>
-            <a:endParaRPr lang="en-US" sz="980" dirty="0"/>
-          </a:p>
-          <a:p>
-            <a:pPr indent="0" marL="0">
-              <a:buNone/>
-            </a:pPr>
-            <a:r>
-              <a:rPr lang="en-US" sz="980" dirty="0">
-                <a:solidFill>
-                  <a:srgbClr val="F8FAFC"/>
-                </a:solidFill>
-                <a:latin typeface="Consolas" pitchFamily="34" charset="0"/>
-                <a:ea typeface="Consolas" pitchFamily="34" charset="-122"/>
-                <a:cs typeface="Consolas" pitchFamily="34" charset="-120"/>
+            <a:endParaRPr lang="en-US" sz="950" dirty="0"/>
+          </a:p>
+          <a:p>
+            <a:pPr indent="0" marL="0">
+              <a:buNone/>
+            </a:pPr>
+            <a:endParaRPr lang="en-US" sz="950" dirty="0"/>
+          </a:p>
+          <a:p>
+            <a:pPr indent="0" marL="0">
+              <a:buNone/>
+            </a:pPr>
+            <a:r>
+              <a:rPr lang="en-US" sz="950" dirty="0">
+                <a:solidFill>
+                  <a:srgbClr val="F8FAFC"/>
+                </a:solidFill>
+                <a:latin typeface="맑은 고딕" pitchFamily="34" charset="0"/>
+                <a:ea typeface="맑은 고딕" pitchFamily="34" charset="-122"/>
+                <a:cs typeface="맑은 고딕" pitchFamily="34" charset="-120"/>
+              </a:rPr>
+              <a:t>  // 2. 컨텍스트 생성 후 AI 모델 호출 &amp; JSON 정규화 반환</a:t>
+            </a:r>
+            <a:endParaRPr lang="en-US" sz="950" dirty="0"/>
+          </a:p>
+          <a:p>
+            <a:pPr indent="0" marL="0">
+              <a:buNone/>
+            </a:pPr>
+            <a:r>
+              <a:rPr lang="en-US" sz="950" dirty="0">
+                <a:solidFill>
+                  <a:srgbClr val="F8FAFC"/>
+                </a:solidFill>
+                <a:latin typeface="맑은 고딕" pitchFamily="34" charset="0"/>
+                <a:ea typeface="맑은 고딕" pitchFamily="34" charset="-122"/>
+                <a:cs typeface="맑은 고딕" pitchFamily="34" charset="-120"/>
               </a:rPr>
               <a:t>  const buildContext = formatBuildContext(</a:t>
             </a:r>
-            <a:endParaRPr lang="en-US" sz="980" dirty="0"/>
-          </a:p>
-          <a:p>
-            <a:pPr indent="0" marL="0">
-              <a:buNone/>
-            </a:pPr>
-            <a:r>
-              <a:rPr lang="en-US" sz="980" dirty="0">
-                <a:solidFill>
-                  <a:srgbClr val="F8FAFC"/>
-                </a:solidFill>
-                <a:latin typeface="Consolas" pitchFamily="34" charset="0"/>
-                <a:ea typeface="Consolas" pitchFamily="34" charset="-122"/>
-                <a:cs typeface="Consolas" pitchFamily="34" charset="-120"/>
+            <a:endParaRPr lang="en-US" sz="950" dirty="0"/>
+          </a:p>
+          <a:p>
+            <a:pPr indent="0" marL="0">
+              <a:buNone/>
+            </a:pPr>
+            <a:r>
+              <a:rPr lang="en-US" sz="950" dirty="0">
+                <a:solidFill>
+                  <a:srgbClr val="F8FAFC"/>
+                </a:solidFill>
+                <a:latin typeface="맑은 고딕" pitchFamily="34" charset="0"/>
+                <a:ea typeface="맑은 고딕" pitchFamily="34" charset="-122"/>
+                <a:cs typeface="맑은 고딕" pitchFamily="34" charset="-120"/>
               </a:rPr>
               <a:t>    currentBuild, totalPrice, budget, usage, '', dbParts, benchRef</a:t>
             </a:r>
-            <a:endParaRPr lang="en-US" sz="980" dirty="0"/>
-          </a:p>
-          <a:p>
-            <a:pPr indent="0" marL="0">
-              <a:buNone/>
-            </a:pPr>
-            <a:r>
-              <a:rPr lang="en-US" sz="980" dirty="0">
-                <a:solidFill>
-                  <a:srgbClr val="F8FAFC"/>
-                </a:solidFill>
-                <a:latin typeface="Consolas" pitchFamily="34" charset="0"/>
-                <a:ea typeface="Consolas" pitchFamily="34" charset="-122"/>
-                <a:cs typeface="Consolas" pitchFamily="34" charset="-120"/>
+            <a:endParaRPr lang="en-US" sz="950" dirty="0"/>
+          </a:p>
+          <a:p>
+            <a:pPr indent="0" marL="0">
+              <a:buNone/>
+            </a:pPr>
+            <a:r>
+              <a:rPr lang="en-US" sz="950" dirty="0">
+                <a:solidFill>
+                  <a:srgbClr val="F8FAFC"/>
+                </a:solidFill>
+                <a:latin typeface="맑은 고딕" pitchFamily="34" charset="0"/>
+                <a:ea typeface="맑은 고딕" pitchFamily="34" charset="-122"/>
+                <a:cs typeface="맑은 고딕" pitchFamily="34" charset="-120"/>
               </a:rPr>
               <a:t>  );</a:t>
             </a:r>
-            <a:endParaRPr lang="en-US" sz="980" dirty="0"/>
-          </a:p>
-          <a:p>
-            <a:pPr indent="0" marL="0">
-              <a:buNone/>
-            </a:pPr>
-            <a:r>
-              <a:rPr lang="en-US" sz="980" dirty="0">
-                <a:solidFill>
-                  <a:srgbClr val="F8FAFC"/>
-                </a:solidFill>
-                <a:latin typeface="Consolas" pitchFamily="34" charset="0"/>
-                <a:ea typeface="Consolas" pitchFamily="34" charset="-122"/>
-                <a:cs typeface="Consolas" pitchFamily="34" charset="-120"/>
+            <a:endParaRPr lang="en-US" sz="950" dirty="0"/>
+          </a:p>
+          <a:p>
+            <a:pPr indent="0" marL="0">
+              <a:buNone/>
+            </a:pPr>
+            <a:r>
+              <a:rPr lang="en-US" sz="950" dirty="0">
+                <a:solidFill>
+                  <a:srgbClr val="F8FAFC"/>
+                </a:solidFill>
+                <a:latin typeface="맑은 고딕" pitchFamily="34" charset="0"/>
+                <a:ea typeface="맑은 고딕" pitchFamily="34" charset="-122"/>
+                <a:cs typeface="맑은 고딕" pitchFamily="34" charset="-120"/>
               </a:rPr>
               <a:t>  const normalizedData = normalizeAdvisorResponse(parsedResult, currentBuild);</a:t>
             </a:r>
-            <a:endParaRPr lang="en-US" sz="980" dirty="0"/>
-          </a:p>
-          <a:p>
-            <a:pPr indent="0" marL="0">
-              <a:buNone/>
-            </a:pPr>
-            <a:r>
-              <a:rPr lang="en-US" sz="980" dirty="0">
-                <a:solidFill>
-                  <a:srgbClr val="F8FAFC"/>
-                </a:solidFill>
-                <a:latin typeface="Consolas" pitchFamily="34" charset="0"/>
-                <a:ea typeface="Consolas" pitchFamily="34" charset="-122"/>
-                <a:cs typeface="Consolas" pitchFamily="34" charset="-120"/>
+            <a:endParaRPr lang="en-US" sz="950" dirty="0"/>
+          </a:p>
+          <a:p>
+            <a:pPr indent="0" marL="0">
+              <a:buNone/>
+            </a:pPr>
+            <a:r>
+              <a:rPr lang="en-US" sz="950" dirty="0">
+                <a:solidFill>
+                  <a:srgbClr val="F8FAFC"/>
+                </a:solidFill>
+                <a:latin typeface="맑은 고딕" pitchFamily="34" charset="0"/>
+                <a:ea typeface="맑은 고딕" pitchFamily="34" charset="-122"/>
+                <a:cs typeface="맑은 고딕" pitchFamily="34" charset="-120"/>
               </a:rPr>
               <a:t>  return res.json({ success: true, data: normalizedData });</a:t>
             </a:r>
-            <a:endParaRPr lang="en-US" sz="980" dirty="0"/>
-          </a:p>
-          <a:p>
-            <a:pPr indent="0" marL="0">
-              <a:buNone/>
-            </a:pPr>
-            <a:r>
-              <a:rPr lang="en-US" sz="980" dirty="0">
-                <a:solidFill>
-                  <a:srgbClr val="F8FAFC"/>
-                </a:solidFill>
-                <a:latin typeface="Consolas" pitchFamily="34" charset="0"/>
-                <a:ea typeface="Consolas" pitchFamily="34" charset="-122"/>
-                <a:cs typeface="Consolas" pitchFamily="34" charset="-120"/>
+            <a:endParaRPr lang="en-US" sz="950" dirty="0"/>
+          </a:p>
+          <a:p>
+            <a:pPr indent="0" marL="0">
+              <a:buNone/>
+            </a:pPr>
+            <a:r>
+              <a:rPr lang="en-US" sz="950" dirty="0">
+                <a:solidFill>
+                  <a:srgbClr val="F8FAFC"/>
+                </a:solidFill>
+                <a:latin typeface="맑은 고딕" pitchFamily="34" charset="0"/>
+                <a:ea typeface="맑은 고딕" pitchFamily="34" charset="-122"/>
+                <a:cs typeface="맑은 고딕" pitchFamily="34" charset="-120"/>
               </a:rPr>
               <a:t>};</a:t>
             </a:r>
-            <a:endParaRPr lang="en-US" sz="980" dirty="0"/>
+            <a:endParaRPr lang="en-US" sz="950" dirty="0"/>
           </a:p>
         </p:txBody>
       </p:sp>
@@ -11627,11 +12243,28 @@
                 <a:solidFill>
                   <a:srgbClr val="F8FAFC"/>
                 </a:solidFill>
-                <a:latin typeface="Pretendard" pitchFamily="34" charset="0"/>
-                <a:ea typeface="Pretendard" pitchFamily="34" charset="-122"/>
-                <a:cs typeface="Pretendard" pitchFamily="34" charset="-120"/>
-              </a:rPr>
-              <a:t>💡 백엔드 핵심: queryDbPartsForComparison으로 Supabase 부품 DB를 조회하고 matchBenchmarksForContext로 3DMark·퀘이사존 FPS를 결합해 전달</a:t>
+                <a:latin typeface="맑은 고딕" pitchFamily="34" charset="0"/>
+                <a:ea typeface="맑은 고딕" pitchFamily="34" charset="-122"/>
+                <a:cs typeface="맑은 고딕" pitchFamily="34" charset="-120"/>
+              </a:rPr>
+              <a:t>[백엔드 핵심 동작]</a:t>
+            </a:r>
+            <a:endParaRPr lang="en-US" sz="1050" dirty="0"/>
+          </a:p>
+          <a:p>
+            <a:pPr indent="0" marL="0">
+              <a:buNone/>
+            </a:pPr>
+            <a:r>
+              <a:rPr lang="en-US" sz="1050" b="1" dirty="0">
+                <a:solidFill>
+                  <a:srgbClr val="F8FAFC"/>
+                </a:solidFill>
+                <a:latin typeface="맑은 고딕" pitchFamily="34" charset="0"/>
+                <a:ea typeface="맑은 고딕" pitchFamily="34" charset="-122"/>
+                <a:cs typeface="맑은 고딕" pitchFamily="34" charset="-120"/>
+              </a:rPr>
+              <a:t>queryDbPartsForComparison으로 DB 스펙을 조회하고 matchBenchmarksForContext로 3DMark·퀘이사존 FPS를 매칭해 AI에게 전달합니다.</a:t>
             </a:r>
             <a:endParaRPr lang="en-US" sz="1050" dirty="0"/>
           </a:p>
@@ -11693,11 +12326,11 @@
                 <a:solidFill>
                   <a:srgbClr val="FF5CA8"/>
                 </a:solidFill>
-                <a:latin typeface="Consolas" pitchFamily="34" charset="0"/>
-                <a:ea typeface="Consolas" pitchFamily="34" charset="-122"/>
-                <a:cs typeface="Consolas" pitchFamily="34" charset="-120"/>
-              </a:rPr>
-              <a:t>📁 front/src/components/domain/PartAdvisorCard.vue (Frontend)</a:t>
+                <a:latin typeface="맑은 고딕" pitchFamily="34" charset="0"/>
+                <a:ea typeface="맑은 고딕" pitchFamily="34" charset="-122"/>
+                <a:cs typeface="맑은 고딕" pitchFamily="34" charset="-120"/>
+              </a:rPr>
+              <a:t>front/src/components/domain/PartAdvisorCard.vue (Frontend)</a:t>
             </a:r>
             <a:endParaRPr lang="en-US" sz="1100" dirty="0"/>
           </a:p>
@@ -11728,289 +12361,289 @@
               <a:buNone/>
             </a:pPr>
             <a:r>
-              <a:rPr lang="en-US" sz="980" dirty="0">
-                <a:solidFill>
-                  <a:srgbClr val="F8FAFC"/>
-                </a:solidFill>
-                <a:latin typeface="Consolas" pitchFamily="34" charset="0"/>
-                <a:ea typeface="Consolas" pitchFamily="34" charset="-122"/>
-                <a:cs typeface="Consolas" pitchFamily="34" charset="-120"/>
+              <a:rPr lang="en-US" sz="950" dirty="0">
+                <a:solidFill>
+                  <a:srgbClr val="F8FAFC"/>
+                </a:solidFill>
+                <a:latin typeface="맑은 고딕" pitchFamily="34" charset="0"/>
+                <a:ea typeface="맑은 고딕" pitchFamily="34" charset="-122"/>
+                <a:cs typeface="맑은 고딕" pitchFamily="34" charset="-120"/>
               </a:rPr>
               <a:t>// 빠른 질문 칩 클릭 또는 직접 질문 시 백엔드 API 호출</a:t>
             </a:r>
-            <a:endParaRPr lang="en-US" sz="980" dirty="0"/>
-          </a:p>
-          <a:p>
-            <a:pPr indent="0" marL="0">
-              <a:buNone/>
-            </a:pPr>
-            <a:r>
-              <a:rPr lang="en-US" sz="980" dirty="0">
-                <a:solidFill>
-                  <a:srgbClr val="F8FAFC"/>
-                </a:solidFill>
-                <a:latin typeface="Consolas" pitchFamily="34" charset="0"/>
-                <a:ea typeface="Consolas" pitchFamily="34" charset="-122"/>
-                <a:cs typeface="Consolas" pitchFamily="34" charset="-120"/>
+            <a:endParaRPr lang="en-US" sz="950" dirty="0"/>
+          </a:p>
+          <a:p>
+            <a:pPr indent="0" marL="0">
+              <a:buNone/>
+            </a:pPr>
+            <a:r>
+              <a:rPr lang="en-US" sz="950" dirty="0">
+                <a:solidFill>
+                  <a:srgbClr val="F8FAFC"/>
+                </a:solidFill>
+                <a:latin typeface="맑은 고딕" pitchFamily="34" charset="0"/>
+                <a:ea typeface="맑은 고딕" pitchFamily="34" charset="-122"/>
+                <a:cs typeface="맑은 고딕" pitchFamily="34" charset="-120"/>
               </a:rPr>
               <a:t>async submitQuestion(customQuery) {</a:t>
             </a:r>
-            <a:endParaRPr lang="en-US" sz="980" dirty="0"/>
-          </a:p>
-          <a:p>
-            <a:pPr indent="0" marL="0">
-              <a:buNone/>
-            </a:pPr>
-            <a:r>
-              <a:rPr lang="en-US" sz="980" dirty="0">
-                <a:solidFill>
-                  <a:srgbClr val="F8FAFC"/>
-                </a:solidFill>
-                <a:latin typeface="Consolas" pitchFamily="34" charset="0"/>
-                <a:ea typeface="Consolas" pitchFamily="34" charset="-122"/>
-                <a:cs typeface="Consolas" pitchFamily="34" charset="-120"/>
+            <a:endParaRPr lang="en-US" sz="950" dirty="0"/>
+          </a:p>
+          <a:p>
+            <a:pPr indent="0" marL="0">
+              <a:buNone/>
+            </a:pPr>
+            <a:r>
+              <a:rPr lang="en-US" sz="950" dirty="0">
+                <a:solidFill>
+                  <a:srgbClr val="F8FAFC"/>
+                </a:solidFill>
+                <a:latin typeface="맑은 고딕" pitchFamily="34" charset="0"/>
+                <a:ea typeface="맑은 고딕" pitchFamily="34" charset="-122"/>
+                <a:cs typeface="맑은 고딕" pitchFamily="34" charset="-120"/>
               </a:rPr>
               <a:t>  const q = (customQuery || this.questionInput || '').trim();</a:t>
             </a:r>
-            <a:endParaRPr lang="en-US" sz="980" dirty="0"/>
-          </a:p>
-          <a:p>
-            <a:pPr indent="0" marL="0">
-              <a:buNone/>
-            </a:pPr>
-            <a:r>
-              <a:rPr lang="en-US" sz="980" dirty="0">
-                <a:solidFill>
-                  <a:srgbClr val="F8FAFC"/>
-                </a:solidFill>
-                <a:latin typeface="Consolas" pitchFamily="34" charset="0"/>
-                <a:ea typeface="Consolas" pitchFamily="34" charset="-122"/>
-                <a:cs typeface="Consolas" pitchFamily="34" charset="-120"/>
+            <a:endParaRPr lang="en-US" sz="950" dirty="0"/>
+          </a:p>
+          <a:p>
+            <a:pPr indent="0" marL="0">
+              <a:buNone/>
+            </a:pPr>
+            <a:r>
+              <a:rPr lang="en-US" sz="950" dirty="0">
+                <a:solidFill>
+                  <a:srgbClr val="F8FAFC"/>
+                </a:solidFill>
+                <a:latin typeface="맑은 고딕" pitchFamily="34" charset="0"/>
+                <a:ea typeface="맑은 고딕" pitchFamily="34" charset="-122"/>
+                <a:cs typeface="맑은 고딕" pitchFamily="34" charset="-120"/>
               </a:rPr>
               <a:t>  const res = await api.post('recommend/compare-advisor', {</a:t>
             </a:r>
-            <a:endParaRPr lang="en-US" sz="980" dirty="0"/>
-          </a:p>
-          <a:p>
-            <a:pPr indent="0" marL="0">
-              <a:buNone/>
-            </a:pPr>
-            <a:r>
-              <a:rPr lang="en-US" sz="980" dirty="0">
-                <a:solidFill>
-                  <a:srgbClr val="F8FAFC"/>
-                </a:solidFill>
-                <a:latin typeface="Consolas" pitchFamily="34" charset="0"/>
-                <a:ea typeface="Consolas" pitchFamily="34" charset="-122"/>
-                <a:cs typeface="Consolas" pitchFamily="34" charset="-120"/>
+            <a:endParaRPr lang="en-US" sz="950" dirty="0"/>
+          </a:p>
+          <a:p>
+            <a:pPr indent="0" marL="0">
+              <a:buNone/>
+            </a:pPr>
+            <a:r>
+              <a:rPr lang="en-US" sz="950" dirty="0">
+                <a:solidFill>
+                  <a:srgbClr val="F8FAFC"/>
+                </a:solidFill>
+                <a:latin typeface="맑은 고딕" pitchFamily="34" charset="0"/>
+                <a:ea typeface="맑은 고딕" pitchFamily="34" charset="-122"/>
+                <a:cs typeface="맑은 고딕" pitchFamily="34" charset="-120"/>
               </a:rPr>
               <a:t>    question: q,</a:t>
             </a:r>
-            <a:endParaRPr lang="en-US" sz="980" dirty="0"/>
-          </a:p>
-          <a:p>
-            <a:pPr indent="0" marL="0">
-              <a:buNone/>
-            </a:pPr>
-            <a:r>
-              <a:rPr lang="en-US" sz="980" dirty="0">
-                <a:solidFill>
-                  <a:srgbClr val="F8FAFC"/>
-                </a:solidFill>
-                <a:latin typeface="Consolas" pitchFamily="34" charset="0"/>
-                <a:ea typeface="Consolas" pitchFamily="34" charset="-122"/>
-                <a:cs typeface="Consolas" pitchFamily="34" charset="-120"/>
+            <a:endParaRPr lang="en-US" sz="950" dirty="0"/>
+          </a:p>
+          <a:p>
+            <a:pPr indent="0" marL="0">
+              <a:buNone/>
+            </a:pPr>
+            <a:r>
+              <a:rPr lang="en-US" sz="950" dirty="0">
+                <a:solidFill>
+                  <a:srgbClr val="F8FAFC"/>
+                </a:solidFill>
+                <a:latin typeface="맑은 고딕" pitchFamily="34" charset="0"/>
+                <a:ea typeface="맑은 고딕" pitchFamily="34" charset="-122"/>
+                <a:cs typeface="맑은 고딕" pitchFamily="34" charset="-120"/>
               </a:rPr>
               <a:t>    currentBuild: this.parts, // 현재 견적 부품 8종 전달</a:t>
             </a:r>
-            <a:endParaRPr lang="en-US" sz="980" dirty="0"/>
-          </a:p>
-          <a:p>
-            <a:pPr indent="0" marL="0">
-              <a:buNone/>
-            </a:pPr>
-            <a:r>
-              <a:rPr lang="en-US" sz="980" dirty="0">
-                <a:solidFill>
-                  <a:srgbClr val="F8FAFC"/>
-                </a:solidFill>
-                <a:latin typeface="Consolas" pitchFamily="34" charset="0"/>
-                <a:ea typeface="Consolas" pitchFamily="34" charset="-122"/>
-                <a:cs typeface="Consolas" pitchFamily="34" charset="-120"/>
+            <a:endParaRPr lang="en-US" sz="950" dirty="0"/>
+          </a:p>
+          <a:p>
+            <a:pPr indent="0" marL="0">
+              <a:buNone/>
+            </a:pPr>
+            <a:r>
+              <a:rPr lang="en-US" sz="950" dirty="0">
+                <a:solidFill>
+                  <a:srgbClr val="F8FAFC"/>
+                </a:solidFill>
+                <a:latin typeface="맑은 고딕" pitchFamily="34" charset="0"/>
+                <a:ea typeface="맑은 고딕" pitchFamily="34" charset="-122"/>
+                <a:cs typeface="맑은 고딕" pitchFamily="34" charset="-120"/>
               </a:rPr>
               <a:t>    totalPrice: this.totalPrice,</a:t>
             </a:r>
-            <a:endParaRPr lang="en-US" sz="980" dirty="0"/>
-          </a:p>
-          <a:p>
-            <a:pPr indent="0" marL="0">
-              <a:buNone/>
-            </a:pPr>
-            <a:r>
-              <a:rPr lang="en-US" sz="980" dirty="0">
-                <a:solidFill>
-                  <a:srgbClr val="F8FAFC"/>
-                </a:solidFill>
-                <a:latin typeface="Consolas" pitchFamily="34" charset="0"/>
-                <a:ea typeface="Consolas" pitchFamily="34" charset="-122"/>
-                <a:cs typeface="Consolas" pitchFamily="34" charset="-120"/>
+            <a:endParaRPr lang="en-US" sz="950" dirty="0"/>
+          </a:p>
+          <a:p>
+            <a:pPr indent="0" marL="0">
+              <a:buNone/>
+            </a:pPr>
+            <a:r>
+              <a:rPr lang="en-US" sz="950" dirty="0">
+                <a:solidFill>
+                  <a:srgbClr val="F8FAFC"/>
+                </a:solidFill>
+                <a:latin typeface="맑은 고딕" pitchFamily="34" charset="0"/>
+                <a:ea typeface="맑은 고딕" pitchFamily="34" charset="-122"/>
+                <a:cs typeface="맑은 고딕" pitchFamily="34" charset="-120"/>
               </a:rPr>
               <a:t>    budget: this.budget,</a:t>
             </a:r>
-            <a:endParaRPr lang="en-US" sz="980" dirty="0"/>
-          </a:p>
-          <a:p>
-            <a:pPr indent="0" marL="0">
-              <a:buNone/>
-            </a:pPr>
-            <a:r>
-              <a:rPr lang="en-US" sz="980" dirty="0">
-                <a:solidFill>
-                  <a:srgbClr val="F8FAFC"/>
-                </a:solidFill>
-                <a:latin typeface="Consolas" pitchFamily="34" charset="0"/>
-                <a:ea typeface="Consolas" pitchFamily="34" charset="-122"/>
-                <a:cs typeface="Consolas" pitchFamily="34" charset="-120"/>
+            <a:endParaRPr lang="en-US" sz="950" dirty="0"/>
+          </a:p>
+          <a:p>
+            <a:pPr indent="0" marL="0">
+              <a:buNone/>
+            </a:pPr>
+            <a:r>
+              <a:rPr lang="en-US" sz="950" dirty="0">
+                <a:solidFill>
+                  <a:srgbClr val="F8FAFC"/>
+                </a:solidFill>
+                <a:latin typeface="맑은 고딕" pitchFamily="34" charset="0"/>
+                <a:ea typeface="맑은 고딕" pitchFamily="34" charset="-122"/>
+                <a:cs typeface="맑은 고딕" pitchFamily="34" charset="-120"/>
               </a:rPr>
               <a:t>    usage: this.usage</a:t>
             </a:r>
-            <a:endParaRPr lang="en-US" sz="980" dirty="0"/>
-          </a:p>
-          <a:p>
-            <a:pPr indent="0" marL="0">
-              <a:buNone/>
-            </a:pPr>
-            <a:r>
-              <a:rPr lang="en-US" sz="980" dirty="0">
-                <a:solidFill>
-                  <a:srgbClr val="F8FAFC"/>
-                </a:solidFill>
-                <a:latin typeface="Consolas" pitchFamily="34" charset="0"/>
-                <a:ea typeface="Consolas" pitchFamily="34" charset="-122"/>
-                <a:cs typeface="Consolas" pitchFamily="34" charset="-120"/>
+            <a:endParaRPr lang="en-US" sz="950" dirty="0"/>
+          </a:p>
+          <a:p>
+            <a:pPr indent="0" marL="0">
+              <a:buNone/>
+            </a:pPr>
+            <a:r>
+              <a:rPr lang="en-US" sz="950" dirty="0">
+                <a:solidFill>
+                  <a:srgbClr val="F8FAFC"/>
+                </a:solidFill>
+                <a:latin typeface="맑은 고딕" pitchFamily="34" charset="0"/>
+                <a:ea typeface="맑은 고딕" pitchFamily="34" charset="-122"/>
+                <a:cs typeface="맑은 고딕" pitchFamily="34" charset="-120"/>
               </a:rPr>
               <a:t>  });</a:t>
             </a:r>
-            <a:endParaRPr lang="en-US" sz="980" dirty="0"/>
-          </a:p>
-          <a:p>
-            <a:pPr indent="0" marL="0">
-              <a:buNone/>
-            </a:pPr>
-            <a:r>
-              <a:rPr lang="en-US" sz="980" dirty="0">
-                <a:solidFill>
-                  <a:srgbClr val="F8FAFC"/>
-                </a:solidFill>
-                <a:latin typeface="Consolas" pitchFamily="34" charset="0"/>
-                <a:ea typeface="Consolas" pitchFamily="34" charset="-122"/>
-                <a:cs typeface="Consolas" pitchFamily="34" charset="-120"/>
+            <a:endParaRPr lang="en-US" sz="950" dirty="0"/>
+          </a:p>
+          <a:p>
+            <a:pPr indent="0" marL="0">
+              <a:buNone/>
+            </a:pPr>
+            <a:r>
+              <a:rPr lang="en-US" sz="950" dirty="0">
+                <a:solidFill>
+                  <a:srgbClr val="F8FAFC"/>
+                </a:solidFill>
+                <a:latin typeface="맑은 고딕" pitchFamily="34" charset="0"/>
+                <a:ea typeface="맑은 고딕" pitchFamily="34" charset="-122"/>
+                <a:cs typeface="맑은 고딕" pitchFamily="34" charset="-120"/>
               </a:rPr>
               <a:t>  this.result = res.data.data; // chartData·tableData·sources 바인딩</a:t>
             </a:r>
-            <a:endParaRPr lang="en-US" sz="980" dirty="0"/>
-          </a:p>
-          <a:p>
-            <a:pPr indent="0" marL="0">
-              <a:buNone/>
-            </a:pPr>
-            <a:r>
-              <a:rPr lang="en-US" sz="980" dirty="0">
-                <a:solidFill>
-                  <a:srgbClr val="F8FAFC"/>
-                </a:solidFill>
-                <a:latin typeface="Consolas" pitchFamily="34" charset="0"/>
-                <a:ea typeface="Consolas" pitchFamily="34" charset="-122"/>
-                <a:cs typeface="Consolas" pitchFamily="34" charset="-120"/>
+            <a:endParaRPr lang="en-US" sz="950" dirty="0"/>
+          </a:p>
+          <a:p>
+            <a:pPr indent="0" marL="0">
+              <a:buNone/>
+            </a:pPr>
+            <a:r>
+              <a:rPr lang="en-US" sz="950" dirty="0">
+                <a:solidFill>
+                  <a:srgbClr val="F8FAFC"/>
+                </a:solidFill>
+                <a:latin typeface="맑은 고딕" pitchFamily="34" charset="0"/>
+                <a:ea typeface="맑은 고딕" pitchFamily="34" charset="-122"/>
+                <a:cs typeface="맑은 고딕" pitchFamily="34" charset="-120"/>
               </a:rPr>
               <a:t>},</a:t>
             </a:r>
-            <a:endParaRPr lang="en-US" sz="980" dirty="0"/>
-          </a:p>
-          <a:p>
-            <a:pPr indent="0" marL="0">
-              <a:buNone/>
-            </a:pPr>
-            <a:r>
-              <a:rPr lang="en-US" sz="980" dirty="0">
-                <a:solidFill>
-                  <a:srgbClr val="F8FAFC"/>
-                </a:solidFill>
-                <a:latin typeface="Consolas" pitchFamily="34" charset="0"/>
-                <a:ea typeface="Consolas" pitchFamily="34" charset="-122"/>
-                <a:cs typeface="Consolas" pitchFamily="34" charset="-120"/>
+            <a:endParaRPr lang="en-US" sz="950" dirty="0"/>
+          </a:p>
+          <a:p>
+            <a:pPr indent="0" marL="0">
+              <a:buNone/>
+            </a:pPr>
+            <a:r>
+              <a:rPr lang="en-US" sz="950" dirty="0">
+                <a:solidFill>
+                  <a:srgbClr val="F8FAFC"/>
+                </a:solidFill>
+                <a:latin typeface="맑은 고딕" pitchFamily="34" charset="0"/>
+                <a:ea typeface="맑은 고딕" pitchFamily="34" charset="-122"/>
+                <a:cs typeface="맑은 고딕" pitchFamily="34" charset="-120"/>
               </a:rPr>
               <a:t>// 두 부품의 수치 비율로 가로 막대그래프 너비(%) 계산</a:t>
             </a:r>
-            <a:endParaRPr lang="en-US" sz="980" dirty="0"/>
-          </a:p>
-          <a:p>
-            <a:pPr indent="0" marL="0">
-              <a:buNone/>
-            </a:pPr>
-            <a:r>
-              <a:rPr lang="en-US" sz="980" dirty="0">
-                <a:solidFill>
-                  <a:srgbClr val="F8FAFC"/>
-                </a:solidFill>
-                <a:latin typeface="Consolas" pitchFamily="34" charset="0"/>
-                <a:ea typeface="Consolas" pitchFamily="34" charset="-122"/>
-                <a:cs typeface="Consolas" pitchFamily="34" charset="-120"/>
+            <a:endParaRPr lang="en-US" sz="950" dirty="0"/>
+          </a:p>
+          <a:p>
+            <a:pPr indent="0" marL="0">
+              <a:buNone/>
+            </a:pPr>
+            <a:r>
+              <a:rPr lang="en-US" sz="950" dirty="0">
+                <a:solidFill>
+                  <a:srgbClr val="F8FAFC"/>
+                </a:solidFill>
+                <a:latin typeface="맑은 고딕" pitchFamily="34" charset="0"/>
+                <a:ea typeface="맑은 고딕" pitchFamily="34" charset="-122"/>
+                <a:cs typeface="맑은 고딕" pitchFamily="34" charset="-120"/>
               </a:rPr>
               <a:t>getBarWidth(valA, valB, targetVal) {</a:t>
             </a:r>
-            <a:endParaRPr lang="en-US" sz="980" dirty="0"/>
-          </a:p>
-          <a:p>
-            <a:pPr indent="0" marL="0">
-              <a:buNone/>
-            </a:pPr>
-            <a:r>
-              <a:rPr lang="en-US" sz="980" dirty="0">
-                <a:solidFill>
-                  <a:srgbClr val="F8FAFC"/>
-                </a:solidFill>
-                <a:latin typeface="Consolas" pitchFamily="34" charset="0"/>
-                <a:ea typeface="Consolas" pitchFamily="34" charset="-122"/>
-                <a:cs typeface="Consolas" pitchFamily="34" charset="-120"/>
+            <a:endParaRPr lang="en-US" sz="950" dirty="0"/>
+          </a:p>
+          <a:p>
+            <a:pPr indent="0" marL="0">
+              <a:buNone/>
+            </a:pPr>
+            <a:r>
+              <a:rPr lang="en-US" sz="950" dirty="0">
+                <a:solidFill>
+                  <a:srgbClr val="F8FAFC"/>
+                </a:solidFill>
+                <a:latin typeface="맑은 고딕" pitchFamily="34" charset="0"/>
+                <a:ea typeface="맑은 고딕" pitchFamily="34" charset="-122"/>
+                <a:cs typeface="맑은 고딕" pitchFamily="34" charset="-120"/>
               </a:rPr>
               <a:t>  const max = Math.max(Number(valA) || 0, Number(valB) || 0, 1);</a:t>
             </a:r>
-            <a:endParaRPr lang="en-US" sz="980" dirty="0"/>
-          </a:p>
-          <a:p>
-            <a:pPr indent="0" marL="0">
-              <a:buNone/>
-            </a:pPr>
-            <a:r>
-              <a:rPr lang="en-US" sz="980" dirty="0">
-                <a:solidFill>
-                  <a:srgbClr val="F8FAFC"/>
-                </a:solidFill>
-                <a:latin typeface="Consolas" pitchFamily="34" charset="0"/>
-                <a:ea typeface="Consolas" pitchFamily="34" charset="-122"/>
-                <a:cs typeface="Consolas" pitchFamily="34" charset="-120"/>
+            <a:endParaRPr lang="en-US" sz="950" dirty="0"/>
+          </a:p>
+          <a:p>
+            <a:pPr indent="0" marL="0">
+              <a:buNone/>
+            </a:pPr>
+            <a:r>
+              <a:rPr lang="en-US" sz="950" dirty="0">
+                <a:solidFill>
+                  <a:srgbClr val="F8FAFC"/>
+                </a:solidFill>
+                <a:latin typeface="맑은 고딕" pitchFamily="34" charset="0"/>
+                <a:ea typeface="맑은 고딕" pitchFamily="34" charset="-122"/>
+                <a:cs typeface="맑은 고딕" pitchFamily="34" charset="-120"/>
               </a:rPr>
               <a:t>  return Math.min(Math.max(Math.round((targetVal / max) * 100), 12), 100);</a:t>
             </a:r>
-            <a:endParaRPr lang="en-US" sz="980" dirty="0"/>
-          </a:p>
-          <a:p>
-            <a:pPr indent="0" marL="0">
-              <a:buNone/>
-            </a:pPr>
-            <a:r>
-              <a:rPr lang="en-US" sz="980" dirty="0">
-                <a:solidFill>
-                  <a:srgbClr val="F8FAFC"/>
-                </a:solidFill>
-                <a:latin typeface="Consolas" pitchFamily="34" charset="0"/>
-                <a:ea typeface="Consolas" pitchFamily="34" charset="-122"/>
-                <a:cs typeface="Consolas" pitchFamily="34" charset="-120"/>
+            <a:endParaRPr lang="en-US" sz="950" dirty="0"/>
+          </a:p>
+          <a:p>
+            <a:pPr indent="0" marL="0">
+              <a:buNone/>
+            </a:pPr>
+            <a:r>
+              <a:rPr lang="en-US" sz="950" dirty="0">
+                <a:solidFill>
+                  <a:srgbClr val="F8FAFC"/>
+                </a:solidFill>
+                <a:latin typeface="맑은 고딕" pitchFamily="34" charset="0"/>
+                <a:ea typeface="맑은 고딕" pitchFamily="34" charset="-122"/>
+                <a:cs typeface="맑은 고딕" pitchFamily="34" charset="-120"/>
               </a:rPr>
               <a:t>}</a:t>
             </a:r>
-            <a:endParaRPr lang="en-US" sz="980" dirty="0"/>
+            <a:endParaRPr lang="en-US" sz="950" dirty="0"/>
           </a:p>
         </p:txBody>
       </p:sp>
@@ -12072,11 +12705,28 @@
                 <a:solidFill>
                   <a:srgbClr val="F8FAFC"/>
                 </a:solidFill>
-                <a:latin typeface="Pretendard" pitchFamily="34" charset="0"/>
-                <a:ea typeface="Pretendard" pitchFamily="34" charset="-122"/>
-                <a:cs typeface="Pretendard" pitchFamily="34" charset="-120"/>
-              </a:rPr>
-              <a:t>💡 프론트엔드 핵심: recommend/compare-advisor API 응답을 받아 getBarWidth()로 두 부품의 상대 성능 막대그래프 길이를 실시간 렌더링</a:t>
+                <a:latin typeface="맑은 고딕" pitchFamily="34" charset="0"/>
+                <a:ea typeface="맑은 고딕" pitchFamily="34" charset="-122"/>
+                <a:cs typeface="맑은 고딕" pitchFamily="34" charset="-120"/>
+              </a:rPr>
+              <a:t>[프론트엔드 핵심 동작]</a:t>
+            </a:r>
+            <a:endParaRPr lang="en-US" sz="1050" dirty="0"/>
+          </a:p>
+          <a:p>
+            <a:pPr indent="0" marL="0">
+              <a:buNone/>
+            </a:pPr>
+            <a:r>
+              <a:rPr lang="en-US" sz="1050" b="1" dirty="0">
+                <a:solidFill>
+                  <a:srgbClr val="F8FAFC"/>
+                </a:solidFill>
+                <a:latin typeface="맑은 고딕" pitchFamily="34" charset="0"/>
+                <a:ea typeface="맑은 고딕" pitchFamily="34" charset="-122"/>
+                <a:cs typeface="맑은 고딕" pitchFamily="34" charset="-120"/>
+              </a:rPr>
+              <a:t>recommend/compare-advisor 응답 데이터를 받아 getBarWidth()로 두 부품의 상대 성능 막대그래프 너비(%)를 계산해 화면에 그립니다.</a:t>
             </a:r>
             <a:endParaRPr lang="en-US" sz="1050" dirty="0"/>
           </a:p>
@@ -12123,14 +12773,14 @@
         <p:spPr>
           <a:xfrm>
             <a:off x="457200" y="228600"/>
-            <a:ext cx="11274552" cy="27432"/>
+            <a:ext cx="11274552" cy="36576"/>
           </a:xfrm>
           <a:prstGeom prst="rect">
             <a:avLst/>
           </a:prstGeom>
           <a:solidFill>
             <a:srgbClr val="00F3FF">
-              <a:alpha val="30000"/>
+              <a:alpha val="40000"/>
             </a:srgbClr>
           </a:solidFill>
           <a:ln w="12700">
@@ -12152,7 +12802,7 @@
         <p:spPr>
           <a:xfrm>
             <a:off x="457200" y="384048"/>
-            <a:ext cx="3474720" cy="310896"/>
+            <a:ext cx="3840480" cy="329184"/>
           </a:xfrm>
           <a:prstGeom prst="roundRect">
             <a:avLst>
@@ -12181,7 +12831,7 @@
         <p:spPr>
           <a:xfrm>
             <a:off x="457200" y="384048"/>
-            <a:ext cx="3474720" cy="310896"/>
+            <a:ext cx="3840480" cy="329184"/>
           </a:xfrm>
           <a:prstGeom prst="rect">
             <a:avLst/>
@@ -12197,17 +12847,17 @@
               <a:buNone/>
             </a:pPr>
             <a:r>
-              <a:rPr lang="en-US" sz="1000" b="1" dirty="0">
+              <a:rPr lang="en-US" sz="1050" b="1" dirty="0">
                 <a:solidFill>
                   <a:srgbClr val="00E676"/>
                 </a:solidFill>
-                <a:latin typeface="Pretendard" pitchFamily="34" charset="0"/>
-                <a:ea typeface="Pretendard" pitchFamily="34" charset="-122"/>
-                <a:cs typeface="Pretendard" pitchFamily="34" charset="-120"/>
+                <a:latin typeface="맑은 고딕" pitchFamily="34" charset="0"/>
+                <a:ea typeface="맑은 고딕" pitchFamily="34" charset="-122"/>
+                <a:cs typeface="맑은 고딕" pitchFamily="34" charset="-120"/>
               </a:rPr>
               <a:t>CONCLUSION &amp; FUTURE ROADMAP</a:t>
             </a:r>
-            <a:endParaRPr lang="en-US" sz="1000" dirty="0"/>
+            <a:endParaRPr lang="en-US" sz="1050" dirty="0"/>
           </a:p>
         </p:txBody>
       </p:sp>
@@ -12219,7 +12869,7 @@
         </p:nvSpPr>
         <p:spPr>
           <a:xfrm>
-            <a:off x="457200" y="777240"/>
+            <a:off x="457200" y="786384"/>
             <a:ext cx="11274552" cy="502920"/>
           </a:xfrm>
           <a:prstGeom prst="rect">
@@ -12236,17 +12886,17 @@
               <a:buNone/>
             </a:pPr>
             <a:r>
-              <a:rPr lang="en-US" sz="2400" b="1" dirty="0">
-                <a:solidFill>
-                  <a:srgbClr val="F8FAFC"/>
-                </a:solidFill>
-                <a:latin typeface="Pretendard" pitchFamily="34" charset="0"/>
-                <a:ea typeface="Pretendard" pitchFamily="34" charset="-122"/>
-                <a:cs typeface="Pretendard" pitchFamily="34" charset="-120"/>
+              <a:rPr lang="en-US" sz="2200" b="1" dirty="0">
+                <a:solidFill>
+                  <a:srgbClr val="F8FAFC"/>
+                </a:solidFill>
+                <a:latin typeface="맑은 고딕" pitchFamily="34" charset="0"/>
+                <a:ea typeface="맑은 고딕" pitchFamily="34" charset="-122"/>
+                <a:cs typeface="맑은 고딕" pitchFamily="34" charset="-120"/>
               </a:rPr>
               <a:t>2학기 핵심 성과 요약 및 아쉬운 점 · 향후 개선 방향</a:t>
             </a:r>
-            <a:endParaRPr lang="en-US" sz="2400" dirty="0"/>
+            <a:endParaRPr lang="en-US" sz="2200" dirty="0"/>
           </a:p>
         </p:txBody>
       </p:sp>
@@ -12302,13 +12952,13 @@
             <a:r>
               <a:rPr lang="en-US" sz="950" dirty="0">
                 <a:solidFill>
-                  <a:srgbClr val="64748B"/>
-                </a:solidFill>
-                <a:latin typeface="Pretendard" pitchFamily="34" charset="0"/>
-                <a:ea typeface="Pretendard" pitchFamily="34" charset="-122"/>
-                <a:cs typeface="Pretendard" pitchFamily="34" charset="-120"/>
-              </a:rPr>
-              <a:t>PC-FIT 2.0 : AI 부품·가격 비교 &amp; 가성비 어드바이저</a:t>
+                  <a:srgbClr val="94A3B8"/>
+                </a:solidFill>
+                <a:latin typeface="맑은 고딕" pitchFamily="34" charset="0"/>
+                <a:ea typeface="맑은 고딕" pitchFamily="34" charset="-122"/>
+                <a:cs typeface="맑은 고딕" pitchFamily="34" charset="-120"/>
+              </a:rPr>
+              <a:t>PC-FIT 2.0 : AI 부품·가격 비교 및 가성비 어드바이저</a:t>
             </a:r>
             <a:endParaRPr lang="en-US" sz="950" dirty="0"/>
           </a:p>
@@ -12343,9 +12993,9 @@
                 <a:solidFill>
                   <a:srgbClr val="00F3FF"/>
                 </a:solidFill>
-                <a:latin typeface="Consolas" pitchFamily="34" charset="0"/>
-                <a:ea typeface="Consolas" pitchFamily="34" charset="-122"/>
-                <a:cs typeface="Consolas" pitchFamily="34" charset="-120"/>
+                <a:latin typeface="맑은 고딕" pitchFamily="34" charset="0"/>
+                <a:ea typeface="맑은 고딕" pitchFamily="34" charset="-122"/>
+                <a:cs typeface="맑은 고딕" pitchFamily="34" charset="-120"/>
               </a:rPr>
               <a:t>SLIDE 09 / 09</a:t>
             </a:r>
@@ -12409,11 +13059,11 @@
                 <a:solidFill>
                   <a:srgbClr val="CBD5E1"/>
                 </a:solidFill>
-                <a:latin typeface="Pretendard" pitchFamily="34" charset="0"/>
-                <a:ea typeface="Pretendard" pitchFamily="34" charset="-122"/>
-                <a:cs typeface="Pretendard" pitchFamily="34" charset="-120"/>
-              </a:rPr>
-              <a:t>부품 비교·검증 소요 시간</a:t>
+                <a:latin typeface="맑은 고딕" pitchFamily="34" charset="0"/>
+                <a:ea typeface="맑은 고딕" pitchFamily="34" charset="-122"/>
+                <a:cs typeface="맑은 고딕" pitchFamily="34" charset="-120"/>
+              </a:rPr>
+              <a:t>부품 비교·검증 과정 단축</a:t>
             </a:r>
             <a:endParaRPr lang="en-US" sz="1050" dirty="0"/>
           </a:p>
@@ -12444,17 +13094,17 @@
               <a:buNone/>
             </a:pPr>
             <a:r>
-              <a:rPr lang="en-US" sz="2400" b="1" dirty="0">
+              <a:rPr lang="en-US" sz="2100" b="1" dirty="0">
                 <a:solidFill>
                   <a:srgbClr val="00F3FF"/>
                 </a:solidFill>
-                <a:latin typeface="Consolas" pitchFamily="34" charset="0"/>
-                <a:ea typeface="Consolas" pitchFamily="34" charset="-122"/>
-                <a:cs typeface="Consolas" pitchFamily="34" charset="-120"/>
-              </a:rPr>
-              <a:t>3시간 ➔ 3초</a:t>
-            </a:r>
-            <a:endParaRPr lang="en-US" sz="2400" dirty="0"/>
+                <a:latin typeface="맑은 고딕" pitchFamily="34" charset="0"/>
+                <a:ea typeface="맑은 고딕" pitchFamily="34" charset="-122"/>
+                <a:cs typeface="맑은 고딕" pitchFamily="34" charset="-120"/>
+              </a:rPr>
+              <a:t>원클릭 즉시 비교</a:t>
+            </a:r>
+            <a:endParaRPr lang="en-US" sz="2100" dirty="0"/>
           </a:p>
         </p:txBody>
       </p:sp>
@@ -12485,13 +13135,13 @@
             <a:r>
               <a:rPr lang="en-US" sz="1000" dirty="0">
                 <a:solidFill>
-                  <a:srgbClr val="64748B"/>
-                </a:solidFill>
-                <a:latin typeface="Pretendard" pitchFamily="34" charset="0"/>
-                <a:ea typeface="Pretendard" pitchFamily="34" charset="-122"/>
-                <a:cs typeface="Pretendard" pitchFamily="34" charset="-120"/>
-              </a:rPr>
-              <a:t>유튜브·다나와 다중 검색 제거</a:t>
+                  <a:srgbClr val="94A3B8"/>
+                </a:solidFill>
+                <a:latin typeface="맑은 고딕" pitchFamily="34" charset="0"/>
+                <a:ea typeface="맑은 고딕" pitchFamily="34" charset="-122"/>
+                <a:cs typeface="맑은 고딕" pitchFamily="34" charset="-120"/>
+              </a:rPr>
+              <a:t>유튜브·다나와 다중 검색 불필요</a:t>
             </a:r>
             <a:endParaRPr lang="en-US" sz="1000" dirty="0"/>
           </a:p>
@@ -12553,11 +13203,11 @@
                 <a:solidFill>
                   <a:srgbClr val="CBD5E1"/>
                 </a:solidFill>
-                <a:latin typeface="Pretendard" pitchFamily="34" charset="0"/>
-                <a:ea typeface="Pretendard" pitchFamily="34" charset="-122"/>
-                <a:cs typeface="Pretendard" pitchFamily="34" charset="-120"/>
-              </a:rPr>
-              <a:t>불필요한 과소비 방어 효과</a:t>
+                <a:latin typeface="맑은 고딕" pitchFamily="34" charset="0"/>
+                <a:ea typeface="맑은 고딕" pitchFamily="34" charset="-122"/>
+                <a:cs typeface="맑은 고딕" pitchFamily="34" charset="-120"/>
+              </a:rPr>
+              <a:t>합리적 소비 의사결정 지원</a:t>
             </a:r>
             <a:endParaRPr lang="en-US" sz="1050" dirty="0"/>
           </a:p>
@@ -12588,17 +13238,17 @@
               <a:buNone/>
             </a:pPr>
             <a:r>
-              <a:rPr lang="en-US" sz="2400" b="1" dirty="0">
+              <a:rPr lang="en-US" sz="2100" b="1" dirty="0">
                 <a:solidFill>
                   <a:srgbClr val="FF5CA8"/>
                 </a:solidFill>
-                <a:latin typeface="Consolas" pitchFamily="34" charset="0"/>
-                <a:ea typeface="Consolas" pitchFamily="34" charset="-122"/>
-                <a:cs typeface="Consolas" pitchFamily="34" charset="-120"/>
+                <a:latin typeface="맑은 고딕" pitchFamily="34" charset="0"/>
+                <a:ea typeface="맑은 고딕" pitchFamily="34" charset="-122"/>
+                <a:cs typeface="맑은 고딕" pitchFamily="34" charset="-120"/>
               </a:rPr>
               <a:t>30~60만 원 절감</a:t>
             </a:r>
-            <a:endParaRPr lang="en-US" sz="2400" dirty="0"/>
+            <a:endParaRPr lang="en-US" sz="2100" dirty="0"/>
           </a:p>
         </p:txBody>
       </p:sp>
@@ -12629,11 +13279,11 @@
             <a:r>
               <a:rPr lang="en-US" sz="1000" dirty="0">
                 <a:solidFill>
-                  <a:srgbClr val="64748B"/>
-                </a:solidFill>
-                <a:latin typeface="Pretendard" pitchFamily="34" charset="0"/>
-                <a:ea typeface="Pretendard" pitchFamily="34" charset="-122"/>
-                <a:cs typeface="Pretendard" pitchFamily="34" charset="-120"/>
+                  <a:srgbClr val="94A3B8"/>
+                </a:solidFill>
+                <a:latin typeface="맑은 고딕" pitchFamily="34" charset="0"/>
+                <a:ea typeface="맑은 고딕" pitchFamily="34" charset="-122"/>
+                <a:cs typeface="맑은 고딕" pitchFamily="34" charset="-120"/>
               </a:rPr>
               <a:t>내 모니터·게임 맞춤 등급 선택</a:t>
             </a:r>
@@ -12697,11 +13347,11 @@
                 <a:solidFill>
                   <a:srgbClr val="CBD5E1"/>
                 </a:solidFill>
-                <a:latin typeface="Pretendard" pitchFamily="34" charset="0"/>
-                <a:ea typeface="Pretendard" pitchFamily="34" charset="-122"/>
-                <a:cs typeface="Pretendard" pitchFamily="34" charset="-120"/>
-              </a:rPr>
-              <a:t>데이터 신뢰도 &amp; 출처 검증</a:t>
+                <a:latin typeface="맑은 고딕" pitchFamily="34" charset="0"/>
+                <a:ea typeface="맑은 고딕" pitchFamily="34" charset="-122"/>
+                <a:cs typeface="맑은 고딕" pitchFamily="34" charset="-120"/>
+              </a:rPr>
+              <a:t>데이터 신뢰도 &amp; 출처 명시</a:t>
             </a:r>
             <a:endParaRPr lang="en-US" sz="1050" dirty="0"/>
           </a:p>
@@ -12732,17 +13382,17 @@
               <a:buNone/>
             </a:pPr>
             <a:r>
-              <a:rPr lang="en-US" sz="2400" b="1" dirty="0">
+              <a:rPr lang="en-US" sz="2100" b="1" dirty="0">
                 <a:solidFill>
                   <a:srgbClr val="00E676"/>
                 </a:solidFill>
-                <a:latin typeface="Consolas" pitchFamily="34" charset="0"/>
-                <a:ea typeface="Consolas" pitchFamily="34" charset="-122"/>
-                <a:cs typeface="Consolas" pitchFamily="34" charset="-120"/>
-              </a:rPr>
-              <a:t>945종 DB + 실측</a:t>
-            </a:r>
-            <a:endParaRPr lang="en-US" sz="2400" dirty="0"/>
+                <a:latin typeface="맑은 고딕" pitchFamily="34" charset="0"/>
+                <a:ea typeface="맑은 고딕" pitchFamily="34" charset="-122"/>
+                <a:cs typeface="맑은 고딕" pitchFamily="34" charset="-120"/>
+              </a:rPr>
+              <a:t>실측 벤치마크 기반</a:t>
+            </a:r>
+            <a:endParaRPr lang="en-US" sz="2100" dirty="0"/>
           </a:p>
         </p:txBody>
       </p:sp>
@@ -12773,13 +13423,13 @@
             <a:r>
               <a:rPr lang="en-US" sz="1000" dirty="0">
                 <a:solidFill>
-                  <a:srgbClr val="64748B"/>
-                </a:solidFill>
-                <a:latin typeface="Pretendard" pitchFamily="34" charset="0"/>
-                <a:ea typeface="Pretendard" pitchFamily="34" charset="-122"/>
-                <a:cs typeface="Pretendard" pitchFamily="34" charset="-120"/>
-              </a:rPr>
-              <a:t>Supabase DB + 3DMark·퀘이사존 결합</a:t>
+                  <a:srgbClr val="94A3B8"/>
+                </a:solidFill>
+                <a:latin typeface="맑은 고딕" pitchFamily="34" charset="0"/>
+                <a:ea typeface="맑은 고딕" pitchFamily="34" charset="-122"/>
+                <a:cs typeface="맑은 고딕" pitchFamily="34" charset="-120"/>
+              </a:rPr>
+              <a:t>3DMark·퀘이사존·부품 DB 결합</a:t>
             </a:r>
             <a:endParaRPr lang="en-US" sz="1000" dirty="0"/>
           </a:p>
@@ -12841,11 +13491,11 @@
                 <a:solidFill>
                   <a:srgbClr val="FF5CA8"/>
                 </a:solidFill>
-                <a:latin typeface="Pretendard" pitchFamily="34" charset="0"/>
-                <a:ea typeface="Pretendard" pitchFamily="34" charset="-122"/>
-                <a:cs typeface="Pretendard" pitchFamily="34" charset="-120"/>
-              </a:rPr>
-              <a:t>⚠️ 개발하며 느낀 아쉬운 점 (한계점)</a:t>
+                <a:latin typeface="맑은 고딕" pitchFamily="34" charset="0"/>
+                <a:ea typeface="맑은 고딕" pitchFamily="34" charset="-122"/>
+                <a:cs typeface="맑은 고딕" pitchFamily="34" charset="-120"/>
+              </a:rPr>
+              <a:t>[개발하며 느낀 아쉬운 점 (한계점)]</a:t>
             </a:r>
             <a:endParaRPr lang="en-US" sz="1350" dirty="0"/>
           </a:p>
@@ -12874,7 +13524,7 @@
           <a:p>
             <a:pPr indent="0" marL="0">
               <a:lnSpc>
-                <a:spcPct val="125000"/>
+                <a:spcPct val="128000"/>
               </a:lnSpc>
               <a:buNone/>
             </a:pPr>
@@ -12883,18 +13533,18 @@
                 <a:solidFill>
                   <a:srgbClr val="F8FAFC"/>
                 </a:solidFill>
-                <a:latin typeface="Pretendard" pitchFamily="34" charset="0"/>
-                <a:ea typeface="Pretendard" pitchFamily="34" charset="-122"/>
-                <a:cs typeface="Pretendard" pitchFamily="34" charset="-120"/>
-              </a:rPr>
-              <a:t>📉 1. 실시간 특가·재고 변동의 완벽한 자동 동기화 한계</a:t>
+                <a:latin typeface="맑은 고딕" pitchFamily="34" charset="0"/>
+                <a:ea typeface="맑은 고딕" pitchFamily="34" charset="-122"/>
+                <a:cs typeface="맑은 고딕" pitchFamily="34" charset="-120"/>
+              </a:rPr>
+              <a:t>1. 실시간 쇼핑몰 특가·재고 변동의 완벽한 자동 동기화 한계</a:t>
             </a:r>
             <a:endParaRPr lang="en-US" sz="1100" dirty="0"/>
           </a:p>
           <a:p>
             <a:pPr indent="0" marL="0">
               <a:lnSpc>
-                <a:spcPct val="125000"/>
+                <a:spcPct val="128000"/>
               </a:lnSpc>
               <a:buNone/>
             </a:pPr>
@@ -12903,18 +13553,18 @@
                 <a:solidFill>
                   <a:srgbClr val="F8FAFC"/>
                 </a:solidFill>
-                <a:latin typeface="Pretendard" pitchFamily="34" charset="0"/>
-                <a:ea typeface="Pretendard" pitchFamily="34" charset="-122"/>
-                <a:cs typeface="Pretendard" pitchFamily="34" charset="-120"/>
-              </a:rPr>
-              <a:t>네이버 쇼핑 최저가 검색 링크는 연동했지만, 컴퓨존·다나와 등 현금몰의 실시간 품절 상태나 일일 특가 변동을 DB 가격에 100% 자동 반영하지 못한 점이 아쉬움</a:t>
+                <a:latin typeface="맑은 고딕" pitchFamily="34" charset="0"/>
+                <a:ea typeface="맑은 고딕" pitchFamily="34" charset="-122"/>
+                <a:cs typeface="맑은 고딕" pitchFamily="34" charset="-120"/>
+              </a:rPr>
+              <a:t>네이버 쇼핑 최저가 검색 버튼은 연동했지만, 컴퓨존·다나와 등 현금몰의 실시간 품절 상태나 일일 특가 변동을 내부 DB 가격에 100% 실시간으로 자동 크롤링해 반영하지 못한 점이 아쉬움</a:t>
             </a:r>
             <a:endParaRPr lang="en-US" sz="1100" dirty="0"/>
           </a:p>
           <a:p>
             <a:pPr indent="0" marL="0">
               <a:lnSpc>
-                <a:spcPct val="125000"/>
+                <a:spcPct val="128000"/>
               </a:lnSpc>
               <a:buNone/>
             </a:pPr>
@@ -12923,7 +13573,7 @@
           <a:p>
             <a:pPr indent="0" marL="0">
               <a:lnSpc>
-                <a:spcPct val="125000"/>
+                <a:spcPct val="128000"/>
               </a:lnSpc>
               <a:buNone/>
             </a:pPr>
@@ -12932,18 +13582,18 @@
                 <a:solidFill>
                   <a:srgbClr val="F8FAFC"/>
                 </a:solidFill>
-                <a:latin typeface="Pretendard" pitchFamily="34" charset="0"/>
-                <a:ea typeface="Pretendard" pitchFamily="34" charset="-122"/>
-                <a:cs typeface="Pretendard" pitchFamily="34" charset="-120"/>
-              </a:rPr>
-              <a:t>🎮 2. 벤치마크 비교 기준이 메이저 인기 게임 위주로 한정됨</a:t>
+                <a:latin typeface="맑은 고딕" pitchFamily="34" charset="0"/>
+                <a:ea typeface="맑은 고딕" pitchFamily="34" charset="-122"/>
+                <a:cs typeface="맑은 고딕" pitchFamily="34" charset="-120"/>
+              </a:rPr>
+              <a:t>2. 벤치마크 비교 기준이 메이저 인기 게임 위주로 한정됨</a:t>
             </a:r>
             <a:endParaRPr lang="en-US" sz="1100" dirty="0"/>
           </a:p>
           <a:p>
             <a:pPr indent="0" marL="0">
               <a:lnSpc>
-                <a:spcPct val="125000"/>
+                <a:spcPct val="128000"/>
               </a:lnSpc>
               <a:buNone/>
             </a:pPr>
@@ -12952,11 +13602,11 @@
                 <a:solidFill>
                   <a:srgbClr val="F8FAFC"/>
                 </a:solidFill>
-                <a:latin typeface="Pretendard" pitchFamily="34" charset="0"/>
-                <a:ea typeface="Pretendard" pitchFamily="34" charset="-122"/>
-                <a:cs typeface="Pretendard" pitchFamily="34" charset="-120"/>
-              </a:rPr>
-              <a:t>배그·사이버펑크·몬헌와일즈 등 대표 게임 평균 FPS는 정확하지만, 최신 스팀 인디 게임이나 특수 전문 작업의 세밀한 실측 표본이 아직 부족함</a:t>
+                <a:latin typeface="맑은 고딕" pitchFamily="34" charset="0"/>
+                <a:ea typeface="맑은 고딕" pitchFamily="34" charset="-122"/>
+                <a:cs typeface="맑은 고딕" pitchFamily="34" charset="-120"/>
+              </a:rPr>
+              <a:t>배그·사이버펑크·몬헌와일즈 등 대표 게임 평균 FPS는 정확하지만, 최신 스팀 인디 게임이나 특수 전문 작업 프로그램의 세밀한 실측 표본이 아직 부족함</a:t>
             </a:r>
             <a:endParaRPr lang="en-US" sz="1100" dirty="0"/>
           </a:p>
@@ -13018,11 +13668,11 @@
                 <a:solidFill>
                   <a:srgbClr val="00F3FF"/>
                 </a:solidFill>
-                <a:latin typeface="Pretendard" pitchFamily="34" charset="0"/>
-                <a:ea typeface="Pretendard" pitchFamily="34" charset="-122"/>
-                <a:cs typeface="Pretendard" pitchFamily="34" charset="-120"/>
-              </a:rPr>
-              <a:t>🚀 향후 고도화 및 개선 방향</a:t>
+                <a:latin typeface="맑은 고딕" pitchFamily="34" charset="0"/>
+                <a:ea typeface="맑은 고딕" pitchFamily="34" charset="-122"/>
+                <a:cs typeface="맑은 고딕" pitchFamily="34" charset="-120"/>
+              </a:rPr>
+              <a:t>[향후 고도화 및 개선 방향]</a:t>
             </a:r>
             <a:endParaRPr lang="en-US" sz="1350" dirty="0"/>
           </a:p>
@@ -13051,7 +13701,7 @@
           <a:p>
             <a:pPr indent="0" marL="0">
               <a:lnSpc>
-                <a:spcPct val="125000"/>
+                <a:spcPct val="128000"/>
               </a:lnSpc>
               <a:buNone/>
             </a:pPr>
@@ -13060,18 +13710,18 @@
                 <a:solidFill>
                   <a:srgbClr val="F8FAFC"/>
                 </a:solidFill>
-                <a:latin typeface="Pretendard" pitchFamily="34" charset="0"/>
-                <a:ea typeface="Pretendard" pitchFamily="34" charset="-122"/>
-                <a:cs typeface="Pretendard" pitchFamily="34" charset="-120"/>
-              </a:rPr>
-              <a:t>🔔 1. 부품 시세 변동 그래프 &amp; '매수 타이밍' AI 알림</a:t>
+                <a:latin typeface="맑은 고딕" pitchFamily="34" charset="0"/>
+                <a:ea typeface="맑은 고딕" pitchFamily="34" charset="-122"/>
+                <a:cs typeface="맑은 고딕" pitchFamily="34" charset="-120"/>
+              </a:rPr>
+              <a:t>1. 부품 시세 변동 그래프 &amp; '매수 타이밍' AI 알림</a:t>
             </a:r>
             <a:endParaRPr lang="en-US" sz="1100" dirty="0"/>
           </a:p>
           <a:p>
             <a:pPr indent="0" marL="0">
               <a:lnSpc>
-                <a:spcPct val="125000"/>
+                <a:spcPct val="128000"/>
               </a:lnSpc>
               <a:buNone/>
             </a:pPr>
@@ -13080,18 +13730,18 @@
                 <a:solidFill>
                   <a:srgbClr val="F8FAFC"/>
                 </a:solidFill>
-                <a:latin typeface="Pretendard" pitchFamily="34" charset="0"/>
-                <a:ea typeface="Pretendard" pitchFamily="34" charset="-122"/>
-                <a:cs typeface="Pretendard" pitchFamily="34" charset="-120"/>
-              </a:rPr>
-              <a:t>최근 3개월 부품 가격 추이를 차트로 보여주고, "지금이 역대 최저가 근처입니다 vs 신제품 출시 전이니 2주 대기하세요"를 알려주는 기능 추가</a:t>
+                <a:latin typeface="맑은 고딕" pitchFamily="34" charset="0"/>
+                <a:ea typeface="맑은 고딕" pitchFamily="34" charset="-122"/>
+                <a:cs typeface="맑은 고딕" pitchFamily="34" charset="-120"/>
+              </a:rPr>
+              <a:t>최근 3개월 부품 가격 추이를 차트로 보여주고, "지금이 저점 근처입니다 vs 신제품 출시 전이니 잠시 대기하세요"를 알려주는 구매 시기 가이드 추가</a:t>
             </a:r>
             <a:endParaRPr lang="en-US" sz="1100" dirty="0"/>
           </a:p>
           <a:p>
             <a:pPr indent="0" marL="0">
               <a:lnSpc>
-                <a:spcPct val="125000"/>
+                <a:spcPct val="128000"/>
               </a:lnSpc>
               <a:buNone/>
             </a:pPr>
@@ -13100,7 +13750,7 @@
           <a:p>
             <a:pPr indent="0" marL="0">
               <a:lnSpc>
-                <a:spcPct val="125000"/>
+                <a:spcPct val="128000"/>
               </a:lnSpc>
               <a:buNone/>
             </a:pPr>
@@ -13109,18 +13759,18 @@
                 <a:solidFill>
                   <a:srgbClr val="F8FAFC"/>
                 </a:solidFill>
-                <a:latin typeface="Pretendard" pitchFamily="34" charset="0"/>
-                <a:ea typeface="Pretendard" pitchFamily="34" charset="-122"/>
-                <a:cs typeface="Pretendard" pitchFamily="34" charset="-120"/>
-              </a:rPr>
-              <a:t>🤝 2. 실사용자 벤치마크(3DMark) 후기 데이터 누적</a:t>
+                <a:latin typeface="맑은 고딕" pitchFamily="34" charset="0"/>
+                <a:ea typeface="맑은 고딕" pitchFamily="34" charset="-122"/>
+                <a:cs typeface="맑은 고딕" pitchFamily="34" charset="-120"/>
+              </a:rPr>
+              <a:t>2. 실사용자 벤치마크(3DMark) 후기 데이터 누적</a:t>
             </a:r>
             <a:endParaRPr lang="en-US" sz="1100" dirty="0"/>
           </a:p>
           <a:p>
             <a:pPr indent="0" marL="0">
               <a:lnSpc>
-                <a:spcPct val="125000"/>
+                <a:spcPct val="128000"/>
               </a:lnSpc>
               <a:buNone/>
             </a:pPr>
@@ -13129,11 +13779,11 @@
                 <a:solidFill>
                   <a:srgbClr val="F8FAFC"/>
                 </a:solidFill>
-                <a:latin typeface="Pretendard" pitchFamily="34" charset="0"/>
-                <a:ea typeface="Pretendard" pitchFamily="34" charset="-122"/>
-                <a:cs typeface="Pretendard" pitchFamily="34" charset="-120"/>
-              </a:rPr>
-              <a:t>견적을 맞춘 실제 유저들이 자신의 실측 프레임과 타스(TimeSpy) 점수를 인증·공유하여 AI 비교 DB가 스스로 정교해지는 선순환 구조 구축</a:t>
+                <a:latin typeface="맑은 고딕" pitchFamily="34" charset="0"/>
+                <a:ea typeface="맑은 고딕" pitchFamily="34" charset="-122"/>
+                <a:cs typeface="맑은 고딕" pitchFamily="34" charset="-120"/>
+              </a:rPr>
+              <a:t>견적을 맞춘 실제 유저들이 자신의 실측 프레임과 3DMark 점수를 커뮤니티에 인증·공유하여 비교 DB가 지속적으로 확장되는 구조 구축</a:t>
             </a:r>
             <a:endParaRPr lang="en-US" sz="1100" dirty="0"/>
           </a:p>

--- a/PC-FIT_2학기_발표자료.pptx
+++ b/PC-FIT_2학기_발표자료.pptx
@@ -7725,7 +7725,7 @@
                 <a:ea typeface="맑은 고딕" pitchFamily="34" charset="-122"/>
                 <a:cs typeface="맑은 고딕" pitchFamily="34" charset="-120"/>
               </a:rPr>
-              <a:t>[멀티 AI 모델 연동]</a:t>
+              <a:t>[Google Gemini AI 엔진]</a:t>
             </a:r>
             <a:endParaRPr lang="en-US" sz="1050" dirty="0"/>
           </a:p>
@@ -7742,7 +7742,7 @@
                 <a:ea typeface="맑은 고딕" pitchFamily="34" charset="-122"/>
                 <a:cs typeface="맑은 고딕" pitchFamily="34" charset="-120"/>
               </a:rPr>
-              <a:t>Gemini 2.5 / 3.5 Flash</a:t>
+              <a:t>Gemini 2.5 Flash 기반</a:t>
             </a:r>
             <a:endParaRPr lang="en-US" sz="1050" dirty="0"/>
           </a:p>
@@ -7759,7 +7759,7 @@
                 <a:ea typeface="맑은 고딕" pitchFamily="34" charset="-122"/>
                 <a:cs typeface="맑은 고딕" pitchFamily="34" charset="-120"/>
               </a:rPr>
-              <a:t>GPT-5.1</a:t>
+              <a:t>정형 JSON 스키마 응답</a:t>
             </a:r>
             <a:endParaRPr lang="en-US" sz="1050" dirty="0"/>
           </a:p>
@@ -7776,24 +7776,7 @@
                 <a:ea typeface="맑은 고딕" pitchFamily="34" charset="-122"/>
                 <a:cs typeface="맑은 고딕" pitchFamily="34" charset="-120"/>
               </a:rPr>
-              <a:t>Claude Sonnet 4.6</a:t>
-            </a:r>
-            <a:endParaRPr lang="en-US" sz="1050" dirty="0"/>
-          </a:p>
-          <a:p>
-            <a:pPr algn="ctr" indent="0" marL="0">
-              <a:buNone/>
-            </a:pPr>
-            <a:r>
-              <a:rPr lang="en-US" sz="1050" b="1" dirty="0">
-                <a:solidFill>
-                  <a:srgbClr val="F8FAFC"/>
-                </a:solidFill>
-                <a:latin typeface="맑은 고딕" pitchFamily="34" charset="0"/>
-                <a:ea typeface="맑은 고딕" pitchFamily="34" charset="-122"/>
-                <a:cs typeface="맑은 고딕" pitchFamily="34" charset="-120"/>
-              </a:rPr>
-              <a:t>(장애 시 다음 모델로 자동 전환)</a:t>
+              <a:t>(verdict · chartData · tableData)</a:t>
             </a:r>
             <a:endParaRPr lang="en-US" sz="1050" dirty="0"/>
           </a:p>
@@ -9674,6 +9657,83 @@
         </p:nvSpPr>
         <p:spPr>
           <a:xfrm>
+            <a:off x="8458200" y="384048"/>
+            <a:ext cx="3273552" cy="475488"/>
+          </a:xfrm>
+          <a:prstGeom prst="roundRect">
+            <a:avLst>
+              <a:gd name="adj" fmla="val 48077"/>
+            </a:avLst>
+          </a:prstGeom>
+          <a:solidFill>
+            <a:srgbClr val="00E676">
+              <a:alpha val="20000"/>
+            </a:srgbClr>
+          </a:solidFill>
+          <a:ln w="12700">
+            <a:solidFill>
+              <a:srgbClr val="00E676"/>
+            </a:solidFill>
+            <a:prstDash val="solid"/>
+          </a:ln>
+        </p:spPr>
+      </p:sp>
+      <p:sp>
+        <p:nvSpPr>
+          <p:cNvPr id="10" name="Text 8">
+            <a:hlinkClick r:id="rId1" tooltip="https://pc-fit-tjandud.vercel.app/ 열기"/>
+          </p:cNvPr>
+          <p:cNvSpPr/>
+          <p:nvPr/>
+        </p:nvSpPr>
+        <p:spPr>
+          <a:xfrm>
+            <a:off x="8458200" y="384048"/>
+            <a:ext cx="3273552" cy="475488"/>
+          </a:xfrm>
+          <a:prstGeom prst="rect">
+            <a:avLst/>
+          </a:prstGeom>
+          <a:noFill/>
+          <a:ln/>
+        </p:spPr>
+        <p:txBody>
+          <a:bodyPr wrap="square" rtlCol="0" anchor="ctr"/>
+          <a:lstStyle/>
+          <a:p>
+            <a:pPr algn="ctr" indent="0" marL="0">
+              <a:buNone/>
+            </a:pPr>
+            <a:r>
+              <a:rPr lang="en-US" sz="1100" b="1" u="sng" dirty="0">
+                <a:solidFill>
+                  <a:srgbClr val="00E676"/>
+                </a:solidFill>
+                <a:latin typeface="맑은 고딕" pitchFamily="34" charset="0"/>
+                <a:ea typeface="맑은 고딕" pitchFamily="34" charset="-122"/>
+                <a:cs typeface="맑은 고딕" pitchFamily="34" charset="-120"/>
+                <a:hlinkClick r:id="rId1" invalidUrl="" action="" tgtFrame="" tooltip="https://pc-fit-tjandud.vercel.app/ 열기" history="1" highlightClick="0" endSnd="0">
+                  <a:extLst>
+                    <a:ext uri="{A12FA001-AC4F-418D-AE19-62706E023703}">
+                      <ahyp:hlinkClr xmlns:ahyp="http://schemas.microsoft.com/office/drawing/2018/hyperlinkcolor" val="tx"/>
+                    </a:ext>
+                  </a:extLst>
+                </a:hlinkClick>
+              </a:rPr>
+              <a:t>실제 사이트 시뮬레이션 열기 (클릭)</a:t>
+            </a:r>
+            <a:endParaRPr lang="en-US" sz="1100" dirty="0"/>
+          </a:p>
+        </p:txBody>
+      </p:sp>
+      <p:sp>
+        <p:nvSpPr>
+          <p:cNvPr id="11" name="Shape 9"/>
+          <p:cNvSpPr/>
+          <p:nvPr/>
+        </p:nvSpPr>
+        <p:spPr>
+          <a:xfrm>
             <a:off x="457200" y="1371600"/>
             <a:ext cx="11274552" cy="4800600"/>
           </a:xfrm>
@@ -9695,7 +9755,7 @@
       </p:sp>
       <p:sp>
         <p:nvSpPr>
-          <p:cNvPr id="10" name="Shape 8"/>
+          <p:cNvPr id="12" name="Shape 10"/>
           <p:cNvSpPr/>
           <p:nvPr/>
         </p:nvSpPr>
@@ -9724,7 +9784,7 @@
       </p:sp>
       <p:sp>
         <p:nvSpPr>
-          <p:cNvPr id="11" name="Text 9"/>
+          <p:cNvPr id="13" name="Text 11"/>
           <p:cNvSpPr/>
           <p:nvPr/>
         </p:nvSpPr>
@@ -9755,7 +9815,7 @@
                 <a:ea typeface="맑은 고딕" pitchFamily="34" charset="-122"/>
                 <a:cs typeface="맑은 고딕" pitchFamily="34" charset="-120"/>
               </a:rPr>
-              <a:t>[AI 최종 결론 (verdict)] QHD 게이밍 기준 평균 프레임 격차는 약 18%이나 가격 차이가 크므로 RTX 5070 유지 추천!</a:t>
+              <a:t>[AI 최종 결론 (verdict)] QHD 게이밍 기준 평균 프레임 격차는 약 18%이나 가격 차이가 약 60만 원에 달하므로 RTX 5070 유지 추천!</a:t>
             </a:r>
             <a:endParaRPr lang="en-US" sz="1200" dirty="0"/>
           </a:p>
@@ -9763,7 +9823,7 @@
       </p:sp>
       <p:sp>
         <p:nvSpPr>
-          <p:cNvPr id="12" name="Shape 10"/>
+          <p:cNvPr id="14" name="Shape 12"/>
           <p:cNvSpPr/>
           <p:nvPr/>
         </p:nvSpPr>
@@ -9790,7 +9850,7 @@
       </p:sp>
       <p:sp>
         <p:nvSpPr>
-          <p:cNvPr id="13" name="Text 11"/>
+          <p:cNvPr id="15" name="Text 13"/>
           <p:cNvSpPr/>
           <p:nvPr/>
         </p:nvSpPr>
@@ -9829,7 +9889,7 @@
       </p:sp>
       <p:sp>
         <p:nvSpPr>
-          <p:cNvPr id="14" name="Text 12"/>
+          <p:cNvPr id="16" name="Text 14"/>
           <p:cNvSpPr/>
           <p:nvPr/>
         </p:nvSpPr>
@@ -9868,7 +9928,7 @@
       </p:sp>
       <p:sp>
         <p:nvSpPr>
-          <p:cNvPr id="15" name="Text 13"/>
+          <p:cNvPr id="17" name="Text 15"/>
           <p:cNvSpPr/>
           <p:nvPr/>
         </p:nvSpPr>
@@ -9907,7 +9967,7 @@
       </p:sp>
       <p:sp>
         <p:nvSpPr>
-          <p:cNvPr id="16" name="Shape 14"/>
+          <p:cNvPr id="18" name="Shape 16"/>
           <p:cNvSpPr/>
           <p:nvPr/>
         </p:nvSpPr>
@@ -9934,7 +9994,7 @@
       </p:sp>
       <p:sp>
         <p:nvSpPr>
-          <p:cNvPr id="17" name="Text 15"/>
+          <p:cNvPr id="19" name="Text 17"/>
           <p:cNvSpPr/>
           <p:nvPr/>
         </p:nvSpPr>
@@ -9973,7 +10033,7 @@
       </p:sp>
       <p:sp>
         <p:nvSpPr>
-          <p:cNvPr id="18" name="Text 16"/>
+          <p:cNvPr id="20" name="Text 18"/>
           <p:cNvSpPr/>
           <p:nvPr/>
         </p:nvSpPr>
@@ -10012,7 +10072,7 @@
       </p:sp>
       <p:sp>
         <p:nvSpPr>
-          <p:cNvPr id="19" name="Shape 17"/>
+          <p:cNvPr id="21" name="Shape 19"/>
           <p:cNvSpPr/>
           <p:nvPr/>
         </p:nvSpPr>
@@ -10039,7 +10099,7 @@
       </p:sp>
       <p:sp>
         <p:nvSpPr>
-          <p:cNvPr id="20" name="Text 18"/>
+          <p:cNvPr id="22" name="Text 20"/>
           <p:cNvSpPr/>
           <p:nvPr/>
         </p:nvSpPr>
@@ -10078,7 +10138,7 @@
       </p:sp>
       <p:sp>
         <p:nvSpPr>
-          <p:cNvPr id="21" name="Text 19"/>
+          <p:cNvPr id="23" name="Text 21"/>
           <p:cNvSpPr/>
           <p:nvPr/>
         </p:nvSpPr>
@@ -10117,7 +10177,7 @@
       </p:sp>
       <p:sp>
         <p:nvSpPr>
-          <p:cNvPr id="22" name="Text 20"/>
+          <p:cNvPr id="24" name="Text 22"/>
           <p:cNvSpPr/>
           <p:nvPr/>
         </p:nvSpPr>
@@ -10156,7 +10216,7 @@
       </p:sp>
       <p:sp>
         <p:nvSpPr>
-          <p:cNvPr id="23" name="Shape 21"/>
+          <p:cNvPr id="25" name="Shape 23"/>
           <p:cNvSpPr/>
           <p:nvPr/>
         </p:nvSpPr>
@@ -10183,7 +10243,7 @@
       </p:sp>
       <p:sp>
         <p:nvSpPr>
-          <p:cNvPr id="24" name="Text 22"/>
+          <p:cNvPr id="26" name="Text 24"/>
           <p:cNvSpPr/>
           <p:nvPr/>
         </p:nvSpPr>
@@ -10222,7 +10282,7 @@
       </p:sp>
       <p:sp>
         <p:nvSpPr>
-          <p:cNvPr id="25" name="Text 23"/>
+          <p:cNvPr id="27" name="Text 25"/>
           <p:cNvSpPr/>
           <p:nvPr/>
         </p:nvSpPr>
@@ -10261,7 +10321,7 @@
       </p:sp>
       <p:sp>
         <p:nvSpPr>
-          <p:cNvPr id="26" name="Shape 24"/>
+          <p:cNvPr id="28" name="Shape 26"/>
           <p:cNvSpPr/>
           <p:nvPr/>
         </p:nvSpPr>
@@ -10288,7 +10348,7 @@
       </p:sp>
       <p:sp>
         <p:nvSpPr>
-          <p:cNvPr id="27" name="Text 25"/>
+          <p:cNvPr id="29" name="Text 27"/>
           <p:cNvSpPr/>
           <p:nvPr/>
         </p:nvSpPr>
@@ -10327,7 +10387,7 @@
       </p:sp>
       <p:sp>
         <p:nvSpPr>
-          <p:cNvPr id="28" name="Text 26"/>
+          <p:cNvPr id="30" name="Text 28"/>
           <p:cNvSpPr/>
           <p:nvPr/>
         </p:nvSpPr>
@@ -10366,7 +10426,7 @@
       </p:sp>
       <p:sp>
         <p:nvSpPr>
-          <p:cNvPr id="29" name="Shape 27"/>
+          <p:cNvPr id="31" name="Shape 29"/>
           <p:cNvSpPr/>
           <p:nvPr/>
         </p:nvSpPr>
@@ -10393,7 +10453,7 @@
       </p:sp>
       <p:sp>
         <p:nvSpPr>
-          <p:cNvPr id="30" name="Text 28"/>
+          <p:cNvPr id="32" name="Text 30"/>
           <p:cNvSpPr/>
           <p:nvPr/>
         </p:nvSpPr>
@@ -10749,7 +10809,7 @@
                           <a:ea typeface="맑은 고딕" pitchFamily="34" charset="-122"/>
                           <a:cs typeface="맑은 고딕" pitchFamily="34" charset="-120"/>
                         </a:rPr>
-                        <a:t>기준 부품 (예산 절약)</a:t>
+                        <a:t>약 95만 원 (기준)</a:t>
                       </a:r>
                       <a:endParaRPr lang="en-US" sz="1050" dirty="0">
                         <a:latin typeface="맑은 고딕" charset="0"/>
@@ -10817,7 +10877,7 @@
                           <a:ea typeface="맑은 고딕" pitchFamily="34" charset="-122"/>
                           <a:cs typeface="맑은 고딕" pitchFamily="34" charset="-120"/>
                         </a:rPr>
-                        <a:t>+약 40~60만 원 추가 지출</a:t>
+                        <a:t>약 155만 원 (+60만 원)</a:t>
                       </a:r>
                       <a:endParaRPr lang="en-US" sz="1050" dirty="0">
                         <a:latin typeface="맑은 고딕" charset="0"/>
@@ -11493,7 +11553,7 @@
       </p:graphicFrame>
       <p:sp>
         <p:nvSpPr>
-          <p:cNvPr id="32" name="Shape 29"/>
+          <p:cNvPr id="34" name="Shape 31"/>
           <p:cNvSpPr/>
           <p:nvPr/>
         </p:nvSpPr>
@@ -11522,7 +11582,7 @@
       </p:sp>
       <p:sp>
         <p:nvSpPr>
-          <p:cNvPr id="33" name="Text 30"/>
+          <p:cNvPr id="35" name="Text 32"/>
           <p:cNvSpPr/>
           <p:nvPr/>
         </p:nvSpPr>
@@ -11929,7 +11989,7 @@
                 <a:ea typeface="맑은 고딕" pitchFamily="34" charset="-122"/>
                 <a:cs typeface="맑은 고딕" pitchFamily="34" charset="-120"/>
               </a:rPr>
-              <a:t>// POST /api/v1/recommend/compare-advisor</a:t>
+              <a:t>// POST /api/recommend/compare-advisor</a:t>
             </a:r>
             <a:endParaRPr lang="en-US" sz="950" dirty="0"/>
           </a:p>
@@ -12855,7 +12915,7 @@
                 <a:ea typeface="맑은 고딕" pitchFamily="34" charset="-122"/>
                 <a:cs typeface="맑은 고딕" pitchFamily="34" charset="-120"/>
               </a:rPr>
-              <a:t>CONCLUSION &amp; FUTURE ROADMAP</a:t>
+              <a:t>CONCLUSION &amp; LIVE SIMULATION</a:t>
             </a:r>
             <a:endParaRPr lang="en-US" sz="1050" dirty="0"/>
           </a:p>
@@ -12894,7 +12954,7 @@
                 <a:ea typeface="맑은 고딕" pitchFamily="34" charset="-122"/>
                 <a:cs typeface="맑은 고딕" pitchFamily="34" charset="-120"/>
               </a:rPr>
-              <a:t>2학기 핵심 성과 요약 및 아쉬운 점 · 향후 개선 방향</a:t>
+              <a:t>2학기 핵심 성과 요약 · 아쉬운 점 · 향후 개선 방향 및 실제 사이트 시연</a:t>
             </a:r>
             <a:endParaRPr lang="en-US" sz="2200" dirty="0"/>
           </a:p>
@@ -13011,12 +13071,12 @@
         </p:nvSpPr>
         <p:spPr>
           <a:xfrm>
-            <a:off x="457200" y="1371600"/>
-            <a:ext cx="3639312" cy="1325880"/>
+            <a:off x="457200" y="1353312"/>
+            <a:ext cx="3639312" cy="1170432"/>
           </a:xfrm>
           <a:prstGeom prst="roundRect">
             <a:avLst>
-              <a:gd name="adj" fmla="val 11034"/>
+              <a:gd name="adj" fmla="val 12500"/>
             </a:avLst>
           </a:prstGeom>
           <a:solidFill>
@@ -13038,7 +13098,85 @@
         </p:nvSpPr>
         <p:spPr>
           <a:xfrm>
-            <a:off x="457200" y="1463040"/>
+            <a:off x="457200" y="1417320"/>
+            <a:ext cx="3639312" cy="228600"/>
+          </a:xfrm>
+          <a:prstGeom prst="rect">
+            <a:avLst/>
+          </a:prstGeom>
+          <a:noFill/>
+          <a:ln/>
+        </p:spPr>
+        <p:txBody>
+          <a:bodyPr wrap="square" rtlCol="0" anchor="ctr"/>
+          <a:lstStyle/>
+          <a:p>
+            <a:pPr algn="ctr" indent="0" marL="0">
+              <a:buNone/>
+            </a:pPr>
+            <a:r>
+              <a:rPr lang="en-US" sz="1050" b="1" dirty="0">
+                <a:solidFill>
+                  <a:srgbClr val="CBD5E1"/>
+                </a:solidFill>
+                <a:latin typeface="맑은 고딕" pitchFamily="34" charset="0"/>
+                <a:ea typeface="맑은 고딕" pitchFamily="34" charset="-122"/>
+                <a:cs typeface="맑은 고딕" pitchFamily="34" charset="-120"/>
+              </a:rPr>
+              <a:t>부품 비교·검증 과정 단축</a:t>
+            </a:r>
+            <a:endParaRPr lang="en-US" sz="1050" dirty="0"/>
+          </a:p>
+        </p:txBody>
+      </p:sp>
+      <p:sp>
+        <p:nvSpPr>
+          <p:cNvPr id="11" name="Text 9"/>
+          <p:cNvSpPr/>
+          <p:nvPr/>
+        </p:nvSpPr>
+        <p:spPr>
+          <a:xfrm>
+            <a:off x="457200" y="1664208"/>
+            <a:ext cx="3639312" cy="411480"/>
+          </a:xfrm>
+          <a:prstGeom prst="rect">
+            <a:avLst/>
+          </a:prstGeom>
+          <a:noFill/>
+          <a:ln/>
+        </p:spPr>
+        <p:txBody>
+          <a:bodyPr wrap="square" rtlCol="0" anchor="ctr"/>
+          <a:lstStyle/>
+          <a:p>
+            <a:pPr algn="ctr" indent="0" marL="0">
+              <a:buNone/>
+            </a:pPr>
+            <a:r>
+              <a:rPr lang="en-US" sz="1950" b="1" dirty="0">
+                <a:solidFill>
+                  <a:srgbClr val="00F3FF"/>
+                </a:solidFill>
+                <a:latin typeface="맑은 고딕" pitchFamily="34" charset="0"/>
+                <a:ea typeface="맑은 고딕" pitchFamily="34" charset="-122"/>
+                <a:cs typeface="맑은 고딕" pitchFamily="34" charset="-120"/>
+              </a:rPr>
+              <a:t>원클릭 즉시 비교</a:t>
+            </a:r>
+            <a:endParaRPr lang="en-US" sz="1950" dirty="0"/>
+          </a:p>
+        </p:txBody>
+      </p:sp>
+      <p:sp>
+        <p:nvSpPr>
+          <p:cNvPr id="12" name="Text 10"/>
+          <p:cNvSpPr/>
+          <p:nvPr/>
+        </p:nvSpPr>
+        <p:spPr>
+          <a:xfrm>
+            <a:off x="457200" y="2121408"/>
             <a:ext cx="3639312" cy="256032"/>
           </a:xfrm>
           <a:prstGeom prst="rect">
@@ -13055,85 +13193,7 @@
               <a:buNone/>
             </a:pPr>
             <a:r>
-              <a:rPr lang="en-US" sz="1050" b="1" dirty="0">
-                <a:solidFill>
-                  <a:srgbClr val="CBD5E1"/>
-                </a:solidFill>
-                <a:latin typeface="맑은 고딕" pitchFamily="34" charset="0"/>
-                <a:ea typeface="맑은 고딕" pitchFamily="34" charset="-122"/>
-                <a:cs typeface="맑은 고딕" pitchFamily="34" charset="-120"/>
-              </a:rPr>
-              <a:t>부품 비교·검증 과정 단축</a:t>
-            </a:r>
-            <a:endParaRPr lang="en-US" sz="1050" dirty="0"/>
-          </a:p>
-        </p:txBody>
-      </p:sp>
-      <p:sp>
-        <p:nvSpPr>
-          <p:cNvPr id="11" name="Text 9"/>
-          <p:cNvSpPr/>
-          <p:nvPr/>
-        </p:nvSpPr>
-        <p:spPr>
-          <a:xfrm>
-            <a:off x="457200" y="1737360"/>
-            <a:ext cx="3639312" cy="502920"/>
-          </a:xfrm>
-          <a:prstGeom prst="rect">
-            <a:avLst/>
-          </a:prstGeom>
-          <a:noFill/>
-          <a:ln/>
-        </p:spPr>
-        <p:txBody>
-          <a:bodyPr wrap="square" rtlCol="0" anchor="ctr"/>
-          <a:lstStyle/>
-          <a:p>
-            <a:pPr algn="ctr" indent="0" marL="0">
-              <a:buNone/>
-            </a:pPr>
-            <a:r>
-              <a:rPr lang="en-US" sz="2100" b="1" dirty="0">
-                <a:solidFill>
-                  <a:srgbClr val="00F3FF"/>
-                </a:solidFill>
-                <a:latin typeface="맑은 고딕" pitchFamily="34" charset="0"/>
-                <a:ea typeface="맑은 고딕" pitchFamily="34" charset="-122"/>
-                <a:cs typeface="맑은 고딕" pitchFamily="34" charset="-120"/>
-              </a:rPr>
-              <a:t>원클릭 즉시 비교</a:t>
-            </a:r>
-            <a:endParaRPr lang="en-US" sz="2100" dirty="0"/>
-          </a:p>
-        </p:txBody>
-      </p:sp>
-      <p:sp>
-        <p:nvSpPr>
-          <p:cNvPr id="12" name="Text 10"/>
-          <p:cNvSpPr/>
-          <p:nvPr/>
-        </p:nvSpPr>
-        <p:spPr>
-          <a:xfrm>
-            <a:off x="457200" y="2286000"/>
-            <a:ext cx="3639312" cy="274320"/>
-          </a:xfrm>
-          <a:prstGeom prst="rect">
-            <a:avLst/>
-          </a:prstGeom>
-          <a:noFill/>
-          <a:ln/>
-        </p:spPr>
-        <p:txBody>
-          <a:bodyPr wrap="square" rtlCol="0" anchor="ctr"/>
-          <a:lstStyle/>
-          <a:p>
-            <a:pPr algn="ctr" indent="0" marL="0">
-              <a:buNone/>
-            </a:pPr>
-            <a:r>
-              <a:rPr lang="en-US" sz="1000" dirty="0">
+              <a:rPr lang="en-US" sz="950" dirty="0">
                 <a:solidFill>
                   <a:srgbClr val="94A3B8"/>
                 </a:solidFill>
@@ -13143,7 +13203,7 @@
               </a:rPr>
               <a:t>유튜브·다나와 다중 검색 불필요</a:t>
             </a:r>
-            <a:endParaRPr lang="en-US" sz="1000" dirty="0"/>
+            <a:endParaRPr lang="en-US" sz="950" dirty="0"/>
           </a:p>
         </p:txBody>
       </p:sp>
@@ -13155,12 +13215,12 @@
         </p:nvSpPr>
         <p:spPr>
           <a:xfrm>
-            <a:off x="4251960" y="1371600"/>
-            <a:ext cx="3639312" cy="1325880"/>
+            <a:off x="4251960" y="1353312"/>
+            <a:ext cx="3639312" cy="1170432"/>
           </a:xfrm>
           <a:prstGeom prst="roundRect">
             <a:avLst>
-              <a:gd name="adj" fmla="val 11034"/>
+              <a:gd name="adj" fmla="val 12500"/>
             </a:avLst>
           </a:prstGeom>
           <a:solidFill>
@@ -13182,7 +13242,85 @@
         </p:nvSpPr>
         <p:spPr>
           <a:xfrm>
-            <a:off x="4251960" y="1463040"/>
+            <a:off x="4251960" y="1417320"/>
+            <a:ext cx="3639312" cy="228600"/>
+          </a:xfrm>
+          <a:prstGeom prst="rect">
+            <a:avLst/>
+          </a:prstGeom>
+          <a:noFill/>
+          <a:ln/>
+        </p:spPr>
+        <p:txBody>
+          <a:bodyPr wrap="square" rtlCol="0" anchor="ctr"/>
+          <a:lstStyle/>
+          <a:p>
+            <a:pPr algn="ctr" indent="0" marL="0">
+              <a:buNone/>
+            </a:pPr>
+            <a:r>
+              <a:rPr lang="en-US" sz="1050" b="1" dirty="0">
+                <a:solidFill>
+                  <a:srgbClr val="CBD5E1"/>
+                </a:solidFill>
+                <a:latin typeface="맑은 고딕" pitchFamily="34" charset="0"/>
+                <a:ea typeface="맑은 고딕" pitchFamily="34" charset="-122"/>
+                <a:cs typeface="맑은 고딕" pitchFamily="34" charset="-120"/>
+              </a:rPr>
+              <a:t>합리적 소비 의사결정 지원</a:t>
+            </a:r>
+            <a:endParaRPr lang="en-US" sz="1050" dirty="0"/>
+          </a:p>
+        </p:txBody>
+      </p:sp>
+      <p:sp>
+        <p:nvSpPr>
+          <p:cNvPr id="15" name="Text 13"/>
+          <p:cNvSpPr/>
+          <p:nvPr/>
+        </p:nvSpPr>
+        <p:spPr>
+          <a:xfrm>
+            <a:off x="4251960" y="1664208"/>
+            <a:ext cx="3639312" cy="411480"/>
+          </a:xfrm>
+          <a:prstGeom prst="rect">
+            <a:avLst/>
+          </a:prstGeom>
+          <a:noFill/>
+          <a:ln/>
+        </p:spPr>
+        <p:txBody>
+          <a:bodyPr wrap="square" rtlCol="0" anchor="ctr"/>
+          <a:lstStyle/>
+          <a:p>
+            <a:pPr algn="ctr" indent="0" marL="0">
+              <a:buNone/>
+            </a:pPr>
+            <a:r>
+              <a:rPr lang="en-US" sz="1950" b="1" dirty="0">
+                <a:solidFill>
+                  <a:srgbClr val="FF5CA8"/>
+                </a:solidFill>
+                <a:latin typeface="맑은 고딕" pitchFamily="34" charset="0"/>
+                <a:ea typeface="맑은 고딕" pitchFamily="34" charset="-122"/>
+                <a:cs typeface="맑은 고딕" pitchFamily="34" charset="-120"/>
+              </a:rPr>
+              <a:t>35~60만 원 절감</a:t>
+            </a:r>
+            <a:endParaRPr lang="en-US" sz="1950" dirty="0"/>
+          </a:p>
+        </p:txBody>
+      </p:sp>
+      <p:sp>
+        <p:nvSpPr>
+          <p:cNvPr id="16" name="Text 14"/>
+          <p:cNvSpPr/>
+          <p:nvPr/>
+        </p:nvSpPr>
+        <p:spPr>
+          <a:xfrm>
+            <a:off x="4251960" y="2121408"/>
             <a:ext cx="3639312" cy="256032"/>
           </a:xfrm>
           <a:prstGeom prst="rect">
@@ -13199,85 +13337,7 @@
               <a:buNone/>
             </a:pPr>
             <a:r>
-              <a:rPr lang="en-US" sz="1050" b="1" dirty="0">
-                <a:solidFill>
-                  <a:srgbClr val="CBD5E1"/>
-                </a:solidFill>
-                <a:latin typeface="맑은 고딕" pitchFamily="34" charset="0"/>
-                <a:ea typeface="맑은 고딕" pitchFamily="34" charset="-122"/>
-                <a:cs typeface="맑은 고딕" pitchFamily="34" charset="-120"/>
-              </a:rPr>
-              <a:t>합리적 소비 의사결정 지원</a:t>
-            </a:r>
-            <a:endParaRPr lang="en-US" sz="1050" dirty="0"/>
-          </a:p>
-        </p:txBody>
-      </p:sp>
-      <p:sp>
-        <p:nvSpPr>
-          <p:cNvPr id="15" name="Text 13"/>
-          <p:cNvSpPr/>
-          <p:nvPr/>
-        </p:nvSpPr>
-        <p:spPr>
-          <a:xfrm>
-            <a:off x="4251960" y="1737360"/>
-            <a:ext cx="3639312" cy="502920"/>
-          </a:xfrm>
-          <a:prstGeom prst="rect">
-            <a:avLst/>
-          </a:prstGeom>
-          <a:noFill/>
-          <a:ln/>
-        </p:spPr>
-        <p:txBody>
-          <a:bodyPr wrap="square" rtlCol="0" anchor="ctr"/>
-          <a:lstStyle/>
-          <a:p>
-            <a:pPr algn="ctr" indent="0" marL="0">
-              <a:buNone/>
-            </a:pPr>
-            <a:r>
-              <a:rPr lang="en-US" sz="2100" b="1" dirty="0">
-                <a:solidFill>
-                  <a:srgbClr val="FF5CA8"/>
-                </a:solidFill>
-                <a:latin typeface="맑은 고딕" pitchFamily="34" charset="0"/>
-                <a:ea typeface="맑은 고딕" pitchFamily="34" charset="-122"/>
-                <a:cs typeface="맑은 고딕" pitchFamily="34" charset="-120"/>
-              </a:rPr>
-              <a:t>30~60만 원 절감</a:t>
-            </a:r>
-            <a:endParaRPr lang="en-US" sz="2100" dirty="0"/>
-          </a:p>
-        </p:txBody>
-      </p:sp>
-      <p:sp>
-        <p:nvSpPr>
-          <p:cNvPr id="16" name="Text 14"/>
-          <p:cNvSpPr/>
-          <p:nvPr/>
-        </p:nvSpPr>
-        <p:spPr>
-          <a:xfrm>
-            <a:off x="4251960" y="2286000"/>
-            <a:ext cx="3639312" cy="274320"/>
-          </a:xfrm>
-          <a:prstGeom prst="rect">
-            <a:avLst/>
-          </a:prstGeom>
-          <a:noFill/>
-          <a:ln/>
-        </p:spPr>
-        <p:txBody>
-          <a:bodyPr wrap="square" rtlCol="0" anchor="ctr"/>
-          <a:lstStyle/>
-          <a:p>
-            <a:pPr algn="ctr" indent="0" marL="0">
-              <a:buNone/>
-            </a:pPr>
-            <a:r>
-              <a:rPr lang="en-US" sz="1000" dirty="0">
+              <a:rPr lang="en-US" sz="950" dirty="0">
                 <a:solidFill>
                   <a:srgbClr val="94A3B8"/>
                 </a:solidFill>
@@ -13287,7 +13347,7 @@
               </a:rPr>
               <a:t>내 모니터·게임 맞춤 등급 선택</a:t>
             </a:r>
-            <a:endParaRPr lang="en-US" sz="1000" dirty="0"/>
+            <a:endParaRPr lang="en-US" sz="950" dirty="0"/>
           </a:p>
         </p:txBody>
       </p:sp>
@@ -13299,12 +13359,12 @@
         </p:nvSpPr>
         <p:spPr>
           <a:xfrm>
-            <a:off x="8046720" y="1371600"/>
-            <a:ext cx="3639312" cy="1325880"/>
+            <a:off x="8046720" y="1353312"/>
+            <a:ext cx="3639312" cy="1170432"/>
           </a:xfrm>
           <a:prstGeom prst="roundRect">
             <a:avLst>
-              <a:gd name="adj" fmla="val 11034"/>
+              <a:gd name="adj" fmla="val 12500"/>
             </a:avLst>
           </a:prstGeom>
           <a:solidFill>
@@ -13326,7 +13386,85 @@
         </p:nvSpPr>
         <p:spPr>
           <a:xfrm>
-            <a:off x="8046720" y="1463040"/>
+            <a:off x="8046720" y="1417320"/>
+            <a:ext cx="3639312" cy="228600"/>
+          </a:xfrm>
+          <a:prstGeom prst="rect">
+            <a:avLst/>
+          </a:prstGeom>
+          <a:noFill/>
+          <a:ln/>
+        </p:spPr>
+        <p:txBody>
+          <a:bodyPr wrap="square" rtlCol="0" anchor="ctr"/>
+          <a:lstStyle/>
+          <a:p>
+            <a:pPr algn="ctr" indent="0" marL="0">
+              <a:buNone/>
+            </a:pPr>
+            <a:r>
+              <a:rPr lang="en-US" sz="1050" b="1" dirty="0">
+                <a:solidFill>
+                  <a:srgbClr val="CBD5E1"/>
+                </a:solidFill>
+                <a:latin typeface="맑은 고딕" pitchFamily="34" charset="0"/>
+                <a:ea typeface="맑은 고딕" pitchFamily="34" charset="-122"/>
+                <a:cs typeface="맑은 고딕" pitchFamily="34" charset="-120"/>
+              </a:rPr>
+              <a:t>데이터 신뢰도 &amp; 출처 명시</a:t>
+            </a:r>
+            <a:endParaRPr lang="en-US" sz="1050" dirty="0"/>
+          </a:p>
+        </p:txBody>
+      </p:sp>
+      <p:sp>
+        <p:nvSpPr>
+          <p:cNvPr id="19" name="Text 17"/>
+          <p:cNvSpPr/>
+          <p:nvPr/>
+        </p:nvSpPr>
+        <p:spPr>
+          <a:xfrm>
+            <a:off x="8046720" y="1664208"/>
+            <a:ext cx="3639312" cy="411480"/>
+          </a:xfrm>
+          <a:prstGeom prst="rect">
+            <a:avLst/>
+          </a:prstGeom>
+          <a:noFill/>
+          <a:ln/>
+        </p:spPr>
+        <p:txBody>
+          <a:bodyPr wrap="square" rtlCol="0" anchor="ctr"/>
+          <a:lstStyle/>
+          <a:p>
+            <a:pPr algn="ctr" indent="0" marL="0">
+              <a:buNone/>
+            </a:pPr>
+            <a:r>
+              <a:rPr lang="en-US" sz="1950" b="1" dirty="0">
+                <a:solidFill>
+                  <a:srgbClr val="00E676"/>
+                </a:solidFill>
+                <a:latin typeface="맑은 고딕" pitchFamily="34" charset="0"/>
+                <a:ea typeface="맑은 고딕" pitchFamily="34" charset="-122"/>
+                <a:cs typeface="맑은 고딕" pitchFamily="34" charset="-120"/>
+              </a:rPr>
+              <a:t>실측 벤치마크 기반</a:t>
+            </a:r>
+            <a:endParaRPr lang="en-US" sz="1950" dirty="0"/>
+          </a:p>
+        </p:txBody>
+      </p:sp>
+      <p:sp>
+        <p:nvSpPr>
+          <p:cNvPr id="20" name="Text 18"/>
+          <p:cNvSpPr/>
+          <p:nvPr/>
+        </p:nvSpPr>
+        <p:spPr>
+          <a:xfrm>
+            <a:off x="8046720" y="2121408"/>
             <a:ext cx="3639312" cy="256032"/>
           </a:xfrm>
           <a:prstGeom prst="rect">
@@ -13343,85 +13481,7 @@
               <a:buNone/>
             </a:pPr>
             <a:r>
-              <a:rPr lang="en-US" sz="1050" b="1" dirty="0">
-                <a:solidFill>
-                  <a:srgbClr val="CBD5E1"/>
-                </a:solidFill>
-                <a:latin typeface="맑은 고딕" pitchFamily="34" charset="0"/>
-                <a:ea typeface="맑은 고딕" pitchFamily="34" charset="-122"/>
-                <a:cs typeface="맑은 고딕" pitchFamily="34" charset="-120"/>
-              </a:rPr>
-              <a:t>데이터 신뢰도 &amp; 출처 명시</a:t>
-            </a:r>
-            <a:endParaRPr lang="en-US" sz="1050" dirty="0"/>
-          </a:p>
-        </p:txBody>
-      </p:sp>
-      <p:sp>
-        <p:nvSpPr>
-          <p:cNvPr id="19" name="Text 17"/>
-          <p:cNvSpPr/>
-          <p:nvPr/>
-        </p:nvSpPr>
-        <p:spPr>
-          <a:xfrm>
-            <a:off x="8046720" y="1737360"/>
-            <a:ext cx="3639312" cy="502920"/>
-          </a:xfrm>
-          <a:prstGeom prst="rect">
-            <a:avLst/>
-          </a:prstGeom>
-          <a:noFill/>
-          <a:ln/>
-        </p:spPr>
-        <p:txBody>
-          <a:bodyPr wrap="square" rtlCol="0" anchor="ctr"/>
-          <a:lstStyle/>
-          <a:p>
-            <a:pPr algn="ctr" indent="0" marL="0">
-              <a:buNone/>
-            </a:pPr>
-            <a:r>
-              <a:rPr lang="en-US" sz="2100" b="1" dirty="0">
-                <a:solidFill>
-                  <a:srgbClr val="00E676"/>
-                </a:solidFill>
-                <a:latin typeface="맑은 고딕" pitchFamily="34" charset="0"/>
-                <a:ea typeface="맑은 고딕" pitchFamily="34" charset="-122"/>
-                <a:cs typeface="맑은 고딕" pitchFamily="34" charset="-120"/>
-              </a:rPr>
-              <a:t>실측 벤치마크 기반</a:t>
-            </a:r>
-            <a:endParaRPr lang="en-US" sz="2100" dirty="0"/>
-          </a:p>
-        </p:txBody>
-      </p:sp>
-      <p:sp>
-        <p:nvSpPr>
-          <p:cNvPr id="20" name="Text 18"/>
-          <p:cNvSpPr/>
-          <p:nvPr/>
-        </p:nvSpPr>
-        <p:spPr>
-          <a:xfrm>
-            <a:off x="8046720" y="2286000"/>
-            <a:ext cx="3639312" cy="274320"/>
-          </a:xfrm>
-          <a:prstGeom prst="rect">
-            <a:avLst/>
-          </a:prstGeom>
-          <a:noFill/>
-          <a:ln/>
-        </p:spPr>
-        <p:txBody>
-          <a:bodyPr wrap="square" rtlCol="0" anchor="ctr"/>
-          <a:lstStyle/>
-          <a:p>
-            <a:pPr algn="ctr" indent="0" marL="0">
-              <a:buNone/>
-            </a:pPr>
-            <a:r>
-              <a:rPr lang="en-US" sz="1000" dirty="0">
+              <a:rPr lang="en-US" sz="950" dirty="0">
                 <a:solidFill>
                   <a:srgbClr val="94A3B8"/>
                 </a:solidFill>
@@ -13431,7 +13491,7 @@
               </a:rPr>
               <a:t>3DMark·퀘이사존·부품 DB 결합</a:t>
             </a:r>
-            <a:endParaRPr lang="en-US" sz="1000" dirty="0"/>
+            <a:endParaRPr lang="en-US" sz="950" dirty="0"/>
           </a:p>
         </p:txBody>
       </p:sp>
@@ -13443,12 +13503,12 @@
         </p:nvSpPr>
         <p:spPr>
           <a:xfrm>
-            <a:off x="457200" y="2880360"/>
-            <a:ext cx="5440680" cy="3291840"/>
+            <a:off x="457200" y="2651760"/>
+            <a:ext cx="5440680" cy="2697480"/>
           </a:xfrm>
           <a:prstGeom prst="roundRect">
             <a:avLst>
-              <a:gd name="adj" fmla="val 5000"/>
+              <a:gd name="adj" fmla="val 6102"/>
             </a:avLst>
           </a:prstGeom>
           <a:solidFill>
@@ -13470,24 +13530,24 @@
         </p:nvSpPr>
         <p:spPr>
           <a:xfrm>
-            <a:off x="731520" y="3063240"/>
-            <a:ext cx="4846320" cy="320040"/>
-          </a:xfrm>
-          <a:prstGeom prst="rect">
-            <a:avLst/>
-          </a:prstGeom>
-          <a:noFill/>
-          <a:ln/>
-        </p:spPr>
-        <p:txBody>
-          <a:bodyPr wrap="square" rtlCol="0" anchor="ctr"/>
-          <a:lstStyle/>
-          <a:p>
-            <a:pPr indent="0" marL="0">
-              <a:buNone/>
-            </a:pPr>
-            <a:r>
-              <a:rPr lang="en-US" sz="1350" b="1" dirty="0">
+            <a:off x="731520" y="2788920"/>
+            <a:ext cx="4846320" cy="292608"/>
+          </a:xfrm>
+          <a:prstGeom prst="rect">
+            <a:avLst/>
+          </a:prstGeom>
+          <a:noFill/>
+          <a:ln/>
+        </p:spPr>
+        <p:txBody>
+          <a:bodyPr wrap="square" rtlCol="0" anchor="ctr"/>
+          <a:lstStyle/>
+          <a:p>
+            <a:pPr indent="0" marL="0">
+              <a:buNone/>
+            </a:pPr>
+            <a:r>
+              <a:rPr lang="en-US" sz="1300" b="1" dirty="0">
                 <a:solidFill>
                   <a:srgbClr val="FF5CA8"/>
                 </a:solidFill>
@@ -13497,7 +13557,7 @@
               </a:rPr>
               <a:t>[개발하며 느낀 아쉬운 점 (한계점)]</a:t>
             </a:r>
-            <a:endParaRPr lang="en-US" sz="1350" dirty="0"/>
+            <a:endParaRPr lang="en-US" sz="1300" dirty="0"/>
           </a:p>
         </p:txBody>
       </p:sp>
@@ -13509,8 +13569,8 @@
         </p:nvSpPr>
         <p:spPr>
           <a:xfrm>
-            <a:off x="731520" y="3474720"/>
-            <a:ext cx="4892040" cy="2514600"/>
+            <a:off x="731520" y="3127248"/>
+            <a:ext cx="4892040" cy="2103120"/>
           </a:xfrm>
           <a:prstGeom prst="rect">
             <a:avLst/>
@@ -13524,12 +13584,12 @@
           <a:p>
             <a:pPr indent="0" marL="0">
               <a:lnSpc>
-                <a:spcPct val="128000"/>
+                <a:spcPct val="124000"/>
               </a:lnSpc>
               <a:buNone/>
             </a:pPr>
             <a:r>
-              <a:rPr lang="en-US" sz="1100" dirty="0">
+              <a:rPr lang="en-US" sz="1050" dirty="0">
                 <a:solidFill>
                   <a:srgbClr val="F8FAFC"/>
                 </a:solidFill>
@@ -13539,46 +13599,46 @@
               </a:rPr>
               <a:t>1. 실시간 쇼핑몰 특가·재고 변동의 완벽한 자동 동기화 한계</a:t>
             </a:r>
-            <a:endParaRPr lang="en-US" sz="1100" dirty="0"/>
+            <a:endParaRPr lang="en-US" sz="1050" dirty="0"/>
           </a:p>
           <a:p>
             <a:pPr indent="0" marL="0">
               <a:lnSpc>
-                <a:spcPct val="128000"/>
+                <a:spcPct val="124000"/>
               </a:lnSpc>
               <a:buNone/>
             </a:pPr>
             <a:r>
-              <a:rPr lang="en-US" sz="1100" dirty="0">
-                <a:solidFill>
-                  <a:srgbClr val="F8FAFC"/>
-                </a:solidFill>
-                <a:latin typeface="맑은 고딕" pitchFamily="34" charset="0"/>
-                <a:ea typeface="맑은 고딕" pitchFamily="34" charset="-122"/>
-                <a:cs typeface="맑은 고딕" pitchFamily="34" charset="-120"/>
-              </a:rPr>
-              <a:t>네이버 쇼핑 최저가 검색 버튼은 연동했지만, 컴퓨존·다나와 등 현금몰의 실시간 품절 상태나 일일 특가 변동을 내부 DB 가격에 100% 실시간으로 자동 크롤링해 반영하지 못한 점이 아쉬움</a:t>
-            </a:r>
-            <a:endParaRPr lang="en-US" sz="1100" dirty="0"/>
+              <a:rPr lang="en-US" sz="1050" dirty="0">
+                <a:solidFill>
+                  <a:srgbClr val="F8FAFC"/>
+                </a:solidFill>
+                <a:latin typeface="맑은 고딕" pitchFamily="34" charset="0"/>
+                <a:ea typeface="맑은 고딕" pitchFamily="34" charset="-122"/>
+                <a:cs typeface="맑은 고딕" pitchFamily="34" charset="-120"/>
+              </a:rPr>
+              <a:t>네이버 쇼핑 최저가 검색 버튼은 연동했지만, 컴퓨존·다나와 등 현금몰의 실시간 품절 상태나 일일 특가 변동을 내부 DB 가격에 100% 자동 반영하지 못한 점이 아쉬움</a:t>
+            </a:r>
+            <a:endParaRPr lang="en-US" sz="1050" dirty="0"/>
           </a:p>
           <a:p>
             <a:pPr indent="0" marL="0">
               <a:lnSpc>
-                <a:spcPct val="128000"/>
+                <a:spcPct val="124000"/>
               </a:lnSpc>
               <a:buNone/>
             </a:pPr>
-            <a:endParaRPr lang="en-US" sz="1100" dirty="0"/>
+            <a:endParaRPr lang="en-US" sz="1050" dirty="0"/>
           </a:p>
           <a:p>
             <a:pPr indent="0" marL="0">
               <a:lnSpc>
-                <a:spcPct val="128000"/>
+                <a:spcPct val="124000"/>
               </a:lnSpc>
               <a:buNone/>
             </a:pPr>
             <a:r>
-              <a:rPr lang="en-US" sz="1100" dirty="0">
+              <a:rPr lang="en-US" sz="1050" dirty="0">
                 <a:solidFill>
                   <a:srgbClr val="F8FAFC"/>
                 </a:solidFill>
@@ -13588,17 +13648,17 @@
               </a:rPr>
               <a:t>2. 벤치마크 비교 기준이 메이저 인기 게임 위주로 한정됨</a:t>
             </a:r>
-            <a:endParaRPr lang="en-US" sz="1100" dirty="0"/>
+            <a:endParaRPr lang="en-US" sz="1050" dirty="0"/>
           </a:p>
           <a:p>
             <a:pPr indent="0" marL="0">
               <a:lnSpc>
-                <a:spcPct val="128000"/>
+                <a:spcPct val="124000"/>
               </a:lnSpc>
               <a:buNone/>
             </a:pPr>
             <a:r>
-              <a:rPr lang="en-US" sz="1100" dirty="0">
+              <a:rPr lang="en-US" sz="1050" dirty="0">
                 <a:solidFill>
                   <a:srgbClr val="F8FAFC"/>
                 </a:solidFill>
@@ -13608,7 +13668,7 @@
               </a:rPr>
               <a:t>배그·사이버펑크·몬헌와일즈 등 대표 게임 평균 FPS는 정확하지만, 최신 스팀 인디 게임이나 특수 전문 작업 프로그램의 세밀한 실측 표본이 아직 부족함</a:t>
             </a:r>
-            <a:endParaRPr lang="en-US" sz="1100" dirty="0"/>
+            <a:endParaRPr lang="en-US" sz="1050" dirty="0"/>
           </a:p>
         </p:txBody>
       </p:sp>
@@ -13620,12 +13680,12 @@
         </p:nvSpPr>
         <p:spPr>
           <a:xfrm>
-            <a:off x="6263640" y="2880360"/>
-            <a:ext cx="5440680" cy="3291840"/>
+            <a:off x="6263640" y="2651760"/>
+            <a:ext cx="5440680" cy="2697480"/>
           </a:xfrm>
           <a:prstGeom prst="roundRect">
             <a:avLst>
-              <a:gd name="adj" fmla="val 5000"/>
+              <a:gd name="adj" fmla="val 6102"/>
             </a:avLst>
           </a:prstGeom>
           <a:solidFill>
@@ -13647,24 +13707,24 @@
         </p:nvSpPr>
         <p:spPr>
           <a:xfrm>
-            <a:off x="6537960" y="3063240"/>
-            <a:ext cx="4846320" cy="320040"/>
-          </a:xfrm>
-          <a:prstGeom prst="rect">
-            <a:avLst/>
-          </a:prstGeom>
-          <a:noFill/>
-          <a:ln/>
-        </p:spPr>
-        <p:txBody>
-          <a:bodyPr wrap="square" rtlCol="0" anchor="ctr"/>
-          <a:lstStyle/>
-          <a:p>
-            <a:pPr indent="0" marL="0">
-              <a:buNone/>
-            </a:pPr>
-            <a:r>
-              <a:rPr lang="en-US" sz="1350" b="1" dirty="0">
+            <a:off x="6537960" y="2788920"/>
+            <a:ext cx="4846320" cy="292608"/>
+          </a:xfrm>
+          <a:prstGeom prst="rect">
+            <a:avLst/>
+          </a:prstGeom>
+          <a:noFill/>
+          <a:ln/>
+        </p:spPr>
+        <p:txBody>
+          <a:bodyPr wrap="square" rtlCol="0" anchor="ctr"/>
+          <a:lstStyle/>
+          <a:p>
+            <a:pPr indent="0" marL="0">
+              <a:buNone/>
+            </a:pPr>
+            <a:r>
+              <a:rPr lang="en-US" sz="1300" b="1" dirty="0">
                 <a:solidFill>
                   <a:srgbClr val="00F3FF"/>
                 </a:solidFill>
@@ -13674,7 +13734,7 @@
               </a:rPr>
               <a:t>[향후 고도화 및 개선 방향]</a:t>
             </a:r>
-            <a:endParaRPr lang="en-US" sz="1350" dirty="0"/>
+            <a:endParaRPr lang="en-US" sz="1300" dirty="0"/>
           </a:p>
         </p:txBody>
       </p:sp>
@@ -13686,8 +13746,8 @@
         </p:nvSpPr>
         <p:spPr>
           <a:xfrm>
-            <a:off x="6537960" y="3474720"/>
-            <a:ext cx="4892040" cy="2514600"/>
+            <a:off x="6537960" y="3127248"/>
+            <a:ext cx="4892040" cy="2103120"/>
           </a:xfrm>
           <a:prstGeom prst="rect">
             <a:avLst/>
@@ -13701,12 +13761,12 @@
           <a:p>
             <a:pPr indent="0" marL="0">
               <a:lnSpc>
-                <a:spcPct val="128000"/>
+                <a:spcPct val="124000"/>
               </a:lnSpc>
               <a:buNone/>
             </a:pPr>
             <a:r>
-              <a:rPr lang="en-US" sz="1100" dirty="0">
+              <a:rPr lang="en-US" sz="1050" dirty="0">
                 <a:solidFill>
                   <a:srgbClr val="F8FAFC"/>
                 </a:solidFill>
@@ -13716,17 +13776,17 @@
               </a:rPr>
               <a:t>1. 부품 시세 변동 그래프 &amp; '매수 타이밍' AI 알림</a:t>
             </a:r>
-            <a:endParaRPr lang="en-US" sz="1100" dirty="0"/>
+            <a:endParaRPr lang="en-US" sz="1050" dirty="0"/>
           </a:p>
           <a:p>
             <a:pPr indent="0" marL="0">
               <a:lnSpc>
-                <a:spcPct val="128000"/>
+                <a:spcPct val="124000"/>
               </a:lnSpc>
               <a:buNone/>
             </a:pPr>
             <a:r>
-              <a:rPr lang="en-US" sz="1100" dirty="0">
+              <a:rPr lang="en-US" sz="1050" dirty="0">
                 <a:solidFill>
                   <a:srgbClr val="F8FAFC"/>
                 </a:solidFill>
@@ -13736,26 +13796,26 @@
               </a:rPr>
               <a:t>최근 3개월 부품 가격 추이를 차트로 보여주고, "지금이 저점 근처입니다 vs 신제품 출시 전이니 잠시 대기하세요"를 알려주는 구매 시기 가이드 추가</a:t>
             </a:r>
-            <a:endParaRPr lang="en-US" sz="1100" dirty="0"/>
+            <a:endParaRPr lang="en-US" sz="1050" dirty="0"/>
           </a:p>
           <a:p>
             <a:pPr indent="0" marL="0">
               <a:lnSpc>
-                <a:spcPct val="128000"/>
+                <a:spcPct val="124000"/>
               </a:lnSpc>
               <a:buNone/>
             </a:pPr>
-            <a:endParaRPr lang="en-US" sz="1100" dirty="0"/>
+            <a:endParaRPr lang="en-US" sz="1050" dirty="0"/>
           </a:p>
           <a:p>
             <a:pPr indent="0" marL="0">
               <a:lnSpc>
-                <a:spcPct val="128000"/>
+                <a:spcPct val="124000"/>
               </a:lnSpc>
               <a:buNone/>
             </a:pPr>
             <a:r>
-              <a:rPr lang="en-US" sz="1100" dirty="0">
+              <a:rPr lang="en-US" sz="1050" dirty="0">
                 <a:solidFill>
                   <a:srgbClr val="F8FAFC"/>
                 </a:solidFill>
@@ -13765,17 +13825,17 @@
               </a:rPr>
               <a:t>2. 실사용자 벤치마크(3DMark) 후기 데이터 누적</a:t>
             </a:r>
-            <a:endParaRPr lang="en-US" sz="1100" dirty="0"/>
+            <a:endParaRPr lang="en-US" sz="1050" dirty="0"/>
           </a:p>
           <a:p>
             <a:pPr indent="0" marL="0">
               <a:lnSpc>
-                <a:spcPct val="128000"/>
+                <a:spcPct val="124000"/>
               </a:lnSpc>
               <a:buNone/>
             </a:pPr>
             <a:r>
-              <a:rPr lang="en-US" sz="1100" dirty="0">
+              <a:rPr lang="en-US" sz="1050" dirty="0">
                 <a:solidFill>
                   <a:srgbClr val="F8FAFC"/>
                 </a:solidFill>
@@ -13785,7 +13845,159 @@
               </a:rPr>
               <a:t>견적을 맞춘 실제 유저들이 자신의 실측 프레임과 3DMark 점수를 커뮤니티에 인증·공유하여 비교 DB가 지속적으로 확장되는 구조 구축</a:t>
             </a:r>
-            <a:endParaRPr lang="en-US" sz="1100" dirty="0"/>
+            <a:endParaRPr lang="en-US" sz="1050" dirty="0"/>
+          </a:p>
+        </p:txBody>
+      </p:sp>
+      <p:sp>
+        <p:nvSpPr>
+          <p:cNvPr id="27" name="Shape 25"/>
+          <p:cNvSpPr/>
+          <p:nvPr/>
+        </p:nvSpPr>
+        <p:spPr>
+          <a:xfrm>
+            <a:off x="457200" y="5468112"/>
+            <a:ext cx="11247120" cy="731520"/>
+          </a:xfrm>
+          <a:prstGeom prst="roundRect">
+            <a:avLst>
+              <a:gd name="adj" fmla="val 17500"/>
+            </a:avLst>
+          </a:prstGeom>
+          <a:solidFill>
+            <a:srgbClr val="00E676">
+              <a:alpha val="16000"/>
+            </a:srgbClr>
+          </a:solidFill>
+          <a:ln w="12700">
+            <a:solidFill>
+              <a:srgbClr val="00E676"/>
+            </a:solidFill>
+            <a:prstDash val="solid"/>
+          </a:ln>
+        </p:spPr>
+      </p:sp>
+      <p:sp>
+        <p:nvSpPr>
+          <p:cNvPr id="28" name="Text 26">
+            <a:hlinkClick r:id="rId1" tooltip="https://pc-fit-tjandud.vercel.app/ 열기"/>
+          </p:cNvPr>
+          <p:cNvSpPr/>
+          <p:nvPr/>
+        </p:nvSpPr>
+        <p:spPr>
+          <a:xfrm>
+            <a:off x="685800" y="5468112"/>
+            <a:ext cx="8046720" cy="731520"/>
+          </a:xfrm>
+          <a:prstGeom prst="rect">
+            <a:avLst/>
+          </a:prstGeom>
+          <a:noFill/>
+          <a:ln/>
+        </p:spPr>
+        <p:txBody>
+          <a:bodyPr wrap="square" rtlCol="0" anchor="ctr"/>
+          <a:lstStyle/>
+          <a:p>
+            <a:pPr indent="0" marL="0">
+              <a:buNone/>
+            </a:pPr>
+            <a:r>
+              <a:rPr lang="en-US" sz="1250" b="1" u="sng" dirty="0">
+                <a:solidFill>
+                  <a:srgbClr val="F8FAFC"/>
+                </a:solidFill>
+                <a:latin typeface="맑은 고딕" pitchFamily="34" charset="0"/>
+                <a:ea typeface="맑은 고딕" pitchFamily="34" charset="-122"/>
+                <a:cs typeface="맑은 고딕" pitchFamily="34" charset="-120"/>
+                <a:hlinkClick r:id="rId1" invalidUrl="" action="" tgtFrame="" tooltip="https://pc-fit-tjandud.vercel.app/ 열기" history="1" highlightClick="0" endSnd="0">
+                  <a:extLst>
+                    <a:ext uri="{A12FA001-AC4F-418D-AE19-62706E023703}">
+                      <ahyp:hlinkClr xmlns:ahyp="http://schemas.microsoft.com/office/drawing/2018/hyperlinkcolor" val="tx"/>
+                    </a:ext>
+                  </a:extLst>
+                </a:hlinkClick>
+              </a:rPr>
+              <a:t>[실제 배포 사이트 라이브 시연]  https://pc-fit-tjandud.vercel.app/  (클릭 시 실제 사이트로 즉시 이동)</a:t>
+            </a:r>
+            <a:endParaRPr lang="en-US" sz="1250" dirty="0"/>
+          </a:p>
+        </p:txBody>
+      </p:sp>
+      <p:sp>
+        <p:nvSpPr>
+          <p:cNvPr id="29" name="Shape 27"/>
+          <p:cNvSpPr/>
+          <p:nvPr/>
+        </p:nvSpPr>
+        <p:spPr>
+          <a:xfrm>
+            <a:off x="8869680" y="5596128"/>
+            <a:ext cx="2651760" cy="475488"/>
+          </a:xfrm>
+          <a:prstGeom prst="roundRect">
+            <a:avLst>
+              <a:gd name="adj" fmla="val 48077"/>
+            </a:avLst>
+          </a:prstGeom>
+          <a:solidFill>
+            <a:srgbClr val="00E676"/>
+          </a:solidFill>
+          <a:ln w="12700">
+            <a:solidFill>
+              <a:srgbClr val="00E676"/>
+            </a:solidFill>
+            <a:prstDash val="solid"/>
+          </a:ln>
+        </p:spPr>
+      </p:sp>
+      <p:sp>
+        <p:nvSpPr>
+          <p:cNvPr id="30" name="Text 28">
+            <a:hlinkClick r:id="rId2" tooltip="https://pc-fit-tjandud.vercel.app/ 열기"/>
+          </p:cNvPr>
+          <p:cNvSpPr/>
+          <p:nvPr/>
+        </p:nvSpPr>
+        <p:spPr>
+          <a:xfrm>
+            <a:off x="8869680" y="5596128"/>
+            <a:ext cx="2651760" cy="475488"/>
+          </a:xfrm>
+          <a:prstGeom prst="rect">
+            <a:avLst/>
+          </a:prstGeom>
+          <a:noFill/>
+          <a:ln/>
+        </p:spPr>
+        <p:txBody>
+          <a:bodyPr wrap="square" rtlCol="0" anchor="ctr"/>
+          <a:lstStyle/>
+          <a:p>
+            <a:pPr algn="ctr" indent="0" marL="0">
+              <a:buNone/>
+            </a:pPr>
+            <a:r>
+              <a:rPr lang="en-US" sz="1150" b="1" u="sng" dirty="0">
+                <a:solidFill>
+                  <a:srgbClr val="060913"/>
+                </a:solidFill>
+                <a:latin typeface="맑은 고딕" pitchFamily="34" charset="0"/>
+                <a:ea typeface="맑은 고딕" pitchFamily="34" charset="-122"/>
+                <a:cs typeface="맑은 고딕" pitchFamily="34" charset="-120"/>
+                <a:hlinkClick r:id="rId2" invalidUrl="" action="" tgtFrame="" tooltip="https://pc-fit-tjandud.vercel.app/ 열기" history="1" highlightClick="0" endSnd="0">
+                  <a:extLst>
+                    <a:ext uri="{A12FA001-AC4F-418D-AE19-62706E023703}">
+                      <ahyp:hlinkClr xmlns:ahyp="http://schemas.microsoft.com/office/drawing/2018/hyperlinkcolor" val="tx"/>
+                    </a:ext>
+                  </a:extLst>
+                </a:hlinkClick>
+              </a:rPr>
+              <a:t>실제 사이트 시연 시작 &gt;</a:t>
+            </a:r>
+            <a:endParaRPr lang="en-US" sz="1150" dirty="0"/>
           </a:p>
         </p:txBody>
       </p:sp>
